--- a/yago_ionv/figures_strobe.pptx
+++ b/yago_ionv/figures_strobe.pptx
@@ -111,6 +111,524 @@
     </a:lvl9pPr>
   </p:defaultTextStyle>
 </p:presentation>
+</file>
+
+<file path=ppt/charts/chart1.xml><?xml version="1.0" encoding="utf-8"?>
+<c:chartSpace xmlns:c="http://schemas.openxmlformats.org/drawingml/2006/chart" xmlns:a="http://schemas.openxmlformats.org/drawingml/2006/main" xmlns:r="http://schemas.openxmlformats.org/officeDocument/2006/relationships">
+  <c:date1904 val="0"/>
+  <c:chart>
+    <c:autoTitleDeleted val="0"/>
+    <c:plotArea>
+      <c:barChart>
+        <c:barDir val="col"/>
+        <c:grouping val="clustered"/>
+        <c:ser>
+          <c:idx val="0"/>
+          <c:order val="0"/>
+          <c:tx>
+            <c:strRef>
+              <c:f>Sheet1!$B$1</c:f>
+              <c:strCache>
+                <c:ptCount val="1"/>
+                <c:pt idx="0">
+                  <c:v>Singleton</c:v>
+                </c:pt>
+              </c:strCache>
+            </c:strRef>
+          </c:tx>
+          <c:spPr>
+            <a:solidFill>
+              <a:srgbClr val="4C72B0"/>
+            </a:solidFill>
+          </c:spPr>
+          <c:dLbls>
+            <c:numFmt formatCode="0.0&quot;%&quot;" sourceLinked="0"/>
+            <c:txPr>
+              <a:bodyPr/>
+              <a:lstStyle/>
+              <a:p>
+                <a:pPr>
+                  <a:defRPr sz="900" b="1"/>
+                </a:pPr>
+              </a:p>
+            </c:txPr>
+            <c:showLegendKey val="0"/>
+            <c:showVal val="0"/>
+            <c:showCatName val="0"/>
+            <c:showSerName val="0"/>
+            <c:showPercent val="0"/>
+            <c:showBubbleSize val="0"/>
+            <c:showLeaderLines val="1"/>
+          </c:dLbls>
+          <c:cat>
+            <c:strRef>
+              <c:f>Sheet1!$A$2:$A$5</c:f>
+              <c:strCache>
+                <c:ptCount val="4"/>
+                <c:pt idx="0">
+                  <c:v>Broad: Primary
+(any phase)</c:v>
+                </c:pt>
+                <c:pt idx="1">
+                  <c:v>Broad: Secondary
+(before delivery)</c:v>
+                </c:pt>
+                <c:pt idx="2">
+                  <c:v>Narrow: Primary
+(5-HT3, any phase)</c:v>
+                </c:pt>
+                <c:pt idx="3">
+                  <c:v>Narrow: Secondary
+(5-HT3 + before delivery)</c:v>
+                </c:pt>
+              </c:strCache>
+            </c:strRef>
+          </c:cat>
+          <c:val>
+            <c:numRef>
+              <c:f>Sheet1!$B$2:$B$5</c:f>
+              <c:numCache>
+                <c:formatCode>General</c:formatCode>
+                <c:ptCount val="4"/>
+                <c:pt idx="0">
+                  <c:v>17.70906535488405</c:v>
+                </c:pt>
+                <c:pt idx="1">
+                  <c:v>1.8973998594518624</c:v>
+                </c:pt>
+                <c:pt idx="2">
+                  <c:v>0.8784258608573436</c:v>
+                </c:pt>
+                <c:pt idx="3">
+                  <c:v>0.21082220660576245</c:v>
+                </c:pt>
+              </c:numCache>
+            </c:numRef>
+          </c:val>
+        </c:ser>
+        <c:ser>
+          <c:idx val="1"/>
+          <c:order val="1"/>
+          <c:tx>
+            <c:strRef>
+              <c:f>Sheet1!$C$1</c:f>
+              <c:strCache>
+                <c:ptCount val="1"/>
+                <c:pt idx="0">
+                  <c:v>Twin</c:v>
+                </c:pt>
+              </c:strCache>
+            </c:strRef>
+          </c:tx>
+          <c:spPr>
+            <a:solidFill>
+              <a:srgbClr val="DD8452"/>
+            </a:solidFill>
+          </c:spPr>
+          <c:dLbls>
+            <c:numFmt formatCode="0.0&quot;%&quot;" sourceLinked="0"/>
+            <c:txPr>
+              <a:bodyPr/>
+              <a:lstStyle/>
+              <a:p>
+                <a:pPr>
+                  <a:defRPr sz="900" b="1"/>
+                </a:pPr>
+              </a:p>
+            </c:txPr>
+            <c:showLegendKey val="0"/>
+            <c:showVal val="0"/>
+            <c:showCatName val="0"/>
+            <c:showSerName val="0"/>
+            <c:showPercent val="0"/>
+            <c:showBubbleSize val="0"/>
+            <c:showLeaderLines val="1"/>
+          </c:dLbls>
+          <c:cat>
+            <c:strRef>
+              <c:f>Sheet1!$A$2:$A$5</c:f>
+              <c:strCache>
+                <c:ptCount val="4"/>
+                <c:pt idx="0">
+                  <c:v>Broad: Primary
+(any phase)</c:v>
+                </c:pt>
+                <c:pt idx="1">
+                  <c:v>Broad: Secondary
+(before delivery)</c:v>
+                </c:pt>
+                <c:pt idx="2">
+                  <c:v>Narrow: Primary
+(5-HT3, any phase)</c:v>
+                </c:pt>
+                <c:pt idx="3">
+                  <c:v>Narrow: Secondary
+(5-HT3 + before delivery)</c:v>
+                </c:pt>
+              </c:strCache>
+            </c:strRef>
+          </c:cat>
+          <c:val>
+            <c:numRef>
+              <c:f>Sheet1!$C$2:$C$5</c:f>
+              <c:numCache>
+                <c:formatCode>General</c:formatCode>
+                <c:ptCount val="4"/>
+                <c:pt idx="0">
+                  <c:v>16.95906432748538</c:v>
+                </c:pt>
+                <c:pt idx="1">
+                  <c:v>1.461988304093567</c:v>
+                </c:pt>
+                <c:pt idx="2">
+                  <c:v>2.3391812865497075</c:v>
+                </c:pt>
+                <c:pt idx="3">
+                  <c:v>0.8771929824561403</c:v>
+                </c:pt>
+              </c:numCache>
+            </c:numRef>
+          </c:val>
+        </c:ser>
+        <c:axId val="-2068027336"/>
+        <c:axId val="-2113994440"/>
+      </c:barChart>
+      <c:catAx>
+        <c:axId val="-2068027336"/>
+        <c:scaling>
+          <c:orientation val="minMax"/>
+        </c:scaling>
+        <c:delete val="0"/>
+        <c:axPos val="b"/>
+        <c:majorTickMark val="out"/>
+        <c:minorTickMark val="none"/>
+        <c:tickLblPos val="nextTo"/>
+        <c:crossAx val="-2113994440"/>
+        <c:crosses val="autoZero"/>
+        <c:auto val="1"/>
+        <c:lblAlgn val="ctr"/>
+        <c:lblOffset val="100"/>
+        <c:noMultiLvlLbl val="0"/>
+      </c:catAx>
+      <c:valAx>
+        <c:axId val="-2113994440"/>
+        <c:scaling/>
+        <c:delete val="0"/>
+        <c:axPos val="l"/>
+        <c:majorGridlines/>
+        <c:title>
+          <c:tx>
+            <c:rich>
+              <a:bodyPr/>
+              <a:lstStyle/>
+              <a:p>
+                <a:pPr>
+                  <a:defRPr sz="1100"/>
+                </a:pPr>
+                <a:r>
+                  <a:t>Rate (%)</a:t>
+                </a:r>
+              </a:p>
+            </c:rich>
+          </c:tx>
+          <c:layout/>
+          <c:overlay val="0"/>
+        </c:title>
+        <c:majorTickMark val="out"/>
+        <c:minorTickMark val="none"/>
+        <c:tickLblPos val="nextTo"/>
+        <c:crossAx val="-2068027336"/>
+        <c:crosses val="autoZero"/>
+      </c:valAx>
+    </c:plotArea>
+    <c:legend>
+      <c:legendPos val="b"/>
+      <c:overlay val="0"/>
+      <c:txPr>
+        <a:bodyPr/>
+        <a:lstStyle/>
+        <a:p>
+          <a:pPr>
+            <a:defRPr sz="1100"/>
+          </a:pPr>
+        </a:p>
+      </c:txPr>
+    </c:legend>
+    <c:dispBlanksAs val="gap"/>
+  </c:chart>
+  <c:txPr>
+    <a:bodyPr/>
+    <a:lstStyle/>
+    <a:p>
+      <a:pPr>
+        <a:defRPr sz="1800"/>
+      </a:pPr>
+      <a:endParaRPr lang="en-US"/>
+    </a:p>
+  </c:txPr>
+  <c:externalData r:id="rId1">
+    <c:autoUpdate val="0"/>
+  </c:externalData>
+</c:chartSpace>
+</file>
+
+<file path=ppt/charts/chart2.xml><?xml version="1.0" encoding="utf-8"?>
+<c:chartSpace xmlns:c="http://schemas.openxmlformats.org/drawingml/2006/chart" xmlns:a="http://schemas.openxmlformats.org/drawingml/2006/main" xmlns:r="http://schemas.openxmlformats.org/officeDocument/2006/relationships">
+  <c:date1904 val="0"/>
+  <c:chart>
+    <c:autoTitleDeleted val="0"/>
+    <c:plotArea>
+      <c:barChart>
+        <c:barDir val="col"/>
+        <c:grouping val="clustered"/>
+        <c:ser>
+          <c:idx val="0"/>
+          <c:order val="0"/>
+          <c:tx>
+            <c:strRef>
+              <c:f>Sheet1!$B$1</c:f>
+              <c:strCache>
+                <c:ptCount val="1"/>
+                <c:pt idx="0">
+                  <c:v>Singleton</c:v>
+                </c:pt>
+              </c:strCache>
+            </c:strRef>
+          </c:tx>
+          <c:spPr>
+            <a:solidFill>
+              <a:srgbClr val="4C72B0"/>
+            </a:solidFill>
+          </c:spPr>
+          <c:dLbls>
+            <c:numFmt formatCode="0.0&quot;%&quot;" sourceLinked="0"/>
+            <c:txPr>
+              <a:bodyPr/>
+              <a:lstStyle/>
+              <a:p>
+                <a:pPr>
+                  <a:defRPr sz="900" b="1"/>
+                </a:pPr>
+              </a:p>
+            </c:txPr>
+            <c:showLegendKey val="0"/>
+            <c:showVal val="0"/>
+            <c:showCatName val="0"/>
+            <c:showSerName val="0"/>
+            <c:showPercent val="0"/>
+            <c:showBubbleSize val="0"/>
+            <c:showLeaderLines val="1"/>
+          </c:dLbls>
+          <c:cat>
+            <c:strRef>
+              <c:f>Sheet1!$A$2:$A$5</c:f>
+              <c:strCache>
+                <c:ptCount val="4"/>
+                <c:pt idx="0">
+                  <c:v>Broad: Primary
+(any phase)</c:v>
+                </c:pt>
+                <c:pt idx="1">
+                  <c:v>Broad: Secondary
+(before delivery)</c:v>
+                </c:pt>
+                <c:pt idx="2">
+                  <c:v>Narrow: Primary
+(5-HT3, any phase)</c:v>
+                </c:pt>
+                <c:pt idx="3">
+                  <c:v>Narrow: Secondary
+(5-HT3 + before delivery)</c:v>
+                </c:pt>
+              </c:strCache>
+            </c:strRef>
+          </c:cat>
+          <c:val>
+            <c:numRef>
+              <c:f>Sheet1!$B$2:$B$5</c:f>
+              <c:numCache>
+                <c:formatCode>General</c:formatCode>
+                <c:ptCount val="4"/>
+                <c:pt idx="0">
+                  <c:v>21.920668058455114</c:v>
+                </c:pt>
+                <c:pt idx="1">
+                  <c:v>2.9227557411273484</c:v>
+                </c:pt>
+                <c:pt idx="2">
+                  <c:v>0.41753653444676403</c:v>
+                </c:pt>
+                <c:pt idx="3">
+                  <c:v>0.20876826722338201</c:v>
+                </c:pt>
+              </c:numCache>
+            </c:numRef>
+          </c:val>
+        </c:ser>
+        <c:ser>
+          <c:idx val="1"/>
+          <c:order val="1"/>
+          <c:tx>
+            <c:strRef>
+              <c:f>Sheet1!$C$1</c:f>
+              <c:strCache>
+                <c:ptCount val="1"/>
+                <c:pt idx="0">
+                  <c:v>Twin</c:v>
+                </c:pt>
+              </c:strCache>
+            </c:strRef>
+          </c:tx>
+          <c:spPr>
+            <a:solidFill>
+              <a:srgbClr val="DD8452"/>
+            </a:solidFill>
+          </c:spPr>
+          <c:dLbls>
+            <c:numFmt formatCode="0.0&quot;%&quot;" sourceLinked="0"/>
+            <c:txPr>
+              <a:bodyPr/>
+              <a:lstStyle/>
+              <a:p>
+                <a:pPr>
+                  <a:defRPr sz="900" b="1"/>
+                </a:pPr>
+              </a:p>
+            </c:txPr>
+            <c:showLegendKey val="0"/>
+            <c:showVal val="0"/>
+            <c:showCatName val="0"/>
+            <c:showSerName val="0"/>
+            <c:showPercent val="0"/>
+            <c:showBubbleSize val="0"/>
+            <c:showLeaderLines val="1"/>
+          </c:dLbls>
+          <c:cat>
+            <c:strRef>
+              <c:f>Sheet1!$A$2:$A$5</c:f>
+              <c:strCache>
+                <c:ptCount val="4"/>
+                <c:pt idx="0">
+                  <c:v>Broad: Primary
+(any phase)</c:v>
+                </c:pt>
+                <c:pt idx="1">
+                  <c:v>Broad: Secondary
+(before delivery)</c:v>
+                </c:pt>
+                <c:pt idx="2">
+                  <c:v>Narrow: Primary
+(5-HT3, any phase)</c:v>
+                </c:pt>
+                <c:pt idx="3">
+                  <c:v>Narrow: Secondary
+(5-HT3 + before delivery)</c:v>
+                </c:pt>
+              </c:strCache>
+            </c:strRef>
+          </c:cat>
+          <c:val>
+            <c:numRef>
+              <c:f>Sheet1!$C$2:$C$5</c:f>
+              <c:numCache>
+                <c:formatCode>General</c:formatCode>
+                <c:ptCount val="4"/>
+                <c:pt idx="0">
+                  <c:v>14.673913043478262</c:v>
+                </c:pt>
+                <c:pt idx="1">
+                  <c:v>2.1739130434782608</c:v>
+                </c:pt>
+                <c:pt idx="2">
+                  <c:v>3.260869565217391</c:v>
+                </c:pt>
+                <c:pt idx="3">
+                  <c:v>1.6304347826086956</c:v>
+                </c:pt>
+              </c:numCache>
+            </c:numRef>
+          </c:val>
+        </c:ser>
+        <c:axId val="-2068027336"/>
+        <c:axId val="-2113994440"/>
+      </c:barChart>
+      <c:catAx>
+        <c:axId val="-2068027336"/>
+        <c:scaling>
+          <c:orientation val="minMax"/>
+        </c:scaling>
+        <c:delete val="0"/>
+        <c:axPos val="b"/>
+        <c:majorTickMark val="out"/>
+        <c:minorTickMark val="none"/>
+        <c:tickLblPos val="nextTo"/>
+        <c:crossAx val="-2113994440"/>
+        <c:crosses val="autoZero"/>
+        <c:auto val="1"/>
+        <c:lblAlgn val="ctr"/>
+        <c:lblOffset val="100"/>
+        <c:noMultiLvlLbl val="0"/>
+      </c:catAx>
+      <c:valAx>
+        <c:axId val="-2113994440"/>
+        <c:scaling/>
+        <c:delete val="0"/>
+        <c:axPos val="l"/>
+        <c:majorGridlines/>
+        <c:title>
+          <c:tx>
+            <c:rich>
+              <a:bodyPr/>
+              <a:lstStyle/>
+              <a:p>
+                <a:pPr>
+                  <a:defRPr sz="1100"/>
+                </a:pPr>
+                <a:r>
+                  <a:t>Rate (%)</a:t>
+                </a:r>
+              </a:p>
+            </c:rich>
+          </c:tx>
+          <c:layout/>
+          <c:overlay val="0"/>
+        </c:title>
+        <c:majorTickMark val="out"/>
+        <c:minorTickMark val="none"/>
+        <c:tickLblPos val="nextTo"/>
+        <c:crossAx val="-2068027336"/>
+        <c:crosses val="autoZero"/>
+      </c:valAx>
+    </c:plotArea>
+    <c:legend>
+      <c:legendPos val="b"/>
+      <c:overlay val="0"/>
+      <c:txPr>
+        <a:bodyPr/>
+        <a:lstStyle/>
+        <a:p>
+          <a:pPr>
+            <a:defRPr sz="1100"/>
+          </a:pPr>
+        </a:p>
+      </c:txPr>
+    </c:legend>
+    <c:dispBlanksAs val="gap"/>
+  </c:chart>
+  <c:txPr>
+    <a:bodyPr/>
+    <a:lstStyle/>
+    <a:p>
+      <a:pPr>
+        <a:defRPr sz="1800"/>
+      </a:pPr>
+      <a:endParaRPr lang="en-US"/>
+    </a:p>
+  </c:txPr>
+  <c:externalData r:id="rId1">
+    <c:autoUpdate val="0"/>
+  </c:externalData>
+</c:chartSpace>
 </file>
 
 <file path=ppt/slideLayouts/slideLayout1.xml><?xml version="1.0" encoding="utf-8"?>
@@ -3102,8 +3620,8 @@
         </p:nvSpPr>
         <p:spPr>
           <a:xfrm>
-            <a:off x="457200" y="182880"/>
-            <a:ext cx="11277295" cy="548640"/>
+            <a:off x="274320" y="137160"/>
+            <a:ext cx="11612880" cy="457200"/>
           </a:xfrm>
           <a:prstGeom prst="rect">
             <a:avLst/>
@@ -3111,7 +3629,7 @@
           <a:noFill/>
         </p:spPr>
         <p:txBody>
-          <a:bodyPr wrap="none">
+          <a:bodyPr wrap="square">
             <a:spAutoFit/>
           </a:bodyPr>
           <a:lstStyle/>
@@ -3124,62 +3642,1262 @@
               </a:defRPr>
             </a:pPr>
             <a:r>
-              <a:t>Figure 1. STROBE Flow Diagram</a:t>
-            </a:r>
-          </a:p>
-        </p:txBody>
-      </p:sp>
-      <p:pic>
-        <p:nvPicPr>
-          <p:cNvPr id="3" name="Picture 2" descr="fig_flowchart.png"/>
-          <p:cNvPicPr>
-            <a:picLocks noChangeAspect="1"/>
-          </p:cNvPicPr>
-          <p:nvPr/>
-        </p:nvPicPr>
-        <p:blipFill>
-          <a:blip r:embed="rId2"/>
-          <a:stretch>
-            <a:fillRect/>
-          </a:stretch>
-        </p:blipFill>
-        <p:spPr>
-          <a:xfrm>
-            <a:off x="4247308" y="822960"/>
-            <a:ext cx="3697078" cy="5029200"/>
-          </a:xfrm>
-          <a:prstGeom prst="rect">
-            <a:avLst/>
-          </a:prstGeom>
-        </p:spPr>
-      </p:pic>
-      <p:sp>
-        <p:nvSpPr>
-          <p:cNvPr id="4" name="TextBox 3"/>
-          <p:cNvSpPr txBox="1"/>
-          <p:nvPr/>
-        </p:nvSpPr>
-        <p:spPr>
-          <a:xfrm>
-            <a:off x="457200" y="6126480"/>
-            <a:ext cx="11277295" cy="640080"/>
-          </a:xfrm>
-          <a:prstGeom prst="rect">
-            <a:avLst/>
-          </a:prstGeom>
-          <a:noFill/>
-        </p:spPr>
-        <p:txBody>
-          <a:bodyPr wrap="none">
-            <a:spAutoFit/>
-          </a:bodyPr>
-          <a:lstStyle/>
-          <a:p>
-            <a:pPr algn="ctr">
-              <a:defRPr sz="1100" i="1"/>
-            </a:pPr>
-            <a:r>
-              <a:t>Participant selection from initial assessment (N=3,479) through primary analysis (N=3,188) and sensitivity subgroup (N=663).</a:t>
+              <a:t>Figure 1. STROBE Flow Diagram — Participant Selection</a:t>
+            </a:r>
+          </a:p>
+        </p:txBody>
+      </p:sp>
+      <p:sp>
+        <p:nvSpPr>
+          <p:cNvPr id="3" name="Rounded Rectangle 2"/>
+          <p:cNvSpPr/>
+          <p:nvPr/>
+        </p:nvSpPr>
+        <p:spPr>
+          <a:xfrm>
+            <a:off x="1600200" y="731520"/>
+            <a:ext cx="4114800" cy="777240"/>
+          </a:xfrm>
+          <a:prstGeom prst="roundRect">
+            <a:avLst/>
+          </a:prstGeom>
+          <a:solidFill>
+            <a:srgbClr val="E8F0FE"/>
+          </a:solidFill>
+          <a:ln w="19050">
+            <a:solidFill>
+              <a:srgbClr val="1565C0"/>
+            </a:solidFill>
+          </a:ln>
+        </p:spPr>
+        <p:style>
+          <a:lnRef idx="1">
+            <a:schemeClr val="accent1"/>
+          </a:lnRef>
+          <a:fillRef idx="3">
+            <a:schemeClr val="accent1"/>
+          </a:fillRef>
+          <a:effectRef idx="2">
+            <a:schemeClr val="accent1"/>
+          </a:effectRef>
+          <a:fontRef idx="minor">
+            <a:schemeClr val="lt1"/>
+          </a:fontRef>
+        </p:style>
+        <p:txBody>
+          <a:bodyPr rtlCol="0" anchor="ctr" wrap="square" lIns="50800" rIns="50800" tIns="25400" bIns="25400"/>
+          <a:lstStyle/>
+          <a:p>
+            <a:pPr algn="ctr"/>
+            <a:r>
+              <a:rPr sz="900" b="1">
+                <a:solidFill>
+                  <a:srgbClr val="000000"/>
+                </a:solidFill>
+              </a:rPr>
+              <a:t>Cesarean deliveries assessed for eligibility</a:t>
+            </a:r>
+          </a:p>
+          <a:p>
+            <a:pPr algn="ctr"/>
+            <a:r>
+              <a:rPr sz="800">
+                <a:solidFill>
+                  <a:srgbClr val="000000"/>
+                </a:solidFill>
+              </a:rPr>
+              <a:t>(Apr 2014 – Oct 2024)</a:t>
+            </a:r>
+          </a:p>
+          <a:p>
+            <a:pPr algn="ctr"/>
+            <a:r>
+              <a:rPr sz="900">
+                <a:solidFill>
+                  <a:srgbClr val="000000"/>
+                </a:solidFill>
+              </a:rPr>
+              <a:t>N = 3,479  (Singleton 3,113  /  Twin 366)</a:t>
+            </a:r>
+          </a:p>
+        </p:txBody>
+      </p:sp>
+      <p:sp>
+        <p:nvSpPr>
+          <p:cNvPr id="4" name="Down Arrow 3"/>
+          <p:cNvSpPr/>
+          <p:nvPr/>
+        </p:nvSpPr>
+        <p:spPr>
+          <a:xfrm>
+            <a:off x="3566160" y="1508760"/>
+            <a:ext cx="182880" cy="274320"/>
+          </a:xfrm>
+          <a:prstGeom prst="downArrow">
+            <a:avLst/>
+          </a:prstGeom>
+          <a:solidFill>
+            <a:srgbClr val="555555"/>
+          </a:solidFill>
+          <a:ln>
+            <a:noFill/>
+          </a:ln>
+        </p:spPr>
+        <p:style>
+          <a:lnRef idx="1">
+            <a:schemeClr val="accent1"/>
+          </a:lnRef>
+          <a:fillRef idx="3">
+            <a:schemeClr val="accent1"/>
+          </a:fillRef>
+          <a:effectRef idx="2">
+            <a:schemeClr val="accent1"/>
+          </a:effectRef>
+          <a:fontRef idx="minor">
+            <a:schemeClr val="lt1"/>
+          </a:fontRef>
+        </p:style>
+        <p:txBody>
+          <a:bodyPr rtlCol="0" anchor="ctr"/>
+          <a:lstStyle/>
+          <a:p>
+            <a:pPr algn="ctr"/>
+          </a:p>
+        </p:txBody>
+      </p:sp>
+      <p:sp>
+        <p:nvSpPr>
+          <p:cNvPr id="5" name="Right Arrow 4"/>
+          <p:cNvSpPr/>
+          <p:nvPr/>
+        </p:nvSpPr>
+        <p:spPr>
+          <a:xfrm>
+            <a:off x="5715000" y="1572768"/>
+            <a:ext cx="1371600" cy="146304"/>
+          </a:xfrm>
+          <a:prstGeom prst="rightArrow">
+            <a:avLst/>
+          </a:prstGeom>
+          <a:solidFill>
+            <a:srgbClr val="AA5500"/>
+          </a:solidFill>
+          <a:ln>
+            <a:noFill/>
+          </a:ln>
+        </p:spPr>
+        <p:style>
+          <a:lnRef idx="1">
+            <a:schemeClr val="accent1"/>
+          </a:lnRef>
+          <a:fillRef idx="3">
+            <a:schemeClr val="accent1"/>
+          </a:fillRef>
+          <a:effectRef idx="2">
+            <a:schemeClr val="accent1"/>
+          </a:effectRef>
+          <a:fontRef idx="minor">
+            <a:schemeClr val="lt1"/>
+          </a:fontRef>
+        </p:style>
+        <p:txBody>
+          <a:bodyPr rtlCol="0" anchor="ctr"/>
+          <a:lstStyle/>
+          <a:p>
+            <a:pPr algn="ctr"/>
+          </a:p>
+        </p:txBody>
+      </p:sp>
+      <p:sp>
+        <p:nvSpPr>
+          <p:cNvPr id="6" name="Rounded Rectangle 5"/>
+          <p:cNvSpPr/>
+          <p:nvPr/>
+        </p:nvSpPr>
+        <p:spPr>
+          <a:xfrm>
+            <a:off x="7086600" y="960120"/>
+            <a:ext cx="3200400" cy="1682496"/>
+          </a:xfrm>
+          <a:prstGeom prst="roundRect">
+            <a:avLst/>
+          </a:prstGeom>
+          <a:solidFill>
+            <a:srgbClr val="FFF3E0"/>
+          </a:solidFill>
+          <a:ln w="19050">
+            <a:solidFill>
+              <a:srgbClr val="E65100"/>
+            </a:solidFill>
+          </a:ln>
+        </p:spPr>
+        <p:style>
+          <a:lnRef idx="1">
+            <a:schemeClr val="accent1"/>
+          </a:lnRef>
+          <a:fillRef idx="3">
+            <a:schemeClr val="accent1"/>
+          </a:fillRef>
+          <a:effectRef idx="2">
+            <a:schemeClr val="accent1"/>
+          </a:effectRef>
+          <a:fontRef idx="minor">
+            <a:schemeClr val="lt1"/>
+          </a:fontRef>
+        </p:style>
+        <p:txBody>
+          <a:bodyPr rtlCol="0" anchor="ctr" wrap="square" lIns="50800" rIns="50800" tIns="25400" bIns="25400"/>
+          <a:lstStyle/>
+          <a:p>
+            <a:pPr algn="ctr"/>
+            <a:r>
+              <a:rPr sz="800" b="1">
+                <a:solidFill>
+                  <a:srgbClr val="000000"/>
+                </a:solidFill>
+              </a:rPr>
+              <a:t>Excluded  (n = 236)</a:t>
+            </a:r>
+          </a:p>
+          <a:p>
+            <a:pPr algn="ctr"/>
+            <a:r>
+              <a:rPr sz="700">
+                <a:solidFill>
+                  <a:srgbClr val="000000"/>
+                </a:solidFill>
+              </a:rPr>
+              <a:t>General anesthesia: n=6 (S 4, T 2)</a:t>
+            </a:r>
+          </a:p>
+          <a:p>
+            <a:pPr algn="ctr"/>
+            <a:r>
+              <a:rPr sz="700">
+                <a:solidFill>
+                  <a:srgbClr val="000000"/>
+                </a:solidFill>
+              </a:rPr>
+              <a:t>SBP &lt; 90 mmHg at admission: n=4 (S 3, T 1)</a:t>
+            </a:r>
+          </a:p>
+          <a:p>
+            <a:pPr algn="ctr"/>
+            <a:r>
+              <a:rPr sz="700">
+                <a:solidFill>
+                  <a:srgbClr val="000000"/>
+                </a:solidFill>
+              </a:rPr>
+              <a:t>Intrauterine fetal death (IUFD): n=13 (S 4, T 9)</a:t>
+            </a:r>
+          </a:p>
+          <a:p>
+            <a:pPr algn="ctr"/>
+            <a:r>
+              <a:rPr sz="700">
+                <a:solidFill>
+                  <a:srgbClr val="000000"/>
+                </a:solidFill>
+              </a:rPr>
+              <a:t>Vanishing twin: n=3 (S 0, T 3)</a:t>
+            </a:r>
+          </a:p>
+          <a:p>
+            <a:pPr algn="ctr"/>
+            <a:r>
+              <a:rPr sz="700">
+                <a:solidFill>
+                  <a:srgbClr val="000000"/>
+                </a:solidFill>
+              </a:rPr>
+              <a:t>Triplet pregnancy: n=5 (S 5, T 0)</a:t>
+            </a:r>
+          </a:p>
+          <a:p>
+            <a:pPr algn="ctr"/>
+            <a:r>
+              <a:rPr sz="700">
+                <a:solidFill>
+                  <a:srgbClr val="000000"/>
+                </a:solidFill>
+              </a:rPr>
+              <a:t>Other exclusion criteria: n=147 (S 143, T 4)</a:t>
+            </a:r>
+          </a:p>
+          <a:p>
+            <a:pPr algn="ctr"/>
+            <a:r>
+              <a:rPr sz="700">
+                <a:solidFill>
+                  <a:srgbClr val="000000"/>
+                </a:solidFill>
+              </a:rPr>
+              <a:t>Missing anesthesia data: n=58 (S 57, T 1)</a:t>
+            </a:r>
+          </a:p>
+        </p:txBody>
+      </p:sp>
+      <p:sp>
+        <p:nvSpPr>
+          <p:cNvPr id="7" name="Rounded Rectangle 6"/>
+          <p:cNvSpPr/>
+          <p:nvPr/>
+        </p:nvSpPr>
+        <p:spPr>
+          <a:xfrm>
+            <a:off x="1600200" y="1965960"/>
+            <a:ext cx="4114800" cy="594360"/>
+          </a:xfrm>
+          <a:prstGeom prst="roundRect">
+            <a:avLst/>
+          </a:prstGeom>
+          <a:solidFill>
+            <a:srgbClr val="E8F0FE"/>
+          </a:solidFill>
+          <a:ln w="19050">
+            <a:solidFill>
+              <a:srgbClr val="1565C0"/>
+            </a:solidFill>
+          </a:ln>
+        </p:spPr>
+        <p:style>
+          <a:lnRef idx="1">
+            <a:schemeClr val="accent1"/>
+          </a:lnRef>
+          <a:fillRef idx="3">
+            <a:schemeClr val="accent1"/>
+          </a:fillRef>
+          <a:effectRef idx="2">
+            <a:schemeClr val="accent1"/>
+          </a:effectRef>
+          <a:fontRef idx="minor">
+            <a:schemeClr val="lt1"/>
+          </a:fontRef>
+        </p:style>
+        <p:txBody>
+          <a:bodyPr rtlCol="0" anchor="ctr" wrap="square" lIns="50800" rIns="50800" tIns="25400" bIns="25400"/>
+          <a:lstStyle/>
+          <a:p>
+            <a:pPr algn="ctr"/>
+            <a:r>
+              <a:rPr sz="900" b="1">
+                <a:solidFill>
+                  <a:srgbClr val="000000"/>
+                </a:solidFill>
+              </a:rPr>
+              <a:t>Eligible for analysis</a:t>
+            </a:r>
+          </a:p>
+          <a:p>
+            <a:pPr algn="ctr"/>
+            <a:r>
+              <a:rPr sz="900">
+                <a:solidFill>
+                  <a:srgbClr val="000000"/>
+                </a:solidFill>
+              </a:rPr>
+              <a:t>N = 3,243  (Singleton 2,897  /  Twin 346)</a:t>
+            </a:r>
+          </a:p>
+        </p:txBody>
+      </p:sp>
+      <p:sp>
+        <p:nvSpPr>
+          <p:cNvPr id="8" name="Down Arrow 7"/>
+          <p:cNvSpPr/>
+          <p:nvPr/>
+        </p:nvSpPr>
+        <p:spPr>
+          <a:xfrm>
+            <a:off x="3566160" y="2560320"/>
+            <a:ext cx="182880" cy="228600"/>
+          </a:xfrm>
+          <a:prstGeom prst="downArrow">
+            <a:avLst/>
+          </a:prstGeom>
+          <a:solidFill>
+            <a:srgbClr val="555555"/>
+          </a:solidFill>
+          <a:ln>
+            <a:noFill/>
+          </a:ln>
+        </p:spPr>
+        <p:style>
+          <a:lnRef idx="1">
+            <a:schemeClr val="accent1"/>
+          </a:lnRef>
+          <a:fillRef idx="3">
+            <a:schemeClr val="accent1"/>
+          </a:fillRef>
+          <a:effectRef idx="2">
+            <a:schemeClr val="accent1"/>
+          </a:effectRef>
+          <a:fontRef idx="minor">
+            <a:schemeClr val="lt1"/>
+          </a:fontRef>
+        </p:style>
+        <p:txBody>
+          <a:bodyPr rtlCol="0" anchor="ctr"/>
+          <a:lstStyle/>
+          <a:p>
+            <a:pPr algn="ctr"/>
+          </a:p>
+        </p:txBody>
+      </p:sp>
+      <p:sp>
+        <p:nvSpPr>
+          <p:cNvPr id="9" name="Right Arrow 8"/>
+          <p:cNvSpPr/>
+          <p:nvPr/>
+        </p:nvSpPr>
+        <p:spPr>
+          <a:xfrm>
+            <a:off x="5715000" y="2596896"/>
+            <a:ext cx="1371600" cy="146304"/>
+          </a:xfrm>
+          <a:prstGeom prst="rightArrow">
+            <a:avLst/>
+          </a:prstGeom>
+          <a:solidFill>
+            <a:srgbClr val="AA5500"/>
+          </a:solidFill>
+          <a:ln>
+            <a:noFill/>
+          </a:ln>
+        </p:spPr>
+        <p:style>
+          <a:lnRef idx="1">
+            <a:schemeClr val="accent1"/>
+          </a:lnRef>
+          <a:fillRef idx="3">
+            <a:schemeClr val="accent1"/>
+          </a:fillRef>
+          <a:effectRef idx="2">
+            <a:schemeClr val="accent1"/>
+          </a:effectRef>
+          <a:fontRef idx="minor">
+            <a:schemeClr val="lt1"/>
+          </a:fontRef>
+        </p:style>
+        <p:txBody>
+          <a:bodyPr rtlCol="0" anchor="ctr"/>
+          <a:lstStyle/>
+          <a:p>
+            <a:pPr algn="ctr"/>
+          </a:p>
+        </p:txBody>
+      </p:sp>
+      <p:sp>
+        <p:nvSpPr>
+          <p:cNvPr id="10" name="Rounded Rectangle 9"/>
+          <p:cNvSpPr/>
+          <p:nvPr/>
+        </p:nvSpPr>
+        <p:spPr>
+          <a:xfrm>
+            <a:off x="7086600" y="2514600"/>
+            <a:ext cx="3200400" cy="502920"/>
+          </a:xfrm>
+          <a:prstGeom prst="roundRect">
+            <a:avLst/>
+          </a:prstGeom>
+          <a:solidFill>
+            <a:srgbClr val="FFF3E0"/>
+          </a:solidFill>
+          <a:ln w="19050">
+            <a:solidFill>
+              <a:srgbClr val="E65100"/>
+            </a:solidFill>
+          </a:ln>
+        </p:spPr>
+        <p:style>
+          <a:lnRef idx="1">
+            <a:schemeClr val="accent1"/>
+          </a:lnRef>
+          <a:fillRef idx="3">
+            <a:schemeClr val="accent1"/>
+          </a:fillRef>
+          <a:effectRef idx="2">
+            <a:schemeClr val="accent1"/>
+          </a:effectRef>
+          <a:fontRef idx="minor">
+            <a:schemeClr val="lt1"/>
+          </a:fontRef>
+        </p:style>
+        <p:txBody>
+          <a:bodyPr rtlCol="0" anchor="ctr" wrap="square" lIns="50800" rIns="50800" tIns="25400" bIns="25400"/>
+          <a:lstStyle/>
+          <a:p>
+            <a:pPr algn="ctr"/>
+            <a:r>
+              <a:rPr sz="800" b="1">
+                <a:solidFill>
+                  <a:srgbClr val="000000"/>
+                </a:solidFill>
+              </a:rPr>
+              <a:t>Prophylactic antiemetic before anesthesia</a:t>
+            </a:r>
+          </a:p>
+          <a:p>
+            <a:pPr algn="ctr"/>
+            <a:r>
+              <a:rPr sz="800">
+                <a:solidFill>
+                  <a:srgbClr val="000000"/>
+                </a:solidFill>
+              </a:rPr>
+              <a:t>n = 55  (S 51, T 4)</a:t>
+            </a:r>
+          </a:p>
+        </p:txBody>
+      </p:sp>
+      <p:sp>
+        <p:nvSpPr>
+          <p:cNvPr id="11" name="Rounded Rectangle 10"/>
+          <p:cNvSpPr/>
+          <p:nvPr/>
+        </p:nvSpPr>
+        <p:spPr>
+          <a:xfrm>
+            <a:off x="1600200" y="2926080"/>
+            <a:ext cx="4114800" cy="594360"/>
+          </a:xfrm>
+          <a:prstGeom prst="roundRect">
+            <a:avLst/>
+          </a:prstGeom>
+          <a:solidFill>
+            <a:srgbClr val="E8F5E9"/>
+          </a:solidFill>
+          <a:ln w="19050">
+            <a:solidFill>
+              <a:srgbClr val="2E7D32"/>
+            </a:solidFill>
+          </a:ln>
+        </p:spPr>
+        <p:style>
+          <a:lnRef idx="1">
+            <a:schemeClr val="accent1"/>
+          </a:lnRef>
+          <a:fillRef idx="3">
+            <a:schemeClr val="accent1"/>
+          </a:fillRef>
+          <a:effectRef idx="2">
+            <a:schemeClr val="accent1"/>
+          </a:effectRef>
+          <a:fontRef idx="minor">
+            <a:schemeClr val="lt1"/>
+          </a:fontRef>
+        </p:style>
+        <p:txBody>
+          <a:bodyPr rtlCol="0" anchor="ctr" wrap="square" lIns="50800" rIns="50800" tIns="25400" bIns="25400"/>
+          <a:lstStyle/>
+          <a:p>
+            <a:pPr algn="ctr"/>
+            <a:r>
+              <a:rPr sz="900" b="1">
+                <a:solidFill>
+                  <a:srgbClr val="000000"/>
+                </a:solidFill>
+              </a:rPr>
+              <a:t>Primary analysis cohort</a:t>
+            </a:r>
+          </a:p>
+          <a:p>
+            <a:pPr algn="ctr"/>
+            <a:r>
+              <a:rPr sz="900">
+                <a:solidFill>
+                  <a:srgbClr val="000000"/>
+                </a:solidFill>
+              </a:rPr>
+              <a:t>N = 3,188  (Singleton 2,846  /  Twin 342)</a:t>
+            </a:r>
+          </a:p>
+        </p:txBody>
+      </p:sp>
+      <p:sp>
+        <p:nvSpPr>
+          <p:cNvPr id="12" name="Down Arrow 11"/>
+          <p:cNvSpPr/>
+          <p:nvPr/>
+        </p:nvSpPr>
+        <p:spPr>
+          <a:xfrm>
+            <a:off x="2468880" y="3520440"/>
+            <a:ext cx="182880" cy="274320"/>
+          </a:xfrm>
+          <a:prstGeom prst="downArrow">
+            <a:avLst/>
+          </a:prstGeom>
+          <a:solidFill>
+            <a:srgbClr val="555555"/>
+          </a:solidFill>
+          <a:ln>
+            <a:noFill/>
+          </a:ln>
+        </p:spPr>
+        <p:style>
+          <a:lnRef idx="1">
+            <a:schemeClr val="accent1"/>
+          </a:lnRef>
+          <a:fillRef idx="3">
+            <a:schemeClr val="accent1"/>
+          </a:fillRef>
+          <a:effectRef idx="2">
+            <a:schemeClr val="accent1"/>
+          </a:effectRef>
+          <a:fontRef idx="minor">
+            <a:schemeClr val="lt1"/>
+          </a:fontRef>
+        </p:style>
+        <p:txBody>
+          <a:bodyPr rtlCol="0" anchor="ctr"/>
+          <a:lstStyle/>
+          <a:p>
+            <a:pPr algn="ctr"/>
+          </a:p>
+        </p:txBody>
+      </p:sp>
+      <p:sp>
+        <p:nvSpPr>
+          <p:cNvPr id="13" name="Rounded Rectangle 12"/>
+          <p:cNvSpPr/>
+          <p:nvPr/>
+        </p:nvSpPr>
+        <p:spPr>
+          <a:xfrm>
+            <a:off x="1371600" y="3794760"/>
+            <a:ext cx="2011680" cy="502920"/>
+          </a:xfrm>
+          <a:prstGeom prst="roundRect">
+            <a:avLst/>
+          </a:prstGeom>
+          <a:solidFill>
+            <a:srgbClr val="E8F5E9"/>
+          </a:solidFill>
+          <a:ln w="19050">
+            <a:solidFill>
+              <a:srgbClr val="2E7D32"/>
+            </a:solidFill>
+          </a:ln>
+        </p:spPr>
+        <p:style>
+          <a:lnRef idx="1">
+            <a:schemeClr val="accent1"/>
+          </a:lnRef>
+          <a:fillRef idx="3">
+            <a:schemeClr val="accent1"/>
+          </a:fillRef>
+          <a:effectRef idx="2">
+            <a:schemeClr val="accent1"/>
+          </a:effectRef>
+          <a:fontRef idx="minor">
+            <a:schemeClr val="lt1"/>
+          </a:fontRef>
+        </p:style>
+        <p:txBody>
+          <a:bodyPr rtlCol="0" anchor="ctr" wrap="square" lIns="50800" rIns="50800" tIns="25400" bIns="25400"/>
+          <a:lstStyle/>
+          <a:p>
+            <a:pPr algn="ctr"/>
+            <a:r>
+              <a:rPr sz="900" b="1">
+                <a:solidFill>
+                  <a:srgbClr val="000000"/>
+                </a:solidFill>
+              </a:rPr>
+              <a:t>Singleton</a:t>
+            </a:r>
+          </a:p>
+          <a:p>
+            <a:pPr algn="ctr"/>
+            <a:r>
+              <a:rPr sz="900">
+                <a:solidFill>
+                  <a:srgbClr val="000000"/>
+                </a:solidFill>
+              </a:rPr>
+              <a:t>n = 2,846</a:t>
+            </a:r>
+          </a:p>
+        </p:txBody>
+      </p:sp>
+      <p:sp>
+        <p:nvSpPr>
+          <p:cNvPr id="14" name="Down Arrow 13"/>
+          <p:cNvSpPr/>
+          <p:nvPr/>
+        </p:nvSpPr>
+        <p:spPr>
+          <a:xfrm>
+            <a:off x="4663440" y="3520440"/>
+            <a:ext cx="182880" cy="274320"/>
+          </a:xfrm>
+          <a:prstGeom prst="downArrow">
+            <a:avLst/>
+          </a:prstGeom>
+          <a:solidFill>
+            <a:srgbClr val="555555"/>
+          </a:solidFill>
+          <a:ln>
+            <a:noFill/>
+          </a:ln>
+        </p:spPr>
+        <p:style>
+          <a:lnRef idx="1">
+            <a:schemeClr val="accent1"/>
+          </a:lnRef>
+          <a:fillRef idx="3">
+            <a:schemeClr val="accent1"/>
+          </a:fillRef>
+          <a:effectRef idx="2">
+            <a:schemeClr val="accent1"/>
+          </a:effectRef>
+          <a:fontRef idx="minor">
+            <a:schemeClr val="lt1"/>
+          </a:fontRef>
+        </p:style>
+        <p:txBody>
+          <a:bodyPr rtlCol="0" anchor="ctr"/>
+          <a:lstStyle/>
+          <a:p>
+            <a:pPr algn="ctr"/>
+          </a:p>
+        </p:txBody>
+      </p:sp>
+      <p:sp>
+        <p:nvSpPr>
+          <p:cNvPr id="15" name="Rounded Rectangle 14"/>
+          <p:cNvSpPr/>
+          <p:nvPr/>
+        </p:nvSpPr>
+        <p:spPr>
+          <a:xfrm>
+            <a:off x="3931920" y="3794760"/>
+            <a:ext cx="2011680" cy="502920"/>
+          </a:xfrm>
+          <a:prstGeom prst="roundRect">
+            <a:avLst/>
+          </a:prstGeom>
+          <a:solidFill>
+            <a:srgbClr val="E8F5E9"/>
+          </a:solidFill>
+          <a:ln w="19050">
+            <a:solidFill>
+              <a:srgbClr val="2E7D32"/>
+            </a:solidFill>
+          </a:ln>
+        </p:spPr>
+        <p:style>
+          <a:lnRef idx="1">
+            <a:schemeClr val="accent1"/>
+          </a:lnRef>
+          <a:fillRef idx="3">
+            <a:schemeClr val="accent1"/>
+          </a:fillRef>
+          <a:effectRef idx="2">
+            <a:schemeClr val="accent1"/>
+          </a:effectRef>
+          <a:fontRef idx="minor">
+            <a:schemeClr val="lt1"/>
+          </a:fontRef>
+        </p:style>
+        <p:txBody>
+          <a:bodyPr rtlCol="0" anchor="ctr" wrap="square" lIns="50800" rIns="50800" tIns="25400" bIns="25400"/>
+          <a:lstStyle/>
+          <a:p>
+            <a:pPr algn="ctr"/>
+            <a:r>
+              <a:rPr sz="900" b="1">
+                <a:solidFill>
+                  <a:srgbClr val="000000"/>
+                </a:solidFill>
+              </a:rPr>
+              <a:t>Twin</a:t>
+            </a:r>
+          </a:p>
+          <a:p>
+            <a:pPr algn="ctr"/>
+            <a:r>
+              <a:rPr sz="900">
+                <a:solidFill>
+                  <a:srgbClr val="000000"/>
+                </a:solidFill>
+              </a:rPr>
+              <a:t>n = 342</a:t>
+            </a:r>
+          </a:p>
+        </p:txBody>
+      </p:sp>
+      <p:sp>
+        <p:nvSpPr>
+          <p:cNvPr id="16" name="Down Arrow 15"/>
+          <p:cNvSpPr/>
+          <p:nvPr/>
+        </p:nvSpPr>
+        <p:spPr>
+          <a:xfrm>
+            <a:off x="3566160" y="4297680"/>
+            <a:ext cx="182880" cy="228600"/>
+          </a:xfrm>
+          <a:prstGeom prst="downArrow">
+            <a:avLst/>
+          </a:prstGeom>
+          <a:solidFill>
+            <a:srgbClr val="555555"/>
+          </a:solidFill>
+          <a:ln>
+            <a:noFill/>
+          </a:ln>
+        </p:spPr>
+        <p:style>
+          <a:lnRef idx="1">
+            <a:schemeClr val="accent1"/>
+          </a:lnRef>
+          <a:fillRef idx="3">
+            <a:schemeClr val="accent1"/>
+          </a:fillRef>
+          <a:effectRef idx="2">
+            <a:schemeClr val="accent1"/>
+          </a:effectRef>
+          <a:fontRef idx="minor">
+            <a:schemeClr val="lt1"/>
+          </a:fontRef>
+        </p:style>
+        <p:txBody>
+          <a:bodyPr rtlCol="0" anchor="ctr"/>
+          <a:lstStyle/>
+          <a:p>
+            <a:pPr algn="ctr"/>
+          </a:p>
+        </p:txBody>
+      </p:sp>
+      <p:sp>
+        <p:nvSpPr>
+          <p:cNvPr id="17" name="Rounded Rectangle 16"/>
+          <p:cNvSpPr/>
+          <p:nvPr/>
+        </p:nvSpPr>
+        <p:spPr>
+          <a:xfrm>
+            <a:off x="7086600" y="4434840"/>
+            <a:ext cx="3200400" cy="1188720"/>
+          </a:xfrm>
+          <a:prstGeom prst="roundRect">
+            <a:avLst/>
+          </a:prstGeom>
+          <a:solidFill>
+            <a:srgbClr val="FFF3E0"/>
+          </a:solidFill>
+          <a:ln w="19050">
+            <a:solidFill>
+              <a:srgbClr val="E65100"/>
+            </a:solidFill>
+          </a:ln>
+        </p:spPr>
+        <p:style>
+          <a:lnRef idx="1">
+            <a:schemeClr val="accent1"/>
+          </a:lnRef>
+          <a:fillRef idx="3">
+            <a:schemeClr val="accent1"/>
+          </a:fillRef>
+          <a:effectRef idx="2">
+            <a:schemeClr val="accent1"/>
+          </a:effectRef>
+          <a:fontRef idx="minor">
+            <a:schemeClr val="lt1"/>
+          </a:fontRef>
+        </p:style>
+        <p:txBody>
+          <a:bodyPr rtlCol="0" anchor="ctr" wrap="square" lIns="50800" rIns="50800" tIns="25400" bIns="25400"/>
+          <a:lstStyle/>
+          <a:p>
+            <a:pPr algn="ctr"/>
+            <a:r>
+              <a:rPr sz="700" b="1">
+                <a:solidFill>
+                  <a:srgbClr val="000000"/>
+                </a:solidFill>
+              </a:rPr>
+              <a:t>Additional exclusion for sensitivity analysis</a:t>
+            </a:r>
+          </a:p>
+          <a:p>
+            <a:pPr algn="ctr"/>
+            <a:r>
+              <a:rPr sz="700" b="1">
+                <a:solidFill>
+                  <a:srgbClr val="000000"/>
+                </a:solidFill>
+              </a:rPr>
+              <a:t>n = 2,525 (with overlap)</a:t>
+            </a:r>
+          </a:p>
+          <a:p>
+            <a:pPr algn="ctr"/>
+            <a:r>
+              <a:rPr sz="700">
+                <a:solidFill>
+                  <a:srgbClr val="000000"/>
+                </a:solidFill>
+              </a:rPr>
+              <a:t>Emergency CS: n=1452</a:t>
+            </a:r>
+          </a:p>
+          <a:p>
+            <a:pPr algn="ctr"/>
+            <a:r>
+              <a:rPr sz="700">
+                <a:solidFill>
+                  <a:srgbClr val="000000"/>
+                </a:solidFill>
+              </a:rPr>
+              <a:t>Prior CS: n=1320</a:t>
+            </a:r>
+          </a:p>
+          <a:p>
+            <a:pPr algn="ctr"/>
+            <a:r>
+              <a:rPr sz="700">
+                <a:solidFill>
+                  <a:srgbClr val="000000"/>
+                </a:solidFill>
+              </a:rPr>
+              <a:t>HDP: n=317</a:t>
+            </a:r>
+          </a:p>
+          <a:p>
+            <a:pPr algn="ctr"/>
+            <a:r>
+              <a:rPr sz="700">
+                <a:solidFill>
+                  <a:srgbClr val="000000"/>
+                </a:solidFill>
+              </a:rPr>
+              <a:t>Preoperative steroid: n=232</a:t>
+            </a:r>
+          </a:p>
+        </p:txBody>
+      </p:sp>
+      <p:sp>
+        <p:nvSpPr>
+          <p:cNvPr id="18" name="Right Arrow 17"/>
+          <p:cNvSpPr/>
+          <p:nvPr/>
+        </p:nvSpPr>
+        <p:spPr>
+          <a:xfrm>
+            <a:off x="4800600" y="4498848"/>
+            <a:ext cx="2286000" cy="146304"/>
+          </a:xfrm>
+          <a:prstGeom prst="rightArrow">
+            <a:avLst/>
+          </a:prstGeom>
+          <a:solidFill>
+            <a:srgbClr val="AA5500"/>
+          </a:solidFill>
+          <a:ln>
+            <a:noFill/>
+          </a:ln>
+        </p:spPr>
+        <p:style>
+          <a:lnRef idx="1">
+            <a:schemeClr val="accent1"/>
+          </a:lnRef>
+          <a:fillRef idx="3">
+            <a:schemeClr val="accent1"/>
+          </a:fillRef>
+          <a:effectRef idx="2">
+            <a:schemeClr val="accent1"/>
+          </a:effectRef>
+          <a:fontRef idx="minor">
+            <a:schemeClr val="lt1"/>
+          </a:fontRef>
+        </p:style>
+        <p:txBody>
+          <a:bodyPr rtlCol="0" anchor="ctr"/>
+          <a:lstStyle/>
+          <a:p>
+            <a:pPr algn="ctr"/>
+          </a:p>
+        </p:txBody>
+      </p:sp>
+      <p:sp>
+        <p:nvSpPr>
+          <p:cNvPr id="19" name="Rounded Rectangle 18"/>
+          <p:cNvSpPr/>
+          <p:nvPr/>
+        </p:nvSpPr>
+        <p:spPr>
+          <a:xfrm>
+            <a:off x="1600200" y="4754880"/>
+            <a:ext cx="4114800" cy="640080"/>
+          </a:xfrm>
+          <a:prstGeom prst="roundRect">
+            <a:avLst/>
+          </a:prstGeom>
+          <a:solidFill>
+            <a:srgbClr val="F3E5F5"/>
+          </a:solidFill>
+          <a:ln w="19050">
+            <a:solidFill>
+              <a:srgbClr val="6A1B9A"/>
+            </a:solidFill>
+          </a:ln>
+        </p:spPr>
+        <p:style>
+          <a:lnRef idx="1">
+            <a:schemeClr val="accent1"/>
+          </a:lnRef>
+          <a:fillRef idx="3">
+            <a:schemeClr val="accent1"/>
+          </a:fillRef>
+          <a:effectRef idx="2">
+            <a:schemeClr val="accent1"/>
+          </a:effectRef>
+          <a:fontRef idx="minor">
+            <a:schemeClr val="lt1"/>
+          </a:fontRef>
+        </p:style>
+        <p:txBody>
+          <a:bodyPr rtlCol="0" anchor="ctr" wrap="square" lIns="50800" rIns="50800" tIns="25400" bIns="25400"/>
+          <a:lstStyle/>
+          <a:p>
+            <a:pPr algn="ctr"/>
+            <a:r>
+              <a:rPr sz="900" b="1">
+                <a:solidFill>
+                  <a:srgbClr val="000000"/>
+                </a:solidFill>
+              </a:rPr>
+              <a:t>Sensitivity analysis subgroup (Elective, low-risk)</a:t>
+            </a:r>
+          </a:p>
+          <a:p>
+            <a:pPr algn="ctr"/>
+            <a:r>
+              <a:rPr sz="900">
+                <a:solidFill>
+                  <a:srgbClr val="000000"/>
+                </a:solidFill>
+              </a:rPr>
+              <a:t>N = 663  (Singleton 479  /  Twin 184)</a:t>
+            </a:r>
+          </a:p>
+        </p:txBody>
+      </p:sp>
+      <p:sp>
+        <p:nvSpPr>
+          <p:cNvPr id="20" name="Down Arrow 19"/>
+          <p:cNvSpPr/>
+          <p:nvPr/>
+        </p:nvSpPr>
+        <p:spPr>
+          <a:xfrm>
+            <a:off x="2468880" y="5394960"/>
+            <a:ext cx="182880" cy="155448"/>
+          </a:xfrm>
+          <a:prstGeom prst="downArrow">
+            <a:avLst/>
+          </a:prstGeom>
+          <a:solidFill>
+            <a:srgbClr val="555555"/>
+          </a:solidFill>
+          <a:ln>
+            <a:noFill/>
+          </a:ln>
+        </p:spPr>
+        <p:style>
+          <a:lnRef idx="1">
+            <a:schemeClr val="accent1"/>
+          </a:lnRef>
+          <a:fillRef idx="3">
+            <a:schemeClr val="accent1"/>
+          </a:fillRef>
+          <a:effectRef idx="2">
+            <a:schemeClr val="accent1"/>
+          </a:effectRef>
+          <a:fontRef idx="minor">
+            <a:schemeClr val="lt1"/>
+          </a:fontRef>
+        </p:style>
+        <p:txBody>
+          <a:bodyPr rtlCol="0" anchor="ctr"/>
+          <a:lstStyle/>
+          <a:p>
+            <a:pPr algn="ctr"/>
+          </a:p>
+        </p:txBody>
+      </p:sp>
+      <p:sp>
+        <p:nvSpPr>
+          <p:cNvPr id="21" name="Rounded Rectangle 20"/>
+          <p:cNvSpPr/>
+          <p:nvPr/>
+        </p:nvSpPr>
+        <p:spPr>
+          <a:xfrm>
+            <a:off x="1371600" y="5550408"/>
+            <a:ext cx="2011680" cy="502920"/>
+          </a:xfrm>
+          <a:prstGeom prst="roundRect">
+            <a:avLst/>
+          </a:prstGeom>
+          <a:solidFill>
+            <a:srgbClr val="F3E5F5"/>
+          </a:solidFill>
+          <a:ln w="19050">
+            <a:solidFill>
+              <a:srgbClr val="6A1B9A"/>
+            </a:solidFill>
+          </a:ln>
+        </p:spPr>
+        <p:style>
+          <a:lnRef idx="1">
+            <a:schemeClr val="accent1"/>
+          </a:lnRef>
+          <a:fillRef idx="3">
+            <a:schemeClr val="accent1"/>
+          </a:fillRef>
+          <a:effectRef idx="2">
+            <a:schemeClr val="accent1"/>
+          </a:effectRef>
+          <a:fontRef idx="minor">
+            <a:schemeClr val="lt1"/>
+          </a:fontRef>
+        </p:style>
+        <p:txBody>
+          <a:bodyPr rtlCol="0" anchor="ctr" wrap="square" lIns="50800" rIns="50800" tIns="25400" bIns="25400"/>
+          <a:lstStyle/>
+          <a:p>
+            <a:pPr algn="ctr"/>
+            <a:r>
+              <a:rPr sz="900" b="1">
+                <a:solidFill>
+                  <a:srgbClr val="000000"/>
+                </a:solidFill>
+              </a:rPr>
+              <a:t>Singleton</a:t>
+            </a:r>
+          </a:p>
+          <a:p>
+            <a:pPr algn="ctr"/>
+            <a:r>
+              <a:rPr sz="900">
+                <a:solidFill>
+                  <a:srgbClr val="000000"/>
+                </a:solidFill>
+              </a:rPr>
+              <a:t>n = 479</a:t>
+            </a:r>
+          </a:p>
+        </p:txBody>
+      </p:sp>
+      <p:sp>
+        <p:nvSpPr>
+          <p:cNvPr id="22" name="Down Arrow 21"/>
+          <p:cNvSpPr/>
+          <p:nvPr/>
+        </p:nvSpPr>
+        <p:spPr>
+          <a:xfrm>
+            <a:off x="4663440" y="5394960"/>
+            <a:ext cx="182880" cy="155448"/>
+          </a:xfrm>
+          <a:prstGeom prst="downArrow">
+            <a:avLst/>
+          </a:prstGeom>
+          <a:solidFill>
+            <a:srgbClr val="555555"/>
+          </a:solidFill>
+          <a:ln>
+            <a:noFill/>
+          </a:ln>
+        </p:spPr>
+        <p:style>
+          <a:lnRef idx="1">
+            <a:schemeClr val="accent1"/>
+          </a:lnRef>
+          <a:fillRef idx="3">
+            <a:schemeClr val="accent1"/>
+          </a:fillRef>
+          <a:effectRef idx="2">
+            <a:schemeClr val="accent1"/>
+          </a:effectRef>
+          <a:fontRef idx="minor">
+            <a:schemeClr val="lt1"/>
+          </a:fontRef>
+        </p:style>
+        <p:txBody>
+          <a:bodyPr rtlCol="0" anchor="ctr"/>
+          <a:lstStyle/>
+          <a:p>
+            <a:pPr algn="ctr"/>
+          </a:p>
+        </p:txBody>
+      </p:sp>
+      <p:sp>
+        <p:nvSpPr>
+          <p:cNvPr id="23" name="Rounded Rectangle 22"/>
+          <p:cNvSpPr/>
+          <p:nvPr/>
+        </p:nvSpPr>
+        <p:spPr>
+          <a:xfrm>
+            <a:off x="3931920" y="5550408"/>
+            <a:ext cx="2011680" cy="502920"/>
+          </a:xfrm>
+          <a:prstGeom prst="roundRect">
+            <a:avLst/>
+          </a:prstGeom>
+          <a:solidFill>
+            <a:srgbClr val="F3E5F5"/>
+          </a:solidFill>
+          <a:ln w="19050">
+            <a:solidFill>
+              <a:srgbClr val="6A1B9A"/>
+            </a:solidFill>
+          </a:ln>
+        </p:spPr>
+        <p:style>
+          <a:lnRef idx="1">
+            <a:schemeClr val="accent1"/>
+          </a:lnRef>
+          <a:fillRef idx="3">
+            <a:schemeClr val="accent1"/>
+          </a:fillRef>
+          <a:effectRef idx="2">
+            <a:schemeClr val="accent1"/>
+          </a:effectRef>
+          <a:fontRef idx="minor">
+            <a:schemeClr val="lt1"/>
+          </a:fontRef>
+        </p:style>
+        <p:txBody>
+          <a:bodyPr rtlCol="0" anchor="ctr" wrap="square" lIns="50800" rIns="50800" tIns="25400" bIns="25400"/>
+          <a:lstStyle/>
+          <a:p>
+            <a:pPr algn="ctr"/>
+            <a:r>
+              <a:rPr sz="900" b="1">
+                <a:solidFill>
+                  <a:srgbClr val="000000"/>
+                </a:solidFill>
+              </a:rPr>
+              <a:t>Twin</a:t>
+            </a:r>
+          </a:p>
+          <a:p>
+            <a:pPr algn="ctr"/>
+            <a:r>
+              <a:rPr sz="900">
+                <a:solidFill>
+                  <a:srgbClr val="000000"/>
+                </a:solidFill>
+              </a:rPr>
+              <a:t>n = 184</a:t>
             </a:r>
           </a:p>
         </p:txBody>
@@ -3210,8 +4928,8 @@
         </p:nvSpPr>
         <p:spPr>
           <a:xfrm>
-            <a:off x="457200" y="182880"/>
-            <a:ext cx="11277295" cy="548640"/>
+            <a:off x="274320" y="137160"/>
+            <a:ext cx="11612880" cy="457200"/>
           </a:xfrm>
           <a:prstGeom prst="rect">
             <a:avLst/>
@@ -3219,7 +4937,7 @@
           <a:noFill/>
         </p:spPr>
         <p:txBody>
-          <a:bodyPr wrap="none">
+          <a:bodyPr wrap="square">
             <a:spAutoFit/>
           </a:bodyPr>
           <a:lstStyle/>
@@ -3232,35 +4950,29 @@
               </a:defRPr>
             </a:pPr>
             <a:r>
-              <a:t>Figure 2. IONV Rates: Broad vs Narrow Definition</a:t>
-            </a:r>
-          </a:p>
-        </p:txBody>
-      </p:sp>
-      <p:pic>
-        <p:nvPicPr>
-          <p:cNvPr id="3" name="Picture 2" descr="fig1_rates_comparison.png"/>
-          <p:cNvPicPr>
-            <a:picLocks noChangeAspect="1"/>
-          </p:cNvPicPr>
-          <p:nvPr/>
-        </p:nvPicPr>
-        <p:blipFill>
-          <a:blip r:embed="rId2"/>
-          <a:stretch>
-            <a:fillRect/>
-          </a:stretch>
-        </p:blipFill>
-        <p:spPr>
-          <a:xfrm>
-            <a:off x="838047" y="1062126"/>
-            <a:ext cx="10515600" cy="4550868"/>
-          </a:xfrm>
-          <a:prstGeom prst="rect">
-            <a:avLst/>
-          </a:prstGeom>
-        </p:spPr>
-      </p:pic>
+              <a:t>Figure 2. IONV Rates: Broad vs Narrow Antiemetic Definition</a:t>
+            </a:r>
+          </a:p>
+        </p:txBody>
+      </p:sp>
+      <p:graphicFrame>
+        <p:nvGraphicFramePr>
+          <p:cNvPr id="3" name="Chart 2"/>
+          <p:cNvGraphicFramePr>
+            <a:graphicFrameLocks noGrp="1"/>
+          </p:cNvGraphicFramePr>
+          <p:nvPr/>
+        </p:nvGraphicFramePr>
+        <p:xfrm>
+          <a:off x="914400" y="822960"/>
+          <a:ext cx="10058400" cy="5029200"/>
+        </p:xfrm>
+        <a:graphic>
+          <a:graphicData uri="http://schemas.openxmlformats.org/drawingml/2006/chart">
+            <c:chart xmlns:c="http://schemas.openxmlformats.org/drawingml/2006/chart" r:id="rId2"/>
+          </a:graphicData>
+        </a:graphic>
+      </p:graphicFrame>
       <p:sp>
         <p:nvSpPr>
           <p:cNvPr id="4" name="TextBox 3"/>
@@ -3269,8 +4981,8 @@
         </p:nvSpPr>
         <p:spPr>
           <a:xfrm>
-            <a:off x="457200" y="6126480"/>
-            <a:ext cx="11277295" cy="640080"/>
+            <a:off x="457200" y="6217920"/>
+            <a:ext cx="11277295" cy="548640"/>
           </a:xfrm>
           <a:prstGeom prst="rect">
             <a:avLst/>
@@ -3278,16 +4990,16 @@
           <a:noFill/>
         </p:spPr>
         <p:txBody>
-          <a:bodyPr wrap="none">
+          <a:bodyPr wrap="square">
             <a:spAutoFit/>
           </a:bodyPr>
           <a:lstStyle/>
           <a:p>
             <a:pPr algn="ctr">
-              <a:defRPr sz="1100" i="1"/>
+              <a:defRPr sz="1000" i="1"/>
             </a:pPr>
             <a:r>
-              <a:t>Comparison of antiemetic use between singleton and twin groups using broad (all 7 drugs) and narrow (5-HT3 antagonists only) definitions.</a:t>
+              <a:t>Comparison of antiemetic use between singleton and twin groups. Broad = all 7 antiemetics; Narrow = 5-HT3 antagonists (ondansetron, granisetron) only.</a:t>
             </a:r>
           </a:p>
         </p:txBody>
@@ -3318,8 +5030,8 @@
         </p:nvSpPr>
         <p:spPr>
           <a:xfrm>
-            <a:off x="457200" y="182880"/>
-            <a:ext cx="11277295" cy="548640"/>
+            <a:off x="274320" y="137160"/>
+            <a:ext cx="11612880" cy="457200"/>
           </a:xfrm>
           <a:prstGeom prst="rect">
             <a:avLst/>
@@ -3327,7 +5039,7 @@
           <a:noFill/>
         </p:spPr>
         <p:txBody>
-          <a:bodyPr wrap="none">
+          <a:bodyPr wrap="square">
             <a:spAutoFit/>
           </a:bodyPr>
           <a:lstStyle/>
@@ -3340,35 +5052,54 @@
               </a:defRPr>
             </a:pPr>
             <a:r>
-              <a:t>Figure 3. Forest Plot — Narrow Antiemetic Definition</a:t>
-            </a:r>
-          </a:p>
-        </p:txBody>
-      </p:sp>
-      <p:pic>
-        <p:nvPicPr>
-          <p:cNvPr id="3" name="Picture 2" descr="fig2_forest_E_primary.png"/>
-          <p:cNvPicPr>
-            <a:picLocks noChangeAspect="1"/>
-          </p:cNvPicPr>
-          <p:nvPr/>
-        </p:nvPicPr>
-        <p:blipFill>
-          <a:blip r:embed="rId2"/>
-          <a:stretch>
-            <a:fillRect/>
-          </a:stretch>
-        </p:blipFill>
-        <p:spPr>
-          <a:xfrm>
-            <a:off x="1874049" y="822960"/>
-            <a:ext cx="8443597" cy="5029200"/>
-          </a:xfrm>
-          <a:prstGeom prst="rect">
-            <a:avLst/>
-          </a:prstGeom>
-        </p:spPr>
-      </p:pic>
+              <a:t>Figure 3. Forest Plot — Narrow Antiemetic Definition (5-HT3)</a:t>
+            </a:r>
+          </a:p>
+        </p:txBody>
+      </p:sp>
+      <p:sp>
+        <p:nvSpPr>
+          <p:cNvPr id="3" name="Rectangle 2"/>
+          <p:cNvSpPr/>
+          <p:nvPr/>
+        </p:nvSpPr>
+        <p:spPr>
+          <a:xfrm>
+            <a:off x="4374488" y="1097280"/>
+            <a:ext cx="19050" cy="2468880"/>
+          </a:xfrm>
+          <a:prstGeom prst="rect">
+            <a:avLst/>
+          </a:prstGeom>
+          <a:solidFill>
+            <a:srgbClr val="FF0000"/>
+          </a:solidFill>
+          <a:ln>
+            <a:noFill/>
+          </a:ln>
+        </p:spPr>
+        <p:style>
+          <a:lnRef idx="1">
+            <a:schemeClr val="accent1"/>
+          </a:lnRef>
+          <a:fillRef idx="3">
+            <a:schemeClr val="accent1"/>
+          </a:fillRef>
+          <a:effectRef idx="2">
+            <a:schemeClr val="accent1"/>
+          </a:effectRef>
+          <a:fontRef idx="minor">
+            <a:schemeClr val="lt1"/>
+          </a:fontRef>
+        </p:style>
+        <p:txBody>
+          <a:bodyPr rtlCol="0" anchor="ctr"/>
+          <a:lstStyle/>
+          <a:p>
+            <a:pPr algn="ctr"/>
+          </a:p>
+        </p:txBody>
+      </p:sp>
       <p:sp>
         <p:nvSpPr>
           <p:cNvPr id="4" name="TextBox 3"/>
@@ -3377,8 +5108,8 @@
         </p:nvSpPr>
         <p:spPr>
           <a:xfrm>
-            <a:off x="457200" y="6126480"/>
-            <a:ext cx="11277295" cy="640080"/>
+            <a:off x="4100168" y="3611880"/>
+            <a:ext cx="548640" cy="228600"/>
           </a:xfrm>
           <a:prstGeom prst="rect">
             <a:avLst/>
@@ -3392,10 +5123,1000 @@
           <a:lstStyle/>
           <a:p>
             <a:pPr algn="ctr">
-              <a:defRPr sz="1100" i="1"/>
+              <a:defRPr sz="800">
+                <a:solidFill>
+                  <a:srgbClr val="FF0000"/>
+                </a:solidFill>
+              </a:defRPr>
             </a:pPr>
             <a:r>
-              <a:t>Multivariable logistic regression for 5-HT3 antagonist use (primary outcome). Reduced model (6 covariates).</a:t>
+              <a:t>OR=1</a:t>
+            </a:r>
+          </a:p>
+        </p:txBody>
+      </p:sp>
+      <p:sp>
+        <p:nvSpPr>
+          <p:cNvPr id="5" name="TextBox 4"/>
+          <p:cNvSpPr txBox="1"/>
+          <p:nvPr/>
+        </p:nvSpPr>
+        <p:spPr>
+          <a:xfrm>
+            <a:off x="3657600" y="3840480"/>
+            <a:ext cx="6858000" cy="274320"/>
+          </a:xfrm>
+          <a:prstGeom prst="rect">
+            <a:avLst/>
+          </a:prstGeom>
+          <a:noFill/>
+        </p:spPr>
+        <p:txBody>
+          <a:bodyPr wrap="none">
+            <a:spAutoFit/>
+          </a:bodyPr>
+          <a:lstStyle/>
+          <a:p>
+            <a:pPr algn="ctr">
+              <a:defRPr sz="1000"/>
+            </a:pPr>
+            <a:r>
+              <a:t>Adjusted Odds Ratio (95% CI)</a:t>
+            </a:r>
+          </a:p>
+        </p:txBody>
+      </p:sp>
+      <p:sp>
+        <p:nvSpPr>
+          <p:cNvPr id="6" name="TextBox 5"/>
+          <p:cNvSpPr txBox="1"/>
+          <p:nvPr/>
+        </p:nvSpPr>
+        <p:spPr>
+          <a:xfrm>
+            <a:off x="274320" y="1165860"/>
+            <a:ext cx="3200400" cy="274320"/>
+          </a:xfrm>
+          <a:prstGeom prst="rect">
+            <a:avLst/>
+          </a:prstGeom>
+          <a:noFill/>
+        </p:spPr>
+        <p:txBody>
+          <a:bodyPr wrap="square">
+            <a:spAutoFit/>
+          </a:bodyPr>
+          <a:lstStyle/>
+          <a:p>
+            <a:pPr algn="r">
+              <a:defRPr sz="800"/>
+            </a:pPr>
+            <a:r>
+              <a:t>Emergency CS</a:t>
+            </a:r>
+          </a:p>
+        </p:txBody>
+      </p:sp>
+      <p:sp>
+        <p:nvSpPr>
+          <p:cNvPr id="7" name="Rectangle 6"/>
+          <p:cNvSpPr/>
+          <p:nvPr/>
+        </p:nvSpPr>
+        <p:spPr>
+          <a:xfrm>
+            <a:off x="4015343" y="1283970"/>
+            <a:ext cx="1196770" cy="38100"/>
+          </a:xfrm>
+          <a:prstGeom prst="rect">
+            <a:avLst/>
+          </a:prstGeom>
+          <a:solidFill>
+            <a:srgbClr val="4C72B0"/>
+          </a:solidFill>
+          <a:ln>
+            <a:noFill/>
+          </a:ln>
+        </p:spPr>
+        <p:style>
+          <a:lnRef idx="1">
+            <a:schemeClr val="accent1"/>
+          </a:lnRef>
+          <a:fillRef idx="3">
+            <a:schemeClr val="accent1"/>
+          </a:fillRef>
+          <a:effectRef idx="2">
+            <a:schemeClr val="accent1"/>
+          </a:effectRef>
+          <a:fontRef idx="minor">
+            <a:schemeClr val="lt1"/>
+          </a:fontRef>
+        </p:style>
+        <p:txBody>
+          <a:bodyPr rtlCol="0" anchor="ctr"/>
+          <a:lstStyle/>
+          <a:p>
+            <a:pPr algn="ctr"/>
+          </a:p>
+        </p:txBody>
+      </p:sp>
+      <p:sp>
+        <p:nvSpPr>
+          <p:cNvPr id="8" name="Diamond 7"/>
+          <p:cNvSpPr/>
+          <p:nvPr/>
+        </p:nvSpPr>
+        <p:spPr>
+          <a:xfrm>
+            <a:off x="4348468" y="1248156"/>
+            <a:ext cx="109728" cy="109728"/>
+          </a:xfrm>
+          <a:prstGeom prst="diamond">
+            <a:avLst/>
+          </a:prstGeom>
+          <a:solidFill>
+            <a:srgbClr val="4C72B0"/>
+          </a:solidFill>
+          <a:ln>
+            <a:solidFill>
+              <a:srgbClr val="4C72B0"/>
+            </a:solidFill>
+          </a:ln>
+        </p:spPr>
+        <p:style>
+          <a:lnRef idx="1">
+            <a:schemeClr val="accent1"/>
+          </a:lnRef>
+          <a:fillRef idx="3">
+            <a:schemeClr val="accent1"/>
+          </a:fillRef>
+          <a:effectRef idx="2">
+            <a:schemeClr val="accent1"/>
+          </a:effectRef>
+          <a:fontRef idx="minor">
+            <a:schemeClr val="lt1"/>
+          </a:fontRef>
+        </p:style>
+        <p:txBody>
+          <a:bodyPr rtlCol="0" anchor="ctr"/>
+          <a:lstStyle/>
+          <a:p>
+            <a:pPr algn="ctr"/>
+          </a:p>
+        </p:txBody>
+      </p:sp>
+      <p:sp>
+        <p:nvSpPr>
+          <p:cNvPr id="9" name="TextBox 8"/>
+          <p:cNvSpPr txBox="1"/>
+          <p:nvPr/>
+        </p:nvSpPr>
+        <p:spPr>
+          <a:xfrm>
+            <a:off x="10607040" y="1193292"/>
+            <a:ext cx="1371600" cy="228600"/>
+          </a:xfrm>
+          <a:prstGeom prst="rect">
+            <a:avLst/>
+          </a:prstGeom>
+          <a:noFill/>
+        </p:spPr>
+        <p:txBody>
+          <a:bodyPr wrap="none">
+            <a:spAutoFit/>
+          </a:bodyPr>
+          <a:lstStyle/>
+          <a:p>
+            <a:pPr>
+              <a:defRPr sz="700">
+                <a:solidFill>
+                  <a:srgbClr val="4C72B0"/>
+                </a:solidFill>
+              </a:defRPr>
+            </a:pPr>
+            <a:r>
+              <a:t>OR 1.04 [0.50–2.17] P=0.916</a:t>
+            </a:r>
+          </a:p>
+        </p:txBody>
+      </p:sp>
+      <p:sp>
+        <p:nvSpPr>
+          <p:cNvPr id="10" name="TextBox 9"/>
+          <p:cNvSpPr txBox="1"/>
+          <p:nvPr/>
+        </p:nvSpPr>
+        <p:spPr>
+          <a:xfrm>
+            <a:off x="274320" y="1577340"/>
+            <a:ext cx="3200400" cy="274320"/>
+          </a:xfrm>
+          <a:prstGeom prst="rect">
+            <a:avLst/>
+          </a:prstGeom>
+          <a:noFill/>
+        </p:spPr>
+        <p:txBody>
+          <a:bodyPr wrap="square">
+            <a:spAutoFit/>
+          </a:bodyPr>
+          <a:lstStyle/>
+          <a:p>
+            <a:pPr algn="r">
+              <a:defRPr sz="800"/>
+            </a:pPr>
+            <a:r>
+              <a:t>GA (per week)</a:t>
+            </a:r>
+          </a:p>
+        </p:txBody>
+      </p:sp>
+      <p:sp>
+        <p:nvSpPr>
+          <p:cNvPr id="11" name="Rectangle 10"/>
+          <p:cNvSpPr/>
+          <p:nvPr/>
+        </p:nvSpPr>
+        <p:spPr>
+          <a:xfrm>
+            <a:off x="4295992" y="1695450"/>
+            <a:ext cx="191177" cy="38100"/>
+          </a:xfrm>
+          <a:prstGeom prst="rect">
+            <a:avLst/>
+          </a:prstGeom>
+          <a:solidFill>
+            <a:srgbClr val="4C72B0"/>
+          </a:solidFill>
+          <a:ln>
+            <a:noFill/>
+          </a:ln>
+        </p:spPr>
+        <p:style>
+          <a:lnRef idx="1">
+            <a:schemeClr val="accent1"/>
+          </a:lnRef>
+          <a:fillRef idx="3">
+            <a:schemeClr val="accent1"/>
+          </a:fillRef>
+          <a:effectRef idx="2">
+            <a:schemeClr val="accent1"/>
+          </a:effectRef>
+          <a:fontRef idx="minor">
+            <a:schemeClr val="lt1"/>
+          </a:fontRef>
+        </p:style>
+        <p:txBody>
+          <a:bodyPr rtlCol="0" anchor="ctr"/>
+          <a:lstStyle/>
+          <a:p>
+            <a:pPr algn="ctr"/>
+          </a:p>
+        </p:txBody>
+      </p:sp>
+      <p:sp>
+        <p:nvSpPr>
+          <p:cNvPr id="12" name="Diamond 11"/>
+          <p:cNvSpPr/>
+          <p:nvPr/>
+        </p:nvSpPr>
+        <p:spPr>
+          <a:xfrm>
+            <a:off x="4330466" y="1659636"/>
+            <a:ext cx="109728" cy="109728"/>
+          </a:xfrm>
+          <a:prstGeom prst="diamond">
+            <a:avLst/>
+          </a:prstGeom>
+          <a:solidFill>
+            <a:srgbClr val="4C72B0"/>
+          </a:solidFill>
+          <a:ln>
+            <a:solidFill>
+              <a:srgbClr val="4C72B0"/>
+            </a:solidFill>
+          </a:ln>
+        </p:spPr>
+        <p:style>
+          <a:lnRef idx="1">
+            <a:schemeClr val="accent1"/>
+          </a:lnRef>
+          <a:fillRef idx="3">
+            <a:schemeClr val="accent1"/>
+          </a:fillRef>
+          <a:effectRef idx="2">
+            <a:schemeClr val="accent1"/>
+          </a:effectRef>
+          <a:fontRef idx="minor">
+            <a:schemeClr val="lt1"/>
+          </a:fontRef>
+        </p:style>
+        <p:txBody>
+          <a:bodyPr rtlCol="0" anchor="ctr"/>
+          <a:lstStyle/>
+          <a:p>
+            <a:pPr algn="ctr"/>
+          </a:p>
+        </p:txBody>
+      </p:sp>
+      <p:sp>
+        <p:nvSpPr>
+          <p:cNvPr id="13" name="TextBox 12"/>
+          <p:cNvSpPr txBox="1"/>
+          <p:nvPr/>
+        </p:nvSpPr>
+        <p:spPr>
+          <a:xfrm>
+            <a:off x="10607040" y="1604772"/>
+            <a:ext cx="1371600" cy="228600"/>
+          </a:xfrm>
+          <a:prstGeom prst="rect">
+            <a:avLst/>
+          </a:prstGeom>
+          <a:noFill/>
+        </p:spPr>
+        <p:txBody>
+          <a:bodyPr wrap="none">
+            <a:spAutoFit/>
+          </a:bodyPr>
+          <a:lstStyle/>
+          <a:p>
+            <a:pPr>
+              <a:defRPr sz="700">
+                <a:solidFill>
+                  <a:srgbClr val="4C72B0"/>
+                </a:solidFill>
+              </a:defRPr>
+            </a:pPr>
+            <a:r>
+              <a:t>OR 1.02 [0.89–1.16] P=0.822</a:t>
+            </a:r>
+          </a:p>
+        </p:txBody>
+      </p:sp>
+      <p:sp>
+        <p:nvSpPr>
+          <p:cNvPr id="14" name="TextBox 13"/>
+          <p:cNvSpPr txBox="1"/>
+          <p:nvPr/>
+        </p:nvSpPr>
+        <p:spPr>
+          <a:xfrm>
+            <a:off x="274320" y="1988820"/>
+            <a:ext cx="3200400" cy="274320"/>
+          </a:xfrm>
+          <a:prstGeom prst="rect">
+            <a:avLst/>
+          </a:prstGeom>
+          <a:noFill/>
+        </p:spPr>
+        <p:txBody>
+          <a:bodyPr wrap="square">
+            <a:spAutoFit/>
+          </a:bodyPr>
+          <a:lstStyle/>
+          <a:p>
+            <a:pPr algn="r">
+              <a:defRPr sz="800"/>
+            </a:pPr>
+            <a:r>
+              <a:t>Hypotension (SBP&lt;90)</a:t>
+            </a:r>
+          </a:p>
+        </p:txBody>
+      </p:sp>
+      <p:sp>
+        <p:nvSpPr>
+          <p:cNvPr id="15" name="Rectangle 14"/>
+          <p:cNvSpPr/>
+          <p:nvPr/>
+        </p:nvSpPr>
+        <p:spPr>
+          <a:xfrm>
+            <a:off x="4131923" y="2106930"/>
+            <a:ext cx="1481817" cy="38100"/>
+          </a:xfrm>
+          <a:prstGeom prst="rect">
+            <a:avLst/>
+          </a:prstGeom>
+          <a:solidFill>
+            <a:srgbClr val="4C72B0"/>
+          </a:solidFill>
+          <a:ln>
+            <a:noFill/>
+          </a:ln>
+        </p:spPr>
+        <p:style>
+          <a:lnRef idx="1">
+            <a:schemeClr val="accent1"/>
+          </a:lnRef>
+          <a:fillRef idx="3">
+            <a:schemeClr val="accent1"/>
+          </a:fillRef>
+          <a:effectRef idx="2">
+            <a:schemeClr val="accent1"/>
+          </a:effectRef>
+          <a:fontRef idx="minor">
+            <a:schemeClr val="lt1"/>
+          </a:fontRef>
+        </p:style>
+        <p:txBody>
+          <a:bodyPr rtlCol="0" anchor="ctr"/>
+          <a:lstStyle/>
+          <a:p>
+            <a:pPr algn="ctr"/>
+          </a:p>
+        </p:txBody>
+      </p:sp>
+      <p:sp>
+        <p:nvSpPr>
+          <p:cNvPr id="16" name="Diamond 15"/>
+          <p:cNvSpPr/>
+          <p:nvPr/>
+        </p:nvSpPr>
+        <p:spPr>
+          <a:xfrm>
+            <a:off x="4565982" y="2071116"/>
+            <a:ext cx="109728" cy="109728"/>
+          </a:xfrm>
+          <a:prstGeom prst="diamond">
+            <a:avLst/>
+          </a:prstGeom>
+          <a:solidFill>
+            <a:srgbClr val="4C72B0"/>
+          </a:solidFill>
+          <a:ln>
+            <a:solidFill>
+              <a:srgbClr val="4C72B0"/>
+            </a:solidFill>
+          </a:ln>
+        </p:spPr>
+        <p:style>
+          <a:lnRef idx="1">
+            <a:schemeClr val="accent1"/>
+          </a:lnRef>
+          <a:fillRef idx="3">
+            <a:schemeClr val="accent1"/>
+          </a:fillRef>
+          <a:effectRef idx="2">
+            <a:schemeClr val="accent1"/>
+          </a:effectRef>
+          <a:fontRef idx="minor">
+            <a:schemeClr val="lt1"/>
+          </a:fontRef>
+        </p:style>
+        <p:txBody>
+          <a:bodyPr rtlCol="0" anchor="ctr"/>
+          <a:lstStyle/>
+          <a:p>
+            <a:pPr algn="ctr"/>
+          </a:p>
+        </p:txBody>
+      </p:sp>
+      <p:sp>
+        <p:nvSpPr>
+          <p:cNvPr id="17" name="TextBox 16"/>
+          <p:cNvSpPr txBox="1"/>
+          <p:nvPr/>
+        </p:nvSpPr>
+        <p:spPr>
+          <a:xfrm>
+            <a:off x="10607040" y="2016252"/>
+            <a:ext cx="1371600" cy="228600"/>
+          </a:xfrm>
+          <a:prstGeom prst="rect">
+            <a:avLst/>
+          </a:prstGeom>
+          <a:noFill/>
+        </p:spPr>
+        <p:txBody>
+          <a:bodyPr wrap="none">
+            <a:spAutoFit/>
+          </a:bodyPr>
+          <a:lstStyle/>
+          <a:p>
+            <a:pPr>
+              <a:defRPr sz="700">
+                <a:solidFill>
+                  <a:srgbClr val="4C72B0"/>
+                </a:solidFill>
+              </a:defRPr>
+            </a:pPr>
+            <a:r>
+              <a:t>OR 1.34 [0.66–2.73] P=0.414</a:t>
+            </a:r>
+          </a:p>
+        </p:txBody>
+      </p:sp>
+      <p:sp>
+        <p:nvSpPr>
+          <p:cNvPr id="18" name="TextBox 17"/>
+          <p:cNvSpPr txBox="1"/>
+          <p:nvPr/>
+        </p:nvSpPr>
+        <p:spPr>
+          <a:xfrm>
+            <a:off x="274320" y="2400300"/>
+            <a:ext cx="3200400" cy="274320"/>
+          </a:xfrm>
+          <a:prstGeom prst="rect">
+            <a:avLst/>
+          </a:prstGeom>
+          <a:noFill/>
+        </p:spPr>
+        <p:txBody>
+          <a:bodyPr wrap="square">
+            <a:spAutoFit/>
+          </a:bodyPr>
+          <a:lstStyle/>
+          <a:p>
+            <a:pPr algn="r">
+              <a:defRPr sz="800"/>
+            </a:pPr>
+            <a:r>
+              <a:t>BMI (per kg/m²)</a:t>
+            </a:r>
+          </a:p>
+        </p:txBody>
+      </p:sp>
+      <p:sp>
+        <p:nvSpPr>
+          <p:cNvPr id="19" name="Rectangle 18"/>
+          <p:cNvSpPr/>
+          <p:nvPr/>
+        </p:nvSpPr>
+        <p:spPr>
+          <a:xfrm>
+            <a:off x="4373627" y="2518410"/>
+            <a:ext cx="13304" cy="38100"/>
+          </a:xfrm>
+          <a:prstGeom prst="rect">
+            <a:avLst/>
+          </a:prstGeom>
+          <a:solidFill>
+            <a:srgbClr val="4C72B0"/>
+          </a:solidFill>
+          <a:ln>
+            <a:noFill/>
+          </a:ln>
+        </p:spPr>
+        <p:style>
+          <a:lnRef idx="1">
+            <a:schemeClr val="accent1"/>
+          </a:lnRef>
+          <a:fillRef idx="3">
+            <a:schemeClr val="accent1"/>
+          </a:fillRef>
+          <a:effectRef idx="2">
+            <a:schemeClr val="accent1"/>
+          </a:effectRef>
+          <a:fontRef idx="minor">
+            <a:schemeClr val="lt1"/>
+          </a:fontRef>
+        </p:style>
+        <p:txBody>
+          <a:bodyPr rtlCol="0" anchor="ctr"/>
+          <a:lstStyle/>
+          <a:p>
+            <a:pPr algn="ctr"/>
+          </a:p>
+        </p:txBody>
+      </p:sp>
+      <p:sp>
+        <p:nvSpPr>
+          <p:cNvPr id="20" name="Diamond 19"/>
+          <p:cNvSpPr/>
+          <p:nvPr/>
+        </p:nvSpPr>
+        <p:spPr>
+          <a:xfrm>
+            <a:off x="4325384" y="2482596"/>
+            <a:ext cx="109728" cy="109728"/>
+          </a:xfrm>
+          <a:prstGeom prst="diamond">
+            <a:avLst/>
+          </a:prstGeom>
+          <a:solidFill>
+            <a:srgbClr val="4C72B0"/>
+          </a:solidFill>
+          <a:ln>
+            <a:solidFill>
+              <a:srgbClr val="4C72B0"/>
+            </a:solidFill>
+          </a:ln>
+        </p:spPr>
+        <p:style>
+          <a:lnRef idx="1">
+            <a:schemeClr val="accent1"/>
+          </a:lnRef>
+          <a:fillRef idx="3">
+            <a:schemeClr val="accent1"/>
+          </a:fillRef>
+          <a:effectRef idx="2">
+            <a:schemeClr val="accent1"/>
+          </a:effectRef>
+          <a:fontRef idx="minor">
+            <a:schemeClr val="lt1"/>
+          </a:fontRef>
+        </p:style>
+        <p:txBody>
+          <a:bodyPr rtlCol="0" anchor="ctr"/>
+          <a:lstStyle/>
+          <a:p>
+            <a:pPr algn="ctr"/>
+          </a:p>
+        </p:txBody>
+      </p:sp>
+      <p:sp>
+        <p:nvSpPr>
+          <p:cNvPr id="21" name="TextBox 20"/>
+          <p:cNvSpPr txBox="1"/>
+          <p:nvPr/>
+        </p:nvSpPr>
+        <p:spPr>
+          <a:xfrm>
+            <a:off x="10607040" y="2427732"/>
+            <a:ext cx="1371600" cy="228600"/>
+          </a:xfrm>
+          <a:prstGeom prst="rect">
+            <a:avLst/>
+          </a:prstGeom>
+          <a:noFill/>
+        </p:spPr>
+        <p:txBody>
+          <a:bodyPr wrap="none">
+            <a:spAutoFit/>
+          </a:bodyPr>
+          <a:lstStyle/>
+          <a:p>
+            <a:pPr>
+              <a:defRPr sz="700">
+                <a:solidFill>
+                  <a:srgbClr val="4C72B0"/>
+                </a:solidFill>
+              </a:defRPr>
+            </a:pPr>
+            <a:r>
+              <a:t>OR 1.01 [1.00–1.02] P=0.088</a:t>
+            </a:r>
+          </a:p>
+        </p:txBody>
+      </p:sp>
+      <p:sp>
+        <p:nvSpPr>
+          <p:cNvPr id="22" name="TextBox 21"/>
+          <p:cNvSpPr txBox="1"/>
+          <p:nvPr/>
+        </p:nvSpPr>
+        <p:spPr>
+          <a:xfrm>
+            <a:off x="274320" y="2811780"/>
+            <a:ext cx="3200400" cy="274320"/>
+          </a:xfrm>
+          <a:prstGeom prst="rect">
+            <a:avLst/>
+          </a:prstGeom>
+          <a:noFill/>
+        </p:spPr>
+        <p:txBody>
+          <a:bodyPr wrap="square">
+            <a:spAutoFit/>
+          </a:bodyPr>
+          <a:lstStyle/>
+          <a:p>
+            <a:pPr algn="r">
+              <a:defRPr sz="800"/>
+            </a:pPr>
+            <a:r>
+              <a:t>Age (per year)</a:t>
+            </a:r>
+          </a:p>
+        </p:txBody>
+      </p:sp>
+      <p:sp>
+        <p:nvSpPr>
+          <p:cNvPr id="23" name="Rectangle 22"/>
+          <p:cNvSpPr/>
+          <p:nvPr/>
+        </p:nvSpPr>
+        <p:spPr>
+          <a:xfrm>
+            <a:off x="4373330" y="2929890"/>
+            <a:ext cx="107300" cy="38100"/>
+          </a:xfrm>
+          <a:prstGeom prst="rect">
+            <a:avLst/>
+          </a:prstGeom>
+          <a:solidFill>
+            <a:srgbClr val="4C72B0"/>
+          </a:solidFill>
+          <a:ln>
+            <a:noFill/>
+          </a:ln>
+        </p:spPr>
+        <p:style>
+          <a:lnRef idx="1">
+            <a:schemeClr val="accent1"/>
+          </a:lnRef>
+          <a:fillRef idx="3">
+            <a:schemeClr val="accent1"/>
+          </a:fillRef>
+          <a:effectRef idx="2">
+            <a:schemeClr val="accent1"/>
+          </a:effectRef>
+          <a:fontRef idx="minor">
+            <a:schemeClr val="lt1"/>
+          </a:fontRef>
+        </p:style>
+        <p:txBody>
+          <a:bodyPr rtlCol="0" anchor="ctr"/>
+          <a:lstStyle/>
+          <a:p>
+            <a:pPr algn="ctr"/>
+          </a:p>
+        </p:txBody>
+      </p:sp>
+      <p:sp>
+        <p:nvSpPr>
+          <p:cNvPr id="24" name="Diamond 23"/>
+          <p:cNvSpPr/>
+          <p:nvPr/>
+        </p:nvSpPr>
+        <p:spPr>
+          <a:xfrm>
+            <a:off x="4370243" y="2894076"/>
+            <a:ext cx="109728" cy="109728"/>
+          </a:xfrm>
+          <a:prstGeom prst="diamond">
+            <a:avLst/>
+          </a:prstGeom>
+          <a:solidFill>
+            <a:srgbClr val="4C72B0"/>
+          </a:solidFill>
+          <a:ln>
+            <a:solidFill>
+              <a:srgbClr val="4C72B0"/>
+            </a:solidFill>
+          </a:ln>
+        </p:spPr>
+        <p:style>
+          <a:lnRef idx="1">
+            <a:schemeClr val="accent1"/>
+          </a:lnRef>
+          <a:fillRef idx="3">
+            <a:schemeClr val="accent1"/>
+          </a:fillRef>
+          <a:effectRef idx="2">
+            <a:schemeClr val="accent1"/>
+          </a:effectRef>
+          <a:fontRef idx="minor">
+            <a:schemeClr val="lt1"/>
+          </a:fontRef>
+        </p:style>
+        <p:txBody>
+          <a:bodyPr rtlCol="0" anchor="ctr"/>
+          <a:lstStyle/>
+          <a:p>
+            <a:pPr algn="ctr"/>
+          </a:p>
+        </p:txBody>
+      </p:sp>
+      <p:sp>
+        <p:nvSpPr>
+          <p:cNvPr id="25" name="TextBox 24"/>
+          <p:cNvSpPr txBox="1"/>
+          <p:nvPr/>
+        </p:nvSpPr>
+        <p:spPr>
+          <a:xfrm>
+            <a:off x="10607040" y="2839212"/>
+            <a:ext cx="1371600" cy="228600"/>
+          </a:xfrm>
+          <a:prstGeom prst="rect">
+            <a:avLst/>
+          </a:prstGeom>
+          <a:noFill/>
+        </p:spPr>
+        <p:txBody>
+          <a:bodyPr wrap="none">
+            <a:spAutoFit/>
+          </a:bodyPr>
+          <a:lstStyle/>
+          <a:p>
+            <a:pPr>
+              <a:defRPr sz="700">
+                <a:solidFill>
+                  <a:srgbClr val="4C72B0"/>
+                </a:solidFill>
+              </a:defRPr>
+            </a:pPr>
+            <a:r>
+              <a:t>OR 1.07 [1.00–1.15] P=0.056</a:t>
+            </a:r>
+          </a:p>
+        </p:txBody>
+      </p:sp>
+      <p:sp>
+        <p:nvSpPr>
+          <p:cNvPr id="26" name="TextBox 25"/>
+          <p:cNvSpPr txBox="1"/>
+          <p:nvPr/>
+        </p:nvSpPr>
+        <p:spPr>
+          <a:xfrm>
+            <a:off x="274320" y="3223260"/>
+            <a:ext cx="3200400" cy="274320"/>
+          </a:xfrm>
+          <a:prstGeom prst="rect">
+            <a:avLst/>
+          </a:prstGeom>
+          <a:noFill/>
+        </p:spPr>
+        <p:txBody>
+          <a:bodyPr wrap="square">
+            <a:spAutoFit/>
+          </a:bodyPr>
+          <a:lstStyle/>
+          <a:p>
+            <a:pPr algn="r">
+              <a:defRPr sz="800"/>
+            </a:pPr>
+            <a:r>
+              <a:t>Twin pregnancy</a:t>
+            </a:r>
+          </a:p>
+        </p:txBody>
+      </p:sp>
+      <p:sp>
+        <p:nvSpPr>
+          <p:cNvPr id="27" name="Rectangle 26"/>
+          <p:cNvSpPr/>
+          <p:nvPr/>
+        </p:nvSpPr>
+        <p:spPr>
+          <a:xfrm>
+            <a:off x="4644233" y="3341370"/>
+            <a:ext cx="4288751" cy="38100"/>
+          </a:xfrm>
+          <a:prstGeom prst="rect">
+            <a:avLst/>
+          </a:prstGeom>
+          <a:solidFill>
+            <a:srgbClr val="C44E52"/>
+          </a:solidFill>
+          <a:ln>
+            <a:noFill/>
+          </a:ln>
+        </p:spPr>
+        <p:style>
+          <a:lnRef idx="1">
+            <a:schemeClr val="accent1"/>
+          </a:lnRef>
+          <a:fillRef idx="3">
+            <a:schemeClr val="accent1"/>
+          </a:fillRef>
+          <a:effectRef idx="2">
+            <a:schemeClr val="accent1"/>
+          </a:effectRef>
+          <a:fontRef idx="minor">
+            <a:schemeClr val="lt1"/>
+          </a:fontRef>
+        </p:style>
+        <p:txBody>
+          <a:bodyPr rtlCol="0" anchor="ctr"/>
+          <a:lstStyle/>
+          <a:p>
+            <a:pPr algn="ctr"/>
+          </a:p>
+        </p:txBody>
+      </p:sp>
+      <p:sp>
+        <p:nvSpPr>
+          <p:cNvPr id="28" name="Diamond 27"/>
+          <p:cNvSpPr/>
+          <p:nvPr/>
+        </p:nvSpPr>
+        <p:spPr>
+          <a:xfrm>
+            <a:off x="5884154" y="3305556"/>
+            <a:ext cx="109728" cy="109728"/>
+          </a:xfrm>
+          <a:prstGeom prst="diamond">
+            <a:avLst/>
+          </a:prstGeom>
+          <a:solidFill>
+            <a:srgbClr val="C44E52"/>
+          </a:solidFill>
+          <a:ln>
+            <a:solidFill>
+              <a:srgbClr val="C44E52"/>
+            </a:solidFill>
+          </a:ln>
+        </p:spPr>
+        <p:style>
+          <a:lnRef idx="1">
+            <a:schemeClr val="accent1"/>
+          </a:lnRef>
+          <a:fillRef idx="3">
+            <a:schemeClr val="accent1"/>
+          </a:fillRef>
+          <a:effectRef idx="2">
+            <a:schemeClr val="accent1"/>
+          </a:effectRef>
+          <a:fontRef idx="minor">
+            <a:schemeClr val="lt1"/>
+          </a:fontRef>
+        </p:style>
+        <p:txBody>
+          <a:bodyPr rtlCol="0" anchor="ctr"/>
+          <a:lstStyle/>
+          <a:p>
+            <a:pPr algn="ctr"/>
+          </a:p>
+        </p:txBody>
+      </p:sp>
+      <p:sp>
+        <p:nvSpPr>
+          <p:cNvPr id="29" name="TextBox 28"/>
+          <p:cNvSpPr txBox="1"/>
+          <p:nvPr/>
+        </p:nvSpPr>
+        <p:spPr>
+          <a:xfrm>
+            <a:off x="10607040" y="3250692"/>
+            <a:ext cx="1371600" cy="228600"/>
+          </a:xfrm>
+          <a:prstGeom prst="rect">
+            <a:avLst/>
+          </a:prstGeom>
+          <a:noFill/>
+        </p:spPr>
+        <p:txBody>
+          <a:bodyPr wrap="none">
+            <a:spAutoFit/>
+          </a:bodyPr>
+          <a:lstStyle/>
+          <a:p>
+            <a:pPr>
+              <a:defRPr sz="700">
+                <a:solidFill>
+                  <a:srgbClr val="C44E52"/>
+                </a:solidFill>
+              </a:defRPr>
+            </a:pPr>
+            <a:r>
+              <a:t>OR 3.18 [1.38–7.36] P=0.007**</a:t>
+            </a:r>
+          </a:p>
+        </p:txBody>
+      </p:sp>
+      <p:sp>
+        <p:nvSpPr>
+          <p:cNvPr id="30" name="TextBox 29"/>
+          <p:cNvSpPr txBox="1"/>
+          <p:nvPr/>
+        </p:nvSpPr>
+        <p:spPr>
+          <a:xfrm>
+            <a:off x="457200" y="6217920"/>
+            <a:ext cx="11277295" cy="548640"/>
+          </a:xfrm>
+          <a:prstGeom prst="rect">
+            <a:avLst/>
+          </a:prstGeom>
+          <a:noFill/>
+        </p:spPr>
+        <p:txBody>
+          <a:bodyPr wrap="square">
+            <a:spAutoFit/>
+          </a:bodyPr>
+          <a:lstStyle/>
+          <a:p>
+            <a:pPr algn="ctr">
+              <a:defRPr sz="1000" i="1"/>
+            </a:pPr>
+            <a:r>
+              <a:t>Multivariable logistic regression for 5-HT3 antagonist use (primary outcome). Reduced model with 6 covariates. N = 3,153.</a:t>
             </a:r>
           </a:p>
         </p:txBody>
@@ -3426,8 +6147,8 @@
         </p:nvSpPr>
         <p:spPr>
           <a:xfrm>
-            <a:off x="457200" y="182880"/>
-            <a:ext cx="11277295" cy="548640"/>
+            <a:off x="274320" y="137160"/>
+            <a:ext cx="11612880" cy="457200"/>
           </a:xfrm>
           <a:prstGeom prst="rect">
             <a:avLst/>
@@ -3435,7 +6156,7 @@
           <a:noFill/>
         </p:spPr>
         <p:txBody>
-          <a:bodyPr wrap="none">
+          <a:bodyPr wrap="square">
             <a:spAutoFit/>
           </a:bodyPr>
           <a:lstStyle/>
@@ -3448,35 +6169,54 @@
               </a:defRPr>
             </a:pPr>
             <a:r>
-              <a:t>Figure 4. Twin Effect: Broad vs Narrow Definition</a:t>
-            </a:r>
-          </a:p>
-        </p:txBody>
-      </p:sp>
-      <p:pic>
-        <p:nvPicPr>
-          <p:cNvPr id="3" name="Picture 2" descr="fig4_protocol_vs_defE.png"/>
-          <p:cNvPicPr>
-            <a:picLocks noChangeAspect="1"/>
-          </p:cNvPicPr>
-          <p:nvPr/>
-        </p:nvPicPr>
-        <p:blipFill>
-          <a:blip r:embed="rId2"/>
-          <a:stretch>
-            <a:fillRect/>
-          </a:stretch>
-        </p:blipFill>
-        <p:spPr>
-          <a:xfrm>
-            <a:off x="838047" y="1266305"/>
-            <a:ext cx="10515600" cy="4142509"/>
-          </a:xfrm>
-          <a:prstGeom prst="rect">
-            <a:avLst/>
-          </a:prstGeom>
-        </p:spPr>
-      </p:pic>
+              <a:t>Figure 4. Twin Effect: Broad vs Narrow Antiemetic Definition</a:t>
+            </a:r>
+          </a:p>
+        </p:txBody>
+      </p:sp>
+      <p:sp>
+        <p:nvSpPr>
+          <p:cNvPr id="3" name="Rectangle 2"/>
+          <p:cNvSpPr/>
+          <p:nvPr/>
+        </p:nvSpPr>
+        <p:spPr>
+          <a:xfrm>
+            <a:off x="4007918" y="1097280"/>
+            <a:ext cx="19050" cy="1645920"/>
+          </a:xfrm>
+          <a:prstGeom prst="rect">
+            <a:avLst/>
+          </a:prstGeom>
+          <a:solidFill>
+            <a:srgbClr val="FF0000"/>
+          </a:solidFill>
+          <a:ln>
+            <a:noFill/>
+          </a:ln>
+        </p:spPr>
+        <p:style>
+          <a:lnRef idx="1">
+            <a:schemeClr val="accent1"/>
+          </a:lnRef>
+          <a:fillRef idx="3">
+            <a:schemeClr val="accent1"/>
+          </a:fillRef>
+          <a:effectRef idx="2">
+            <a:schemeClr val="accent1"/>
+          </a:effectRef>
+          <a:fontRef idx="minor">
+            <a:schemeClr val="lt1"/>
+          </a:fontRef>
+        </p:style>
+        <p:txBody>
+          <a:bodyPr rtlCol="0" anchor="ctr"/>
+          <a:lstStyle/>
+          <a:p>
+            <a:pPr algn="ctr"/>
+          </a:p>
+        </p:txBody>
+      </p:sp>
       <p:sp>
         <p:nvSpPr>
           <p:cNvPr id="4" name="TextBox 3"/>
@@ -3485,8 +6225,8 @@
         </p:nvSpPr>
         <p:spPr>
           <a:xfrm>
-            <a:off x="457200" y="6126480"/>
-            <a:ext cx="11277295" cy="640080"/>
+            <a:off x="3733598" y="2788920"/>
+            <a:ext cx="548640" cy="228600"/>
           </a:xfrm>
           <a:prstGeom prst="rect">
             <a:avLst/>
@@ -3500,10 +6240,692 @@
           <a:lstStyle/>
           <a:p>
             <a:pPr algn="ctr">
-              <a:defRPr sz="1100" i="1"/>
+              <a:defRPr sz="800">
+                <a:solidFill>
+                  <a:srgbClr val="FF0000"/>
+                </a:solidFill>
+              </a:defRPr>
             </a:pPr>
             <a:r>
-              <a:t>Adjusted odds ratios for twin pregnancy across broad and narrow antiemetic definitions.</a:t>
+              <a:t>OR=1</a:t>
+            </a:r>
+          </a:p>
+        </p:txBody>
+      </p:sp>
+      <p:sp>
+        <p:nvSpPr>
+          <p:cNvPr id="5" name="TextBox 4"/>
+          <p:cNvSpPr txBox="1"/>
+          <p:nvPr/>
+        </p:nvSpPr>
+        <p:spPr>
+          <a:xfrm>
+            <a:off x="3657600" y="3017520"/>
+            <a:ext cx="6858000" cy="274320"/>
+          </a:xfrm>
+          <a:prstGeom prst="rect">
+            <a:avLst/>
+          </a:prstGeom>
+          <a:noFill/>
+        </p:spPr>
+        <p:txBody>
+          <a:bodyPr wrap="none">
+            <a:spAutoFit/>
+          </a:bodyPr>
+          <a:lstStyle/>
+          <a:p>
+            <a:pPr algn="ctr">
+              <a:defRPr sz="1000"/>
+            </a:pPr>
+            <a:r>
+              <a:t>Adjusted Odds Ratio (95% CI)</a:t>
+            </a:r>
+          </a:p>
+        </p:txBody>
+      </p:sp>
+      <p:sp>
+        <p:nvSpPr>
+          <p:cNvPr id="6" name="TextBox 5"/>
+          <p:cNvSpPr txBox="1"/>
+          <p:nvPr/>
+        </p:nvSpPr>
+        <p:spPr>
+          <a:xfrm>
+            <a:off x="274320" y="1165860"/>
+            <a:ext cx="3200400" cy="274320"/>
+          </a:xfrm>
+          <a:prstGeom prst="rect">
+            <a:avLst/>
+          </a:prstGeom>
+          <a:noFill/>
+        </p:spPr>
+        <p:txBody>
+          <a:bodyPr wrap="square">
+            <a:spAutoFit/>
+          </a:bodyPr>
+          <a:lstStyle/>
+          <a:p>
+            <a:pPr algn="r">
+              <a:defRPr sz="800"/>
+            </a:pPr>
+            <a:r>
+              <a:t>Narrow: 5-HT3 + before delivery phase</a:t>
+            </a:r>
+          </a:p>
+        </p:txBody>
+      </p:sp>
+      <p:sp>
+        <p:nvSpPr>
+          <p:cNvPr id="7" name="Rectangle 6"/>
+          <p:cNvSpPr/>
+          <p:nvPr/>
+        </p:nvSpPr>
+        <p:spPr>
+          <a:xfrm>
+            <a:off x="3939744" y="1283970"/>
+            <a:ext cx="4993240" cy="38100"/>
+          </a:xfrm>
+          <a:prstGeom prst="rect">
+            <a:avLst/>
+          </a:prstGeom>
+          <a:solidFill>
+            <a:srgbClr val="4C72B0"/>
+          </a:solidFill>
+          <a:ln>
+            <a:noFill/>
+          </a:ln>
+        </p:spPr>
+        <p:style>
+          <a:lnRef idx="1">
+            <a:schemeClr val="accent1"/>
+          </a:lnRef>
+          <a:fillRef idx="3">
+            <a:schemeClr val="accent1"/>
+          </a:fillRef>
+          <a:effectRef idx="2">
+            <a:schemeClr val="accent1"/>
+          </a:effectRef>
+          <a:fontRef idx="minor">
+            <a:schemeClr val="lt1"/>
+          </a:fontRef>
+        </p:style>
+        <p:txBody>
+          <a:bodyPr rtlCol="0" anchor="ctr"/>
+          <a:lstStyle/>
+          <a:p>
+            <a:pPr algn="ctr"/>
+          </a:p>
+        </p:txBody>
+      </p:sp>
+      <p:sp>
+        <p:nvSpPr>
+          <p:cNvPr id="8" name="Diamond 7"/>
+          <p:cNvSpPr/>
+          <p:nvPr/>
+        </p:nvSpPr>
+        <p:spPr>
+          <a:xfrm>
+            <a:off x="4822745" y="1248156"/>
+            <a:ext cx="109728" cy="109728"/>
+          </a:xfrm>
+          <a:prstGeom prst="diamond">
+            <a:avLst/>
+          </a:prstGeom>
+          <a:solidFill>
+            <a:srgbClr val="4C72B0"/>
+          </a:solidFill>
+          <a:ln>
+            <a:solidFill>
+              <a:srgbClr val="4C72B0"/>
+            </a:solidFill>
+          </a:ln>
+        </p:spPr>
+        <p:style>
+          <a:lnRef idx="1">
+            <a:schemeClr val="accent1"/>
+          </a:lnRef>
+          <a:fillRef idx="3">
+            <a:schemeClr val="accent1"/>
+          </a:fillRef>
+          <a:effectRef idx="2">
+            <a:schemeClr val="accent1"/>
+          </a:effectRef>
+          <a:fontRef idx="minor">
+            <a:schemeClr val="lt1"/>
+          </a:fontRef>
+        </p:style>
+        <p:txBody>
+          <a:bodyPr rtlCol="0" anchor="ctr"/>
+          <a:lstStyle/>
+          <a:p>
+            <a:pPr algn="ctr"/>
+          </a:p>
+        </p:txBody>
+      </p:sp>
+      <p:sp>
+        <p:nvSpPr>
+          <p:cNvPr id="9" name="TextBox 8"/>
+          <p:cNvSpPr txBox="1"/>
+          <p:nvPr/>
+        </p:nvSpPr>
+        <p:spPr>
+          <a:xfrm>
+            <a:off x="10607040" y="1193292"/>
+            <a:ext cx="1371600" cy="228600"/>
+          </a:xfrm>
+          <a:prstGeom prst="rect">
+            <a:avLst/>
+          </a:prstGeom>
+          <a:noFill/>
+        </p:spPr>
+        <p:txBody>
+          <a:bodyPr wrap="none">
+            <a:spAutoFit/>
+          </a:bodyPr>
+          <a:lstStyle/>
+          <a:p>
+            <a:pPr>
+              <a:defRPr sz="700">
+                <a:solidFill>
+                  <a:srgbClr val="4C72B0"/>
+                </a:solidFill>
+              </a:defRPr>
+            </a:pPr>
+            <a:r>
+              <a:t>OR 3.48 [0.81–15.06] P=0.095</a:t>
+            </a:r>
+          </a:p>
+        </p:txBody>
+      </p:sp>
+      <p:sp>
+        <p:nvSpPr>
+          <p:cNvPr id="10" name="TextBox 9"/>
+          <p:cNvSpPr txBox="1"/>
+          <p:nvPr/>
+        </p:nvSpPr>
+        <p:spPr>
+          <a:xfrm>
+            <a:off x="274320" y="1577340"/>
+            <a:ext cx="3200400" cy="274320"/>
+          </a:xfrm>
+          <a:prstGeom prst="rect">
+            <a:avLst/>
+          </a:prstGeom>
+          <a:noFill/>
+        </p:spPr>
+        <p:txBody>
+          <a:bodyPr wrap="square">
+            <a:spAutoFit/>
+          </a:bodyPr>
+          <a:lstStyle/>
+          <a:p>
+            <a:pPr algn="r">
+              <a:defRPr sz="800"/>
+            </a:pPr>
+            <a:r>
+              <a:t>Narrow: 5-HT3 antagonist (any phase)</a:t>
+            </a:r>
+          </a:p>
+        </p:txBody>
+      </p:sp>
+      <p:sp>
+        <p:nvSpPr>
+          <p:cNvPr id="11" name="Rectangle 10"/>
+          <p:cNvSpPr/>
+          <p:nvPr/>
+        </p:nvSpPr>
+        <p:spPr>
+          <a:xfrm>
+            <a:off x="4139733" y="1695450"/>
+            <a:ext cx="2095764" cy="38100"/>
+          </a:xfrm>
+          <a:prstGeom prst="rect">
+            <a:avLst/>
+          </a:prstGeom>
+          <a:solidFill>
+            <a:srgbClr val="C44E52"/>
+          </a:solidFill>
+          <a:ln>
+            <a:noFill/>
+          </a:ln>
+        </p:spPr>
+        <p:style>
+          <a:lnRef idx="1">
+            <a:schemeClr val="accent1"/>
+          </a:lnRef>
+          <a:fillRef idx="3">
+            <a:schemeClr val="accent1"/>
+          </a:fillRef>
+          <a:effectRef idx="2">
+            <a:schemeClr val="accent1"/>
+          </a:effectRef>
+          <a:fontRef idx="minor">
+            <a:schemeClr val="lt1"/>
+          </a:fontRef>
+        </p:style>
+        <p:txBody>
+          <a:bodyPr rtlCol="0" anchor="ctr"/>
+          <a:lstStyle/>
+          <a:p>
+            <a:pPr algn="ctr"/>
+          </a:p>
+        </p:txBody>
+      </p:sp>
+      <p:sp>
+        <p:nvSpPr>
+          <p:cNvPr id="12" name="Diamond 11"/>
+          <p:cNvSpPr/>
+          <p:nvPr/>
+        </p:nvSpPr>
+        <p:spPr>
+          <a:xfrm>
+            <a:off x="4717586" y="1659636"/>
+            <a:ext cx="109728" cy="109728"/>
+          </a:xfrm>
+          <a:prstGeom prst="diamond">
+            <a:avLst/>
+          </a:prstGeom>
+          <a:solidFill>
+            <a:srgbClr val="C44E52"/>
+          </a:solidFill>
+          <a:ln>
+            <a:solidFill>
+              <a:srgbClr val="C44E52"/>
+            </a:solidFill>
+          </a:ln>
+        </p:spPr>
+        <p:style>
+          <a:lnRef idx="1">
+            <a:schemeClr val="accent1"/>
+          </a:lnRef>
+          <a:fillRef idx="3">
+            <a:schemeClr val="accent1"/>
+          </a:fillRef>
+          <a:effectRef idx="2">
+            <a:schemeClr val="accent1"/>
+          </a:effectRef>
+          <a:fontRef idx="minor">
+            <a:schemeClr val="lt1"/>
+          </a:fontRef>
+        </p:style>
+        <p:txBody>
+          <a:bodyPr rtlCol="0" anchor="ctr"/>
+          <a:lstStyle/>
+          <a:p>
+            <a:pPr algn="ctr"/>
+          </a:p>
+        </p:txBody>
+      </p:sp>
+      <p:sp>
+        <p:nvSpPr>
+          <p:cNvPr id="13" name="TextBox 12"/>
+          <p:cNvSpPr txBox="1"/>
+          <p:nvPr/>
+        </p:nvSpPr>
+        <p:spPr>
+          <a:xfrm>
+            <a:off x="10607040" y="1604772"/>
+            <a:ext cx="1371600" cy="228600"/>
+          </a:xfrm>
+          <a:prstGeom prst="rect">
+            <a:avLst/>
+          </a:prstGeom>
+          <a:noFill/>
+        </p:spPr>
+        <p:txBody>
+          <a:bodyPr wrap="none">
+            <a:spAutoFit/>
+          </a:bodyPr>
+          <a:lstStyle/>
+          <a:p>
+            <a:pPr>
+              <a:defRPr sz="700">
+                <a:solidFill>
+                  <a:srgbClr val="C44E52"/>
+                </a:solidFill>
+              </a:defRPr>
+            </a:pPr>
+            <a:r>
+              <a:t>OR 3.18 [1.38–7.36] P=0.007**</a:t>
+            </a:r>
+          </a:p>
+        </p:txBody>
+      </p:sp>
+      <p:sp>
+        <p:nvSpPr>
+          <p:cNvPr id="14" name="TextBox 13"/>
+          <p:cNvSpPr txBox="1"/>
+          <p:nvPr/>
+        </p:nvSpPr>
+        <p:spPr>
+          <a:xfrm>
+            <a:off x="274320" y="1988820"/>
+            <a:ext cx="3200400" cy="274320"/>
+          </a:xfrm>
+          <a:prstGeom prst="rect">
+            <a:avLst/>
+          </a:prstGeom>
+          <a:noFill/>
+        </p:spPr>
+        <p:txBody>
+          <a:bodyPr wrap="square">
+            <a:spAutoFit/>
+          </a:bodyPr>
+          <a:lstStyle/>
+          <a:p>
+            <a:pPr algn="r">
+              <a:defRPr sz="800"/>
+            </a:pPr>
+            <a:r>
+              <a:t>Protocol: antiemetic before delivery</a:t>
+            </a:r>
+          </a:p>
+        </p:txBody>
+      </p:sp>
+      <p:sp>
+        <p:nvSpPr>
+          <p:cNvPr id="15" name="Rectangle 14"/>
+          <p:cNvSpPr/>
+          <p:nvPr/>
+        </p:nvSpPr>
+        <p:spPr>
+          <a:xfrm>
+            <a:off x="3766155" y="2106930"/>
+            <a:ext cx="646378" cy="38100"/>
+          </a:xfrm>
+          <a:prstGeom prst="rect">
+            <a:avLst/>
+          </a:prstGeom>
+          <a:solidFill>
+            <a:srgbClr val="4C72B0"/>
+          </a:solidFill>
+          <a:ln>
+            <a:noFill/>
+          </a:ln>
+        </p:spPr>
+        <p:style>
+          <a:lnRef idx="1">
+            <a:schemeClr val="accent1"/>
+          </a:lnRef>
+          <a:fillRef idx="3">
+            <a:schemeClr val="accent1"/>
+          </a:fillRef>
+          <a:effectRef idx="2">
+            <a:schemeClr val="accent1"/>
+          </a:effectRef>
+          <a:fontRef idx="minor">
+            <a:schemeClr val="lt1"/>
+          </a:fontRef>
+        </p:style>
+        <p:txBody>
+          <a:bodyPr rtlCol="0" anchor="ctr"/>
+          <a:lstStyle/>
+          <a:p>
+            <a:pPr algn="ctr"/>
+          </a:p>
+        </p:txBody>
+      </p:sp>
+      <p:sp>
+        <p:nvSpPr>
+          <p:cNvPr id="16" name="Diamond 15"/>
+          <p:cNvSpPr/>
+          <p:nvPr/>
+        </p:nvSpPr>
+        <p:spPr>
+          <a:xfrm>
+            <a:off x="3889008" y="2071116"/>
+            <a:ext cx="109728" cy="109728"/>
+          </a:xfrm>
+          <a:prstGeom prst="diamond">
+            <a:avLst/>
+          </a:prstGeom>
+          <a:solidFill>
+            <a:srgbClr val="4C72B0"/>
+          </a:solidFill>
+          <a:ln>
+            <a:solidFill>
+              <a:srgbClr val="4C72B0"/>
+            </a:solidFill>
+          </a:ln>
+        </p:spPr>
+        <p:style>
+          <a:lnRef idx="1">
+            <a:schemeClr val="accent1"/>
+          </a:lnRef>
+          <a:fillRef idx="3">
+            <a:schemeClr val="accent1"/>
+          </a:fillRef>
+          <a:effectRef idx="2">
+            <a:schemeClr val="accent1"/>
+          </a:effectRef>
+          <a:fontRef idx="minor">
+            <a:schemeClr val="lt1"/>
+          </a:fontRef>
+        </p:style>
+        <p:txBody>
+          <a:bodyPr rtlCol="0" anchor="ctr"/>
+          <a:lstStyle/>
+          <a:p>
+            <a:pPr algn="ctr"/>
+          </a:p>
+        </p:txBody>
+      </p:sp>
+      <p:sp>
+        <p:nvSpPr>
+          <p:cNvPr id="17" name="TextBox 16"/>
+          <p:cNvSpPr txBox="1"/>
+          <p:nvPr/>
+        </p:nvSpPr>
+        <p:spPr>
+          <a:xfrm>
+            <a:off x="10607040" y="2016252"/>
+            <a:ext cx="1371600" cy="228600"/>
+          </a:xfrm>
+          <a:prstGeom prst="rect">
+            <a:avLst/>
+          </a:prstGeom>
+          <a:noFill/>
+        </p:spPr>
+        <p:txBody>
+          <a:bodyPr wrap="none">
+            <a:spAutoFit/>
+          </a:bodyPr>
+          <a:lstStyle/>
+          <a:p>
+            <a:pPr>
+              <a:defRPr sz="700">
+                <a:solidFill>
+                  <a:srgbClr val="4C72B0"/>
+                </a:solidFill>
+              </a:defRPr>
+            </a:pPr>
+            <a:r>
+              <a:t>OR 0.82 [0.31–2.15] P=0.683</a:t>
+            </a:r>
+          </a:p>
+        </p:txBody>
+      </p:sp>
+      <p:sp>
+        <p:nvSpPr>
+          <p:cNvPr id="18" name="TextBox 17"/>
+          <p:cNvSpPr txBox="1"/>
+          <p:nvPr/>
+        </p:nvSpPr>
+        <p:spPr>
+          <a:xfrm>
+            <a:off x="274320" y="2400300"/>
+            <a:ext cx="3200400" cy="274320"/>
+          </a:xfrm>
+          <a:prstGeom prst="rect">
+            <a:avLst/>
+          </a:prstGeom>
+          <a:noFill/>
+        </p:spPr>
+        <p:txBody>
+          <a:bodyPr wrap="square">
+            <a:spAutoFit/>
+          </a:bodyPr>
+          <a:lstStyle/>
+          <a:p>
+            <a:pPr algn="r">
+              <a:defRPr sz="800"/>
+            </a:pPr>
+            <a:r>
+              <a:t>Protocol: any antiemetic (any phase)</a:t>
+            </a:r>
+          </a:p>
+        </p:txBody>
+      </p:sp>
+      <p:sp>
+        <p:nvSpPr>
+          <p:cNvPr id="19" name="Rectangle 18"/>
+          <p:cNvSpPr/>
+          <p:nvPr/>
+        </p:nvSpPr>
+        <p:spPr>
+          <a:xfrm>
+            <a:off x="3893871" y="2518410"/>
+            <a:ext cx="207380" cy="38100"/>
+          </a:xfrm>
+          <a:prstGeom prst="rect">
+            <a:avLst/>
+          </a:prstGeom>
+          <a:solidFill>
+            <a:srgbClr val="4C72B0"/>
+          </a:solidFill>
+          <a:ln>
+            <a:noFill/>
+          </a:ln>
+        </p:spPr>
+        <p:style>
+          <a:lnRef idx="1">
+            <a:schemeClr val="accent1"/>
+          </a:lnRef>
+          <a:fillRef idx="3">
+            <a:schemeClr val="accent1"/>
+          </a:fillRef>
+          <a:effectRef idx="2">
+            <a:schemeClr val="accent1"/>
+          </a:effectRef>
+          <a:fontRef idx="minor">
+            <a:schemeClr val="lt1"/>
+          </a:fontRef>
+        </p:style>
+        <p:txBody>
+          <a:bodyPr rtlCol="0" anchor="ctr"/>
+          <a:lstStyle/>
+          <a:p>
+            <a:pPr algn="ctr"/>
+          </a:p>
+        </p:txBody>
+      </p:sp>
+      <p:sp>
+        <p:nvSpPr>
+          <p:cNvPr id="20" name="Diamond 19"/>
+          <p:cNvSpPr/>
+          <p:nvPr/>
+        </p:nvSpPr>
+        <p:spPr>
+          <a:xfrm>
+            <a:off x="3926498" y="2482596"/>
+            <a:ext cx="109728" cy="109728"/>
+          </a:xfrm>
+          <a:prstGeom prst="diamond">
+            <a:avLst/>
+          </a:prstGeom>
+          <a:solidFill>
+            <a:srgbClr val="4C72B0"/>
+          </a:solidFill>
+          <a:ln>
+            <a:solidFill>
+              <a:srgbClr val="4C72B0"/>
+            </a:solidFill>
+          </a:ln>
+        </p:spPr>
+        <p:style>
+          <a:lnRef idx="1">
+            <a:schemeClr val="accent1"/>
+          </a:lnRef>
+          <a:fillRef idx="3">
+            <a:schemeClr val="accent1"/>
+          </a:fillRef>
+          <a:effectRef idx="2">
+            <a:schemeClr val="accent1"/>
+          </a:effectRef>
+          <a:fontRef idx="minor">
+            <a:schemeClr val="lt1"/>
+          </a:fontRef>
+        </p:style>
+        <p:txBody>
+          <a:bodyPr rtlCol="0" anchor="ctr"/>
+          <a:lstStyle/>
+          <a:p>
+            <a:pPr algn="ctr"/>
+          </a:p>
+        </p:txBody>
+      </p:sp>
+      <p:sp>
+        <p:nvSpPr>
+          <p:cNvPr id="21" name="TextBox 20"/>
+          <p:cNvSpPr txBox="1"/>
+          <p:nvPr/>
+        </p:nvSpPr>
+        <p:spPr>
+          <a:xfrm>
+            <a:off x="10607040" y="2427732"/>
+            <a:ext cx="1371600" cy="228600"/>
+          </a:xfrm>
+          <a:prstGeom prst="rect">
+            <a:avLst/>
+          </a:prstGeom>
+          <a:noFill/>
+        </p:spPr>
+        <p:txBody>
+          <a:bodyPr wrap="none">
+            <a:spAutoFit/>
+          </a:bodyPr>
+          <a:lstStyle/>
+          <a:p>
+            <a:pPr>
+              <a:defRPr sz="700">
+                <a:solidFill>
+                  <a:srgbClr val="4C72B0"/>
+                </a:solidFill>
+              </a:defRPr>
+            </a:pPr>
+            <a:r>
+              <a:t>OR 0.92 [0.67–1.27] P=0.624</a:t>
+            </a:r>
+          </a:p>
+        </p:txBody>
+      </p:sp>
+      <p:sp>
+        <p:nvSpPr>
+          <p:cNvPr id="22" name="TextBox 21"/>
+          <p:cNvSpPr txBox="1"/>
+          <p:nvPr/>
+        </p:nvSpPr>
+        <p:spPr>
+          <a:xfrm>
+            <a:off x="457200" y="6217920"/>
+            <a:ext cx="11277295" cy="548640"/>
+          </a:xfrm>
+          <a:prstGeom prst="rect">
+            <a:avLst/>
+          </a:prstGeom>
+          <a:noFill/>
+        </p:spPr>
+        <p:txBody>
+          <a:bodyPr wrap="square">
+            <a:spAutoFit/>
+          </a:bodyPr>
+          <a:lstStyle/>
+          <a:p>
+            <a:pPr algn="ctr">
+              <a:defRPr sz="1000" i="1"/>
+            </a:pPr>
+            <a:r>
+              <a:t>Adjusted odds ratios for twin pregnancy across broad (all 7 drugs) and narrow (5-HT3 antagonists only) IONV definitions. N = 3,153.</a:t>
             </a:r>
           </a:p>
         </p:txBody>
@@ -3534,8 +6956,8 @@
         </p:nvSpPr>
         <p:spPr>
           <a:xfrm>
-            <a:off x="457200" y="182880"/>
-            <a:ext cx="11277295" cy="548640"/>
+            <a:off x="274320" y="137160"/>
+            <a:ext cx="11612880" cy="457200"/>
           </a:xfrm>
           <a:prstGeom prst="rect">
             <a:avLst/>
@@ -3543,7 +6965,7 @@
           <a:noFill/>
         </p:spPr>
         <p:txBody>
-          <a:bodyPr wrap="none">
+          <a:bodyPr wrap="square">
             <a:spAutoFit/>
           </a:bodyPr>
           <a:lstStyle/>
@@ -3561,30 +6983,49 @@
           </a:p>
         </p:txBody>
       </p:sp>
-      <p:pic>
-        <p:nvPicPr>
-          <p:cNvPr id="3" name="Picture 2" descr="fig3_covariate_sensitivity.png"/>
-          <p:cNvPicPr>
-            <a:picLocks noChangeAspect="1"/>
-          </p:cNvPicPr>
-          <p:nvPr/>
-        </p:nvPicPr>
-        <p:blipFill>
-          <a:blip r:embed="rId2"/>
-          <a:stretch>
-            <a:fillRect/>
-          </a:stretch>
-        </p:blipFill>
-        <p:spPr>
-          <a:xfrm>
-            <a:off x="3073247" y="822960"/>
-            <a:ext cx="6045200" cy="5029200"/>
-          </a:xfrm>
-          <a:prstGeom prst="rect">
-            <a:avLst/>
-          </a:prstGeom>
-        </p:spPr>
-      </p:pic>
+      <p:sp>
+        <p:nvSpPr>
+          <p:cNvPr id="3" name="Rectangle 2"/>
+          <p:cNvSpPr/>
+          <p:nvPr/>
+        </p:nvSpPr>
+        <p:spPr>
+          <a:xfrm>
+            <a:off x="4262051" y="1097280"/>
+            <a:ext cx="19050" cy="4572000"/>
+          </a:xfrm>
+          <a:prstGeom prst="rect">
+            <a:avLst/>
+          </a:prstGeom>
+          <a:solidFill>
+            <a:srgbClr val="FF0000"/>
+          </a:solidFill>
+          <a:ln>
+            <a:noFill/>
+          </a:ln>
+        </p:spPr>
+        <p:style>
+          <a:lnRef idx="1">
+            <a:schemeClr val="accent1"/>
+          </a:lnRef>
+          <a:fillRef idx="3">
+            <a:schemeClr val="accent1"/>
+          </a:fillRef>
+          <a:effectRef idx="2">
+            <a:schemeClr val="accent1"/>
+          </a:effectRef>
+          <a:fontRef idx="minor">
+            <a:schemeClr val="lt1"/>
+          </a:fontRef>
+        </p:style>
+        <p:txBody>
+          <a:bodyPr rtlCol="0" anchor="ctr"/>
+          <a:lstStyle/>
+          <a:p>
+            <a:pPr algn="ctr"/>
+          </a:p>
+        </p:txBody>
+      </p:sp>
       <p:sp>
         <p:nvSpPr>
           <p:cNvPr id="4" name="TextBox 3"/>
@@ -3593,8 +7034,8 @@
         </p:nvSpPr>
         <p:spPr>
           <a:xfrm>
-            <a:off x="457200" y="6126480"/>
-            <a:ext cx="11277295" cy="640080"/>
+            <a:off x="3987731" y="5715000"/>
+            <a:ext cx="548640" cy="228600"/>
           </a:xfrm>
           <a:prstGeom prst="rect">
             <a:avLst/>
@@ -3608,10 +7049,2848 @@
           <a:lstStyle/>
           <a:p>
             <a:pPr algn="ctr">
-              <a:defRPr sz="1100" i="1"/>
+              <a:defRPr sz="800">
+                <a:solidFill>
+                  <a:srgbClr val="FF0000"/>
+                </a:solidFill>
+              </a:defRPr>
             </a:pPr>
             <a:r>
-              <a:t>Robustness of twin effect across 20 covariate models for narrow-definition primary outcome (all P &lt; 0.05).</a:t>
+              <a:t>OR=1</a:t>
+            </a:r>
+          </a:p>
+        </p:txBody>
+      </p:sp>
+      <p:sp>
+        <p:nvSpPr>
+          <p:cNvPr id="5" name="TextBox 4"/>
+          <p:cNvSpPr txBox="1"/>
+          <p:nvPr/>
+        </p:nvSpPr>
+        <p:spPr>
+          <a:xfrm>
+            <a:off x="3657600" y="5943600"/>
+            <a:ext cx="6858000" cy="274320"/>
+          </a:xfrm>
+          <a:prstGeom prst="rect">
+            <a:avLst/>
+          </a:prstGeom>
+          <a:noFill/>
+        </p:spPr>
+        <p:txBody>
+          <a:bodyPr wrap="none">
+            <a:spAutoFit/>
+          </a:bodyPr>
+          <a:lstStyle/>
+          <a:p>
+            <a:pPr algn="ctr">
+              <a:defRPr sz="1000"/>
+            </a:pPr>
+            <a:r>
+              <a:t>Adjusted Odds Ratio (95% CI)</a:t>
+            </a:r>
+          </a:p>
+        </p:txBody>
+      </p:sp>
+      <p:sp>
+        <p:nvSpPr>
+          <p:cNvPr id="6" name="TextBox 5"/>
+          <p:cNvSpPr txBox="1"/>
+          <p:nvPr/>
+        </p:nvSpPr>
+        <p:spPr>
+          <a:xfrm>
+            <a:off x="274320" y="1087120"/>
+            <a:ext cx="3200400" cy="274320"/>
+          </a:xfrm>
+          <a:prstGeom prst="rect">
+            <a:avLst/>
+          </a:prstGeom>
+          <a:noFill/>
+        </p:spPr>
+        <p:txBody>
+          <a:bodyPr wrap="square">
+            <a:spAutoFit/>
+          </a:bodyPr>
+          <a:lstStyle/>
+          <a:p>
+            <a:pPr algn="r">
+              <a:defRPr sz="800"/>
+            </a:pPr>
+            <a:r>
+              <a:t>Reduced (6 covariates)</a:t>
+            </a:r>
+          </a:p>
+        </p:txBody>
+      </p:sp>
+      <p:sp>
+        <p:nvSpPr>
+          <p:cNvPr id="7" name="Rectangle 6"/>
+          <p:cNvSpPr/>
+          <p:nvPr/>
+        </p:nvSpPr>
+        <p:spPr>
+          <a:xfrm>
+            <a:off x="4489489" y="1205230"/>
+            <a:ext cx="3616104" cy="38100"/>
+          </a:xfrm>
+          <a:prstGeom prst="rect">
+            <a:avLst/>
+          </a:prstGeom>
+          <a:solidFill>
+            <a:srgbClr val="C44E52"/>
+          </a:solidFill>
+          <a:ln>
+            <a:noFill/>
+          </a:ln>
+        </p:spPr>
+        <p:style>
+          <a:lnRef idx="1">
+            <a:schemeClr val="accent1"/>
+          </a:lnRef>
+          <a:fillRef idx="3">
+            <a:schemeClr val="accent1"/>
+          </a:fillRef>
+          <a:effectRef idx="2">
+            <a:schemeClr val="accent1"/>
+          </a:effectRef>
+          <a:fontRef idx="minor">
+            <a:schemeClr val="lt1"/>
+          </a:fontRef>
+        </p:style>
+        <p:txBody>
+          <a:bodyPr rtlCol="0" anchor="ctr"/>
+          <a:lstStyle/>
+          <a:p>
+            <a:pPr algn="ctr"/>
+          </a:p>
+        </p:txBody>
+      </p:sp>
+      <p:sp>
+        <p:nvSpPr>
+          <p:cNvPr id="8" name="Diamond 7"/>
+          <p:cNvSpPr/>
+          <p:nvPr/>
+        </p:nvSpPr>
+        <p:spPr>
+          <a:xfrm>
+            <a:off x="5526336" y="1169416"/>
+            <a:ext cx="109728" cy="109728"/>
+          </a:xfrm>
+          <a:prstGeom prst="diamond">
+            <a:avLst/>
+          </a:prstGeom>
+          <a:solidFill>
+            <a:srgbClr val="C44E52"/>
+          </a:solidFill>
+          <a:ln>
+            <a:solidFill>
+              <a:srgbClr val="C44E52"/>
+            </a:solidFill>
+          </a:ln>
+        </p:spPr>
+        <p:style>
+          <a:lnRef idx="1">
+            <a:schemeClr val="accent1"/>
+          </a:lnRef>
+          <a:fillRef idx="3">
+            <a:schemeClr val="accent1"/>
+          </a:fillRef>
+          <a:effectRef idx="2">
+            <a:schemeClr val="accent1"/>
+          </a:effectRef>
+          <a:fontRef idx="minor">
+            <a:schemeClr val="lt1"/>
+          </a:fontRef>
+        </p:style>
+        <p:txBody>
+          <a:bodyPr rtlCol="0" anchor="ctr"/>
+          <a:lstStyle/>
+          <a:p>
+            <a:pPr algn="ctr"/>
+          </a:p>
+        </p:txBody>
+      </p:sp>
+      <p:sp>
+        <p:nvSpPr>
+          <p:cNvPr id="9" name="TextBox 8"/>
+          <p:cNvSpPr txBox="1"/>
+          <p:nvPr/>
+        </p:nvSpPr>
+        <p:spPr>
+          <a:xfrm>
+            <a:off x="10607040" y="1114552"/>
+            <a:ext cx="1371600" cy="228600"/>
+          </a:xfrm>
+          <a:prstGeom prst="rect">
+            <a:avLst/>
+          </a:prstGeom>
+          <a:noFill/>
+        </p:spPr>
+        <p:txBody>
+          <a:bodyPr wrap="none">
+            <a:spAutoFit/>
+          </a:bodyPr>
+          <a:lstStyle/>
+          <a:p>
+            <a:pPr>
+              <a:defRPr sz="700">
+                <a:solidFill>
+                  <a:srgbClr val="C44E52"/>
+                </a:solidFill>
+              </a:defRPr>
+            </a:pPr>
+            <a:r>
+              <a:t>OR 3.18 [1.38–7.36] P=0.007**</a:t>
+            </a:r>
+          </a:p>
+        </p:txBody>
+      </p:sp>
+      <p:sp>
+        <p:nvSpPr>
+          <p:cNvPr id="10" name="TextBox 9"/>
+          <p:cNvSpPr txBox="1"/>
+          <p:nvPr/>
+        </p:nvSpPr>
+        <p:spPr>
+          <a:xfrm>
+            <a:off x="274320" y="1341120"/>
+            <a:ext cx="3200400" cy="274320"/>
+          </a:xfrm>
+          <a:prstGeom prst="rect">
+            <a:avLst/>
+          </a:prstGeom>
+          <a:noFill/>
+        </p:spPr>
+        <p:txBody>
+          <a:bodyPr wrap="square">
+            <a:spAutoFit/>
+          </a:bodyPr>
+          <a:lstStyle/>
+          <a:p>
+            <a:pPr algn="r">
+              <a:defRPr sz="800"/>
+            </a:pPr>
+            <a:r>
+              <a:t>Full minus Hypotension (SBP &lt; 90)</a:t>
+            </a:r>
+          </a:p>
+        </p:txBody>
+      </p:sp>
+      <p:sp>
+        <p:nvSpPr>
+          <p:cNvPr id="11" name="Rectangle 10"/>
+          <p:cNvSpPr/>
+          <p:nvPr/>
+        </p:nvSpPr>
+        <p:spPr>
+          <a:xfrm>
+            <a:off x="4371826" y="1459230"/>
+            <a:ext cx="3712687" cy="38100"/>
+          </a:xfrm>
+          <a:prstGeom prst="rect">
+            <a:avLst/>
+          </a:prstGeom>
+          <a:solidFill>
+            <a:srgbClr val="C44E52"/>
+          </a:solidFill>
+          <a:ln>
+            <a:noFill/>
+          </a:ln>
+        </p:spPr>
+        <p:style>
+          <a:lnRef idx="1">
+            <a:schemeClr val="accent1"/>
+          </a:lnRef>
+          <a:fillRef idx="3">
+            <a:schemeClr val="accent1"/>
+          </a:fillRef>
+          <a:effectRef idx="2">
+            <a:schemeClr val="accent1"/>
+          </a:effectRef>
+          <a:fontRef idx="minor">
+            <a:schemeClr val="lt1"/>
+          </a:fontRef>
+        </p:style>
+        <p:txBody>
+          <a:bodyPr rtlCol="0" anchor="ctr"/>
+          <a:lstStyle/>
+          <a:p>
+            <a:pPr algn="ctr"/>
+          </a:p>
+        </p:txBody>
+      </p:sp>
+      <p:sp>
+        <p:nvSpPr>
+          <p:cNvPr id="12" name="Diamond 11"/>
+          <p:cNvSpPr/>
+          <p:nvPr/>
+        </p:nvSpPr>
+        <p:spPr>
+          <a:xfrm>
+            <a:off x="5380886" y="1423416"/>
+            <a:ext cx="109728" cy="109728"/>
+          </a:xfrm>
+          <a:prstGeom prst="diamond">
+            <a:avLst/>
+          </a:prstGeom>
+          <a:solidFill>
+            <a:srgbClr val="C44E52"/>
+          </a:solidFill>
+          <a:ln>
+            <a:solidFill>
+              <a:srgbClr val="C44E52"/>
+            </a:solidFill>
+          </a:ln>
+        </p:spPr>
+        <p:style>
+          <a:lnRef idx="1">
+            <a:schemeClr val="accent1"/>
+          </a:lnRef>
+          <a:fillRef idx="3">
+            <a:schemeClr val="accent1"/>
+          </a:fillRef>
+          <a:effectRef idx="2">
+            <a:schemeClr val="accent1"/>
+          </a:effectRef>
+          <a:fontRef idx="minor">
+            <a:schemeClr val="lt1"/>
+          </a:fontRef>
+        </p:style>
+        <p:txBody>
+          <a:bodyPr rtlCol="0" anchor="ctr"/>
+          <a:lstStyle/>
+          <a:p>
+            <a:pPr algn="ctr"/>
+          </a:p>
+        </p:txBody>
+      </p:sp>
+      <p:sp>
+        <p:nvSpPr>
+          <p:cNvPr id="13" name="TextBox 12"/>
+          <p:cNvSpPr txBox="1"/>
+          <p:nvPr/>
+        </p:nvSpPr>
+        <p:spPr>
+          <a:xfrm>
+            <a:off x="10607040" y="1368552"/>
+            <a:ext cx="1371600" cy="228600"/>
+          </a:xfrm>
+          <a:prstGeom prst="rect">
+            <a:avLst/>
+          </a:prstGeom>
+          <a:noFill/>
+        </p:spPr>
+        <p:txBody>
+          <a:bodyPr wrap="none">
+            <a:spAutoFit/>
+          </a:bodyPr>
+          <a:lstStyle/>
+          <a:p>
+            <a:pPr>
+              <a:defRPr sz="700">
+                <a:solidFill>
+                  <a:srgbClr val="C44E52"/>
+                </a:solidFill>
+              </a:defRPr>
+            </a:pPr>
+            <a:r>
+              <a:t>OR 2.94 [1.18–7.32] P=0.020*</a:t>
+            </a:r>
+          </a:p>
+        </p:txBody>
+      </p:sp>
+      <p:sp>
+        <p:nvSpPr>
+          <p:cNvPr id="14" name="TextBox 13"/>
+          <p:cNvSpPr txBox="1"/>
+          <p:nvPr/>
+        </p:nvSpPr>
+        <p:spPr>
+          <a:xfrm>
+            <a:off x="274320" y="1595120"/>
+            <a:ext cx="3200400" cy="274320"/>
+          </a:xfrm>
+          <a:prstGeom prst="rect">
+            <a:avLst/>
+          </a:prstGeom>
+          <a:noFill/>
+        </p:spPr>
+        <p:txBody>
+          <a:bodyPr wrap="square">
+            <a:spAutoFit/>
+          </a:bodyPr>
+          <a:lstStyle/>
+          <a:p>
+            <a:pPr algn="r">
+              <a:defRPr sz="800"/>
+            </a:pPr>
+            <a:r>
+              <a:t>Full minus Surgery time (per min)</a:t>
+            </a:r>
+          </a:p>
+        </p:txBody>
+      </p:sp>
+      <p:sp>
+        <p:nvSpPr>
+          <p:cNvPr id="15" name="Rectangle 14"/>
+          <p:cNvSpPr/>
+          <p:nvPr/>
+        </p:nvSpPr>
+        <p:spPr>
+          <a:xfrm>
+            <a:off x="4314432" y="1713230"/>
+            <a:ext cx="3364718" cy="38100"/>
+          </a:xfrm>
+          <a:prstGeom prst="rect">
+            <a:avLst/>
+          </a:prstGeom>
+          <a:solidFill>
+            <a:srgbClr val="C44E52"/>
+          </a:solidFill>
+          <a:ln>
+            <a:noFill/>
+          </a:ln>
+        </p:spPr>
+        <p:style>
+          <a:lnRef idx="1">
+            <a:schemeClr val="accent1"/>
+          </a:lnRef>
+          <a:fillRef idx="3">
+            <a:schemeClr val="accent1"/>
+          </a:fillRef>
+          <a:effectRef idx="2">
+            <a:schemeClr val="accent1"/>
+          </a:effectRef>
+          <a:fontRef idx="minor">
+            <a:schemeClr val="lt1"/>
+          </a:fontRef>
+        </p:style>
+        <p:txBody>
+          <a:bodyPr rtlCol="0" anchor="ctr"/>
+          <a:lstStyle/>
+          <a:p>
+            <a:pPr algn="ctr"/>
+          </a:p>
+        </p:txBody>
+      </p:sp>
+      <p:sp>
+        <p:nvSpPr>
+          <p:cNvPr id="16" name="Diamond 15"/>
+          <p:cNvSpPr/>
+          <p:nvPr/>
+        </p:nvSpPr>
+        <p:spPr>
+          <a:xfrm>
+            <a:off x="5228000" y="1677416"/>
+            <a:ext cx="109728" cy="109728"/>
+          </a:xfrm>
+          <a:prstGeom prst="diamond">
+            <a:avLst/>
+          </a:prstGeom>
+          <a:solidFill>
+            <a:srgbClr val="C44E52"/>
+          </a:solidFill>
+          <a:ln>
+            <a:solidFill>
+              <a:srgbClr val="C44E52"/>
+            </a:solidFill>
+          </a:ln>
+        </p:spPr>
+        <p:style>
+          <a:lnRef idx="1">
+            <a:schemeClr val="accent1"/>
+          </a:lnRef>
+          <a:fillRef idx="3">
+            <a:schemeClr val="accent1"/>
+          </a:fillRef>
+          <a:effectRef idx="2">
+            <a:schemeClr val="accent1"/>
+          </a:effectRef>
+          <a:fontRef idx="minor">
+            <a:schemeClr val="lt1"/>
+          </a:fontRef>
+        </p:style>
+        <p:txBody>
+          <a:bodyPr rtlCol="0" anchor="ctr"/>
+          <a:lstStyle/>
+          <a:p>
+            <a:pPr algn="ctr"/>
+          </a:p>
+        </p:txBody>
+      </p:sp>
+      <p:sp>
+        <p:nvSpPr>
+          <p:cNvPr id="17" name="TextBox 16"/>
+          <p:cNvSpPr txBox="1"/>
+          <p:nvPr/>
+        </p:nvSpPr>
+        <p:spPr>
+          <a:xfrm>
+            <a:off x="10607040" y="1622552"/>
+            <a:ext cx="1371600" cy="228600"/>
+          </a:xfrm>
+          <a:prstGeom prst="rect">
+            <a:avLst/>
+          </a:prstGeom>
+          <a:noFill/>
+        </p:spPr>
+        <p:txBody>
+          <a:bodyPr wrap="none">
+            <a:spAutoFit/>
+          </a:bodyPr>
+          <a:lstStyle/>
+          <a:p>
+            <a:pPr>
+              <a:defRPr sz="700">
+                <a:solidFill>
+                  <a:srgbClr val="C44E52"/>
+                </a:solidFill>
+              </a:defRPr>
+            </a:pPr>
+            <a:r>
+              <a:t>OR 2.69 [1.09–6.65] P=0.032*</a:t>
+            </a:r>
+          </a:p>
+        </p:txBody>
+      </p:sp>
+      <p:sp>
+        <p:nvSpPr>
+          <p:cNvPr id="18" name="TextBox 17"/>
+          <p:cNvSpPr txBox="1"/>
+          <p:nvPr/>
+        </p:nvSpPr>
+        <p:spPr>
+          <a:xfrm>
+            <a:off x="274320" y="1849120"/>
+            <a:ext cx="3200400" cy="274320"/>
+          </a:xfrm>
+          <a:prstGeom prst="rect">
+            <a:avLst/>
+          </a:prstGeom>
+          <a:noFill/>
+        </p:spPr>
+        <p:txBody>
+          <a:bodyPr wrap="square">
+            <a:spAutoFit/>
+          </a:bodyPr>
+          <a:lstStyle/>
+          <a:p>
+            <a:pPr algn="r">
+              <a:defRPr sz="800"/>
+            </a:pPr>
+            <a:r>
+              <a:t>Full minus Epidural anesthesia</a:t>
+            </a:r>
+          </a:p>
+        </p:txBody>
+      </p:sp>
+      <p:sp>
+        <p:nvSpPr>
+          <p:cNvPr id="19" name="Rectangle 18"/>
+          <p:cNvSpPr/>
+          <p:nvPr/>
+        </p:nvSpPr>
+        <p:spPr>
+          <a:xfrm>
+            <a:off x="4483504" y="1967230"/>
+            <a:ext cx="4178928" cy="38100"/>
+          </a:xfrm>
+          <a:prstGeom prst="rect">
+            <a:avLst/>
+          </a:prstGeom>
+          <a:solidFill>
+            <a:srgbClr val="C44E52"/>
+          </a:solidFill>
+          <a:ln>
+            <a:noFill/>
+          </a:ln>
+        </p:spPr>
+        <p:style>
+          <a:lnRef idx="1">
+            <a:schemeClr val="accent1"/>
+          </a:lnRef>
+          <a:fillRef idx="3">
+            <a:schemeClr val="accent1"/>
+          </a:fillRef>
+          <a:effectRef idx="2">
+            <a:schemeClr val="accent1"/>
+          </a:effectRef>
+          <a:fontRef idx="minor">
+            <a:schemeClr val="lt1"/>
+          </a:fontRef>
+        </p:style>
+        <p:txBody>
+          <a:bodyPr rtlCol="0" anchor="ctr"/>
+          <a:lstStyle/>
+          <a:p>
+            <a:pPr algn="ctr"/>
+          </a:p>
+        </p:txBody>
+      </p:sp>
+      <p:sp>
+        <p:nvSpPr>
+          <p:cNvPr id="20" name="Diamond 19"/>
+          <p:cNvSpPr/>
+          <p:nvPr/>
+        </p:nvSpPr>
+        <p:spPr>
+          <a:xfrm>
+            <a:off x="5635840" y="1931416"/>
+            <a:ext cx="109728" cy="109728"/>
+          </a:xfrm>
+          <a:prstGeom prst="diamond">
+            <a:avLst/>
+          </a:prstGeom>
+          <a:solidFill>
+            <a:srgbClr val="C44E52"/>
+          </a:solidFill>
+          <a:ln>
+            <a:solidFill>
+              <a:srgbClr val="C44E52"/>
+            </a:solidFill>
+          </a:ln>
+        </p:spPr>
+        <p:style>
+          <a:lnRef idx="1">
+            <a:schemeClr val="accent1"/>
+          </a:lnRef>
+          <a:fillRef idx="3">
+            <a:schemeClr val="accent1"/>
+          </a:fillRef>
+          <a:effectRef idx="2">
+            <a:schemeClr val="accent1"/>
+          </a:effectRef>
+          <a:fontRef idx="minor">
+            <a:schemeClr val="lt1"/>
+          </a:fontRef>
+        </p:style>
+        <p:txBody>
+          <a:bodyPr rtlCol="0" anchor="ctr"/>
+          <a:lstStyle/>
+          <a:p>
+            <a:pPr algn="ctr"/>
+          </a:p>
+        </p:txBody>
+      </p:sp>
+      <p:sp>
+        <p:nvSpPr>
+          <p:cNvPr id="21" name="TextBox 20"/>
+          <p:cNvSpPr txBox="1"/>
+          <p:nvPr/>
+        </p:nvSpPr>
+        <p:spPr>
+          <a:xfrm>
+            <a:off x="10607040" y="1876552"/>
+            <a:ext cx="1371600" cy="228600"/>
+          </a:xfrm>
+          <a:prstGeom prst="rect">
+            <a:avLst/>
+          </a:prstGeom>
+          <a:noFill/>
+        </p:spPr>
+        <p:txBody>
+          <a:bodyPr wrap="none">
+            <a:spAutoFit/>
+          </a:bodyPr>
+          <a:lstStyle/>
+          <a:p>
+            <a:pPr>
+              <a:defRPr sz="700">
+                <a:solidFill>
+                  <a:srgbClr val="C44E52"/>
+                </a:solidFill>
+              </a:defRPr>
+            </a:pPr>
+            <a:r>
+              <a:t>OR 3.36 [1.37–8.28] P=0.008**</a:t>
+            </a:r>
+          </a:p>
+        </p:txBody>
+      </p:sp>
+      <p:sp>
+        <p:nvSpPr>
+          <p:cNvPr id="22" name="TextBox 21"/>
+          <p:cNvSpPr txBox="1"/>
+          <p:nvPr/>
+        </p:nvSpPr>
+        <p:spPr>
+          <a:xfrm>
+            <a:off x="274320" y="2103120"/>
+            <a:ext cx="3200400" cy="274320"/>
+          </a:xfrm>
+          <a:prstGeom prst="rect">
+            <a:avLst/>
+          </a:prstGeom>
+          <a:noFill/>
+        </p:spPr>
+        <p:txBody>
+          <a:bodyPr wrap="square">
+            <a:spAutoFit/>
+          </a:bodyPr>
+          <a:lstStyle/>
+          <a:p>
+            <a:pPr algn="r">
+              <a:defRPr sz="800"/>
+            </a:pPr>
+            <a:r>
+              <a:t>Full minus HDP</a:t>
+            </a:r>
+          </a:p>
+        </p:txBody>
+      </p:sp>
+      <p:sp>
+        <p:nvSpPr>
+          <p:cNvPr id="23" name="Rectangle 22"/>
+          <p:cNvSpPr/>
+          <p:nvPr/>
+        </p:nvSpPr>
+        <p:spPr>
+          <a:xfrm>
+            <a:off x="4387298" y="2221230"/>
+            <a:ext cx="3812648" cy="38100"/>
+          </a:xfrm>
+          <a:prstGeom prst="rect">
+            <a:avLst/>
+          </a:prstGeom>
+          <a:solidFill>
+            <a:srgbClr val="C44E52"/>
+          </a:solidFill>
+          <a:ln>
+            <a:noFill/>
+          </a:ln>
+        </p:spPr>
+        <p:style>
+          <a:lnRef idx="1">
+            <a:schemeClr val="accent1"/>
+          </a:lnRef>
+          <a:fillRef idx="3">
+            <a:schemeClr val="accent1"/>
+          </a:fillRef>
+          <a:effectRef idx="2">
+            <a:schemeClr val="accent1"/>
+          </a:effectRef>
+          <a:fontRef idx="minor">
+            <a:schemeClr val="lt1"/>
+          </a:fontRef>
+        </p:style>
+        <p:txBody>
+          <a:bodyPr rtlCol="0" anchor="ctr"/>
+          <a:lstStyle/>
+          <a:p>
+            <a:pPr algn="ctr"/>
+          </a:p>
+        </p:txBody>
+      </p:sp>
+      <p:sp>
+        <p:nvSpPr>
+          <p:cNvPr id="24" name="Diamond 23"/>
+          <p:cNvSpPr/>
+          <p:nvPr/>
+        </p:nvSpPr>
+        <p:spPr>
+          <a:xfrm>
+            <a:off x="5423325" y="2185416"/>
+            <a:ext cx="109728" cy="109728"/>
+          </a:xfrm>
+          <a:prstGeom prst="diamond">
+            <a:avLst/>
+          </a:prstGeom>
+          <a:solidFill>
+            <a:srgbClr val="C44E52"/>
+          </a:solidFill>
+          <a:ln>
+            <a:solidFill>
+              <a:srgbClr val="C44E52"/>
+            </a:solidFill>
+          </a:ln>
+        </p:spPr>
+        <p:style>
+          <a:lnRef idx="1">
+            <a:schemeClr val="accent1"/>
+          </a:lnRef>
+          <a:fillRef idx="3">
+            <a:schemeClr val="accent1"/>
+          </a:fillRef>
+          <a:effectRef idx="2">
+            <a:schemeClr val="accent1"/>
+          </a:effectRef>
+          <a:fontRef idx="minor">
+            <a:schemeClr val="lt1"/>
+          </a:fontRef>
+        </p:style>
+        <p:txBody>
+          <a:bodyPr rtlCol="0" anchor="ctr"/>
+          <a:lstStyle/>
+          <a:p>
+            <a:pPr algn="ctr"/>
+          </a:p>
+        </p:txBody>
+      </p:sp>
+      <p:sp>
+        <p:nvSpPr>
+          <p:cNvPr id="25" name="TextBox 24"/>
+          <p:cNvSpPr txBox="1"/>
+          <p:nvPr/>
+        </p:nvSpPr>
+        <p:spPr>
+          <a:xfrm>
+            <a:off x="10607040" y="2130552"/>
+            <a:ext cx="1371600" cy="228600"/>
+          </a:xfrm>
+          <a:prstGeom prst="rect">
+            <a:avLst/>
+          </a:prstGeom>
+          <a:noFill/>
+        </p:spPr>
+        <p:txBody>
+          <a:bodyPr wrap="none">
+            <a:spAutoFit/>
+          </a:bodyPr>
+          <a:lstStyle/>
+          <a:p>
+            <a:pPr>
+              <a:defRPr sz="700">
+                <a:solidFill>
+                  <a:srgbClr val="C44E52"/>
+                </a:solidFill>
+              </a:defRPr>
+            </a:pPr>
+            <a:r>
+              <a:t>OR 3.01 [1.21–7.51] P=0.018*</a:t>
+            </a:r>
+          </a:p>
+        </p:txBody>
+      </p:sp>
+      <p:sp>
+        <p:nvSpPr>
+          <p:cNvPr id="26" name="TextBox 25"/>
+          <p:cNvSpPr txBox="1"/>
+          <p:nvPr/>
+        </p:nvSpPr>
+        <p:spPr>
+          <a:xfrm>
+            <a:off x="274320" y="2357120"/>
+            <a:ext cx="3200400" cy="274320"/>
+          </a:xfrm>
+          <a:prstGeom prst="rect">
+            <a:avLst/>
+          </a:prstGeom>
+          <a:noFill/>
+        </p:spPr>
+        <p:txBody>
+          <a:bodyPr wrap="square">
+            <a:spAutoFit/>
+          </a:bodyPr>
+          <a:lstStyle/>
+          <a:p>
+            <a:pPr algn="r">
+              <a:defRPr sz="800"/>
+            </a:pPr>
+            <a:r>
+              <a:t>Full minus Prior CS</a:t>
+            </a:r>
+          </a:p>
+        </p:txBody>
+      </p:sp>
+      <p:sp>
+        <p:nvSpPr>
+          <p:cNvPr id="27" name="Rectangle 26"/>
+          <p:cNvSpPr/>
+          <p:nvPr/>
+        </p:nvSpPr>
+        <p:spPr>
+          <a:xfrm>
+            <a:off x="4591416" y="2475230"/>
+            <a:ext cx="4341568" cy="38100"/>
+          </a:xfrm>
+          <a:prstGeom prst="rect">
+            <a:avLst/>
+          </a:prstGeom>
+          <a:solidFill>
+            <a:srgbClr val="C44E52"/>
+          </a:solidFill>
+          <a:ln>
+            <a:noFill/>
+          </a:ln>
+        </p:spPr>
+        <p:style>
+          <a:lnRef idx="1">
+            <a:schemeClr val="accent1"/>
+          </a:lnRef>
+          <a:fillRef idx="3">
+            <a:schemeClr val="accent1"/>
+          </a:fillRef>
+          <a:effectRef idx="2">
+            <a:schemeClr val="accent1"/>
+          </a:effectRef>
+          <a:fontRef idx="minor">
+            <a:schemeClr val="lt1"/>
+          </a:fontRef>
+        </p:style>
+        <p:txBody>
+          <a:bodyPr rtlCol="0" anchor="ctr"/>
+          <a:lstStyle/>
+          <a:p>
+            <a:pPr algn="ctr"/>
+          </a:p>
+        </p:txBody>
+      </p:sp>
+      <p:sp>
+        <p:nvSpPr>
+          <p:cNvPr id="28" name="Diamond 27"/>
+          <p:cNvSpPr/>
+          <p:nvPr/>
+        </p:nvSpPr>
+        <p:spPr>
+          <a:xfrm>
+            <a:off x="5822250" y="2439416"/>
+            <a:ext cx="109728" cy="109728"/>
+          </a:xfrm>
+          <a:prstGeom prst="diamond">
+            <a:avLst/>
+          </a:prstGeom>
+          <a:solidFill>
+            <a:srgbClr val="C44E52"/>
+          </a:solidFill>
+          <a:ln>
+            <a:solidFill>
+              <a:srgbClr val="C44E52"/>
+            </a:solidFill>
+          </a:ln>
+        </p:spPr>
+        <p:style>
+          <a:lnRef idx="1">
+            <a:schemeClr val="accent1"/>
+          </a:lnRef>
+          <a:fillRef idx="3">
+            <a:schemeClr val="accent1"/>
+          </a:fillRef>
+          <a:effectRef idx="2">
+            <a:schemeClr val="accent1"/>
+          </a:effectRef>
+          <a:fontRef idx="minor">
+            <a:schemeClr val="lt1"/>
+          </a:fontRef>
+        </p:style>
+        <p:txBody>
+          <a:bodyPr rtlCol="0" anchor="ctr"/>
+          <a:lstStyle/>
+          <a:p>
+            <a:pPr algn="ctr"/>
+          </a:p>
+        </p:txBody>
+      </p:sp>
+      <p:sp>
+        <p:nvSpPr>
+          <p:cNvPr id="29" name="TextBox 28"/>
+          <p:cNvSpPr txBox="1"/>
+          <p:nvPr/>
+        </p:nvSpPr>
+        <p:spPr>
+          <a:xfrm>
+            <a:off x="10607040" y="2384552"/>
+            <a:ext cx="1371600" cy="228600"/>
+          </a:xfrm>
+          <a:prstGeom prst="rect">
+            <a:avLst/>
+          </a:prstGeom>
+          <a:noFill/>
+        </p:spPr>
+        <p:txBody>
+          <a:bodyPr wrap="none">
+            <a:spAutoFit/>
+          </a:bodyPr>
+          <a:lstStyle/>
+          <a:p>
+            <a:pPr>
+              <a:defRPr sz="700">
+                <a:solidFill>
+                  <a:srgbClr val="C44E52"/>
+                </a:solidFill>
+              </a:defRPr>
+            </a:pPr>
+            <a:r>
+              <a:t>OR 3.67 [1.54–8.73] P=0.003**</a:t>
+            </a:r>
+          </a:p>
+        </p:txBody>
+      </p:sp>
+      <p:sp>
+        <p:nvSpPr>
+          <p:cNvPr id="30" name="TextBox 29"/>
+          <p:cNvSpPr txBox="1"/>
+          <p:nvPr/>
+        </p:nvSpPr>
+        <p:spPr>
+          <a:xfrm>
+            <a:off x="274320" y="2611120"/>
+            <a:ext cx="3200400" cy="274320"/>
+          </a:xfrm>
+          <a:prstGeom prst="rect">
+            <a:avLst/>
+          </a:prstGeom>
+          <a:noFill/>
+        </p:spPr>
+        <p:txBody>
+          <a:bodyPr wrap="square">
+            <a:spAutoFit/>
+          </a:bodyPr>
+          <a:lstStyle/>
+          <a:p>
+            <a:pPr algn="r">
+              <a:defRPr sz="800"/>
+            </a:pPr>
+            <a:r>
+              <a:t>Full minus Emergency CS</a:t>
+            </a:r>
+          </a:p>
+        </p:txBody>
+      </p:sp>
+      <p:sp>
+        <p:nvSpPr>
+          <p:cNvPr id="31" name="Rectangle 30"/>
+          <p:cNvSpPr/>
+          <p:nvPr/>
+        </p:nvSpPr>
+        <p:spPr>
+          <a:xfrm>
+            <a:off x="4449491" y="2729230"/>
+            <a:ext cx="3745205" cy="38100"/>
+          </a:xfrm>
+          <a:prstGeom prst="rect">
+            <a:avLst/>
+          </a:prstGeom>
+          <a:solidFill>
+            <a:srgbClr val="C44E52"/>
+          </a:solidFill>
+          <a:ln>
+            <a:noFill/>
+          </a:ln>
+        </p:spPr>
+        <p:style>
+          <a:lnRef idx="1">
+            <a:schemeClr val="accent1"/>
+          </a:lnRef>
+          <a:fillRef idx="3">
+            <a:schemeClr val="accent1"/>
+          </a:fillRef>
+          <a:effectRef idx="2">
+            <a:schemeClr val="accent1"/>
+          </a:effectRef>
+          <a:fontRef idx="minor">
+            <a:schemeClr val="lt1"/>
+          </a:fontRef>
+        </p:style>
+        <p:txBody>
+          <a:bodyPr rtlCol="0" anchor="ctr"/>
+          <a:lstStyle/>
+          <a:p>
+            <a:pPr algn="ctr"/>
+          </a:p>
+        </p:txBody>
+      </p:sp>
+      <p:sp>
+        <p:nvSpPr>
+          <p:cNvPr id="32" name="Diamond 31"/>
+          <p:cNvSpPr/>
+          <p:nvPr/>
+        </p:nvSpPr>
+        <p:spPr>
+          <a:xfrm>
+            <a:off x="5498228" y="2693416"/>
+            <a:ext cx="109728" cy="109728"/>
+          </a:xfrm>
+          <a:prstGeom prst="diamond">
+            <a:avLst/>
+          </a:prstGeom>
+          <a:solidFill>
+            <a:srgbClr val="C44E52"/>
+          </a:solidFill>
+          <a:ln>
+            <a:solidFill>
+              <a:srgbClr val="C44E52"/>
+            </a:solidFill>
+          </a:ln>
+        </p:spPr>
+        <p:style>
+          <a:lnRef idx="1">
+            <a:schemeClr val="accent1"/>
+          </a:lnRef>
+          <a:fillRef idx="3">
+            <a:schemeClr val="accent1"/>
+          </a:fillRef>
+          <a:effectRef idx="2">
+            <a:schemeClr val="accent1"/>
+          </a:effectRef>
+          <a:fontRef idx="minor">
+            <a:schemeClr val="lt1"/>
+          </a:fontRef>
+        </p:style>
+        <p:txBody>
+          <a:bodyPr rtlCol="0" anchor="ctr"/>
+          <a:lstStyle/>
+          <a:p>
+            <a:pPr algn="ctr"/>
+          </a:p>
+        </p:txBody>
+      </p:sp>
+      <p:sp>
+        <p:nvSpPr>
+          <p:cNvPr id="33" name="TextBox 32"/>
+          <p:cNvSpPr txBox="1"/>
+          <p:nvPr/>
+        </p:nvSpPr>
+        <p:spPr>
+          <a:xfrm>
+            <a:off x="10607040" y="2638552"/>
+            <a:ext cx="1371600" cy="228600"/>
+          </a:xfrm>
+          <a:prstGeom prst="rect">
+            <a:avLst/>
+          </a:prstGeom>
+          <a:noFill/>
+        </p:spPr>
+        <p:txBody>
+          <a:bodyPr wrap="none">
+            <a:spAutoFit/>
+          </a:bodyPr>
+          <a:lstStyle/>
+          <a:p>
+            <a:pPr>
+              <a:defRPr sz="700">
+                <a:solidFill>
+                  <a:srgbClr val="C44E52"/>
+                </a:solidFill>
+              </a:defRPr>
+            </a:pPr>
+            <a:r>
+              <a:t>OR 3.14 [1.31–7.51] P=0.010*</a:t>
+            </a:r>
+          </a:p>
+        </p:txBody>
+      </p:sp>
+      <p:sp>
+        <p:nvSpPr>
+          <p:cNvPr id="34" name="TextBox 33"/>
+          <p:cNvSpPr txBox="1"/>
+          <p:nvPr/>
+        </p:nvSpPr>
+        <p:spPr>
+          <a:xfrm>
+            <a:off x="274320" y="2865120"/>
+            <a:ext cx="3200400" cy="274320"/>
+          </a:xfrm>
+          <a:prstGeom prst="rect">
+            <a:avLst/>
+          </a:prstGeom>
+          <a:noFill/>
+        </p:spPr>
+        <p:txBody>
+          <a:bodyPr wrap="square">
+            <a:spAutoFit/>
+          </a:bodyPr>
+          <a:lstStyle/>
+          <a:p>
+            <a:pPr algn="r">
+              <a:defRPr sz="800"/>
+            </a:pPr>
+            <a:r>
+              <a:t>Full minus BMI (per kg/m²)</a:t>
+            </a:r>
+          </a:p>
+        </p:txBody>
+      </p:sp>
+      <p:sp>
+        <p:nvSpPr>
+          <p:cNvPr id="35" name="Rectangle 34"/>
+          <p:cNvSpPr/>
+          <p:nvPr/>
+        </p:nvSpPr>
+        <p:spPr>
+          <a:xfrm>
+            <a:off x="4387020" y="2983230"/>
+            <a:ext cx="3781755" cy="38100"/>
+          </a:xfrm>
+          <a:prstGeom prst="rect">
+            <a:avLst/>
+          </a:prstGeom>
+          <a:solidFill>
+            <a:srgbClr val="C44E52"/>
+          </a:solidFill>
+          <a:ln>
+            <a:noFill/>
+          </a:ln>
+        </p:spPr>
+        <p:style>
+          <a:lnRef idx="1">
+            <a:schemeClr val="accent1"/>
+          </a:lnRef>
+          <a:fillRef idx="3">
+            <a:schemeClr val="accent1"/>
+          </a:fillRef>
+          <a:effectRef idx="2">
+            <a:schemeClr val="accent1"/>
+          </a:effectRef>
+          <a:fontRef idx="minor">
+            <a:schemeClr val="lt1"/>
+          </a:fontRef>
+        </p:style>
+        <p:txBody>
+          <a:bodyPr rtlCol="0" anchor="ctr"/>
+          <a:lstStyle/>
+          <a:p>
+            <a:pPr algn="ctr"/>
+          </a:p>
+        </p:txBody>
+      </p:sp>
+      <p:sp>
+        <p:nvSpPr>
+          <p:cNvPr id="36" name="Diamond 35"/>
+          <p:cNvSpPr/>
+          <p:nvPr/>
+        </p:nvSpPr>
+        <p:spPr>
+          <a:xfrm>
+            <a:off x="5416721" y="2947416"/>
+            <a:ext cx="109728" cy="109728"/>
+          </a:xfrm>
+          <a:prstGeom prst="diamond">
+            <a:avLst/>
+          </a:prstGeom>
+          <a:solidFill>
+            <a:srgbClr val="C44E52"/>
+          </a:solidFill>
+          <a:ln>
+            <a:solidFill>
+              <a:srgbClr val="C44E52"/>
+            </a:solidFill>
+          </a:ln>
+        </p:spPr>
+        <p:style>
+          <a:lnRef idx="1">
+            <a:schemeClr val="accent1"/>
+          </a:lnRef>
+          <a:fillRef idx="3">
+            <a:schemeClr val="accent1"/>
+          </a:fillRef>
+          <a:effectRef idx="2">
+            <a:schemeClr val="accent1"/>
+          </a:effectRef>
+          <a:fontRef idx="minor">
+            <a:schemeClr val="lt1"/>
+          </a:fontRef>
+        </p:style>
+        <p:txBody>
+          <a:bodyPr rtlCol="0" anchor="ctr"/>
+          <a:lstStyle/>
+          <a:p>
+            <a:pPr algn="ctr"/>
+          </a:p>
+        </p:txBody>
+      </p:sp>
+      <p:sp>
+        <p:nvSpPr>
+          <p:cNvPr id="37" name="TextBox 36"/>
+          <p:cNvSpPr txBox="1"/>
+          <p:nvPr/>
+        </p:nvSpPr>
+        <p:spPr>
+          <a:xfrm>
+            <a:off x="10607040" y="2892552"/>
+            <a:ext cx="1371600" cy="228600"/>
+          </a:xfrm>
+          <a:prstGeom prst="rect">
+            <a:avLst/>
+          </a:prstGeom>
+          <a:noFill/>
+        </p:spPr>
+        <p:txBody>
+          <a:bodyPr wrap="none">
+            <a:spAutoFit/>
+          </a:bodyPr>
+          <a:lstStyle/>
+          <a:p>
+            <a:pPr>
+              <a:defRPr sz="700">
+                <a:solidFill>
+                  <a:srgbClr val="C44E52"/>
+                </a:solidFill>
+              </a:defRPr>
+            </a:pPr>
+            <a:r>
+              <a:t>OR 3.00 [1.21–7.46] P=0.018*</a:t>
+            </a:r>
+          </a:p>
+        </p:txBody>
+      </p:sp>
+      <p:sp>
+        <p:nvSpPr>
+          <p:cNvPr id="38" name="TextBox 37"/>
+          <p:cNvSpPr txBox="1"/>
+          <p:nvPr/>
+        </p:nvSpPr>
+        <p:spPr>
+          <a:xfrm>
+            <a:off x="274320" y="3119120"/>
+            <a:ext cx="3200400" cy="274320"/>
+          </a:xfrm>
+          <a:prstGeom prst="rect">
+            <a:avLst/>
+          </a:prstGeom>
+          <a:noFill/>
+        </p:spPr>
+        <p:txBody>
+          <a:bodyPr wrap="square">
+            <a:spAutoFit/>
+          </a:bodyPr>
+          <a:lstStyle/>
+          <a:p>
+            <a:pPr algn="r">
+              <a:defRPr sz="800"/>
+            </a:pPr>
+            <a:r>
+              <a:t>Twin + Hypotension (SBP &lt; 90)</a:t>
+            </a:r>
+          </a:p>
+        </p:txBody>
+      </p:sp>
+      <p:sp>
+        <p:nvSpPr>
+          <p:cNvPr id="39" name="Rectangle 38"/>
+          <p:cNvSpPr/>
+          <p:nvPr/>
+        </p:nvSpPr>
+        <p:spPr>
+          <a:xfrm>
+            <a:off x="4404734" y="3237230"/>
+            <a:ext cx="3002977" cy="38100"/>
+          </a:xfrm>
+          <a:prstGeom prst="rect">
+            <a:avLst/>
+          </a:prstGeom>
+          <a:solidFill>
+            <a:srgbClr val="C44E52"/>
+          </a:solidFill>
+          <a:ln>
+            <a:noFill/>
+          </a:ln>
+        </p:spPr>
+        <p:style>
+          <a:lnRef idx="1">
+            <a:schemeClr val="accent1"/>
+          </a:lnRef>
+          <a:fillRef idx="3">
+            <a:schemeClr val="accent1"/>
+          </a:fillRef>
+          <a:effectRef idx="2">
+            <a:schemeClr val="accent1"/>
+          </a:effectRef>
+          <a:fontRef idx="minor">
+            <a:schemeClr val="lt1"/>
+          </a:fontRef>
+        </p:style>
+        <p:txBody>
+          <a:bodyPr rtlCol="0" anchor="ctr"/>
+          <a:lstStyle/>
+          <a:p>
+            <a:pPr algn="ctr"/>
+          </a:p>
+        </p:txBody>
+      </p:sp>
+      <p:sp>
+        <p:nvSpPr>
+          <p:cNvPr id="40" name="Diamond 39"/>
+          <p:cNvSpPr/>
+          <p:nvPr/>
+        </p:nvSpPr>
+        <p:spPr>
+          <a:xfrm>
+            <a:off x="5276604" y="3201416"/>
+            <a:ext cx="109728" cy="109728"/>
+          </a:xfrm>
+          <a:prstGeom prst="diamond">
+            <a:avLst/>
+          </a:prstGeom>
+          <a:solidFill>
+            <a:srgbClr val="C44E52"/>
+          </a:solidFill>
+          <a:ln>
+            <a:solidFill>
+              <a:srgbClr val="C44E52"/>
+            </a:solidFill>
+          </a:ln>
+        </p:spPr>
+        <p:style>
+          <a:lnRef idx="1">
+            <a:schemeClr val="accent1"/>
+          </a:lnRef>
+          <a:fillRef idx="3">
+            <a:schemeClr val="accent1"/>
+          </a:fillRef>
+          <a:effectRef idx="2">
+            <a:schemeClr val="accent1"/>
+          </a:effectRef>
+          <a:fontRef idx="minor">
+            <a:schemeClr val="lt1"/>
+          </a:fontRef>
+        </p:style>
+        <p:txBody>
+          <a:bodyPr rtlCol="0" anchor="ctr"/>
+          <a:lstStyle/>
+          <a:p>
+            <a:pPr algn="ctr"/>
+          </a:p>
+        </p:txBody>
+      </p:sp>
+      <p:sp>
+        <p:nvSpPr>
+          <p:cNvPr id="41" name="TextBox 40"/>
+          <p:cNvSpPr txBox="1"/>
+          <p:nvPr/>
+        </p:nvSpPr>
+        <p:spPr>
+          <a:xfrm>
+            <a:off x="10607040" y="3146552"/>
+            <a:ext cx="1371600" cy="228600"/>
+          </a:xfrm>
+          <a:prstGeom prst="rect">
+            <a:avLst/>
+          </a:prstGeom>
+          <a:noFill/>
+        </p:spPr>
+        <p:txBody>
+          <a:bodyPr wrap="none">
+            <a:spAutoFit/>
+          </a:bodyPr>
+          <a:lstStyle/>
+          <a:p>
+            <a:pPr>
+              <a:defRPr sz="700">
+                <a:solidFill>
+                  <a:srgbClr val="C44E52"/>
+                </a:solidFill>
+              </a:defRPr>
+            </a:pPr>
+            <a:r>
+              <a:t>OR 2.77 [1.24–6.20] P=0.013*</a:t>
+            </a:r>
+          </a:p>
+        </p:txBody>
+      </p:sp>
+      <p:sp>
+        <p:nvSpPr>
+          <p:cNvPr id="42" name="TextBox 41"/>
+          <p:cNvSpPr txBox="1"/>
+          <p:nvPr/>
+        </p:nvSpPr>
+        <p:spPr>
+          <a:xfrm>
+            <a:off x="274320" y="3373120"/>
+            <a:ext cx="3200400" cy="274320"/>
+          </a:xfrm>
+          <a:prstGeom prst="rect">
+            <a:avLst/>
+          </a:prstGeom>
+          <a:noFill/>
+        </p:spPr>
+        <p:txBody>
+          <a:bodyPr wrap="square">
+            <a:spAutoFit/>
+          </a:bodyPr>
+          <a:lstStyle/>
+          <a:p>
+            <a:pPr algn="r">
+              <a:defRPr sz="800"/>
+            </a:pPr>
+            <a:r>
+              <a:t>Twin + Surgery time (per min)</a:t>
+            </a:r>
+          </a:p>
+        </p:txBody>
+      </p:sp>
+      <p:sp>
+        <p:nvSpPr>
+          <p:cNvPr id="43" name="Rectangle 42"/>
+          <p:cNvSpPr/>
+          <p:nvPr/>
+        </p:nvSpPr>
+        <p:spPr>
+          <a:xfrm>
+            <a:off x="4549653" y="3491230"/>
+            <a:ext cx="3741573" cy="38100"/>
+          </a:xfrm>
+          <a:prstGeom prst="rect">
+            <a:avLst/>
+          </a:prstGeom>
+          <a:solidFill>
+            <a:srgbClr val="C44E52"/>
+          </a:solidFill>
+          <a:ln>
+            <a:noFill/>
+          </a:ln>
+        </p:spPr>
+        <p:style>
+          <a:lnRef idx="1">
+            <a:schemeClr val="accent1"/>
+          </a:lnRef>
+          <a:fillRef idx="3">
+            <a:schemeClr val="accent1"/>
+          </a:fillRef>
+          <a:effectRef idx="2">
+            <a:schemeClr val="accent1"/>
+          </a:effectRef>
+          <a:fontRef idx="minor">
+            <a:schemeClr val="lt1"/>
+          </a:fontRef>
+        </p:style>
+        <p:txBody>
+          <a:bodyPr rtlCol="0" anchor="ctr"/>
+          <a:lstStyle/>
+          <a:p>
+            <a:pPr algn="ctr"/>
+          </a:p>
+        </p:txBody>
+      </p:sp>
+      <p:sp>
+        <p:nvSpPr>
+          <p:cNvPr id="44" name="Diamond 43"/>
+          <p:cNvSpPr/>
+          <p:nvPr/>
+        </p:nvSpPr>
+        <p:spPr>
+          <a:xfrm>
+            <a:off x="5635823" y="3455416"/>
+            <a:ext cx="109728" cy="109728"/>
+          </a:xfrm>
+          <a:prstGeom prst="diamond">
+            <a:avLst/>
+          </a:prstGeom>
+          <a:solidFill>
+            <a:srgbClr val="C44E52"/>
+          </a:solidFill>
+          <a:ln>
+            <a:solidFill>
+              <a:srgbClr val="C44E52"/>
+            </a:solidFill>
+          </a:ln>
+        </p:spPr>
+        <p:style>
+          <a:lnRef idx="1">
+            <a:schemeClr val="accent1"/>
+          </a:lnRef>
+          <a:fillRef idx="3">
+            <a:schemeClr val="accent1"/>
+          </a:fillRef>
+          <a:effectRef idx="2">
+            <a:schemeClr val="accent1"/>
+          </a:effectRef>
+          <a:fontRef idx="minor">
+            <a:schemeClr val="lt1"/>
+          </a:fontRef>
+        </p:style>
+        <p:txBody>
+          <a:bodyPr rtlCol="0" anchor="ctr"/>
+          <a:lstStyle/>
+          <a:p>
+            <a:pPr algn="ctr"/>
+          </a:p>
+        </p:txBody>
+      </p:sp>
+      <p:sp>
+        <p:nvSpPr>
+          <p:cNvPr id="45" name="TextBox 44"/>
+          <p:cNvSpPr txBox="1"/>
+          <p:nvPr/>
+        </p:nvSpPr>
+        <p:spPr>
+          <a:xfrm>
+            <a:off x="10607040" y="3400552"/>
+            <a:ext cx="1371600" cy="228600"/>
+          </a:xfrm>
+          <a:prstGeom prst="rect">
+            <a:avLst/>
+          </a:prstGeom>
+          <a:noFill/>
+        </p:spPr>
+        <p:txBody>
+          <a:bodyPr wrap="none">
+            <a:spAutoFit/>
+          </a:bodyPr>
+          <a:lstStyle/>
+          <a:p>
+            <a:pPr>
+              <a:defRPr sz="700">
+                <a:solidFill>
+                  <a:srgbClr val="C44E52"/>
+                </a:solidFill>
+              </a:defRPr>
+            </a:pPr>
+            <a:r>
+              <a:t>OR 3.36 [1.48–7.67] P=0.004**</a:t>
+            </a:r>
+          </a:p>
+        </p:txBody>
+      </p:sp>
+      <p:sp>
+        <p:nvSpPr>
+          <p:cNvPr id="46" name="TextBox 45"/>
+          <p:cNvSpPr txBox="1"/>
+          <p:nvPr/>
+        </p:nvSpPr>
+        <p:spPr>
+          <a:xfrm>
+            <a:off x="274320" y="3627120"/>
+            <a:ext cx="3200400" cy="274320"/>
+          </a:xfrm>
+          <a:prstGeom prst="rect">
+            <a:avLst/>
+          </a:prstGeom>
+          <a:noFill/>
+        </p:spPr>
+        <p:txBody>
+          <a:bodyPr wrap="square">
+            <a:spAutoFit/>
+          </a:bodyPr>
+          <a:lstStyle/>
+          <a:p>
+            <a:pPr algn="r">
+              <a:defRPr sz="800"/>
+            </a:pPr>
+            <a:r>
+              <a:t>Twin + Epidural anesthesia</a:t>
+            </a:r>
+          </a:p>
+        </p:txBody>
+      </p:sp>
+      <p:sp>
+        <p:nvSpPr>
+          <p:cNvPr id="47" name="Rectangle 46"/>
+          <p:cNvSpPr/>
+          <p:nvPr/>
+        </p:nvSpPr>
+        <p:spPr>
+          <a:xfrm>
+            <a:off x="4376445" y="3745230"/>
+            <a:ext cx="2897988" cy="38100"/>
+          </a:xfrm>
+          <a:prstGeom prst="rect">
+            <a:avLst/>
+          </a:prstGeom>
+          <a:solidFill>
+            <a:srgbClr val="C44E52"/>
+          </a:solidFill>
+          <a:ln>
+            <a:noFill/>
+          </a:ln>
+        </p:spPr>
+        <p:style>
+          <a:lnRef idx="1">
+            <a:schemeClr val="accent1"/>
+          </a:lnRef>
+          <a:fillRef idx="3">
+            <a:schemeClr val="accent1"/>
+          </a:fillRef>
+          <a:effectRef idx="2">
+            <a:schemeClr val="accent1"/>
+          </a:effectRef>
+          <a:fontRef idx="minor">
+            <a:schemeClr val="lt1"/>
+          </a:fontRef>
+        </p:style>
+        <p:txBody>
+          <a:bodyPr rtlCol="0" anchor="ctr"/>
+          <a:lstStyle/>
+          <a:p>
+            <a:pPr algn="ctr"/>
+          </a:p>
+        </p:txBody>
+      </p:sp>
+      <p:sp>
+        <p:nvSpPr>
+          <p:cNvPr id="48" name="Diamond 47"/>
+          <p:cNvSpPr/>
+          <p:nvPr/>
+        </p:nvSpPr>
+        <p:spPr>
+          <a:xfrm>
+            <a:off x="5215170" y="3709416"/>
+            <a:ext cx="109728" cy="109728"/>
+          </a:xfrm>
+          <a:prstGeom prst="diamond">
+            <a:avLst/>
+          </a:prstGeom>
+          <a:solidFill>
+            <a:srgbClr val="C44E52"/>
+          </a:solidFill>
+          <a:ln>
+            <a:solidFill>
+              <a:srgbClr val="C44E52"/>
+            </a:solidFill>
+          </a:ln>
+        </p:spPr>
+        <p:style>
+          <a:lnRef idx="1">
+            <a:schemeClr val="accent1"/>
+          </a:lnRef>
+          <a:fillRef idx="3">
+            <a:schemeClr val="accent1"/>
+          </a:fillRef>
+          <a:effectRef idx="2">
+            <a:schemeClr val="accent1"/>
+          </a:effectRef>
+          <a:fontRef idx="minor">
+            <a:schemeClr val="lt1"/>
+          </a:fontRef>
+        </p:style>
+        <p:txBody>
+          <a:bodyPr rtlCol="0" anchor="ctr"/>
+          <a:lstStyle/>
+          <a:p>
+            <a:pPr algn="ctr"/>
+          </a:p>
+        </p:txBody>
+      </p:sp>
+      <p:sp>
+        <p:nvSpPr>
+          <p:cNvPr id="49" name="TextBox 48"/>
+          <p:cNvSpPr txBox="1"/>
+          <p:nvPr/>
+        </p:nvSpPr>
+        <p:spPr>
+          <a:xfrm>
+            <a:off x="10607040" y="3654552"/>
+            <a:ext cx="1371600" cy="228600"/>
+          </a:xfrm>
+          <a:prstGeom prst="rect">
+            <a:avLst/>
+          </a:prstGeom>
+          <a:noFill/>
+        </p:spPr>
+        <p:txBody>
+          <a:bodyPr wrap="none">
+            <a:spAutoFit/>
+          </a:bodyPr>
+          <a:lstStyle/>
+          <a:p>
+            <a:pPr>
+              <a:defRPr sz="700">
+                <a:solidFill>
+                  <a:srgbClr val="C44E52"/>
+                </a:solidFill>
+              </a:defRPr>
+            </a:pPr>
+            <a:r>
+              <a:t>OR 2.67 [1.19–5.98] P=0.017*</a:t>
+            </a:r>
+          </a:p>
+        </p:txBody>
+      </p:sp>
+      <p:sp>
+        <p:nvSpPr>
+          <p:cNvPr id="50" name="TextBox 49"/>
+          <p:cNvSpPr txBox="1"/>
+          <p:nvPr/>
+        </p:nvSpPr>
+        <p:spPr>
+          <a:xfrm>
+            <a:off x="274320" y="3881120"/>
+            <a:ext cx="3200400" cy="274320"/>
+          </a:xfrm>
+          <a:prstGeom prst="rect">
+            <a:avLst/>
+          </a:prstGeom>
+          <a:noFill/>
+        </p:spPr>
+        <p:txBody>
+          <a:bodyPr wrap="square">
+            <a:spAutoFit/>
+          </a:bodyPr>
+          <a:lstStyle/>
+          <a:p>
+            <a:pPr algn="r">
+              <a:defRPr sz="800"/>
+            </a:pPr>
+            <a:r>
+              <a:t>Twin + HDP</a:t>
+            </a:r>
+          </a:p>
+        </p:txBody>
+      </p:sp>
+      <p:sp>
+        <p:nvSpPr>
+          <p:cNvPr id="51" name="Rectangle 50"/>
+          <p:cNvSpPr/>
+          <p:nvPr/>
+        </p:nvSpPr>
+        <p:spPr>
+          <a:xfrm>
+            <a:off x="4387632" y="3999230"/>
+            <a:ext cx="2917158" cy="38100"/>
+          </a:xfrm>
+          <a:prstGeom prst="rect">
+            <a:avLst/>
+          </a:prstGeom>
+          <a:solidFill>
+            <a:srgbClr val="C44E52"/>
+          </a:solidFill>
+          <a:ln>
+            <a:noFill/>
+          </a:ln>
+        </p:spPr>
+        <p:style>
+          <a:lnRef idx="1">
+            <a:schemeClr val="accent1"/>
+          </a:lnRef>
+          <a:fillRef idx="3">
+            <a:schemeClr val="accent1"/>
+          </a:fillRef>
+          <a:effectRef idx="2">
+            <a:schemeClr val="accent1"/>
+          </a:effectRef>
+          <a:fontRef idx="minor">
+            <a:schemeClr val="lt1"/>
+          </a:fontRef>
+        </p:style>
+        <p:txBody>
+          <a:bodyPr rtlCol="0" anchor="ctr"/>
+          <a:lstStyle/>
+          <a:p>
+            <a:pPr algn="ctr"/>
+          </a:p>
+        </p:txBody>
+      </p:sp>
+      <p:sp>
+        <p:nvSpPr>
+          <p:cNvPr id="52" name="Diamond 51"/>
+          <p:cNvSpPr/>
+          <p:nvPr/>
+        </p:nvSpPr>
+        <p:spPr>
+          <a:xfrm>
+            <a:off x="5234473" y="3963416"/>
+            <a:ext cx="109728" cy="109728"/>
+          </a:xfrm>
+          <a:prstGeom prst="diamond">
+            <a:avLst/>
+          </a:prstGeom>
+          <a:solidFill>
+            <a:srgbClr val="C44E52"/>
+          </a:solidFill>
+          <a:ln>
+            <a:solidFill>
+              <a:srgbClr val="C44E52"/>
+            </a:solidFill>
+          </a:ln>
+        </p:spPr>
+        <p:style>
+          <a:lnRef idx="1">
+            <a:schemeClr val="accent1"/>
+          </a:lnRef>
+          <a:fillRef idx="3">
+            <a:schemeClr val="accent1"/>
+          </a:fillRef>
+          <a:effectRef idx="2">
+            <a:schemeClr val="accent1"/>
+          </a:effectRef>
+          <a:fontRef idx="minor">
+            <a:schemeClr val="lt1"/>
+          </a:fontRef>
+        </p:style>
+        <p:txBody>
+          <a:bodyPr rtlCol="0" anchor="ctr"/>
+          <a:lstStyle/>
+          <a:p>
+            <a:pPr algn="ctr"/>
+          </a:p>
+        </p:txBody>
+      </p:sp>
+      <p:sp>
+        <p:nvSpPr>
+          <p:cNvPr id="53" name="TextBox 52"/>
+          <p:cNvSpPr txBox="1"/>
+          <p:nvPr/>
+        </p:nvSpPr>
+        <p:spPr>
+          <a:xfrm>
+            <a:off x="10607040" y="3908552"/>
+            <a:ext cx="1371600" cy="228600"/>
+          </a:xfrm>
+          <a:prstGeom prst="rect">
+            <a:avLst/>
+          </a:prstGeom>
+          <a:noFill/>
+        </p:spPr>
+        <p:txBody>
+          <a:bodyPr wrap="none">
+            <a:spAutoFit/>
+          </a:bodyPr>
+          <a:lstStyle/>
+          <a:p>
+            <a:pPr>
+              <a:defRPr sz="700">
+                <a:solidFill>
+                  <a:srgbClr val="C44E52"/>
+                </a:solidFill>
+              </a:defRPr>
+            </a:pPr>
+            <a:r>
+              <a:t>OR 2.70 [1.21–6.03] P=0.016*</a:t>
+            </a:r>
+          </a:p>
+        </p:txBody>
+      </p:sp>
+      <p:sp>
+        <p:nvSpPr>
+          <p:cNvPr id="54" name="TextBox 53"/>
+          <p:cNvSpPr txBox="1"/>
+          <p:nvPr/>
+        </p:nvSpPr>
+        <p:spPr>
+          <a:xfrm>
+            <a:off x="274320" y="4135120"/>
+            <a:ext cx="3200400" cy="274320"/>
+          </a:xfrm>
+          <a:prstGeom prst="rect">
+            <a:avLst/>
+          </a:prstGeom>
+          <a:noFill/>
+        </p:spPr>
+        <p:txBody>
+          <a:bodyPr wrap="square">
+            <a:spAutoFit/>
+          </a:bodyPr>
+          <a:lstStyle/>
+          <a:p>
+            <a:pPr algn="r">
+              <a:defRPr sz="800"/>
+            </a:pPr>
+            <a:r>
+              <a:t>Twin + Prior CS</a:t>
+            </a:r>
+          </a:p>
+        </p:txBody>
+      </p:sp>
+      <p:sp>
+        <p:nvSpPr>
+          <p:cNvPr id="55" name="Rectangle 54"/>
+          <p:cNvSpPr/>
+          <p:nvPr/>
+        </p:nvSpPr>
+        <p:spPr>
+          <a:xfrm>
+            <a:off x="4326783" y="4253230"/>
+            <a:ext cx="2901317" cy="38100"/>
+          </a:xfrm>
+          <a:prstGeom prst="rect">
+            <a:avLst/>
+          </a:prstGeom>
+          <a:solidFill>
+            <a:srgbClr val="C44E52"/>
+          </a:solidFill>
+          <a:ln>
+            <a:noFill/>
+          </a:ln>
+        </p:spPr>
+        <p:style>
+          <a:lnRef idx="1">
+            <a:schemeClr val="accent1"/>
+          </a:lnRef>
+          <a:fillRef idx="3">
+            <a:schemeClr val="accent1"/>
+          </a:fillRef>
+          <a:effectRef idx="2">
+            <a:schemeClr val="accent1"/>
+          </a:effectRef>
+          <a:fontRef idx="minor">
+            <a:schemeClr val="lt1"/>
+          </a:fontRef>
+        </p:style>
+        <p:txBody>
+          <a:bodyPr rtlCol="0" anchor="ctr"/>
+          <a:lstStyle/>
+          <a:p>
+            <a:pPr algn="ctr"/>
+          </a:p>
+        </p:txBody>
+      </p:sp>
+      <p:sp>
+        <p:nvSpPr>
+          <p:cNvPr id="56" name="Diamond 55"/>
+          <p:cNvSpPr/>
+          <p:nvPr/>
+        </p:nvSpPr>
+        <p:spPr>
+          <a:xfrm>
+            <a:off x="5148478" y="4217416"/>
+            <a:ext cx="109728" cy="109728"/>
+          </a:xfrm>
+          <a:prstGeom prst="diamond">
+            <a:avLst/>
+          </a:prstGeom>
+          <a:solidFill>
+            <a:srgbClr val="C44E52"/>
+          </a:solidFill>
+          <a:ln>
+            <a:solidFill>
+              <a:srgbClr val="C44E52"/>
+            </a:solidFill>
+          </a:ln>
+        </p:spPr>
+        <p:style>
+          <a:lnRef idx="1">
+            <a:schemeClr val="accent1"/>
+          </a:lnRef>
+          <a:fillRef idx="3">
+            <a:schemeClr val="accent1"/>
+          </a:fillRef>
+          <a:effectRef idx="2">
+            <a:schemeClr val="accent1"/>
+          </a:effectRef>
+          <a:fontRef idx="minor">
+            <a:schemeClr val="lt1"/>
+          </a:fontRef>
+        </p:style>
+        <p:txBody>
+          <a:bodyPr rtlCol="0" anchor="ctr"/>
+          <a:lstStyle/>
+          <a:p>
+            <a:pPr algn="ctr"/>
+          </a:p>
+        </p:txBody>
+      </p:sp>
+      <p:sp>
+        <p:nvSpPr>
+          <p:cNvPr id="57" name="TextBox 56"/>
+          <p:cNvSpPr txBox="1"/>
+          <p:nvPr/>
+        </p:nvSpPr>
+        <p:spPr>
+          <a:xfrm>
+            <a:off x="10607040" y="4162552"/>
+            <a:ext cx="1371600" cy="228600"/>
+          </a:xfrm>
+          <a:prstGeom prst="rect">
+            <a:avLst/>
+          </a:prstGeom>
+          <a:noFill/>
+        </p:spPr>
+        <p:txBody>
+          <a:bodyPr wrap="none">
+            <a:spAutoFit/>
+          </a:bodyPr>
+          <a:lstStyle/>
+          <a:p>
+            <a:pPr>
+              <a:defRPr sz="700">
+                <a:solidFill>
+                  <a:srgbClr val="C44E52"/>
+                </a:solidFill>
+              </a:defRPr>
+            </a:pPr>
+            <a:r>
+              <a:t>OR 2.56 [1.11–5.91] P=0.028*</a:t>
+            </a:r>
+          </a:p>
+        </p:txBody>
+      </p:sp>
+      <p:sp>
+        <p:nvSpPr>
+          <p:cNvPr id="58" name="TextBox 57"/>
+          <p:cNvSpPr txBox="1"/>
+          <p:nvPr/>
+        </p:nvSpPr>
+        <p:spPr>
+          <a:xfrm>
+            <a:off x="274320" y="4389120"/>
+            <a:ext cx="3200400" cy="274320"/>
+          </a:xfrm>
+          <a:prstGeom prst="rect">
+            <a:avLst/>
+          </a:prstGeom>
+          <a:noFill/>
+        </p:spPr>
+        <p:txBody>
+          <a:bodyPr wrap="square">
+            <a:spAutoFit/>
+          </a:bodyPr>
+          <a:lstStyle/>
+          <a:p>
+            <a:pPr algn="r">
+              <a:defRPr sz="800"/>
+            </a:pPr>
+            <a:r>
+              <a:t>Twin + Emergency CS</a:t>
+            </a:r>
+          </a:p>
+        </p:txBody>
+      </p:sp>
+      <p:sp>
+        <p:nvSpPr>
+          <p:cNvPr id="59" name="Rectangle 58"/>
+          <p:cNvSpPr/>
+          <p:nvPr/>
+        </p:nvSpPr>
+        <p:spPr>
+          <a:xfrm>
+            <a:off x="4380427" y="4507230"/>
+            <a:ext cx="2914937" cy="38100"/>
+          </a:xfrm>
+          <a:prstGeom prst="rect">
+            <a:avLst/>
+          </a:prstGeom>
+          <a:solidFill>
+            <a:srgbClr val="C44E52"/>
+          </a:solidFill>
+          <a:ln>
+            <a:noFill/>
+          </a:ln>
+        </p:spPr>
+        <p:style>
+          <a:lnRef idx="1">
+            <a:schemeClr val="accent1"/>
+          </a:lnRef>
+          <a:fillRef idx="3">
+            <a:schemeClr val="accent1"/>
+          </a:fillRef>
+          <a:effectRef idx="2">
+            <a:schemeClr val="accent1"/>
+          </a:effectRef>
+          <a:fontRef idx="minor">
+            <a:schemeClr val="lt1"/>
+          </a:fontRef>
+        </p:style>
+        <p:txBody>
+          <a:bodyPr rtlCol="0" anchor="ctr"/>
+          <a:lstStyle/>
+          <a:p>
+            <a:pPr algn="ctr"/>
+          </a:p>
+        </p:txBody>
+      </p:sp>
+      <p:sp>
+        <p:nvSpPr>
+          <p:cNvPr id="60" name="Diamond 59"/>
+          <p:cNvSpPr/>
+          <p:nvPr/>
+        </p:nvSpPr>
+        <p:spPr>
+          <a:xfrm>
+            <a:off x="5224301" y="4471416"/>
+            <a:ext cx="109728" cy="109728"/>
+          </a:xfrm>
+          <a:prstGeom prst="diamond">
+            <a:avLst/>
+          </a:prstGeom>
+          <a:solidFill>
+            <a:srgbClr val="C44E52"/>
+          </a:solidFill>
+          <a:ln>
+            <a:solidFill>
+              <a:srgbClr val="C44E52"/>
+            </a:solidFill>
+          </a:ln>
+        </p:spPr>
+        <p:style>
+          <a:lnRef idx="1">
+            <a:schemeClr val="accent1"/>
+          </a:lnRef>
+          <a:fillRef idx="3">
+            <a:schemeClr val="accent1"/>
+          </a:fillRef>
+          <a:effectRef idx="2">
+            <a:schemeClr val="accent1"/>
+          </a:effectRef>
+          <a:fontRef idx="minor">
+            <a:schemeClr val="lt1"/>
+          </a:fontRef>
+        </p:style>
+        <p:txBody>
+          <a:bodyPr rtlCol="0" anchor="ctr"/>
+          <a:lstStyle/>
+          <a:p>
+            <a:pPr algn="ctr"/>
+          </a:p>
+        </p:txBody>
+      </p:sp>
+      <p:sp>
+        <p:nvSpPr>
+          <p:cNvPr id="61" name="TextBox 60"/>
+          <p:cNvSpPr txBox="1"/>
+          <p:nvPr/>
+        </p:nvSpPr>
+        <p:spPr>
+          <a:xfrm>
+            <a:off x="10607040" y="4416552"/>
+            <a:ext cx="1371600" cy="228600"/>
+          </a:xfrm>
+          <a:prstGeom prst="rect">
+            <a:avLst/>
+          </a:prstGeom>
+          <a:noFill/>
+        </p:spPr>
+        <p:txBody>
+          <a:bodyPr wrap="none">
+            <a:spAutoFit/>
+          </a:bodyPr>
+          <a:lstStyle/>
+          <a:p>
+            <a:pPr>
+              <a:defRPr sz="700">
+                <a:solidFill>
+                  <a:srgbClr val="C44E52"/>
+                </a:solidFill>
+              </a:defRPr>
+            </a:pPr>
+            <a:r>
+              <a:t>OR 2.68 [1.20–6.02] P=0.017*</a:t>
+            </a:r>
+          </a:p>
+        </p:txBody>
+      </p:sp>
+      <p:sp>
+        <p:nvSpPr>
+          <p:cNvPr id="62" name="TextBox 61"/>
+          <p:cNvSpPr txBox="1"/>
+          <p:nvPr/>
+        </p:nvSpPr>
+        <p:spPr>
+          <a:xfrm>
+            <a:off x="274320" y="4643120"/>
+            <a:ext cx="3200400" cy="274320"/>
+          </a:xfrm>
+          <a:prstGeom prst="rect">
+            <a:avLst/>
+          </a:prstGeom>
+          <a:noFill/>
+        </p:spPr>
+        <p:txBody>
+          <a:bodyPr wrap="square">
+            <a:spAutoFit/>
+          </a:bodyPr>
+          <a:lstStyle/>
+          <a:p>
+            <a:pPr algn="r">
+              <a:defRPr sz="800"/>
+            </a:pPr>
+            <a:r>
+              <a:t>Twin + GA (per week)</a:t>
+            </a:r>
+          </a:p>
+        </p:txBody>
+      </p:sp>
+      <p:sp>
+        <p:nvSpPr>
+          <p:cNvPr id="63" name="Rectangle 62"/>
+          <p:cNvSpPr/>
+          <p:nvPr/>
+        </p:nvSpPr>
+        <p:spPr>
+          <a:xfrm>
+            <a:off x="4394082" y="4761230"/>
+            <a:ext cx="3023628" cy="38100"/>
+          </a:xfrm>
+          <a:prstGeom prst="rect">
+            <a:avLst/>
+          </a:prstGeom>
+          <a:solidFill>
+            <a:srgbClr val="C44E52"/>
+          </a:solidFill>
+          <a:ln>
+            <a:noFill/>
+          </a:ln>
+        </p:spPr>
+        <p:style>
+          <a:lnRef idx="1">
+            <a:schemeClr val="accent1"/>
+          </a:lnRef>
+          <a:fillRef idx="3">
+            <a:schemeClr val="accent1"/>
+          </a:fillRef>
+          <a:effectRef idx="2">
+            <a:schemeClr val="accent1"/>
+          </a:effectRef>
+          <a:fontRef idx="minor">
+            <a:schemeClr val="lt1"/>
+          </a:fontRef>
+        </p:style>
+        <p:txBody>
+          <a:bodyPr rtlCol="0" anchor="ctr"/>
+          <a:lstStyle/>
+          <a:p>
+            <a:pPr algn="ctr"/>
+          </a:p>
+        </p:txBody>
+      </p:sp>
+      <p:sp>
+        <p:nvSpPr>
+          <p:cNvPr id="64" name="Diamond 63"/>
+          <p:cNvSpPr/>
+          <p:nvPr/>
+        </p:nvSpPr>
+        <p:spPr>
+          <a:xfrm>
+            <a:off x="5266843" y="4725416"/>
+            <a:ext cx="109728" cy="109728"/>
+          </a:xfrm>
+          <a:prstGeom prst="diamond">
+            <a:avLst/>
+          </a:prstGeom>
+          <a:solidFill>
+            <a:srgbClr val="C44E52"/>
+          </a:solidFill>
+          <a:ln>
+            <a:solidFill>
+              <a:srgbClr val="C44E52"/>
+            </a:solidFill>
+          </a:ln>
+        </p:spPr>
+        <p:style>
+          <a:lnRef idx="1">
+            <a:schemeClr val="accent1"/>
+          </a:lnRef>
+          <a:fillRef idx="3">
+            <a:schemeClr val="accent1"/>
+          </a:fillRef>
+          <a:effectRef idx="2">
+            <a:schemeClr val="accent1"/>
+          </a:effectRef>
+          <a:fontRef idx="minor">
+            <a:schemeClr val="lt1"/>
+          </a:fontRef>
+        </p:style>
+        <p:txBody>
+          <a:bodyPr rtlCol="0" anchor="ctr"/>
+          <a:lstStyle/>
+          <a:p>
+            <a:pPr algn="ctr"/>
+          </a:p>
+        </p:txBody>
+      </p:sp>
+      <p:sp>
+        <p:nvSpPr>
+          <p:cNvPr id="65" name="TextBox 64"/>
+          <p:cNvSpPr txBox="1"/>
+          <p:nvPr/>
+        </p:nvSpPr>
+        <p:spPr>
+          <a:xfrm>
+            <a:off x="10607040" y="4670552"/>
+            <a:ext cx="1371600" cy="228600"/>
+          </a:xfrm>
+          <a:prstGeom prst="rect">
+            <a:avLst/>
+          </a:prstGeom>
+          <a:noFill/>
+        </p:spPr>
+        <p:txBody>
+          <a:bodyPr wrap="none">
+            <a:spAutoFit/>
+          </a:bodyPr>
+          <a:lstStyle/>
+          <a:p>
+            <a:pPr>
+              <a:defRPr sz="700">
+                <a:solidFill>
+                  <a:srgbClr val="C44E52"/>
+                </a:solidFill>
+              </a:defRPr>
+            </a:pPr>
+            <a:r>
+              <a:t>OR 2.75 [1.22–6.22] P=0.015*</a:t>
+            </a:r>
+          </a:p>
+        </p:txBody>
+      </p:sp>
+      <p:sp>
+        <p:nvSpPr>
+          <p:cNvPr id="66" name="TextBox 65"/>
+          <p:cNvSpPr txBox="1"/>
+          <p:nvPr/>
+        </p:nvSpPr>
+        <p:spPr>
+          <a:xfrm>
+            <a:off x="274320" y="4897120"/>
+            <a:ext cx="3200400" cy="274320"/>
+          </a:xfrm>
+          <a:prstGeom prst="rect">
+            <a:avLst/>
+          </a:prstGeom>
+          <a:noFill/>
+        </p:spPr>
+        <p:txBody>
+          <a:bodyPr wrap="square">
+            <a:spAutoFit/>
+          </a:bodyPr>
+          <a:lstStyle/>
+          <a:p>
+            <a:pPr algn="r">
+              <a:defRPr sz="800"/>
+            </a:pPr>
+            <a:r>
+              <a:t>Twin + BMI (per kg/m²)</a:t>
+            </a:r>
+          </a:p>
+        </p:txBody>
+      </p:sp>
+      <p:sp>
+        <p:nvSpPr>
+          <p:cNvPr id="67" name="Rectangle 66"/>
+          <p:cNvSpPr/>
+          <p:nvPr/>
+        </p:nvSpPr>
+        <p:spPr>
+          <a:xfrm>
+            <a:off x="4392706" y="5015230"/>
+            <a:ext cx="2947730" cy="38100"/>
+          </a:xfrm>
+          <a:prstGeom prst="rect">
+            <a:avLst/>
+          </a:prstGeom>
+          <a:solidFill>
+            <a:srgbClr val="C44E52"/>
+          </a:solidFill>
+          <a:ln>
+            <a:noFill/>
+          </a:ln>
+        </p:spPr>
+        <p:style>
+          <a:lnRef idx="1">
+            <a:schemeClr val="accent1"/>
+          </a:lnRef>
+          <a:fillRef idx="3">
+            <a:schemeClr val="accent1"/>
+          </a:fillRef>
+          <a:effectRef idx="2">
+            <a:schemeClr val="accent1"/>
+          </a:effectRef>
+          <a:fontRef idx="minor">
+            <a:schemeClr val="lt1"/>
+          </a:fontRef>
+        </p:style>
+        <p:txBody>
+          <a:bodyPr rtlCol="0" anchor="ctr"/>
+          <a:lstStyle/>
+          <a:p>
+            <a:pPr algn="ctr"/>
+          </a:p>
+        </p:txBody>
+      </p:sp>
+      <p:sp>
+        <p:nvSpPr>
+          <p:cNvPr id="68" name="Diamond 67"/>
+          <p:cNvSpPr/>
+          <p:nvPr/>
+        </p:nvSpPr>
+        <p:spPr>
+          <a:xfrm>
+            <a:off x="5248116" y="4979416"/>
+            <a:ext cx="109728" cy="109728"/>
+          </a:xfrm>
+          <a:prstGeom prst="diamond">
+            <a:avLst/>
+          </a:prstGeom>
+          <a:solidFill>
+            <a:srgbClr val="C44E52"/>
+          </a:solidFill>
+          <a:ln>
+            <a:solidFill>
+              <a:srgbClr val="C44E52"/>
+            </a:solidFill>
+          </a:ln>
+        </p:spPr>
+        <p:style>
+          <a:lnRef idx="1">
+            <a:schemeClr val="accent1"/>
+          </a:lnRef>
+          <a:fillRef idx="3">
+            <a:schemeClr val="accent1"/>
+          </a:fillRef>
+          <a:effectRef idx="2">
+            <a:schemeClr val="accent1"/>
+          </a:effectRef>
+          <a:fontRef idx="minor">
+            <a:schemeClr val="lt1"/>
+          </a:fontRef>
+        </p:style>
+        <p:txBody>
+          <a:bodyPr rtlCol="0" anchor="ctr"/>
+          <a:lstStyle/>
+          <a:p>
+            <a:pPr algn="ctr"/>
+          </a:p>
+        </p:txBody>
+      </p:sp>
+      <p:sp>
+        <p:nvSpPr>
+          <p:cNvPr id="69" name="TextBox 68"/>
+          <p:cNvSpPr txBox="1"/>
+          <p:nvPr/>
+        </p:nvSpPr>
+        <p:spPr>
+          <a:xfrm>
+            <a:off x="10607040" y="4924552"/>
+            <a:ext cx="1371600" cy="228600"/>
+          </a:xfrm>
+          <a:prstGeom prst="rect">
+            <a:avLst/>
+          </a:prstGeom>
+          <a:noFill/>
+        </p:spPr>
+        <p:txBody>
+          <a:bodyPr wrap="none">
+            <a:spAutoFit/>
+          </a:bodyPr>
+          <a:lstStyle/>
+          <a:p>
+            <a:pPr>
+              <a:defRPr sz="700">
+                <a:solidFill>
+                  <a:srgbClr val="C44E52"/>
+                </a:solidFill>
+              </a:defRPr>
+            </a:pPr>
+            <a:r>
+              <a:t>OR 2.72 [1.22–6.09] P=0.015*</a:t>
+            </a:r>
+          </a:p>
+        </p:txBody>
+      </p:sp>
+      <p:sp>
+        <p:nvSpPr>
+          <p:cNvPr id="70" name="TextBox 69"/>
+          <p:cNvSpPr txBox="1"/>
+          <p:nvPr/>
+        </p:nvSpPr>
+        <p:spPr>
+          <a:xfrm>
+            <a:off x="274320" y="5151120"/>
+            <a:ext cx="3200400" cy="274320"/>
+          </a:xfrm>
+          <a:prstGeom prst="rect">
+            <a:avLst/>
+          </a:prstGeom>
+          <a:noFill/>
+        </p:spPr>
+        <p:txBody>
+          <a:bodyPr wrap="square">
+            <a:spAutoFit/>
+          </a:bodyPr>
+          <a:lstStyle/>
+          <a:p>
+            <a:pPr algn="r">
+              <a:defRPr sz="800"/>
+            </a:pPr>
+            <a:r>
+              <a:t>Twin + Age (per year)</a:t>
+            </a:r>
+          </a:p>
+        </p:txBody>
+      </p:sp>
+      <p:sp>
+        <p:nvSpPr>
+          <p:cNvPr id="71" name="Rectangle 70"/>
+          <p:cNvSpPr/>
+          <p:nvPr/>
+        </p:nvSpPr>
+        <p:spPr>
+          <a:xfrm>
+            <a:off x="4467809" y="5269230"/>
+            <a:ext cx="3321347" cy="38100"/>
+          </a:xfrm>
+          <a:prstGeom prst="rect">
+            <a:avLst/>
+          </a:prstGeom>
+          <a:solidFill>
+            <a:srgbClr val="C44E52"/>
+          </a:solidFill>
+          <a:ln>
+            <a:noFill/>
+          </a:ln>
+        </p:spPr>
+        <p:style>
+          <a:lnRef idx="1">
+            <a:schemeClr val="accent1"/>
+          </a:lnRef>
+          <a:fillRef idx="3">
+            <a:schemeClr val="accent1"/>
+          </a:fillRef>
+          <a:effectRef idx="2">
+            <a:schemeClr val="accent1"/>
+          </a:effectRef>
+          <a:fontRef idx="minor">
+            <a:schemeClr val="lt1"/>
+          </a:fontRef>
+        </p:style>
+        <p:txBody>
+          <a:bodyPr rtlCol="0" anchor="ctr"/>
+          <a:lstStyle/>
+          <a:p>
+            <a:pPr algn="ctr"/>
+          </a:p>
+        </p:txBody>
+      </p:sp>
+      <p:sp>
+        <p:nvSpPr>
+          <p:cNvPr id="72" name="Diamond 71"/>
+          <p:cNvSpPr/>
+          <p:nvPr/>
+        </p:nvSpPr>
+        <p:spPr>
+          <a:xfrm>
+            <a:off x="5432332" y="5233416"/>
+            <a:ext cx="109728" cy="109728"/>
+          </a:xfrm>
+          <a:prstGeom prst="diamond">
+            <a:avLst/>
+          </a:prstGeom>
+          <a:solidFill>
+            <a:srgbClr val="C44E52"/>
+          </a:solidFill>
+          <a:ln>
+            <a:solidFill>
+              <a:srgbClr val="C44E52"/>
+            </a:solidFill>
+          </a:ln>
+        </p:spPr>
+        <p:style>
+          <a:lnRef idx="1">
+            <a:schemeClr val="accent1"/>
+          </a:lnRef>
+          <a:fillRef idx="3">
+            <a:schemeClr val="accent1"/>
+          </a:fillRef>
+          <a:effectRef idx="2">
+            <a:schemeClr val="accent1"/>
+          </a:effectRef>
+          <a:fontRef idx="minor">
+            <a:schemeClr val="lt1"/>
+          </a:fontRef>
+        </p:style>
+        <p:txBody>
+          <a:bodyPr rtlCol="0" anchor="ctr"/>
+          <a:lstStyle/>
+          <a:p>
+            <a:pPr algn="ctr"/>
+          </a:p>
+        </p:txBody>
+      </p:sp>
+      <p:sp>
+        <p:nvSpPr>
+          <p:cNvPr id="73" name="TextBox 72"/>
+          <p:cNvSpPr txBox="1"/>
+          <p:nvPr/>
+        </p:nvSpPr>
+        <p:spPr>
+          <a:xfrm>
+            <a:off x="10607040" y="5178552"/>
+            <a:ext cx="1371600" cy="228600"/>
+          </a:xfrm>
+          <a:prstGeom prst="rect">
+            <a:avLst/>
+          </a:prstGeom>
+          <a:noFill/>
+        </p:spPr>
+        <p:txBody>
+          <a:bodyPr wrap="none">
+            <a:spAutoFit/>
+          </a:bodyPr>
+          <a:lstStyle/>
+          <a:p>
+            <a:pPr>
+              <a:defRPr sz="700">
+                <a:solidFill>
+                  <a:srgbClr val="C44E52"/>
+                </a:solidFill>
+              </a:defRPr>
+            </a:pPr>
+            <a:r>
+              <a:t>OR 3.03 [1.34–6.84] P=0.008**</a:t>
+            </a:r>
+          </a:p>
+        </p:txBody>
+      </p:sp>
+      <p:sp>
+        <p:nvSpPr>
+          <p:cNvPr id="74" name="TextBox 73"/>
+          <p:cNvSpPr txBox="1"/>
+          <p:nvPr/>
+        </p:nvSpPr>
+        <p:spPr>
+          <a:xfrm>
+            <a:off x="274320" y="5405120"/>
+            <a:ext cx="3200400" cy="274320"/>
+          </a:xfrm>
+          <a:prstGeom prst="rect">
+            <a:avLst/>
+          </a:prstGeom>
+          <a:noFill/>
+        </p:spPr>
+        <p:txBody>
+          <a:bodyPr wrap="square">
+            <a:spAutoFit/>
+          </a:bodyPr>
+          <a:lstStyle/>
+          <a:p>
+            <a:pPr algn="r">
+              <a:defRPr sz="800"/>
+            </a:pPr>
+            <a:r>
+              <a:t>Crude (twin only)</a:t>
+            </a:r>
+          </a:p>
+        </p:txBody>
+      </p:sp>
+      <p:sp>
+        <p:nvSpPr>
+          <p:cNvPr id="75" name="Rectangle 74"/>
+          <p:cNvSpPr/>
+          <p:nvPr/>
+        </p:nvSpPr>
+        <p:spPr>
+          <a:xfrm>
+            <a:off x="4388600" y="5523230"/>
+            <a:ext cx="2920057" cy="38100"/>
+          </a:xfrm>
+          <a:prstGeom prst="rect">
+            <a:avLst/>
+          </a:prstGeom>
+          <a:solidFill>
+            <a:srgbClr val="C44E52"/>
+          </a:solidFill>
+          <a:ln>
+            <a:noFill/>
+          </a:ln>
+        </p:spPr>
+        <p:style>
+          <a:lnRef idx="1">
+            <a:schemeClr val="accent1"/>
+          </a:lnRef>
+          <a:fillRef idx="3">
+            <a:schemeClr val="accent1"/>
+          </a:fillRef>
+          <a:effectRef idx="2">
+            <a:schemeClr val="accent1"/>
+          </a:effectRef>
+          <a:fontRef idx="minor">
+            <a:schemeClr val="lt1"/>
+          </a:fontRef>
+        </p:style>
+        <p:txBody>
+          <a:bodyPr rtlCol="0" anchor="ctr"/>
+          <a:lstStyle/>
+          <a:p>
+            <a:pPr algn="ctr"/>
+          </a:p>
+        </p:txBody>
+      </p:sp>
+      <p:sp>
+        <p:nvSpPr>
+          <p:cNvPr id="76" name="Diamond 75"/>
+          <p:cNvSpPr/>
+          <p:nvPr/>
+        </p:nvSpPr>
+        <p:spPr>
+          <a:xfrm>
+            <a:off x="5236420" y="5487416"/>
+            <a:ext cx="109728" cy="109728"/>
+          </a:xfrm>
+          <a:prstGeom prst="diamond">
+            <a:avLst/>
+          </a:prstGeom>
+          <a:solidFill>
+            <a:srgbClr val="C44E52"/>
+          </a:solidFill>
+          <a:ln>
+            <a:solidFill>
+              <a:srgbClr val="C44E52"/>
+            </a:solidFill>
+          </a:ln>
+        </p:spPr>
+        <p:style>
+          <a:lnRef idx="1">
+            <a:schemeClr val="accent1"/>
+          </a:lnRef>
+          <a:fillRef idx="3">
+            <a:schemeClr val="accent1"/>
+          </a:fillRef>
+          <a:effectRef idx="2">
+            <a:schemeClr val="accent1"/>
+          </a:effectRef>
+          <a:fontRef idx="minor">
+            <a:schemeClr val="lt1"/>
+          </a:fontRef>
+        </p:style>
+        <p:txBody>
+          <a:bodyPr rtlCol="0" anchor="ctr"/>
+          <a:lstStyle/>
+          <a:p>
+            <a:pPr algn="ctr"/>
+          </a:p>
+        </p:txBody>
+      </p:sp>
+      <p:sp>
+        <p:nvSpPr>
+          <p:cNvPr id="77" name="TextBox 76"/>
+          <p:cNvSpPr txBox="1"/>
+          <p:nvPr/>
+        </p:nvSpPr>
+        <p:spPr>
+          <a:xfrm>
+            <a:off x="10607040" y="5432552"/>
+            <a:ext cx="1371600" cy="228600"/>
+          </a:xfrm>
+          <a:prstGeom prst="rect">
+            <a:avLst/>
+          </a:prstGeom>
+          <a:noFill/>
+        </p:spPr>
+        <p:txBody>
+          <a:bodyPr wrap="none">
+            <a:spAutoFit/>
+          </a:bodyPr>
+          <a:lstStyle/>
+          <a:p>
+            <a:pPr>
+              <a:defRPr sz="700">
+                <a:solidFill>
+                  <a:srgbClr val="C44E52"/>
+                </a:solidFill>
+              </a:defRPr>
+            </a:pPr>
+            <a:r>
+              <a:t>OR 2.70 [1.21–6.04] P=0.015*</a:t>
+            </a:r>
+          </a:p>
+        </p:txBody>
+      </p:sp>
+      <p:sp>
+        <p:nvSpPr>
+          <p:cNvPr id="78" name="TextBox 77"/>
+          <p:cNvSpPr txBox="1"/>
+          <p:nvPr/>
+        </p:nvSpPr>
+        <p:spPr>
+          <a:xfrm>
+            <a:off x="457200" y="6217920"/>
+            <a:ext cx="11277295" cy="548640"/>
+          </a:xfrm>
+          <a:prstGeom prst="rect">
+            <a:avLst/>
+          </a:prstGeom>
+          <a:noFill/>
+        </p:spPr>
+        <p:txBody>
+          <a:bodyPr wrap="square">
+            <a:spAutoFit/>
+          </a:bodyPr>
+          <a:lstStyle/>
+          <a:p>
+            <a:pPr algn="ctr">
+              <a:defRPr sz="1000" i="1"/>
+            </a:pPr>
+            <a:r>
+              <a:t>Robustness of twin effect across 18 covariate models for narrow-definition primary outcome. All models show P &lt; 0.05.</a:t>
             </a:r>
           </a:p>
         </p:txBody>
@@ -3642,8 +9921,8 @@
         </p:nvSpPr>
         <p:spPr>
           <a:xfrm>
-            <a:off x="457200" y="182880"/>
-            <a:ext cx="11277295" cy="548640"/>
+            <a:off x="274320" y="137160"/>
+            <a:ext cx="11612880" cy="457200"/>
           </a:xfrm>
           <a:prstGeom prst="rect">
             <a:avLst/>
@@ -3651,7 +9930,7 @@
           <a:noFill/>
         </p:spPr>
         <p:txBody>
-          <a:bodyPr wrap="none">
+          <a:bodyPr wrap="square">
             <a:spAutoFit/>
           </a:bodyPr>
           <a:lstStyle/>
@@ -3664,35 +9943,29 @@
               </a:defRPr>
             </a:pPr>
             <a:r>
-              <a:t>Figure 6. IONV Rates — Elective Low-Risk Subgroup</a:t>
-            </a:r>
-          </a:p>
-        </p:txBody>
-      </p:sp>
-      <p:pic>
-        <p:nvPicPr>
-          <p:cNvPr id="3" name="Picture 2" descr="fig1_rates_comparison.png"/>
-          <p:cNvPicPr>
-            <a:picLocks noChangeAspect="1"/>
-          </p:cNvPicPr>
-          <p:nvPr/>
-        </p:nvPicPr>
-        <p:blipFill>
-          <a:blip r:embed="rId2"/>
-          <a:stretch>
-            <a:fillRect/>
-          </a:stretch>
-        </p:blipFill>
-        <p:spPr>
-          <a:xfrm>
-            <a:off x="838047" y="1062126"/>
-            <a:ext cx="10515600" cy="4550868"/>
-          </a:xfrm>
-          <a:prstGeom prst="rect">
-            <a:avLst/>
-          </a:prstGeom>
-        </p:spPr>
-      </p:pic>
+              <a:t>Figure 6. IONV Rates — Elective Low-Risk Subgroup (N=663)</a:t>
+            </a:r>
+          </a:p>
+        </p:txBody>
+      </p:sp>
+      <p:graphicFrame>
+        <p:nvGraphicFramePr>
+          <p:cNvPr id="3" name="Chart 2"/>
+          <p:cNvGraphicFramePr>
+            <a:graphicFrameLocks noGrp="1"/>
+          </p:cNvGraphicFramePr>
+          <p:nvPr/>
+        </p:nvGraphicFramePr>
+        <p:xfrm>
+          <a:off x="914400" y="822960"/>
+          <a:ext cx="10058400" cy="5029200"/>
+        </p:xfrm>
+        <a:graphic>
+          <a:graphicData uri="http://schemas.openxmlformats.org/drawingml/2006/chart">
+            <c:chart xmlns:c="http://schemas.openxmlformats.org/drawingml/2006/chart" r:id="rId2"/>
+          </a:graphicData>
+        </a:graphic>
+      </p:graphicFrame>
       <p:sp>
         <p:nvSpPr>
           <p:cNvPr id="4" name="TextBox 3"/>
@@ -3701,8 +9974,8 @@
         </p:nvSpPr>
         <p:spPr>
           <a:xfrm>
-            <a:off x="457200" y="6126480"/>
-            <a:ext cx="11277295" cy="640080"/>
+            <a:off x="457200" y="6217920"/>
+            <a:ext cx="11277295" cy="548640"/>
           </a:xfrm>
           <a:prstGeom prst="rect">
             <a:avLst/>
@@ -3710,16 +9983,16 @@
           <a:noFill/>
         </p:spPr>
         <p:txBody>
-          <a:bodyPr wrap="none">
+          <a:bodyPr wrap="square">
             <a:spAutoFit/>
           </a:bodyPr>
           <a:lstStyle/>
           <a:p>
             <a:pPr algn="ctr">
-              <a:defRPr sz="1100" i="1"/>
+              <a:defRPr sz="1000" i="1"/>
             </a:pPr>
             <a:r>
-              <a:t>IONV rates in sensitivity subgroup (N=663) after excluding emergency CS, prior CS, HDP, preoperative steroid.</a:t>
+              <a:t>IONV rates in sensitivity subgroup after excluding emergency CS, prior CS, HDP, preoperative steroid. Singleton n=479, Twin n=184.</a:t>
             </a:r>
           </a:p>
         </p:txBody>
@@ -3750,8 +10023,8 @@
         </p:nvSpPr>
         <p:spPr>
           <a:xfrm>
-            <a:off x="457200" y="182880"/>
-            <a:ext cx="11277295" cy="548640"/>
+            <a:off x="274320" y="137160"/>
+            <a:ext cx="11612880" cy="457200"/>
           </a:xfrm>
           <a:prstGeom prst="rect">
             <a:avLst/>
@@ -3759,7 +10032,7 @@
           <a:noFill/>
         </p:spPr>
         <p:txBody>
-          <a:bodyPr wrap="none">
+          <a:bodyPr wrap="square">
             <a:spAutoFit/>
           </a:bodyPr>
           <a:lstStyle/>
@@ -3777,30 +10050,49 @@
           </a:p>
         </p:txBody>
       </p:sp>
-      <p:pic>
-        <p:nvPicPr>
-          <p:cNvPr id="3" name="Picture 2" descr="fig4_broad_vs_narrow.png"/>
-          <p:cNvPicPr>
-            <a:picLocks noChangeAspect="1"/>
-          </p:cNvPicPr>
-          <p:nvPr/>
-        </p:nvPicPr>
-        <p:blipFill>
-          <a:blip r:embed="rId2"/>
-          <a:stretch>
-            <a:fillRect/>
-          </a:stretch>
-        </p:blipFill>
-        <p:spPr>
-          <a:xfrm>
-            <a:off x="838047" y="1266305"/>
-            <a:ext cx="10515600" cy="4142509"/>
-          </a:xfrm>
-          <a:prstGeom prst="rect">
-            <a:avLst/>
-          </a:prstGeom>
-        </p:spPr>
-      </p:pic>
+      <p:sp>
+        <p:nvSpPr>
+          <p:cNvPr id="3" name="Rectangle 2"/>
+          <p:cNvSpPr/>
+          <p:nvPr/>
+        </p:nvSpPr>
+        <p:spPr>
+          <a:xfrm>
+            <a:off x="3714750" y="1097280"/>
+            <a:ext cx="19050" cy="1645920"/>
+          </a:xfrm>
+          <a:prstGeom prst="rect">
+            <a:avLst/>
+          </a:prstGeom>
+          <a:solidFill>
+            <a:srgbClr val="FF0000"/>
+          </a:solidFill>
+          <a:ln>
+            <a:noFill/>
+          </a:ln>
+        </p:spPr>
+        <p:style>
+          <a:lnRef idx="1">
+            <a:schemeClr val="accent1"/>
+          </a:lnRef>
+          <a:fillRef idx="3">
+            <a:schemeClr val="accent1"/>
+          </a:fillRef>
+          <a:effectRef idx="2">
+            <a:schemeClr val="accent1"/>
+          </a:effectRef>
+          <a:fontRef idx="minor">
+            <a:schemeClr val="lt1"/>
+          </a:fontRef>
+        </p:style>
+        <p:txBody>
+          <a:bodyPr rtlCol="0" anchor="ctr"/>
+          <a:lstStyle/>
+          <a:p>
+            <a:pPr algn="ctr"/>
+          </a:p>
+        </p:txBody>
+      </p:sp>
       <p:sp>
         <p:nvSpPr>
           <p:cNvPr id="4" name="TextBox 3"/>
@@ -3809,8 +10101,8 @@
         </p:nvSpPr>
         <p:spPr>
           <a:xfrm>
-            <a:off x="457200" y="6126480"/>
-            <a:ext cx="11277295" cy="640080"/>
+            <a:off x="3440430" y="2788920"/>
+            <a:ext cx="548640" cy="228600"/>
           </a:xfrm>
           <a:prstGeom prst="rect">
             <a:avLst/>
@@ -3824,10 +10116,692 @@
           <a:lstStyle/>
           <a:p>
             <a:pPr algn="ctr">
-              <a:defRPr sz="1100" i="1"/>
+              <a:defRPr sz="800">
+                <a:solidFill>
+                  <a:srgbClr val="FF0000"/>
+                </a:solidFill>
+              </a:defRPr>
             </a:pPr>
             <a:r>
-              <a:t>Adjusted odds ratios in sensitivity subgroup: aOR increased from 3.18 to 13.59 for narrow definition.</a:t>
+              <a:t>OR=1</a:t>
+            </a:r>
+          </a:p>
+        </p:txBody>
+      </p:sp>
+      <p:sp>
+        <p:nvSpPr>
+          <p:cNvPr id="5" name="TextBox 4"/>
+          <p:cNvSpPr txBox="1"/>
+          <p:nvPr/>
+        </p:nvSpPr>
+        <p:spPr>
+          <a:xfrm>
+            <a:off x="3657600" y="3017520"/>
+            <a:ext cx="6858000" cy="274320"/>
+          </a:xfrm>
+          <a:prstGeom prst="rect">
+            <a:avLst/>
+          </a:prstGeom>
+          <a:noFill/>
+        </p:spPr>
+        <p:txBody>
+          <a:bodyPr wrap="none">
+            <a:spAutoFit/>
+          </a:bodyPr>
+          <a:lstStyle/>
+          <a:p>
+            <a:pPr algn="ctr">
+              <a:defRPr sz="1000"/>
+            </a:pPr>
+            <a:r>
+              <a:t>Adjusted Odds Ratio (95% CI)</a:t>
+            </a:r>
+          </a:p>
+        </p:txBody>
+      </p:sp>
+      <p:sp>
+        <p:nvSpPr>
+          <p:cNvPr id="6" name="TextBox 5"/>
+          <p:cNvSpPr txBox="1"/>
+          <p:nvPr/>
+        </p:nvSpPr>
+        <p:spPr>
+          <a:xfrm>
+            <a:off x="274320" y="1165860"/>
+            <a:ext cx="3200400" cy="274320"/>
+          </a:xfrm>
+          <a:prstGeom prst="rect">
+            <a:avLst/>
+          </a:prstGeom>
+          <a:noFill/>
+        </p:spPr>
+        <p:txBody>
+          <a:bodyPr wrap="square">
+            <a:spAutoFit/>
+          </a:bodyPr>
+          <a:lstStyle/>
+          <a:p>
+            <a:pPr algn="r">
+              <a:defRPr sz="800"/>
+            </a:pPr>
+            <a:r>
+              <a:t>Narrow: 5-HT3 + before delivery phase</a:t>
+            </a:r>
+          </a:p>
+        </p:txBody>
+      </p:sp>
+      <p:sp>
+        <p:nvSpPr>
+          <p:cNvPr id="7" name="Rectangle 6"/>
+          <p:cNvSpPr/>
+          <p:nvPr/>
+        </p:nvSpPr>
+        <p:spPr>
+          <a:xfrm>
+            <a:off x="3698811" y="1283970"/>
+            <a:ext cx="6816789" cy="38100"/>
+          </a:xfrm>
+          <a:prstGeom prst="rect">
+            <a:avLst/>
+          </a:prstGeom>
+          <a:solidFill>
+            <a:srgbClr val="4C72B0"/>
+          </a:solidFill>
+          <a:ln>
+            <a:noFill/>
+          </a:ln>
+        </p:spPr>
+        <p:style>
+          <a:lnRef idx="1">
+            <a:schemeClr val="accent1"/>
+          </a:lnRef>
+          <a:fillRef idx="3">
+            <a:schemeClr val="accent1"/>
+          </a:fillRef>
+          <a:effectRef idx="2">
+            <a:schemeClr val="accent1"/>
+          </a:effectRef>
+          <a:fontRef idx="minor">
+            <a:schemeClr val="lt1"/>
+          </a:fontRef>
+        </p:style>
+        <p:txBody>
+          <a:bodyPr rtlCol="0" anchor="ctr"/>
+          <a:lstStyle/>
+          <a:p>
+            <a:pPr algn="ctr"/>
+          </a:p>
+        </p:txBody>
+      </p:sp>
+      <p:sp>
+        <p:nvSpPr>
+          <p:cNvPr id="8" name="Diamond 7"/>
+          <p:cNvSpPr/>
+          <p:nvPr/>
+        </p:nvSpPr>
+        <p:spPr>
+          <a:xfrm>
+            <a:off x="4411014" y="1248156"/>
+            <a:ext cx="109728" cy="109728"/>
+          </a:xfrm>
+          <a:prstGeom prst="diamond">
+            <a:avLst/>
+          </a:prstGeom>
+          <a:solidFill>
+            <a:srgbClr val="4C72B0"/>
+          </a:solidFill>
+          <a:ln>
+            <a:solidFill>
+              <a:srgbClr val="4C72B0"/>
+            </a:solidFill>
+          </a:ln>
+        </p:spPr>
+        <p:style>
+          <a:lnRef idx="1">
+            <a:schemeClr val="accent1"/>
+          </a:lnRef>
+          <a:fillRef idx="3">
+            <a:schemeClr val="accent1"/>
+          </a:fillRef>
+          <a:effectRef idx="2">
+            <a:schemeClr val="accent1"/>
+          </a:effectRef>
+          <a:fontRef idx="minor">
+            <a:schemeClr val="lt1"/>
+          </a:fontRef>
+        </p:style>
+        <p:txBody>
+          <a:bodyPr rtlCol="0" anchor="ctr"/>
+          <a:lstStyle/>
+          <a:p>
+            <a:pPr algn="ctr"/>
+          </a:p>
+        </p:txBody>
+      </p:sp>
+      <p:sp>
+        <p:nvSpPr>
+          <p:cNvPr id="9" name="TextBox 8"/>
+          <p:cNvSpPr txBox="1"/>
+          <p:nvPr/>
+        </p:nvSpPr>
+        <p:spPr>
+          <a:xfrm>
+            <a:off x="10607040" y="1193292"/>
+            <a:ext cx="1371600" cy="228600"/>
+          </a:xfrm>
+          <a:prstGeom prst="rect">
+            <a:avLst/>
+          </a:prstGeom>
+          <a:noFill/>
+        </p:spPr>
+        <p:txBody>
+          <a:bodyPr wrap="none">
+            <a:spAutoFit/>
+          </a:bodyPr>
+          <a:lstStyle/>
+          <a:p>
+            <a:pPr>
+              <a:defRPr sz="700">
+                <a:solidFill>
+                  <a:srgbClr val="4C72B0"/>
+                </a:solidFill>
+              </a:defRPr>
+            </a:pPr>
+            <a:r>
+              <a:t>OR 14.14 [0.72–277.39] P=0.081</a:t>
+            </a:r>
+          </a:p>
+        </p:txBody>
+      </p:sp>
+      <p:sp>
+        <p:nvSpPr>
+          <p:cNvPr id="10" name="TextBox 9"/>
+          <p:cNvSpPr txBox="1"/>
+          <p:nvPr/>
+        </p:nvSpPr>
+        <p:spPr>
+          <a:xfrm>
+            <a:off x="274320" y="1577340"/>
+            <a:ext cx="3200400" cy="274320"/>
+          </a:xfrm>
+          <a:prstGeom prst="rect">
+            <a:avLst/>
+          </a:prstGeom>
+          <a:noFill/>
+        </p:spPr>
+        <p:txBody>
+          <a:bodyPr wrap="square">
+            <a:spAutoFit/>
+          </a:bodyPr>
+          <a:lstStyle/>
+          <a:p>
+            <a:pPr algn="r">
+              <a:defRPr sz="800"/>
+            </a:pPr>
+            <a:r>
+              <a:t>Narrow: 5-HT3 antagonist (any phase)</a:t>
+            </a:r>
+          </a:p>
+        </p:txBody>
+      </p:sp>
+      <p:sp>
+        <p:nvSpPr>
+          <p:cNvPr id="11" name="Rectangle 10"/>
+          <p:cNvSpPr/>
+          <p:nvPr/>
+        </p:nvSpPr>
+        <p:spPr>
+          <a:xfrm>
+            <a:off x="3757096" y="1695450"/>
+            <a:ext cx="5960742" cy="38100"/>
+          </a:xfrm>
+          <a:prstGeom prst="rect">
+            <a:avLst/>
+          </a:prstGeom>
+          <a:solidFill>
+            <a:srgbClr val="C44E52"/>
+          </a:solidFill>
+          <a:ln>
+            <a:noFill/>
+          </a:ln>
+        </p:spPr>
+        <p:style>
+          <a:lnRef idx="1">
+            <a:schemeClr val="accent1"/>
+          </a:lnRef>
+          <a:fillRef idx="3">
+            <a:schemeClr val="accent1"/>
+          </a:fillRef>
+          <a:effectRef idx="2">
+            <a:schemeClr val="accent1"/>
+          </a:effectRef>
+          <a:fontRef idx="minor">
+            <a:schemeClr val="lt1"/>
+          </a:fontRef>
+        </p:style>
+        <p:txBody>
+          <a:bodyPr rtlCol="0" anchor="ctr"/>
+          <a:lstStyle/>
+          <a:p>
+            <a:pPr algn="ctr"/>
+          </a:p>
+        </p:txBody>
+      </p:sp>
+      <p:sp>
+        <p:nvSpPr>
+          <p:cNvPr id="12" name="Diamond 11"/>
+          <p:cNvSpPr/>
+          <p:nvPr/>
+        </p:nvSpPr>
+        <p:spPr>
+          <a:xfrm>
+            <a:off x="4379248" y="1659636"/>
+            <a:ext cx="109728" cy="109728"/>
+          </a:xfrm>
+          <a:prstGeom prst="diamond">
+            <a:avLst/>
+          </a:prstGeom>
+          <a:solidFill>
+            <a:srgbClr val="C44E52"/>
+          </a:solidFill>
+          <a:ln>
+            <a:solidFill>
+              <a:srgbClr val="C44E52"/>
+            </a:solidFill>
+          </a:ln>
+        </p:spPr>
+        <p:style>
+          <a:lnRef idx="1">
+            <a:schemeClr val="accent1"/>
+          </a:lnRef>
+          <a:fillRef idx="3">
+            <a:schemeClr val="accent1"/>
+          </a:fillRef>
+          <a:effectRef idx="2">
+            <a:schemeClr val="accent1"/>
+          </a:effectRef>
+          <a:fontRef idx="minor">
+            <a:schemeClr val="lt1"/>
+          </a:fontRef>
+        </p:style>
+        <p:txBody>
+          <a:bodyPr rtlCol="0" anchor="ctr"/>
+          <a:lstStyle/>
+          <a:p>
+            <a:pPr algn="ctr"/>
+          </a:p>
+        </p:txBody>
+      </p:sp>
+      <p:sp>
+        <p:nvSpPr>
+          <p:cNvPr id="13" name="TextBox 12"/>
+          <p:cNvSpPr txBox="1"/>
+          <p:nvPr/>
+        </p:nvSpPr>
+        <p:spPr>
+          <a:xfrm>
+            <a:off x="10607040" y="1604772"/>
+            <a:ext cx="1371600" cy="228600"/>
+          </a:xfrm>
+          <a:prstGeom prst="rect">
+            <a:avLst/>
+          </a:prstGeom>
+          <a:noFill/>
+        </p:spPr>
+        <p:txBody>
+          <a:bodyPr wrap="none">
+            <a:spAutoFit/>
+          </a:bodyPr>
+          <a:lstStyle/>
+          <a:p>
+            <a:pPr>
+              <a:defRPr sz="700">
+                <a:solidFill>
+                  <a:srgbClr val="C44E52"/>
+                </a:solidFill>
+              </a:defRPr>
+            </a:pPr>
+            <a:r>
+              <a:t>OR 13.59 [1.74–106.04] P=0.013*</a:t>
+            </a:r>
+          </a:p>
+        </p:txBody>
+      </p:sp>
+      <p:sp>
+        <p:nvSpPr>
+          <p:cNvPr id="14" name="TextBox 13"/>
+          <p:cNvSpPr txBox="1"/>
+          <p:nvPr/>
+        </p:nvSpPr>
+        <p:spPr>
+          <a:xfrm>
+            <a:off x="274320" y="1988820"/>
+            <a:ext cx="3200400" cy="274320"/>
+          </a:xfrm>
+          <a:prstGeom prst="rect">
+            <a:avLst/>
+          </a:prstGeom>
+          <a:noFill/>
+        </p:spPr>
+        <p:txBody>
+          <a:bodyPr wrap="square">
+            <a:spAutoFit/>
+          </a:bodyPr>
+          <a:lstStyle/>
+          <a:p>
+            <a:pPr algn="r">
+              <a:defRPr sz="800"/>
+            </a:pPr>
+            <a:r>
+              <a:t>Broad: antiemetic before delivery</a:t>
+            </a:r>
+          </a:p>
+        </p:txBody>
+      </p:sp>
+      <p:sp>
+        <p:nvSpPr>
+          <p:cNvPr id="15" name="Rectangle 14"/>
+          <p:cNvSpPr/>
+          <p:nvPr/>
+        </p:nvSpPr>
+        <p:spPr>
+          <a:xfrm>
+            <a:off x="3669892" y="2106930"/>
+            <a:ext cx="117046" cy="38100"/>
+          </a:xfrm>
+          <a:prstGeom prst="rect">
+            <a:avLst/>
+          </a:prstGeom>
+          <a:solidFill>
+            <a:srgbClr val="4C72B0"/>
+          </a:solidFill>
+          <a:ln>
+            <a:noFill/>
+          </a:ln>
+        </p:spPr>
+        <p:style>
+          <a:lnRef idx="1">
+            <a:schemeClr val="accent1"/>
+          </a:lnRef>
+          <a:fillRef idx="3">
+            <a:schemeClr val="accent1"/>
+          </a:fillRef>
+          <a:effectRef idx="2">
+            <a:schemeClr val="accent1"/>
+          </a:effectRef>
+          <a:fontRef idx="minor">
+            <a:schemeClr val="lt1"/>
+          </a:fontRef>
+        </p:style>
+        <p:txBody>
+          <a:bodyPr rtlCol="0" anchor="ctr"/>
+          <a:lstStyle/>
+          <a:p>
+            <a:pPr algn="ctr"/>
+          </a:p>
+        </p:txBody>
+      </p:sp>
+      <p:sp>
+        <p:nvSpPr>
+          <p:cNvPr id="16" name="Diamond 15"/>
+          <p:cNvSpPr/>
+          <p:nvPr/>
+        </p:nvSpPr>
+        <p:spPr>
+          <a:xfrm>
+            <a:off x="3642610" y="2071116"/>
+            <a:ext cx="109728" cy="109728"/>
+          </a:xfrm>
+          <a:prstGeom prst="diamond">
+            <a:avLst/>
+          </a:prstGeom>
+          <a:solidFill>
+            <a:srgbClr val="4C72B0"/>
+          </a:solidFill>
+          <a:ln>
+            <a:solidFill>
+              <a:srgbClr val="4C72B0"/>
+            </a:solidFill>
+          </a:ln>
+        </p:spPr>
+        <p:style>
+          <a:lnRef idx="1">
+            <a:schemeClr val="accent1"/>
+          </a:lnRef>
+          <a:fillRef idx="3">
+            <a:schemeClr val="accent1"/>
+          </a:fillRef>
+          <a:effectRef idx="2">
+            <a:schemeClr val="accent1"/>
+          </a:effectRef>
+          <a:fontRef idx="minor">
+            <a:schemeClr val="lt1"/>
+          </a:fontRef>
+        </p:style>
+        <p:txBody>
+          <a:bodyPr rtlCol="0" anchor="ctr"/>
+          <a:lstStyle/>
+          <a:p>
+            <a:pPr algn="ctr"/>
+          </a:p>
+        </p:txBody>
+      </p:sp>
+      <p:sp>
+        <p:nvSpPr>
+          <p:cNvPr id="17" name="TextBox 16"/>
+          <p:cNvSpPr txBox="1"/>
+          <p:nvPr/>
+        </p:nvSpPr>
+        <p:spPr>
+          <a:xfrm>
+            <a:off x="10607040" y="2016252"/>
+            <a:ext cx="1371600" cy="228600"/>
+          </a:xfrm>
+          <a:prstGeom prst="rect">
+            <a:avLst/>
+          </a:prstGeom>
+          <a:noFill/>
+        </p:spPr>
+        <p:txBody>
+          <a:bodyPr wrap="none">
+            <a:spAutoFit/>
+          </a:bodyPr>
+          <a:lstStyle/>
+          <a:p>
+            <a:pPr>
+              <a:defRPr sz="700">
+                <a:solidFill>
+                  <a:srgbClr val="4C72B0"/>
+                </a:solidFill>
+              </a:defRPr>
+            </a:pPr>
+            <a:r>
+              <a:t>OR 0.70 [0.22–2.26] P=0.549</a:t>
+            </a:r>
+          </a:p>
+        </p:txBody>
+      </p:sp>
+      <p:sp>
+        <p:nvSpPr>
+          <p:cNvPr id="18" name="TextBox 17"/>
+          <p:cNvSpPr txBox="1"/>
+          <p:nvPr/>
+        </p:nvSpPr>
+        <p:spPr>
+          <a:xfrm>
+            <a:off x="274320" y="2400300"/>
+            <a:ext cx="3200400" cy="274320"/>
+          </a:xfrm>
+          <a:prstGeom prst="rect">
+            <a:avLst/>
+          </a:prstGeom>
+          <a:noFill/>
+        </p:spPr>
+        <p:txBody>
+          <a:bodyPr wrap="square">
+            <a:spAutoFit/>
+          </a:bodyPr>
+          <a:lstStyle/>
+          <a:p>
+            <a:pPr algn="r">
+              <a:defRPr sz="800"/>
+            </a:pPr>
+            <a:r>
+              <a:t>Broad: any antiemetic (any phase)</a:t>
+            </a:r>
+          </a:p>
+        </p:txBody>
+      </p:sp>
+      <p:sp>
+        <p:nvSpPr>
+          <p:cNvPr id="19" name="Rectangle 18"/>
+          <p:cNvSpPr/>
+          <p:nvPr/>
+        </p:nvSpPr>
+        <p:spPr>
+          <a:xfrm>
+            <a:off x="3680261" y="2518410"/>
+            <a:ext cx="38055" cy="38100"/>
+          </a:xfrm>
+          <a:prstGeom prst="rect">
+            <a:avLst/>
+          </a:prstGeom>
+          <a:solidFill>
+            <a:srgbClr val="4C72B0"/>
+          </a:solidFill>
+          <a:ln>
+            <a:noFill/>
+          </a:ln>
+        </p:spPr>
+        <p:style>
+          <a:lnRef idx="1">
+            <a:schemeClr val="accent1"/>
+          </a:lnRef>
+          <a:fillRef idx="3">
+            <a:schemeClr val="accent1"/>
+          </a:fillRef>
+          <a:effectRef idx="2">
+            <a:schemeClr val="accent1"/>
+          </a:effectRef>
+          <a:fontRef idx="minor">
+            <a:schemeClr val="lt1"/>
+          </a:fontRef>
+        </p:style>
+        <p:txBody>
+          <a:bodyPr rtlCol="0" anchor="ctr"/>
+          <a:lstStyle/>
+          <a:p>
+            <a:pPr algn="ctr"/>
+          </a:p>
+        </p:txBody>
+      </p:sp>
+      <p:sp>
+        <p:nvSpPr>
+          <p:cNvPr id="20" name="Diamond 19"/>
+          <p:cNvSpPr/>
+          <p:nvPr/>
+        </p:nvSpPr>
+        <p:spPr>
+          <a:xfrm>
+            <a:off x="3639829" y="2482596"/>
+            <a:ext cx="109728" cy="109728"/>
+          </a:xfrm>
+          <a:prstGeom prst="diamond">
+            <a:avLst/>
+          </a:prstGeom>
+          <a:solidFill>
+            <a:srgbClr val="4C72B0"/>
+          </a:solidFill>
+          <a:ln>
+            <a:solidFill>
+              <a:srgbClr val="4C72B0"/>
+            </a:solidFill>
+          </a:ln>
+        </p:spPr>
+        <p:style>
+          <a:lnRef idx="1">
+            <a:schemeClr val="accent1"/>
+          </a:lnRef>
+          <a:fillRef idx="3">
+            <a:schemeClr val="accent1"/>
+          </a:fillRef>
+          <a:effectRef idx="2">
+            <a:schemeClr val="accent1"/>
+          </a:effectRef>
+          <a:fontRef idx="minor">
+            <a:schemeClr val="lt1"/>
+          </a:fontRef>
+        </p:style>
+        <p:txBody>
+          <a:bodyPr rtlCol="0" anchor="ctr"/>
+          <a:lstStyle/>
+          <a:p>
+            <a:pPr algn="ctr"/>
+          </a:p>
+        </p:txBody>
+      </p:sp>
+      <p:sp>
+        <p:nvSpPr>
+          <p:cNvPr id="21" name="TextBox 20"/>
+          <p:cNvSpPr txBox="1"/>
+          <p:nvPr/>
+        </p:nvSpPr>
+        <p:spPr>
+          <a:xfrm>
+            <a:off x="10607040" y="2427732"/>
+            <a:ext cx="1371600" cy="228600"/>
+          </a:xfrm>
+          <a:prstGeom prst="rect">
+            <a:avLst/>
+          </a:prstGeom>
+          <a:noFill/>
+        </p:spPr>
+        <p:txBody>
+          <a:bodyPr wrap="none">
+            <a:spAutoFit/>
+          </a:bodyPr>
+          <a:lstStyle/>
+          <a:p>
+            <a:pPr>
+              <a:defRPr sz="700">
+                <a:solidFill>
+                  <a:srgbClr val="4C72B0"/>
+                </a:solidFill>
+              </a:defRPr>
+            </a:pPr>
+            <a:r>
+              <a:t>OR 0.65 [0.40–1.06] P=0.086</a:t>
+            </a:r>
+          </a:p>
+        </p:txBody>
+      </p:sp>
+      <p:sp>
+        <p:nvSpPr>
+          <p:cNvPr id="22" name="TextBox 21"/>
+          <p:cNvSpPr txBox="1"/>
+          <p:nvPr/>
+        </p:nvSpPr>
+        <p:spPr>
+          <a:xfrm>
+            <a:off x="457200" y="6217920"/>
+            <a:ext cx="11277295" cy="548640"/>
+          </a:xfrm>
+          <a:prstGeom prst="rect">
+            <a:avLst/>
+          </a:prstGeom>
+          <a:noFill/>
+        </p:spPr>
+        <p:txBody>
+          <a:bodyPr wrap="square">
+            <a:spAutoFit/>
+          </a:bodyPr>
+          <a:lstStyle/>
+          <a:p>
+            <a:pPr algn="ctr">
+              <a:defRPr sz="1000" i="1"/>
+            </a:pPr>
+            <a:r>
+              <a:t>Adjusted odds ratios in sensitivity subgroup (N=663). Narrow-definition aOR increased from 3.18 (full) to 13.59 (subgroup).</a:t>
             </a:r>
           </a:p>
         </p:txBody>

--- a/yago_ionv/figures_strobe.pptx
+++ b/yago_ionv/figures_strobe.pptx
@@ -12,6 +12,7 @@
     <p:sldId id="260" r:id="rId11"/>
     <p:sldId id="261" r:id="rId12"/>
     <p:sldId id="262" r:id="rId13"/>
+    <p:sldId id="263" r:id="rId14"/>
   </p:sldIdLst>
   <p:sldSz cx="12191695" cy="6858000" type="screen4x3"/>
   <p:notesSz cx="6858000" cy="9144000"/>
@@ -10814,6 +10815,2904 @@
 </p:sld>
 </file>
 
+<file path=ppt/slides/slide8.xml><?xml version="1.0" encoding="utf-8"?>
+<p:sld xmlns:a="http://schemas.openxmlformats.org/drawingml/2006/main" xmlns:p="http://schemas.openxmlformats.org/presentationml/2006/main" xmlns:r="http://schemas.openxmlformats.org/officeDocument/2006/relationships">
+  <p:cSld>
+    <p:spTree>
+      <p:nvGrpSpPr>
+        <p:cNvPr id="1" name=""/>
+        <p:cNvGrpSpPr/>
+        <p:nvPr/>
+      </p:nvGrpSpPr>
+      <p:grpSpPr/>
+      <p:sp>
+        <p:nvSpPr>
+          <p:cNvPr id="2" name="TextBox 1"/>
+          <p:cNvSpPr txBox="1"/>
+          <p:nvPr/>
+        </p:nvSpPr>
+        <p:spPr>
+          <a:xfrm>
+            <a:off x="274320" y="137160"/>
+            <a:ext cx="11612880" cy="457200"/>
+          </a:xfrm>
+          <a:prstGeom prst="rect">
+            <a:avLst/>
+          </a:prstGeom>
+          <a:noFill/>
+        </p:spPr>
+        <p:txBody>
+          <a:bodyPr wrap="square">
+            <a:spAutoFit/>
+          </a:bodyPr>
+          <a:lstStyle/>
+          <a:p>
+            <a:pPr algn="ctr">
+              <a:defRPr sz="2000" b="1">
+                <a:solidFill>
+                  <a:srgbClr val="1A237E"/>
+                </a:solidFill>
+              </a:defRPr>
+            </a:pPr>
+            <a:r>
+              <a:t>Figure 8. Wald vs Bootstrap Confidence Interval Comparison</a:t>
+            </a:r>
+          </a:p>
+        </p:txBody>
+      </p:sp>
+      <p:sp>
+        <p:nvSpPr>
+          <p:cNvPr id="3" name="TextBox 2"/>
+          <p:cNvSpPr txBox="1"/>
+          <p:nvPr/>
+        </p:nvSpPr>
+        <p:spPr>
+          <a:xfrm>
+            <a:off x="457200" y="6217920"/>
+            <a:ext cx="11277295" cy="548640"/>
+          </a:xfrm>
+          <a:prstGeom prst="rect">
+            <a:avLst/>
+          </a:prstGeom>
+          <a:noFill/>
+        </p:spPr>
+        <p:txBody>
+          <a:bodyPr wrap="square">
+            <a:spAutoFit/>
+          </a:bodyPr>
+          <a:lstStyle/>
+          <a:p>
+            <a:pPr algn="ctr">
+              <a:defRPr sz="1000" i="1"/>
+            </a:pPr>
+            <a:r>
+              <a:t>Stratified bootstrap (10,000 resamples) validation of Wald-based CIs. BCa CI for narrow primary (full cohort) excludes 1, confirming robust twin effect.</a:t>
+            </a:r>
+          </a:p>
+        </p:txBody>
+      </p:sp>
+      <p:sp>
+        <p:nvSpPr>
+          <p:cNvPr id="4" name="Rectangle 3"/>
+          <p:cNvSpPr/>
+          <p:nvPr/>
+        </p:nvSpPr>
+        <p:spPr>
+          <a:xfrm>
+            <a:off x="1371600" y="914400"/>
+            <a:ext cx="1371600" cy="411480"/>
+          </a:xfrm>
+          <a:prstGeom prst="rect">
+            <a:avLst/>
+          </a:prstGeom>
+          <a:solidFill>
+            <a:srgbClr val="1A237E"/>
+          </a:solidFill>
+          <a:ln>
+            <a:solidFill>
+              <a:srgbClr val="FFFFFF"/>
+            </a:solidFill>
+          </a:ln>
+        </p:spPr>
+        <p:style>
+          <a:lnRef idx="1">
+            <a:schemeClr val="accent1"/>
+          </a:lnRef>
+          <a:fillRef idx="3">
+            <a:schemeClr val="accent1"/>
+          </a:fillRef>
+          <a:effectRef idx="2">
+            <a:schemeClr val="accent1"/>
+          </a:effectRef>
+          <a:fontRef idx="minor">
+            <a:schemeClr val="lt1"/>
+          </a:fontRef>
+        </p:style>
+        <p:txBody>
+          <a:bodyPr rtlCol="0" anchor="ctr" wrap="square"/>
+          <a:lstStyle/>
+          <a:p>
+            <a:pPr algn="ctr"/>
+            <a:r>
+              <a:rPr sz="1000" b="1">
+                <a:solidFill>
+                  <a:srgbClr val="FFFFFF"/>
+                </a:solidFill>
+              </a:rPr>
+              <a:t>Cohort</a:t>
+            </a:r>
+          </a:p>
+        </p:txBody>
+      </p:sp>
+      <p:sp>
+        <p:nvSpPr>
+          <p:cNvPr id="5" name="Rectangle 4"/>
+          <p:cNvSpPr/>
+          <p:nvPr/>
+        </p:nvSpPr>
+        <p:spPr>
+          <a:xfrm>
+            <a:off x="2743200" y="914400"/>
+            <a:ext cx="1828800" cy="411480"/>
+          </a:xfrm>
+          <a:prstGeom prst="rect">
+            <a:avLst/>
+          </a:prstGeom>
+          <a:solidFill>
+            <a:srgbClr val="1A237E"/>
+          </a:solidFill>
+          <a:ln>
+            <a:solidFill>
+              <a:srgbClr val="FFFFFF"/>
+            </a:solidFill>
+          </a:ln>
+        </p:spPr>
+        <p:style>
+          <a:lnRef idx="1">
+            <a:schemeClr val="accent1"/>
+          </a:lnRef>
+          <a:fillRef idx="3">
+            <a:schemeClr val="accent1"/>
+          </a:fillRef>
+          <a:effectRef idx="2">
+            <a:schemeClr val="accent1"/>
+          </a:effectRef>
+          <a:fontRef idx="minor">
+            <a:schemeClr val="lt1"/>
+          </a:fontRef>
+        </p:style>
+        <p:txBody>
+          <a:bodyPr rtlCol="0" anchor="ctr" wrap="square"/>
+          <a:lstStyle/>
+          <a:p>
+            <a:pPr algn="ctr"/>
+            <a:r>
+              <a:rPr sz="1000" b="1">
+                <a:solidFill>
+                  <a:srgbClr val="FFFFFF"/>
+                </a:solidFill>
+              </a:rPr>
+              <a:t>Outcome</a:t>
+            </a:r>
+          </a:p>
+        </p:txBody>
+      </p:sp>
+      <p:sp>
+        <p:nvSpPr>
+          <p:cNvPr id="6" name="Rectangle 5"/>
+          <p:cNvSpPr/>
+          <p:nvPr/>
+        </p:nvSpPr>
+        <p:spPr>
+          <a:xfrm>
+            <a:off x="4572000" y="914400"/>
+            <a:ext cx="914400" cy="411480"/>
+          </a:xfrm>
+          <a:prstGeom prst="rect">
+            <a:avLst/>
+          </a:prstGeom>
+          <a:solidFill>
+            <a:srgbClr val="1A237E"/>
+          </a:solidFill>
+          <a:ln>
+            <a:solidFill>
+              <a:srgbClr val="FFFFFF"/>
+            </a:solidFill>
+          </a:ln>
+        </p:spPr>
+        <p:style>
+          <a:lnRef idx="1">
+            <a:schemeClr val="accent1"/>
+          </a:lnRef>
+          <a:fillRef idx="3">
+            <a:schemeClr val="accent1"/>
+          </a:fillRef>
+          <a:effectRef idx="2">
+            <a:schemeClr val="accent1"/>
+          </a:effectRef>
+          <a:fontRef idx="minor">
+            <a:schemeClr val="lt1"/>
+          </a:fontRef>
+        </p:style>
+        <p:txBody>
+          <a:bodyPr rtlCol="0" anchor="ctr" wrap="square"/>
+          <a:lstStyle/>
+          <a:p>
+            <a:pPr algn="ctr"/>
+            <a:r>
+              <a:rPr sz="1000" b="1">
+                <a:solidFill>
+                  <a:srgbClr val="FFFFFF"/>
+                </a:solidFill>
+              </a:rPr>
+              <a:t>aOR</a:t>
+            </a:r>
+          </a:p>
+        </p:txBody>
+      </p:sp>
+      <p:sp>
+        <p:nvSpPr>
+          <p:cNvPr id="7" name="Rectangle 6"/>
+          <p:cNvSpPr/>
+          <p:nvPr/>
+        </p:nvSpPr>
+        <p:spPr>
+          <a:xfrm>
+            <a:off x="5486400" y="914400"/>
+            <a:ext cx="2011680" cy="411480"/>
+          </a:xfrm>
+          <a:prstGeom prst="rect">
+            <a:avLst/>
+          </a:prstGeom>
+          <a:solidFill>
+            <a:srgbClr val="1A237E"/>
+          </a:solidFill>
+          <a:ln>
+            <a:solidFill>
+              <a:srgbClr val="FFFFFF"/>
+            </a:solidFill>
+          </a:ln>
+        </p:spPr>
+        <p:style>
+          <a:lnRef idx="1">
+            <a:schemeClr val="accent1"/>
+          </a:lnRef>
+          <a:fillRef idx="3">
+            <a:schemeClr val="accent1"/>
+          </a:fillRef>
+          <a:effectRef idx="2">
+            <a:schemeClr val="accent1"/>
+          </a:effectRef>
+          <a:fontRef idx="minor">
+            <a:schemeClr val="lt1"/>
+          </a:fontRef>
+        </p:style>
+        <p:txBody>
+          <a:bodyPr rtlCol="0" anchor="ctr" wrap="square"/>
+          <a:lstStyle/>
+          <a:p>
+            <a:pPr algn="ctr"/>
+            <a:r>
+              <a:rPr sz="1000" b="1">
+                <a:solidFill>
+                  <a:srgbClr val="FFFFFF"/>
+                </a:solidFill>
+              </a:rPr>
+              <a:t>Wald 95% CI</a:t>
+            </a:r>
+          </a:p>
+        </p:txBody>
+      </p:sp>
+      <p:sp>
+        <p:nvSpPr>
+          <p:cNvPr id="8" name="Rectangle 7"/>
+          <p:cNvSpPr/>
+          <p:nvPr/>
+        </p:nvSpPr>
+        <p:spPr>
+          <a:xfrm>
+            <a:off x="7498080" y="914400"/>
+            <a:ext cx="2011680" cy="411480"/>
+          </a:xfrm>
+          <a:prstGeom prst="rect">
+            <a:avLst/>
+          </a:prstGeom>
+          <a:solidFill>
+            <a:srgbClr val="1A237E"/>
+          </a:solidFill>
+          <a:ln>
+            <a:solidFill>
+              <a:srgbClr val="FFFFFF"/>
+            </a:solidFill>
+          </a:ln>
+        </p:spPr>
+        <p:style>
+          <a:lnRef idx="1">
+            <a:schemeClr val="accent1"/>
+          </a:lnRef>
+          <a:fillRef idx="3">
+            <a:schemeClr val="accent1"/>
+          </a:fillRef>
+          <a:effectRef idx="2">
+            <a:schemeClr val="accent1"/>
+          </a:effectRef>
+          <a:fontRef idx="minor">
+            <a:schemeClr val="lt1"/>
+          </a:fontRef>
+        </p:style>
+        <p:txBody>
+          <a:bodyPr rtlCol="0" anchor="ctr" wrap="square"/>
+          <a:lstStyle/>
+          <a:p>
+            <a:pPr algn="ctr"/>
+            <a:r>
+              <a:rPr sz="1000" b="1">
+                <a:solidFill>
+                  <a:srgbClr val="FFFFFF"/>
+                </a:solidFill>
+              </a:rPr>
+              <a:t>BCa 95% CI</a:t>
+            </a:r>
+          </a:p>
+        </p:txBody>
+      </p:sp>
+      <p:sp>
+        <p:nvSpPr>
+          <p:cNvPr id="9" name="Rectangle 8"/>
+          <p:cNvSpPr/>
+          <p:nvPr/>
+        </p:nvSpPr>
+        <p:spPr>
+          <a:xfrm>
+            <a:off x="9509760" y="914400"/>
+            <a:ext cx="914400" cy="411480"/>
+          </a:xfrm>
+          <a:prstGeom prst="rect">
+            <a:avLst/>
+          </a:prstGeom>
+          <a:solidFill>
+            <a:srgbClr val="1A237E"/>
+          </a:solidFill>
+          <a:ln>
+            <a:solidFill>
+              <a:srgbClr val="FFFFFF"/>
+            </a:solidFill>
+          </a:ln>
+        </p:spPr>
+        <p:style>
+          <a:lnRef idx="1">
+            <a:schemeClr val="accent1"/>
+          </a:lnRef>
+          <a:fillRef idx="3">
+            <a:schemeClr val="accent1"/>
+          </a:fillRef>
+          <a:effectRef idx="2">
+            <a:schemeClr val="accent1"/>
+          </a:effectRef>
+          <a:fontRef idx="minor">
+            <a:schemeClr val="lt1"/>
+          </a:fontRef>
+        </p:style>
+        <p:txBody>
+          <a:bodyPr rtlCol="0" anchor="ctr" wrap="square"/>
+          <a:lstStyle/>
+          <a:p>
+            <a:pPr algn="ctr"/>
+            <a:r>
+              <a:rPr sz="1000" b="1">
+                <a:solidFill>
+                  <a:srgbClr val="FFFFFF"/>
+                </a:solidFill>
+              </a:rPr>
+              <a:t>Conv.</a:t>
+            </a:r>
+          </a:p>
+        </p:txBody>
+      </p:sp>
+      <p:sp>
+        <p:nvSpPr>
+          <p:cNvPr id="10" name="Rectangle 9"/>
+          <p:cNvSpPr/>
+          <p:nvPr/>
+        </p:nvSpPr>
+        <p:spPr>
+          <a:xfrm>
+            <a:off x="1371600" y="1325880"/>
+            <a:ext cx="1371600" cy="411480"/>
+          </a:xfrm>
+          <a:prstGeom prst="rect">
+            <a:avLst/>
+          </a:prstGeom>
+          <a:solidFill>
+            <a:srgbClr val="F5F5F5"/>
+          </a:solidFill>
+          <a:ln w="6350">
+            <a:solidFill>
+              <a:srgbClr val="CCCCCC"/>
+            </a:solidFill>
+          </a:ln>
+        </p:spPr>
+        <p:style>
+          <a:lnRef idx="1">
+            <a:schemeClr val="accent1"/>
+          </a:lnRef>
+          <a:fillRef idx="3">
+            <a:schemeClr val="accent1"/>
+          </a:fillRef>
+          <a:effectRef idx="2">
+            <a:schemeClr val="accent1"/>
+          </a:effectRef>
+          <a:fontRef idx="minor">
+            <a:schemeClr val="lt1"/>
+          </a:fontRef>
+        </p:style>
+        <p:txBody>
+          <a:bodyPr rtlCol="0" anchor="ctr" wrap="square"/>
+          <a:lstStyle/>
+          <a:p>
+            <a:pPr algn="ctr"/>
+            <a:r>
+              <a:rPr sz="900">
+                <a:solidFill>
+                  <a:srgbClr val="000000"/>
+                </a:solidFill>
+              </a:rPr>
+              <a:t>Full cohort</a:t>
+            </a:r>
+          </a:p>
+        </p:txBody>
+      </p:sp>
+      <p:sp>
+        <p:nvSpPr>
+          <p:cNvPr id="11" name="Rectangle 10"/>
+          <p:cNvSpPr/>
+          <p:nvPr/>
+        </p:nvSpPr>
+        <p:spPr>
+          <a:xfrm>
+            <a:off x="2743200" y="1325880"/>
+            <a:ext cx="1828800" cy="411480"/>
+          </a:xfrm>
+          <a:prstGeom prst="rect">
+            <a:avLst/>
+          </a:prstGeom>
+          <a:solidFill>
+            <a:srgbClr val="F5F5F5"/>
+          </a:solidFill>
+          <a:ln w="6350">
+            <a:solidFill>
+              <a:srgbClr val="CCCCCC"/>
+            </a:solidFill>
+          </a:ln>
+        </p:spPr>
+        <p:style>
+          <a:lnRef idx="1">
+            <a:schemeClr val="accent1"/>
+          </a:lnRef>
+          <a:fillRef idx="3">
+            <a:schemeClr val="accent1"/>
+          </a:fillRef>
+          <a:effectRef idx="2">
+            <a:schemeClr val="accent1"/>
+          </a:effectRef>
+          <a:fontRef idx="minor">
+            <a:schemeClr val="lt1"/>
+          </a:fontRef>
+        </p:style>
+        <p:txBody>
+          <a:bodyPr rtlCol="0" anchor="ctr" wrap="square"/>
+          <a:lstStyle/>
+          <a:p>
+            <a:pPr algn="ctr"/>
+            <a:r>
+              <a:rPr sz="900">
+                <a:solidFill>
+                  <a:srgbClr val="000000"/>
+                </a:solidFill>
+              </a:rPr>
+              <a:t>Broad, Primary</a:t>
+            </a:r>
+          </a:p>
+        </p:txBody>
+      </p:sp>
+      <p:sp>
+        <p:nvSpPr>
+          <p:cNvPr id="12" name="Rectangle 11"/>
+          <p:cNvSpPr/>
+          <p:nvPr/>
+        </p:nvSpPr>
+        <p:spPr>
+          <a:xfrm>
+            <a:off x="4572000" y="1325880"/>
+            <a:ext cx="914400" cy="411480"/>
+          </a:xfrm>
+          <a:prstGeom prst="rect">
+            <a:avLst/>
+          </a:prstGeom>
+          <a:solidFill>
+            <a:srgbClr val="F5F5F5"/>
+          </a:solidFill>
+          <a:ln w="6350">
+            <a:solidFill>
+              <a:srgbClr val="CCCCCC"/>
+            </a:solidFill>
+          </a:ln>
+        </p:spPr>
+        <p:style>
+          <a:lnRef idx="1">
+            <a:schemeClr val="accent1"/>
+          </a:lnRef>
+          <a:fillRef idx="3">
+            <a:schemeClr val="accent1"/>
+          </a:fillRef>
+          <a:effectRef idx="2">
+            <a:schemeClr val="accent1"/>
+          </a:effectRef>
+          <a:fontRef idx="minor">
+            <a:schemeClr val="lt1"/>
+          </a:fontRef>
+        </p:style>
+        <p:txBody>
+          <a:bodyPr rtlCol="0" anchor="ctr" wrap="square"/>
+          <a:lstStyle/>
+          <a:p>
+            <a:pPr algn="ctr"/>
+            <a:r>
+              <a:rPr sz="900">
+                <a:solidFill>
+                  <a:srgbClr val="000000"/>
+                </a:solidFill>
+              </a:rPr>
+              <a:t>0.92</a:t>
+            </a:r>
+          </a:p>
+        </p:txBody>
+      </p:sp>
+      <p:sp>
+        <p:nvSpPr>
+          <p:cNvPr id="13" name="Rectangle 12"/>
+          <p:cNvSpPr/>
+          <p:nvPr/>
+        </p:nvSpPr>
+        <p:spPr>
+          <a:xfrm>
+            <a:off x="5486400" y="1325880"/>
+            <a:ext cx="2011680" cy="411480"/>
+          </a:xfrm>
+          <a:prstGeom prst="rect">
+            <a:avLst/>
+          </a:prstGeom>
+          <a:solidFill>
+            <a:srgbClr val="F5F5F5"/>
+          </a:solidFill>
+          <a:ln w="6350">
+            <a:solidFill>
+              <a:srgbClr val="CCCCCC"/>
+            </a:solidFill>
+          </a:ln>
+        </p:spPr>
+        <p:style>
+          <a:lnRef idx="1">
+            <a:schemeClr val="accent1"/>
+          </a:lnRef>
+          <a:fillRef idx="3">
+            <a:schemeClr val="accent1"/>
+          </a:fillRef>
+          <a:effectRef idx="2">
+            <a:schemeClr val="accent1"/>
+          </a:effectRef>
+          <a:fontRef idx="minor">
+            <a:schemeClr val="lt1"/>
+          </a:fontRef>
+        </p:style>
+        <p:txBody>
+          <a:bodyPr rtlCol="0" anchor="ctr" wrap="square"/>
+          <a:lstStyle/>
+          <a:p>
+            <a:pPr algn="ctr"/>
+            <a:r>
+              <a:rPr sz="900">
+                <a:solidFill>
+                  <a:srgbClr val="000000"/>
+                </a:solidFill>
+              </a:rPr>
+              <a:t>0.67–1.27</a:t>
+            </a:r>
+          </a:p>
+        </p:txBody>
+      </p:sp>
+      <p:sp>
+        <p:nvSpPr>
+          <p:cNvPr id="14" name="Rectangle 13"/>
+          <p:cNvSpPr/>
+          <p:nvPr/>
+        </p:nvSpPr>
+        <p:spPr>
+          <a:xfrm>
+            <a:off x="7498080" y="1325880"/>
+            <a:ext cx="2011680" cy="411480"/>
+          </a:xfrm>
+          <a:prstGeom prst="rect">
+            <a:avLst/>
+          </a:prstGeom>
+          <a:solidFill>
+            <a:srgbClr val="F5F5F5"/>
+          </a:solidFill>
+          <a:ln w="6350">
+            <a:solidFill>
+              <a:srgbClr val="CCCCCC"/>
+            </a:solidFill>
+          </a:ln>
+        </p:spPr>
+        <p:style>
+          <a:lnRef idx="1">
+            <a:schemeClr val="accent1"/>
+          </a:lnRef>
+          <a:fillRef idx="3">
+            <a:schemeClr val="accent1"/>
+          </a:fillRef>
+          <a:effectRef idx="2">
+            <a:schemeClr val="accent1"/>
+          </a:effectRef>
+          <a:fontRef idx="minor">
+            <a:schemeClr val="lt1"/>
+          </a:fontRef>
+        </p:style>
+        <p:txBody>
+          <a:bodyPr rtlCol="0" anchor="ctr" wrap="square"/>
+          <a:lstStyle/>
+          <a:p>
+            <a:pPr algn="ctr"/>
+            <a:r>
+              <a:rPr sz="900">
+                <a:solidFill>
+                  <a:srgbClr val="000000"/>
+                </a:solidFill>
+              </a:rPr>
+              <a:t>0.68–1.26</a:t>
+            </a:r>
+          </a:p>
+        </p:txBody>
+      </p:sp>
+      <p:sp>
+        <p:nvSpPr>
+          <p:cNvPr id="15" name="Rectangle 14"/>
+          <p:cNvSpPr/>
+          <p:nvPr/>
+        </p:nvSpPr>
+        <p:spPr>
+          <a:xfrm>
+            <a:off x="9509760" y="1325880"/>
+            <a:ext cx="914400" cy="411480"/>
+          </a:xfrm>
+          <a:prstGeom prst="rect">
+            <a:avLst/>
+          </a:prstGeom>
+          <a:solidFill>
+            <a:srgbClr val="F5F5F5"/>
+          </a:solidFill>
+          <a:ln w="6350">
+            <a:solidFill>
+              <a:srgbClr val="CCCCCC"/>
+            </a:solidFill>
+          </a:ln>
+        </p:spPr>
+        <p:style>
+          <a:lnRef idx="1">
+            <a:schemeClr val="accent1"/>
+          </a:lnRef>
+          <a:fillRef idx="3">
+            <a:schemeClr val="accent1"/>
+          </a:fillRef>
+          <a:effectRef idx="2">
+            <a:schemeClr val="accent1"/>
+          </a:effectRef>
+          <a:fontRef idx="minor">
+            <a:schemeClr val="lt1"/>
+          </a:fontRef>
+        </p:style>
+        <p:txBody>
+          <a:bodyPr rtlCol="0" anchor="ctr" wrap="square"/>
+          <a:lstStyle/>
+          <a:p>
+            <a:pPr algn="ctr"/>
+            <a:r>
+              <a:rPr sz="900">
+                <a:solidFill>
+                  <a:srgbClr val="000000"/>
+                </a:solidFill>
+              </a:rPr>
+              <a:t>100.0%</a:t>
+            </a:r>
+          </a:p>
+        </p:txBody>
+      </p:sp>
+      <p:sp>
+        <p:nvSpPr>
+          <p:cNvPr id="16" name="Rectangle 15"/>
+          <p:cNvSpPr/>
+          <p:nvPr/>
+        </p:nvSpPr>
+        <p:spPr>
+          <a:xfrm>
+            <a:off x="1371600" y="1737360"/>
+            <a:ext cx="1371600" cy="411480"/>
+          </a:xfrm>
+          <a:prstGeom prst="rect">
+            <a:avLst/>
+          </a:prstGeom>
+          <a:solidFill>
+            <a:srgbClr val="FFFFFF"/>
+          </a:solidFill>
+          <a:ln w="6350">
+            <a:solidFill>
+              <a:srgbClr val="CCCCCC"/>
+            </a:solidFill>
+          </a:ln>
+        </p:spPr>
+        <p:style>
+          <a:lnRef idx="1">
+            <a:schemeClr val="accent1"/>
+          </a:lnRef>
+          <a:fillRef idx="3">
+            <a:schemeClr val="accent1"/>
+          </a:fillRef>
+          <a:effectRef idx="2">
+            <a:schemeClr val="accent1"/>
+          </a:effectRef>
+          <a:fontRef idx="minor">
+            <a:schemeClr val="lt1"/>
+          </a:fontRef>
+        </p:style>
+        <p:txBody>
+          <a:bodyPr rtlCol="0" anchor="ctr" wrap="square"/>
+          <a:lstStyle/>
+          <a:p>
+            <a:pPr algn="ctr"/>
+          </a:p>
+        </p:txBody>
+      </p:sp>
+      <p:sp>
+        <p:nvSpPr>
+          <p:cNvPr id="17" name="Rectangle 16"/>
+          <p:cNvSpPr/>
+          <p:nvPr/>
+        </p:nvSpPr>
+        <p:spPr>
+          <a:xfrm>
+            <a:off x="2743200" y="1737360"/>
+            <a:ext cx="1828800" cy="411480"/>
+          </a:xfrm>
+          <a:prstGeom prst="rect">
+            <a:avLst/>
+          </a:prstGeom>
+          <a:solidFill>
+            <a:srgbClr val="FFFFFF"/>
+          </a:solidFill>
+          <a:ln w="6350">
+            <a:solidFill>
+              <a:srgbClr val="CCCCCC"/>
+            </a:solidFill>
+          </a:ln>
+        </p:spPr>
+        <p:style>
+          <a:lnRef idx="1">
+            <a:schemeClr val="accent1"/>
+          </a:lnRef>
+          <a:fillRef idx="3">
+            <a:schemeClr val="accent1"/>
+          </a:fillRef>
+          <a:effectRef idx="2">
+            <a:schemeClr val="accent1"/>
+          </a:effectRef>
+          <a:fontRef idx="minor">
+            <a:schemeClr val="lt1"/>
+          </a:fontRef>
+        </p:style>
+        <p:txBody>
+          <a:bodyPr rtlCol="0" anchor="ctr" wrap="square"/>
+          <a:lstStyle/>
+          <a:p>
+            <a:pPr algn="ctr"/>
+            <a:r>
+              <a:rPr sz="900">
+                <a:solidFill>
+                  <a:srgbClr val="000000"/>
+                </a:solidFill>
+              </a:rPr>
+              <a:t>Broad, Secondary</a:t>
+            </a:r>
+          </a:p>
+        </p:txBody>
+      </p:sp>
+      <p:sp>
+        <p:nvSpPr>
+          <p:cNvPr id="18" name="Rectangle 17"/>
+          <p:cNvSpPr/>
+          <p:nvPr/>
+        </p:nvSpPr>
+        <p:spPr>
+          <a:xfrm>
+            <a:off x="4572000" y="1737360"/>
+            <a:ext cx="914400" cy="411480"/>
+          </a:xfrm>
+          <a:prstGeom prst="rect">
+            <a:avLst/>
+          </a:prstGeom>
+          <a:solidFill>
+            <a:srgbClr val="FFFFFF"/>
+          </a:solidFill>
+          <a:ln w="6350">
+            <a:solidFill>
+              <a:srgbClr val="CCCCCC"/>
+            </a:solidFill>
+          </a:ln>
+        </p:spPr>
+        <p:style>
+          <a:lnRef idx="1">
+            <a:schemeClr val="accent1"/>
+          </a:lnRef>
+          <a:fillRef idx="3">
+            <a:schemeClr val="accent1"/>
+          </a:fillRef>
+          <a:effectRef idx="2">
+            <a:schemeClr val="accent1"/>
+          </a:effectRef>
+          <a:fontRef idx="minor">
+            <a:schemeClr val="lt1"/>
+          </a:fontRef>
+        </p:style>
+        <p:txBody>
+          <a:bodyPr rtlCol="0" anchor="ctr" wrap="square"/>
+          <a:lstStyle/>
+          <a:p>
+            <a:pPr algn="ctr"/>
+            <a:r>
+              <a:rPr sz="900">
+                <a:solidFill>
+                  <a:srgbClr val="000000"/>
+                </a:solidFill>
+              </a:rPr>
+              <a:t>0.82</a:t>
+            </a:r>
+          </a:p>
+        </p:txBody>
+      </p:sp>
+      <p:sp>
+        <p:nvSpPr>
+          <p:cNvPr id="19" name="Rectangle 18"/>
+          <p:cNvSpPr/>
+          <p:nvPr/>
+        </p:nvSpPr>
+        <p:spPr>
+          <a:xfrm>
+            <a:off x="5486400" y="1737360"/>
+            <a:ext cx="2011680" cy="411480"/>
+          </a:xfrm>
+          <a:prstGeom prst="rect">
+            <a:avLst/>
+          </a:prstGeom>
+          <a:solidFill>
+            <a:srgbClr val="FFFFFF"/>
+          </a:solidFill>
+          <a:ln w="6350">
+            <a:solidFill>
+              <a:srgbClr val="CCCCCC"/>
+            </a:solidFill>
+          </a:ln>
+        </p:spPr>
+        <p:style>
+          <a:lnRef idx="1">
+            <a:schemeClr val="accent1"/>
+          </a:lnRef>
+          <a:fillRef idx="3">
+            <a:schemeClr val="accent1"/>
+          </a:fillRef>
+          <a:effectRef idx="2">
+            <a:schemeClr val="accent1"/>
+          </a:effectRef>
+          <a:fontRef idx="minor">
+            <a:schemeClr val="lt1"/>
+          </a:fontRef>
+        </p:style>
+        <p:txBody>
+          <a:bodyPr rtlCol="0" anchor="ctr" wrap="square"/>
+          <a:lstStyle/>
+          <a:p>
+            <a:pPr algn="ctr"/>
+            <a:r>
+              <a:rPr sz="900">
+                <a:solidFill>
+                  <a:srgbClr val="000000"/>
+                </a:solidFill>
+              </a:rPr>
+              <a:t>0.31–2.15</a:t>
+            </a:r>
+          </a:p>
+        </p:txBody>
+      </p:sp>
+      <p:sp>
+        <p:nvSpPr>
+          <p:cNvPr id="20" name="Rectangle 19"/>
+          <p:cNvSpPr/>
+          <p:nvPr/>
+        </p:nvSpPr>
+        <p:spPr>
+          <a:xfrm>
+            <a:off x="7498080" y="1737360"/>
+            <a:ext cx="2011680" cy="411480"/>
+          </a:xfrm>
+          <a:prstGeom prst="rect">
+            <a:avLst/>
+          </a:prstGeom>
+          <a:solidFill>
+            <a:srgbClr val="FFFFFF"/>
+          </a:solidFill>
+          <a:ln w="6350">
+            <a:solidFill>
+              <a:srgbClr val="CCCCCC"/>
+            </a:solidFill>
+          </a:ln>
+        </p:spPr>
+        <p:style>
+          <a:lnRef idx="1">
+            <a:schemeClr val="accent1"/>
+          </a:lnRef>
+          <a:fillRef idx="3">
+            <a:schemeClr val="accent1"/>
+          </a:fillRef>
+          <a:effectRef idx="2">
+            <a:schemeClr val="accent1"/>
+          </a:effectRef>
+          <a:fontRef idx="minor">
+            <a:schemeClr val="lt1"/>
+          </a:fontRef>
+        </p:style>
+        <p:txBody>
+          <a:bodyPr rtlCol="0" anchor="ctr" wrap="square"/>
+          <a:lstStyle/>
+          <a:p>
+            <a:pPr algn="ctr"/>
+            <a:r>
+              <a:rPr sz="900">
+                <a:solidFill>
+                  <a:srgbClr val="000000"/>
+                </a:solidFill>
+              </a:rPr>
+              <a:t>0.30–2.29</a:t>
+            </a:r>
+          </a:p>
+        </p:txBody>
+      </p:sp>
+      <p:sp>
+        <p:nvSpPr>
+          <p:cNvPr id="21" name="Rectangle 20"/>
+          <p:cNvSpPr/>
+          <p:nvPr/>
+        </p:nvSpPr>
+        <p:spPr>
+          <a:xfrm>
+            <a:off x="9509760" y="1737360"/>
+            <a:ext cx="914400" cy="411480"/>
+          </a:xfrm>
+          <a:prstGeom prst="rect">
+            <a:avLst/>
+          </a:prstGeom>
+          <a:solidFill>
+            <a:srgbClr val="FFFFFF"/>
+          </a:solidFill>
+          <a:ln w="6350">
+            <a:solidFill>
+              <a:srgbClr val="CCCCCC"/>
+            </a:solidFill>
+          </a:ln>
+        </p:spPr>
+        <p:style>
+          <a:lnRef idx="1">
+            <a:schemeClr val="accent1"/>
+          </a:lnRef>
+          <a:fillRef idx="3">
+            <a:schemeClr val="accent1"/>
+          </a:fillRef>
+          <a:effectRef idx="2">
+            <a:schemeClr val="accent1"/>
+          </a:effectRef>
+          <a:fontRef idx="minor">
+            <a:schemeClr val="lt1"/>
+          </a:fontRef>
+        </p:style>
+        <p:txBody>
+          <a:bodyPr rtlCol="0" anchor="ctr" wrap="square"/>
+          <a:lstStyle/>
+          <a:p>
+            <a:pPr algn="ctr"/>
+            <a:r>
+              <a:rPr sz="900">
+                <a:solidFill>
+                  <a:srgbClr val="000000"/>
+                </a:solidFill>
+              </a:rPr>
+              <a:t>100.0%</a:t>
+            </a:r>
+          </a:p>
+        </p:txBody>
+      </p:sp>
+      <p:sp>
+        <p:nvSpPr>
+          <p:cNvPr id="22" name="Rectangle 21"/>
+          <p:cNvSpPr/>
+          <p:nvPr/>
+        </p:nvSpPr>
+        <p:spPr>
+          <a:xfrm>
+            <a:off x="1371600" y="2148840"/>
+            <a:ext cx="1371600" cy="411480"/>
+          </a:xfrm>
+          <a:prstGeom prst="rect">
+            <a:avLst/>
+          </a:prstGeom>
+          <a:solidFill>
+            <a:srgbClr val="E8F5E9"/>
+          </a:solidFill>
+          <a:ln w="6350">
+            <a:solidFill>
+              <a:srgbClr val="CCCCCC"/>
+            </a:solidFill>
+          </a:ln>
+        </p:spPr>
+        <p:style>
+          <a:lnRef idx="1">
+            <a:schemeClr val="accent1"/>
+          </a:lnRef>
+          <a:fillRef idx="3">
+            <a:schemeClr val="accent1"/>
+          </a:fillRef>
+          <a:effectRef idx="2">
+            <a:schemeClr val="accent1"/>
+          </a:effectRef>
+          <a:fontRef idx="minor">
+            <a:schemeClr val="lt1"/>
+          </a:fontRef>
+        </p:style>
+        <p:txBody>
+          <a:bodyPr rtlCol="0" anchor="ctr" wrap="square"/>
+          <a:lstStyle/>
+          <a:p>
+            <a:pPr algn="ctr"/>
+          </a:p>
+        </p:txBody>
+      </p:sp>
+      <p:sp>
+        <p:nvSpPr>
+          <p:cNvPr id="23" name="Rectangle 22"/>
+          <p:cNvSpPr/>
+          <p:nvPr/>
+        </p:nvSpPr>
+        <p:spPr>
+          <a:xfrm>
+            <a:off x="2743200" y="2148840"/>
+            <a:ext cx="1828800" cy="411480"/>
+          </a:xfrm>
+          <a:prstGeom prst="rect">
+            <a:avLst/>
+          </a:prstGeom>
+          <a:solidFill>
+            <a:srgbClr val="E8F5E9"/>
+          </a:solidFill>
+          <a:ln w="6350">
+            <a:solidFill>
+              <a:srgbClr val="CCCCCC"/>
+            </a:solidFill>
+          </a:ln>
+        </p:spPr>
+        <p:style>
+          <a:lnRef idx="1">
+            <a:schemeClr val="accent1"/>
+          </a:lnRef>
+          <a:fillRef idx="3">
+            <a:schemeClr val="accent1"/>
+          </a:fillRef>
+          <a:effectRef idx="2">
+            <a:schemeClr val="accent1"/>
+          </a:effectRef>
+          <a:fontRef idx="minor">
+            <a:schemeClr val="lt1"/>
+          </a:fontRef>
+        </p:style>
+        <p:txBody>
+          <a:bodyPr rtlCol="0" anchor="ctr" wrap="square"/>
+          <a:lstStyle/>
+          <a:p>
+            <a:pPr algn="ctr"/>
+            <a:r>
+              <a:rPr sz="900" b="1">
+                <a:solidFill>
+                  <a:srgbClr val="000000"/>
+                </a:solidFill>
+              </a:rPr>
+              <a:t>Narrow, Primary</a:t>
+            </a:r>
+          </a:p>
+        </p:txBody>
+      </p:sp>
+      <p:sp>
+        <p:nvSpPr>
+          <p:cNvPr id="24" name="Rectangle 23"/>
+          <p:cNvSpPr/>
+          <p:nvPr/>
+        </p:nvSpPr>
+        <p:spPr>
+          <a:xfrm>
+            <a:off x="4572000" y="2148840"/>
+            <a:ext cx="914400" cy="411480"/>
+          </a:xfrm>
+          <a:prstGeom prst="rect">
+            <a:avLst/>
+          </a:prstGeom>
+          <a:solidFill>
+            <a:srgbClr val="E8F5E9"/>
+          </a:solidFill>
+          <a:ln w="6350">
+            <a:solidFill>
+              <a:srgbClr val="CCCCCC"/>
+            </a:solidFill>
+          </a:ln>
+        </p:spPr>
+        <p:style>
+          <a:lnRef idx="1">
+            <a:schemeClr val="accent1"/>
+          </a:lnRef>
+          <a:fillRef idx="3">
+            <a:schemeClr val="accent1"/>
+          </a:fillRef>
+          <a:effectRef idx="2">
+            <a:schemeClr val="accent1"/>
+          </a:effectRef>
+          <a:fontRef idx="minor">
+            <a:schemeClr val="lt1"/>
+          </a:fontRef>
+        </p:style>
+        <p:txBody>
+          <a:bodyPr rtlCol="0" anchor="ctr" wrap="square"/>
+          <a:lstStyle/>
+          <a:p>
+            <a:pPr algn="ctr"/>
+            <a:r>
+              <a:rPr sz="900" b="1">
+                <a:solidFill>
+                  <a:srgbClr val="000000"/>
+                </a:solidFill>
+              </a:rPr>
+              <a:t>3.18</a:t>
+            </a:r>
+          </a:p>
+        </p:txBody>
+      </p:sp>
+      <p:sp>
+        <p:nvSpPr>
+          <p:cNvPr id="25" name="Rectangle 24"/>
+          <p:cNvSpPr/>
+          <p:nvPr/>
+        </p:nvSpPr>
+        <p:spPr>
+          <a:xfrm>
+            <a:off x="5486400" y="2148840"/>
+            <a:ext cx="2011680" cy="411480"/>
+          </a:xfrm>
+          <a:prstGeom prst="rect">
+            <a:avLst/>
+          </a:prstGeom>
+          <a:solidFill>
+            <a:srgbClr val="E8F5E9"/>
+          </a:solidFill>
+          <a:ln w="6350">
+            <a:solidFill>
+              <a:srgbClr val="CCCCCC"/>
+            </a:solidFill>
+          </a:ln>
+        </p:spPr>
+        <p:style>
+          <a:lnRef idx="1">
+            <a:schemeClr val="accent1"/>
+          </a:lnRef>
+          <a:fillRef idx="3">
+            <a:schemeClr val="accent1"/>
+          </a:fillRef>
+          <a:effectRef idx="2">
+            <a:schemeClr val="accent1"/>
+          </a:effectRef>
+          <a:fontRef idx="minor">
+            <a:schemeClr val="lt1"/>
+          </a:fontRef>
+        </p:style>
+        <p:txBody>
+          <a:bodyPr rtlCol="0" anchor="ctr" wrap="square"/>
+          <a:lstStyle/>
+          <a:p>
+            <a:pPr algn="ctr"/>
+            <a:r>
+              <a:rPr sz="900" b="1">
+                <a:solidFill>
+                  <a:srgbClr val="000000"/>
+                </a:solidFill>
+              </a:rPr>
+              <a:t>1.38–7.36</a:t>
+            </a:r>
+          </a:p>
+        </p:txBody>
+      </p:sp>
+      <p:sp>
+        <p:nvSpPr>
+          <p:cNvPr id="26" name="Rectangle 25"/>
+          <p:cNvSpPr/>
+          <p:nvPr/>
+        </p:nvSpPr>
+        <p:spPr>
+          <a:xfrm>
+            <a:off x="7498080" y="2148840"/>
+            <a:ext cx="2011680" cy="411480"/>
+          </a:xfrm>
+          <a:prstGeom prst="rect">
+            <a:avLst/>
+          </a:prstGeom>
+          <a:solidFill>
+            <a:srgbClr val="E8F5E9"/>
+          </a:solidFill>
+          <a:ln w="6350">
+            <a:solidFill>
+              <a:srgbClr val="CCCCCC"/>
+            </a:solidFill>
+          </a:ln>
+        </p:spPr>
+        <p:style>
+          <a:lnRef idx="1">
+            <a:schemeClr val="accent1"/>
+          </a:lnRef>
+          <a:fillRef idx="3">
+            <a:schemeClr val="accent1"/>
+          </a:fillRef>
+          <a:effectRef idx="2">
+            <a:schemeClr val="accent1"/>
+          </a:effectRef>
+          <a:fontRef idx="minor">
+            <a:schemeClr val="lt1"/>
+          </a:fontRef>
+        </p:style>
+        <p:txBody>
+          <a:bodyPr rtlCol="0" anchor="ctr" wrap="square"/>
+          <a:lstStyle/>
+          <a:p>
+            <a:pPr algn="ctr"/>
+            <a:r>
+              <a:rPr sz="900" b="1">
+                <a:solidFill>
+                  <a:srgbClr val="000000"/>
+                </a:solidFill>
+              </a:rPr>
+              <a:t>1.23–7.01</a:t>
+            </a:r>
+          </a:p>
+        </p:txBody>
+      </p:sp>
+      <p:sp>
+        <p:nvSpPr>
+          <p:cNvPr id="27" name="Rectangle 26"/>
+          <p:cNvSpPr/>
+          <p:nvPr/>
+        </p:nvSpPr>
+        <p:spPr>
+          <a:xfrm>
+            <a:off x="9509760" y="2148840"/>
+            <a:ext cx="914400" cy="411480"/>
+          </a:xfrm>
+          <a:prstGeom prst="rect">
+            <a:avLst/>
+          </a:prstGeom>
+          <a:solidFill>
+            <a:srgbClr val="E8F5E9"/>
+          </a:solidFill>
+          <a:ln w="6350">
+            <a:solidFill>
+              <a:srgbClr val="CCCCCC"/>
+            </a:solidFill>
+          </a:ln>
+        </p:spPr>
+        <p:style>
+          <a:lnRef idx="1">
+            <a:schemeClr val="accent1"/>
+          </a:lnRef>
+          <a:fillRef idx="3">
+            <a:schemeClr val="accent1"/>
+          </a:fillRef>
+          <a:effectRef idx="2">
+            <a:schemeClr val="accent1"/>
+          </a:effectRef>
+          <a:fontRef idx="minor">
+            <a:schemeClr val="lt1"/>
+          </a:fontRef>
+        </p:style>
+        <p:txBody>
+          <a:bodyPr rtlCol="0" anchor="ctr" wrap="square"/>
+          <a:lstStyle/>
+          <a:p>
+            <a:pPr algn="ctr"/>
+            <a:r>
+              <a:rPr sz="900" b="1">
+                <a:solidFill>
+                  <a:srgbClr val="000000"/>
+                </a:solidFill>
+              </a:rPr>
+              <a:t>100.0%</a:t>
+            </a:r>
+          </a:p>
+        </p:txBody>
+      </p:sp>
+      <p:sp>
+        <p:nvSpPr>
+          <p:cNvPr id="28" name="Rectangle 27"/>
+          <p:cNvSpPr/>
+          <p:nvPr/>
+        </p:nvSpPr>
+        <p:spPr>
+          <a:xfrm>
+            <a:off x="1371600" y="2560320"/>
+            <a:ext cx="1371600" cy="411480"/>
+          </a:xfrm>
+          <a:prstGeom prst="rect">
+            <a:avLst/>
+          </a:prstGeom>
+          <a:solidFill>
+            <a:srgbClr val="FFFFFF"/>
+          </a:solidFill>
+          <a:ln w="6350">
+            <a:solidFill>
+              <a:srgbClr val="CCCCCC"/>
+            </a:solidFill>
+          </a:ln>
+        </p:spPr>
+        <p:style>
+          <a:lnRef idx="1">
+            <a:schemeClr val="accent1"/>
+          </a:lnRef>
+          <a:fillRef idx="3">
+            <a:schemeClr val="accent1"/>
+          </a:fillRef>
+          <a:effectRef idx="2">
+            <a:schemeClr val="accent1"/>
+          </a:effectRef>
+          <a:fontRef idx="minor">
+            <a:schemeClr val="lt1"/>
+          </a:fontRef>
+        </p:style>
+        <p:txBody>
+          <a:bodyPr rtlCol="0" anchor="ctr" wrap="square"/>
+          <a:lstStyle/>
+          <a:p>
+            <a:pPr algn="ctr"/>
+          </a:p>
+        </p:txBody>
+      </p:sp>
+      <p:sp>
+        <p:nvSpPr>
+          <p:cNvPr id="29" name="Rectangle 28"/>
+          <p:cNvSpPr/>
+          <p:nvPr/>
+        </p:nvSpPr>
+        <p:spPr>
+          <a:xfrm>
+            <a:off x="2743200" y="2560320"/>
+            <a:ext cx="1828800" cy="411480"/>
+          </a:xfrm>
+          <a:prstGeom prst="rect">
+            <a:avLst/>
+          </a:prstGeom>
+          <a:solidFill>
+            <a:srgbClr val="FFFFFF"/>
+          </a:solidFill>
+          <a:ln w="6350">
+            <a:solidFill>
+              <a:srgbClr val="CCCCCC"/>
+            </a:solidFill>
+          </a:ln>
+        </p:spPr>
+        <p:style>
+          <a:lnRef idx="1">
+            <a:schemeClr val="accent1"/>
+          </a:lnRef>
+          <a:fillRef idx="3">
+            <a:schemeClr val="accent1"/>
+          </a:fillRef>
+          <a:effectRef idx="2">
+            <a:schemeClr val="accent1"/>
+          </a:effectRef>
+          <a:fontRef idx="minor">
+            <a:schemeClr val="lt1"/>
+          </a:fontRef>
+        </p:style>
+        <p:txBody>
+          <a:bodyPr rtlCol="0" anchor="ctr" wrap="square"/>
+          <a:lstStyle/>
+          <a:p>
+            <a:pPr algn="ctr"/>
+            <a:r>
+              <a:rPr sz="900">
+                <a:solidFill>
+                  <a:srgbClr val="000000"/>
+                </a:solidFill>
+              </a:rPr>
+              <a:t>Narrow, Secondary</a:t>
+            </a:r>
+          </a:p>
+        </p:txBody>
+      </p:sp>
+      <p:sp>
+        <p:nvSpPr>
+          <p:cNvPr id="30" name="Rectangle 29"/>
+          <p:cNvSpPr/>
+          <p:nvPr/>
+        </p:nvSpPr>
+        <p:spPr>
+          <a:xfrm>
+            <a:off x="4572000" y="2560320"/>
+            <a:ext cx="914400" cy="411480"/>
+          </a:xfrm>
+          <a:prstGeom prst="rect">
+            <a:avLst/>
+          </a:prstGeom>
+          <a:solidFill>
+            <a:srgbClr val="FFFFFF"/>
+          </a:solidFill>
+          <a:ln w="6350">
+            <a:solidFill>
+              <a:srgbClr val="CCCCCC"/>
+            </a:solidFill>
+          </a:ln>
+        </p:spPr>
+        <p:style>
+          <a:lnRef idx="1">
+            <a:schemeClr val="accent1"/>
+          </a:lnRef>
+          <a:fillRef idx="3">
+            <a:schemeClr val="accent1"/>
+          </a:fillRef>
+          <a:effectRef idx="2">
+            <a:schemeClr val="accent1"/>
+          </a:effectRef>
+          <a:fontRef idx="minor">
+            <a:schemeClr val="lt1"/>
+          </a:fontRef>
+        </p:style>
+        <p:txBody>
+          <a:bodyPr rtlCol="0" anchor="ctr" wrap="square"/>
+          <a:lstStyle/>
+          <a:p>
+            <a:pPr algn="ctr"/>
+            <a:r>
+              <a:rPr sz="900">
+                <a:solidFill>
+                  <a:srgbClr val="000000"/>
+                </a:solidFill>
+              </a:rPr>
+              <a:t>3.48</a:t>
+            </a:r>
+          </a:p>
+        </p:txBody>
+      </p:sp>
+      <p:sp>
+        <p:nvSpPr>
+          <p:cNvPr id="31" name="Rectangle 30"/>
+          <p:cNvSpPr/>
+          <p:nvPr/>
+        </p:nvSpPr>
+        <p:spPr>
+          <a:xfrm>
+            <a:off x="5486400" y="2560320"/>
+            <a:ext cx="2011680" cy="411480"/>
+          </a:xfrm>
+          <a:prstGeom prst="rect">
+            <a:avLst/>
+          </a:prstGeom>
+          <a:solidFill>
+            <a:srgbClr val="FFFFFF"/>
+          </a:solidFill>
+          <a:ln w="6350">
+            <a:solidFill>
+              <a:srgbClr val="CCCCCC"/>
+            </a:solidFill>
+          </a:ln>
+        </p:spPr>
+        <p:style>
+          <a:lnRef idx="1">
+            <a:schemeClr val="accent1"/>
+          </a:lnRef>
+          <a:fillRef idx="3">
+            <a:schemeClr val="accent1"/>
+          </a:fillRef>
+          <a:effectRef idx="2">
+            <a:schemeClr val="accent1"/>
+          </a:effectRef>
+          <a:fontRef idx="minor">
+            <a:schemeClr val="lt1"/>
+          </a:fontRef>
+        </p:style>
+        <p:txBody>
+          <a:bodyPr rtlCol="0" anchor="ctr" wrap="square"/>
+          <a:lstStyle/>
+          <a:p>
+            <a:pPr algn="ctr"/>
+            <a:r>
+              <a:rPr sz="900">
+                <a:solidFill>
+                  <a:srgbClr val="000000"/>
+                </a:solidFill>
+              </a:rPr>
+              <a:t>0.81–15.06</a:t>
+            </a:r>
+          </a:p>
+        </p:txBody>
+      </p:sp>
+      <p:sp>
+        <p:nvSpPr>
+          <p:cNvPr id="32" name="Rectangle 31"/>
+          <p:cNvSpPr/>
+          <p:nvPr/>
+        </p:nvSpPr>
+        <p:spPr>
+          <a:xfrm>
+            <a:off x="7498080" y="2560320"/>
+            <a:ext cx="2011680" cy="411480"/>
+          </a:xfrm>
+          <a:prstGeom prst="rect">
+            <a:avLst/>
+          </a:prstGeom>
+          <a:solidFill>
+            <a:srgbClr val="FFFFFF"/>
+          </a:solidFill>
+          <a:ln w="6350">
+            <a:solidFill>
+              <a:srgbClr val="CCCCCC"/>
+            </a:solidFill>
+          </a:ln>
+        </p:spPr>
+        <p:style>
+          <a:lnRef idx="1">
+            <a:schemeClr val="accent1"/>
+          </a:lnRef>
+          <a:fillRef idx="3">
+            <a:schemeClr val="accent1"/>
+          </a:fillRef>
+          <a:effectRef idx="2">
+            <a:schemeClr val="accent1"/>
+          </a:effectRef>
+          <a:fontRef idx="minor">
+            <a:schemeClr val="lt1"/>
+          </a:fontRef>
+        </p:style>
+        <p:txBody>
+          <a:bodyPr rtlCol="0" anchor="ctr" wrap="square"/>
+          <a:lstStyle/>
+          <a:p>
+            <a:pPr algn="ctr"/>
+            <a:r>
+              <a:rPr sz="900">
+                <a:solidFill>
+                  <a:srgbClr val="000000"/>
+                </a:solidFill>
+              </a:rPr>
+              <a:t>0.00–21.33</a:t>
+            </a:r>
+          </a:p>
+        </p:txBody>
+      </p:sp>
+      <p:sp>
+        <p:nvSpPr>
+          <p:cNvPr id="33" name="Rectangle 32"/>
+          <p:cNvSpPr/>
+          <p:nvPr/>
+        </p:nvSpPr>
+        <p:spPr>
+          <a:xfrm>
+            <a:off x="9509760" y="2560320"/>
+            <a:ext cx="914400" cy="411480"/>
+          </a:xfrm>
+          <a:prstGeom prst="rect">
+            <a:avLst/>
+          </a:prstGeom>
+          <a:solidFill>
+            <a:srgbClr val="FFFFFF"/>
+          </a:solidFill>
+          <a:ln w="6350">
+            <a:solidFill>
+              <a:srgbClr val="CCCCCC"/>
+            </a:solidFill>
+          </a:ln>
+        </p:spPr>
+        <p:style>
+          <a:lnRef idx="1">
+            <a:schemeClr val="accent1"/>
+          </a:lnRef>
+          <a:fillRef idx="3">
+            <a:schemeClr val="accent1"/>
+          </a:fillRef>
+          <a:effectRef idx="2">
+            <a:schemeClr val="accent1"/>
+          </a:effectRef>
+          <a:fontRef idx="minor">
+            <a:schemeClr val="lt1"/>
+          </a:fontRef>
+        </p:style>
+        <p:txBody>
+          <a:bodyPr rtlCol="0" anchor="ctr" wrap="square"/>
+          <a:lstStyle/>
+          <a:p>
+            <a:pPr algn="ctr"/>
+            <a:r>
+              <a:rPr sz="900">
+                <a:solidFill>
+                  <a:srgbClr val="000000"/>
+                </a:solidFill>
+              </a:rPr>
+              <a:t>99.8%</a:t>
+            </a:r>
+          </a:p>
+        </p:txBody>
+      </p:sp>
+      <p:sp>
+        <p:nvSpPr>
+          <p:cNvPr id="34" name="Rectangle 33"/>
+          <p:cNvSpPr/>
+          <p:nvPr/>
+        </p:nvSpPr>
+        <p:spPr>
+          <a:xfrm>
+            <a:off x="1371600" y="2971800"/>
+            <a:ext cx="1371600" cy="411480"/>
+          </a:xfrm>
+          <a:prstGeom prst="rect">
+            <a:avLst/>
+          </a:prstGeom>
+          <a:solidFill>
+            <a:srgbClr val="F5F5F5"/>
+          </a:solidFill>
+          <a:ln w="6350">
+            <a:solidFill>
+              <a:srgbClr val="CCCCCC"/>
+            </a:solidFill>
+          </a:ln>
+        </p:spPr>
+        <p:style>
+          <a:lnRef idx="1">
+            <a:schemeClr val="accent1"/>
+          </a:lnRef>
+          <a:fillRef idx="3">
+            <a:schemeClr val="accent1"/>
+          </a:fillRef>
+          <a:effectRef idx="2">
+            <a:schemeClr val="accent1"/>
+          </a:effectRef>
+          <a:fontRef idx="minor">
+            <a:schemeClr val="lt1"/>
+          </a:fontRef>
+        </p:style>
+        <p:txBody>
+          <a:bodyPr rtlCol="0" anchor="ctr" wrap="square"/>
+          <a:lstStyle/>
+          <a:p>
+            <a:pPr algn="ctr"/>
+            <a:r>
+              <a:rPr sz="900">
+                <a:solidFill>
+                  <a:srgbClr val="000000"/>
+                </a:solidFill>
+              </a:rPr>
+              <a:t>Low-risk</a:t>
+            </a:r>
+          </a:p>
+        </p:txBody>
+      </p:sp>
+      <p:sp>
+        <p:nvSpPr>
+          <p:cNvPr id="35" name="Rectangle 34"/>
+          <p:cNvSpPr/>
+          <p:nvPr/>
+        </p:nvSpPr>
+        <p:spPr>
+          <a:xfrm>
+            <a:off x="2743200" y="2971800"/>
+            <a:ext cx="1828800" cy="411480"/>
+          </a:xfrm>
+          <a:prstGeom prst="rect">
+            <a:avLst/>
+          </a:prstGeom>
+          <a:solidFill>
+            <a:srgbClr val="F5F5F5"/>
+          </a:solidFill>
+          <a:ln w="6350">
+            <a:solidFill>
+              <a:srgbClr val="CCCCCC"/>
+            </a:solidFill>
+          </a:ln>
+        </p:spPr>
+        <p:style>
+          <a:lnRef idx="1">
+            <a:schemeClr val="accent1"/>
+          </a:lnRef>
+          <a:fillRef idx="3">
+            <a:schemeClr val="accent1"/>
+          </a:fillRef>
+          <a:effectRef idx="2">
+            <a:schemeClr val="accent1"/>
+          </a:effectRef>
+          <a:fontRef idx="minor">
+            <a:schemeClr val="lt1"/>
+          </a:fontRef>
+        </p:style>
+        <p:txBody>
+          <a:bodyPr rtlCol="0" anchor="ctr" wrap="square"/>
+          <a:lstStyle/>
+          <a:p>
+            <a:pPr algn="ctr"/>
+            <a:r>
+              <a:rPr sz="900">
+                <a:solidFill>
+                  <a:srgbClr val="000000"/>
+                </a:solidFill>
+              </a:rPr>
+              <a:t>Broad, Primary</a:t>
+            </a:r>
+          </a:p>
+        </p:txBody>
+      </p:sp>
+      <p:sp>
+        <p:nvSpPr>
+          <p:cNvPr id="36" name="Rectangle 35"/>
+          <p:cNvSpPr/>
+          <p:nvPr/>
+        </p:nvSpPr>
+        <p:spPr>
+          <a:xfrm>
+            <a:off x="4572000" y="2971800"/>
+            <a:ext cx="914400" cy="411480"/>
+          </a:xfrm>
+          <a:prstGeom prst="rect">
+            <a:avLst/>
+          </a:prstGeom>
+          <a:solidFill>
+            <a:srgbClr val="F5F5F5"/>
+          </a:solidFill>
+          <a:ln w="6350">
+            <a:solidFill>
+              <a:srgbClr val="CCCCCC"/>
+            </a:solidFill>
+          </a:ln>
+        </p:spPr>
+        <p:style>
+          <a:lnRef idx="1">
+            <a:schemeClr val="accent1"/>
+          </a:lnRef>
+          <a:fillRef idx="3">
+            <a:schemeClr val="accent1"/>
+          </a:fillRef>
+          <a:effectRef idx="2">
+            <a:schemeClr val="accent1"/>
+          </a:effectRef>
+          <a:fontRef idx="minor">
+            <a:schemeClr val="lt1"/>
+          </a:fontRef>
+        </p:style>
+        <p:txBody>
+          <a:bodyPr rtlCol="0" anchor="ctr" wrap="square"/>
+          <a:lstStyle/>
+          <a:p>
+            <a:pPr algn="ctr"/>
+            <a:r>
+              <a:rPr sz="900">
+                <a:solidFill>
+                  <a:srgbClr val="000000"/>
+                </a:solidFill>
+              </a:rPr>
+              <a:t>0.65</a:t>
+            </a:r>
+          </a:p>
+        </p:txBody>
+      </p:sp>
+      <p:sp>
+        <p:nvSpPr>
+          <p:cNvPr id="37" name="Rectangle 36"/>
+          <p:cNvSpPr/>
+          <p:nvPr/>
+        </p:nvSpPr>
+        <p:spPr>
+          <a:xfrm>
+            <a:off x="5486400" y="2971800"/>
+            <a:ext cx="2011680" cy="411480"/>
+          </a:xfrm>
+          <a:prstGeom prst="rect">
+            <a:avLst/>
+          </a:prstGeom>
+          <a:solidFill>
+            <a:srgbClr val="F5F5F5"/>
+          </a:solidFill>
+          <a:ln w="6350">
+            <a:solidFill>
+              <a:srgbClr val="CCCCCC"/>
+            </a:solidFill>
+          </a:ln>
+        </p:spPr>
+        <p:style>
+          <a:lnRef idx="1">
+            <a:schemeClr val="accent1"/>
+          </a:lnRef>
+          <a:fillRef idx="3">
+            <a:schemeClr val="accent1"/>
+          </a:fillRef>
+          <a:effectRef idx="2">
+            <a:schemeClr val="accent1"/>
+          </a:effectRef>
+          <a:fontRef idx="minor">
+            <a:schemeClr val="lt1"/>
+          </a:fontRef>
+        </p:style>
+        <p:txBody>
+          <a:bodyPr rtlCol="0" anchor="ctr" wrap="square"/>
+          <a:lstStyle/>
+          <a:p>
+            <a:pPr algn="ctr"/>
+            <a:r>
+              <a:rPr sz="900">
+                <a:solidFill>
+                  <a:srgbClr val="000000"/>
+                </a:solidFill>
+              </a:rPr>
+              <a:t>0.40–1.06</a:t>
+            </a:r>
+          </a:p>
+        </p:txBody>
+      </p:sp>
+      <p:sp>
+        <p:nvSpPr>
+          <p:cNvPr id="38" name="Rectangle 37"/>
+          <p:cNvSpPr/>
+          <p:nvPr/>
+        </p:nvSpPr>
+        <p:spPr>
+          <a:xfrm>
+            <a:off x="7498080" y="2971800"/>
+            <a:ext cx="2011680" cy="411480"/>
+          </a:xfrm>
+          <a:prstGeom prst="rect">
+            <a:avLst/>
+          </a:prstGeom>
+          <a:solidFill>
+            <a:srgbClr val="F5F5F5"/>
+          </a:solidFill>
+          <a:ln w="6350">
+            <a:solidFill>
+              <a:srgbClr val="CCCCCC"/>
+            </a:solidFill>
+          </a:ln>
+        </p:spPr>
+        <p:style>
+          <a:lnRef idx="1">
+            <a:schemeClr val="accent1"/>
+          </a:lnRef>
+          <a:fillRef idx="3">
+            <a:schemeClr val="accent1"/>
+          </a:fillRef>
+          <a:effectRef idx="2">
+            <a:schemeClr val="accent1"/>
+          </a:effectRef>
+          <a:fontRef idx="minor">
+            <a:schemeClr val="lt1"/>
+          </a:fontRef>
+        </p:style>
+        <p:txBody>
+          <a:bodyPr rtlCol="0" anchor="ctr" wrap="square"/>
+          <a:lstStyle/>
+          <a:p>
+            <a:pPr algn="ctr"/>
+            <a:r>
+              <a:rPr sz="900">
+                <a:solidFill>
+                  <a:srgbClr val="000000"/>
+                </a:solidFill>
+              </a:rPr>
+              <a:t>0.39–1.06</a:t>
+            </a:r>
+          </a:p>
+        </p:txBody>
+      </p:sp>
+      <p:sp>
+        <p:nvSpPr>
+          <p:cNvPr id="39" name="Rectangle 38"/>
+          <p:cNvSpPr/>
+          <p:nvPr/>
+        </p:nvSpPr>
+        <p:spPr>
+          <a:xfrm>
+            <a:off x="9509760" y="2971800"/>
+            <a:ext cx="914400" cy="411480"/>
+          </a:xfrm>
+          <a:prstGeom prst="rect">
+            <a:avLst/>
+          </a:prstGeom>
+          <a:solidFill>
+            <a:srgbClr val="F5F5F5"/>
+          </a:solidFill>
+          <a:ln w="6350">
+            <a:solidFill>
+              <a:srgbClr val="CCCCCC"/>
+            </a:solidFill>
+          </a:ln>
+        </p:spPr>
+        <p:style>
+          <a:lnRef idx="1">
+            <a:schemeClr val="accent1"/>
+          </a:lnRef>
+          <a:fillRef idx="3">
+            <a:schemeClr val="accent1"/>
+          </a:fillRef>
+          <a:effectRef idx="2">
+            <a:schemeClr val="accent1"/>
+          </a:effectRef>
+          <a:fontRef idx="minor">
+            <a:schemeClr val="lt1"/>
+          </a:fontRef>
+        </p:style>
+        <p:txBody>
+          <a:bodyPr rtlCol="0" anchor="ctr" wrap="square"/>
+          <a:lstStyle/>
+          <a:p>
+            <a:pPr algn="ctr"/>
+            <a:r>
+              <a:rPr sz="900">
+                <a:solidFill>
+                  <a:srgbClr val="000000"/>
+                </a:solidFill>
+              </a:rPr>
+              <a:t>100.0%</a:t>
+            </a:r>
+          </a:p>
+        </p:txBody>
+      </p:sp>
+      <p:sp>
+        <p:nvSpPr>
+          <p:cNvPr id="40" name="Rectangle 39"/>
+          <p:cNvSpPr/>
+          <p:nvPr/>
+        </p:nvSpPr>
+        <p:spPr>
+          <a:xfrm>
+            <a:off x="1371600" y="3383280"/>
+            <a:ext cx="1371600" cy="411480"/>
+          </a:xfrm>
+          <a:prstGeom prst="rect">
+            <a:avLst/>
+          </a:prstGeom>
+          <a:solidFill>
+            <a:srgbClr val="FFFFFF"/>
+          </a:solidFill>
+          <a:ln w="6350">
+            <a:solidFill>
+              <a:srgbClr val="CCCCCC"/>
+            </a:solidFill>
+          </a:ln>
+        </p:spPr>
+        <p:style>
+          <a:lnRef idx="1">
+            <a:schemeClr val="accent1"/>
+          </a:lnRef>
+          <a:fillRef idx="3">
+            <a:schemeClr val="accent1"/>
+          </a:fillRef>
+          <a:effectRef idx="2">
+            <a:schemeClr val="accent1"/>
+          </a:effectRef>
+          <a:fontRef idx="minor">
+            <a:schemeClr val="lt1"/>
+          </a:fontRef>
+        </p:style>
+        <p:txBody>
+          <a:bodyPr rtlCol="0" anchor="ctr" wrap="square"/>
+          <a:lstStyle/>
+          <a:p>
+            <a:pPr algn="ctr"/>
+          </a:p>
+        </p:txBody>
+      </p:sp>
+      <p:sp>
+        <p:nvSpPr>
+          <p:cNvPr id="41" name="Rectangle 40"/>
+          <p:cNvSpPr/>
+          <p:nvPr/>
+        </p:nvSpPr>
+        <p:spPr>
+          <a:xfrm>
+            <a:off x="2743200" y="3383280"/>
+            <a:ext cx="1828800" cy="411480"/>
+          </a:xfrm>
+          <a:prstGeom prst="rect">
+            <a:avLst/>
+          </a:prstGeom>
+          <a:solidFill>
+            <a:srgbClr val="FFFFFF"/>
+          </a:solidFill>
+          <a:ln w="6350">
+            <a:solidFill>
+              <a:srgbClr val="CCCCCC"/>
+            </a:solidFill>
+          </a:ln>
+        </p:spPr>
+        <p:style>
+          <a:lnRef idx="1">
+            <a:schemeClr val="accent1"/>
+          </a:lnRef>
+          <a:fillRef idx="3">
+            <a:schemeClr val="accent1"/>
+          </a:fillRef>
+          <a:effectRef idx="2">
+            <a:schemeClr val="accent1"/>
+          </a:effectRef>
+          <a:fontRef idx="minor">
+            <a:schemeClr val="lt1"/>
+          </a:fontRef>
+        </p:style>
+        <p:txBody>
+          <a:bodyPr rtlCol="0" anchor="ctr" wrap="square"/>
+          <a:lstStyle/>
+          <a:p>
+            <a:pPr algn="ctr"/>
+            <a:r>
+              <a:rPr sz="900">
+                <a:solidFill>
+                  <a:srgbClr val="000000"/>
+                </a:solidFill>
+              </a:rPr>
+              <a:t>Broad, Secondary</a:t>
+            </a:r>
+          </a:p>
+        </p:txBody>
+      </p:sp>
+      <p:sp>
+        <p:nvSpPr>
+          <p:cNvPr id="42" name="Rectangle 41"/>
+          <p:cNvSpPr/>
+          <p:nvPr/>
+        </p:nvSpPr>
+        <p:spPr>
+          <a:xfrm>
+            <a:off x="4572000" y="3383280"/>
+            <a:ext cx="914400" cy="411480"/>
+          </a:xfrm>
+          <a:prstGeom prst="rect">
+            <a:avLst/>
+          </a:prstGeom>
+          <a:solidFill>
+            <a:srgbClr val="FFFFFF"/>
+          </a:solidFill>
+          <a:ln w="6350">
+            <a:solidFill>
+              <a:srgbClr val="CCCCCC"/>
+            </a:solidFill>
+          </a:ln>
+        </p:spPr>
+        <p:style>
+          <a:lnRef idx="1">
+            <a:schemeClr val="accent1"/>
+          </a:lnRef>
+          <a:fillRef idx="3">
+            <a:schemeClr val="accent1"/>
+          </a:fillRef>
+          <a:effectRef idx="2">
+            <a:schemeClr val="accent1"/>
+          </a:effectRef>
+          <a:fontRef idx="minor">
+            <a:schemeClr val="lt1"/>
+          </a:fontRef>
+        </p:style>
+        <p:txBody>
+          <a:bodyPr rtlCol="0" anchor="ctr" wrap="square"/>
+          <a:lstStyle/>
+          <a:p>
+            <a:pPr algn="ctr"/>
+            <a:r>
+              <a:rPr sz="900">
+                <a:solidFill>
+                  <a:srgbClr val="000000"/>
+                </a:solidFill>
+              </a:rPr>
+              <a:t>0.70</a:t>
+            </a:r>
+          </a:p>
+        </p:txBody>
+      </p:sp>
+      <p:sp>
+        <p:nvSpPr>
+          <p:cNvPr id="43" name="Rectangle 42"/>
+          <p:cNvSpPr/>
+          <p:nvPr/>
+        </p:nvSpPr>
+        <p:spPr>
+          <a:xfrm>
+            <a:off x="5486400" y="3383280"/>
+            <a:ext cx="2011680" cy="411480"/>
+          </a:xfrm>
+          <a:prstGeom prst="rect">
+            <a:avLst/>
+          </a:prstGeom>
+          <a:solidFill>
+            <a:srgbClr val="FFFFFF"/>
+          </a:solidFill>
+          <a:ln w="6350">
+            <a:solidFill>
+              <a:srgbClr val="CCCCCC"/>
+            </a:solidFill>
+          </a:ln>
+        </p:spPr>
+        <p:style>
+          <a:lnRef idx="1">
+            <a:schemeClr val="accent1"/>
+          </a:lnRef>
+          <a:fillRef idx="3">
+            <a:schemeClr val="accent1"/>
+          </a:fillRef>
+          <a:effectRef idx="2">
+            <a:schemeClr val="accent1"/>
+          </a:effectRef>
+          <a:fontRef idx="minor">
+            <a:schemeClr val="lt1"/>
+          </a:fontRef>
+        </p:style>
+        <p:txBody>
+          <a:bodyPr rtlCol="0" anchor="ctr" wrap="square"/>
+          <a:lstStyle/>
+          <a:p>
+            <a:pPr algn="ctr"/>
+            <a:r>
+              <a:rPr sz="900">
+                <a:solidFill>
+                  <a:srgbClr val="000000"/>
+                </a:solidFill>
+              </a:rPr>
+              <a:t>0.22–2.26</a:t>
+            </a:r>
+          </a:p>
+        </p:txBody>
+      </p:sp>
+      <p:sp>
+        <p:nvSpPr>
+          <p:cNvPr id="44" name="Rectangle 43"/>
+          <p:cNvSpPr/>
+          <p:nvPr/>
+        </p:nvSpPr>
+        <p:spPr>
+          <a:xfrm>
+            <a:off x="7498080" y="3383280"/>
+            <a:ext cx="2011680" cy="411480"/>
+          </a:xfrm>
+          <a:prstGeom prst="rect">
+            <a:avLst/>
+          </a:prstGeom>
+          <a:solidFill>
+            <a:srgbClr val="FFFFFF"/>
+          </a:solidFill>
+          <a:ln w="6350">
+            <a:solidFill>
+              <a:srgbClr val="CCCCCC"/>
+            </a:solidFill>
+          </a:ln>
+        </p:spPr>
+        <p:style>
+          <a:lnRef idx="1">
+            <a:schemeClr val="accent1"/>
+          </a:lnRef>
+          <a:fillRef idx="3">
+            <a:schemeClr val="accent1"/>
+          </a:fillRef>
+          <a:effectRef idx="2">
+            <a:schemeClr val="accent1"/>
+          </a:effectRef>
+          <a:fontRef idx="minor">
+            <a:schemeClr val="lt1"/>
+          </a:fontRef>
+        </p:style>
+        <p:txBody>
+          <a:bodyPr rtlCol="0" anchor="ctr" wrap="square"/>
+          <a:lstStyle/>
+          <a:p>
+            <a:pPr algn="ctr"/>
+            <a:r>
+              <a:rPr sz="900">
+                <a:solidFill>
+                  <a:srgbClr val="000000"/>
+                </a:solidFill>
+              </a:rPr>
+              <a:t>0.15–2.72</a:t>
+            </a:r>
+          </a:p>
+        </p:txBody>
+      </p:sp>
+      <p:sp>
+        <p:nvSpPr>
+          <p:cNvPr id="45" name="Rectangle 44"/>
+          <p:cNvSpPr/>
+          <p:nvPr/>
+        </p:nvSpPr>
+        <p:spPr>
+          <a:xfrm>
+            <a:off x="9509760" y="3383280"/>
+            <a:ext cx="914400" cy="411480"/>
+          </a:xfrm>
+          <a:prstGeom prst="rect">
+            <a:avLst/>
+          </a:prstGeom>
+          <a:solidFill>
+            <a:srgbClr val="FFFFFF"/>
+          </a:solidFill>
+          <a:ln w="6350">
+            <a:solidFill>
+              <a:srgbClr val="CCCCCC"/>
+            </a:solidFill>
+          </a:ln>
+        </p:spPr>
+        <p:style>
+          <a:lnRef idx="1">
+            <a:schemeClr val="accent1"/>
+          </a:lnRef>
+          <a:fillRef idx="3">
+            <a:schemeClr val="accent1"/>
+          </a:fillRef>
+          <a:effectRef idx="2">
+            <a:schemeClr val="accent1"/>
+          </a:effectRef>
+          <a:fontRef idx="minor">
+            <a:schemeClr val="lt1"/>
+          </a:fontRef>
+        </p:style>
+        <p:txBody>
+          <a:bodyPr rtlCol="0" anchor="ctr" wrap="square"/>
+          <a:lstStyle/>
+          <a:p>
+            <a:pPr algn="ctr"/>
+            <a:r>
+              <a:rPr sz="900">
+                <a:solidFill>
+                  <a:srgbClr val="000000"/>
+                </a:solidFill>
+              </a:rPr>
+              <a:t>100.0%</a:t>
+            </a:r>
+          </a:p>
+        </p:txBody>
+      </p:sp>
+      <p:sp>
+        <p:nvSpPr>
+          <p:cNvPr id="46" name="Rectangle 45"/>
+          <p:cNvSpPr/>
+          <p:nvPr/>
+        </p:nvSpPr>
+        <p:spPr>
+          <a:xfrm>
+            <a:off x="1371600" y="3794760"/>
+            <a:ext cx="1371600" cy="411480"/>
+          </a:xfrm>
+          <a:prstGeom prst="rect">
+            <a:avLst/>
+          </a:prstGeom>
+          <a:solidFill>
+            <a:srgbClr val="F5F5F5"/>
+          </a:solidFill>
+          <a:ln w="6350">
+            <a:solidFill>
+              <a:srgbClr val="CCCCCC"/>
+            </a:solidFill>
+          </a:ln>
+        </p:spPr>
+        <p:style>
+          <a:lnRef idx="1">
+            <a:schemeClr val="accent1"/>
+          </a:lnRef>
+          <a:fillRef idx="3">
+            <a:schemeClr val="accent1"/>
+          </a:fillRef>
+          <a:effectRef idx="2">
+            <a:schemeClr val="accent1"/>
+          </a:effectRef>
+          <a:fontRef idx="minor">
+            <a:schemeClr val="lt1"/>
+          </a:fontRef>
+        </p:style>
+        <p:txBody>
+          <a:bodyPr rtlCol="0" anchor="ctr" wrap="square"/>
+          <a:lstStyle/>
+          <a:p>
+            <a:pPr algn="ctr"/>
+          </a:p>
+        </p:txBody>
+      </p:sp>
+      <p:sp>
+        <p:nvSpPr>
+          <p:cNvPr id="47" name="Rectangle 46"/>
+          <p:cNvSpPr/>
+          <p:nvPr/>
+        </p:nvSpPr>
+        <p:spPr>
+          <a:xfrm>
+            <a:off x="2743200" y="3794760"/>
+            <a:ext cx="1828800" cy="411480"/>
+          </a:xfrm>
+          <a:prstGeom prst="rect">
+            <a:avLst/>
+          </a:prstGeom>
+          <a:solidFill>
+            <a:srgbClr val="F5F5F5"/>
+          </a:solidFill>
+          <a:ln w="6350">
+            <a:solidFill>
+              <a:srgbClr val="CCCCCC"/>
+            </a:solidFill>
+          </a:ln>
+        </p:spPr>
+        <p:style>
+          <a:lnRef idx="1">
+            <a:schemeClr val="accent1"/>
+          </a:lnRef>
+          <a:fillRef idx="3">
+            <a:schemeClr val="accent1"/>
+          </a:fillRef>
+          <a:effectRef idx="2">
+            <a:schemeClr val="accent1"/>
+          </a:effectRef>
+          <a:fontRef idx="minor">
+            <a:schemeClr val="lt1"/>
+          </a:fontRef>
+        </p:style>
+        <p:txBody>
+          <a:bodyPr rtlCol="0" anchor="ctr" wrap="square"/>
+          <a:lstStyle/>
+          <a:p>
+            <a:pPr algn="ctr"/>
+            <a:r>
+              <a:rPr sz="900">
+                <a:solidFill>
+                  <a:srgbClr val="000000"/>
+                </a:solidFill>
+              </a:rPr>
+              <a:t>Narrow, Primary</a:t>
+            </a:r>
+          </a:p>
+        </p:txBody>
+      </p:sp>
+      <p:sp>
+        <p:nvSpPr>
+          <p:cNvPr id="48" name="Rectangle 47"/>
+          <p:cNvSpPr/>
+          <p:nvPr/>
+        </p:nvSpPr>
+        <p:spPr>
+          <a:xfrm>
+            <a:off x="4572000" y="3794760"/>
+            <a:ext cx="914400" cy="411480"/>
+          </a:xfrm>
+          <a:prstGeom prst="rect">
+            <a:avLst/>
+          </a:prstGeom>
+          <a:solidFill>
+            <a:srgbClr val="F5F5F5"/>
+          </a:solidFill>
+          <a:ln w="6350">
+            <a:solidFill>
+              <a:srgbClr val="CCCCCC"/>
+            </a:solidFill>
+          </a:ln>
+        </p:spPr>
+        <p:style>
+          <a:lnRef idx="1">
+            <a:schemeClr val="accent1"/>
+          </a:lnRef>
+          <a:fillRef idx="3">
+            <a:schemeClr val="accent1"/>
+          </a:fillRef>
+          <a:effectRef idx="2">
+            <a:schemeClr val="accent1"/>
+          </a:effectRef>
+          <a:fontRef idx="minor">
+            <a:schemeClr val="lt1"/>
+          </a:fontRef>
+        </p:style>
+        <p:txBody>
+          <a:bodyPr rtlCol="0" anchor="ctr" wrap="square"/>
+          <a:lstStyle/>
+          <a:p>
+            <a:pPr algn="ctr"/>
+            <a:r>
+              <a:rPr sz="900">
+                <a:solidFill>
+                  <a:srgbClr val="000000"/>
+                </a:solidFill>
+              </a:rPr>
+              <a:t>13.59</a:t>
+            </a:r>
+          </a:p>
+        </p:txBody>
+      </p:sp>
+      <p:sp>
+        <p:nvSpPr>
+          <p:cNvPr id="49" name="Rectangle 48"/>
+          <p:cNvSpPr/>
+          <p:nvPr/>
+        </p:nvSpPr>
+        <p:spPr>
+          <a:xfrm>
+            <a:off x="5486400" y="3794760"/>
+            <a:ext cx="2011680" cy="411480"/>
+          </a:xfrm>
+          <a:prstGeom prst="rect">
+            <a:avLst/>
+          </a:prstGeom>
+          <a:solidFill>
+            <a:srgbClr val="F5F5F5"/>
+          </a:solidFill>
+          <a:ln w="6350">
+            <a:solidFill>
+              <a:srgbClr val="CCCCCC"/>
+            </a:solidFill>
+          </a:ln>
+        </p:spPr>
+        <p:style>
+          <a:lnRef idx="1">
+            <a:schemeClr val="accent1"/>
+          </a:lnRef>
+          <a:fillRef idx="3">
+            <a:schemeClr val="accent1"/>
+          </a:fillRef>
+          <a:effectRef idx="2">
+            <a:schemeClr val="accent1"/>
+          </a:effectRef>
+          <a:fontRef idx="minor">
+            <a:schemeClr val="lt1"/>
+          </a:fontRef>
+        </p:style>
+        <p:txBody>
+          <a:bodyPr rtlCol="0" anchor="ctr" wrap="square"/>
+          <a:lstStyle/>
+          <a:p>
+            <a:pPr algn="ctr"/>
+            <a:r>
+              <a:rPr sz="900">
+                <a:solidFill>
+                  <a:srgbClr val="000000"/>
+                </a:solidFill>
+              </a:rPr>
+              <a:t>1.74–106.04</a:t>
+            </a:r>
+          </a:p>
+        </p:txBody>
+      </p:sp>
+      <p:sp>
+        <p:nvSpPr>
+          <p:cNvPr id="50" name="Rectangle 49"/>
+          <p:cNvSpPr/>
+          <p:nvPr/>
+        </p:nvSpPr>
+        <p:spPr>
+          <a:xfrm>
+            <a:off x="7498080" y="3794760"/>
+            <a:ext cx="2011680" cy="411480"/>
+          </a:xfrm>
+          <a:prstGeom prst="rect">
+            <a:avLst/>
+          </a:prstGeom>
+          <a:solidFill>
+            <a:srgbClr val="F5F5F5"/>
+          </a:solidFill>
+          <a:ln w="6350">
+            <a:solidFill>
+              <a:srgbClr val="CCCCCC"/>
+            </a:solidFill>
+          </a:ln>
+        </p:spPr>
+        <p:style>
+          <a:lnRef idx="1">
+            <a:schemeClr val="accent1"/>
+          </a:lnRef>
+          <a:fillRef idx="3">
+            <a:schemeClr val="accent1"/>
+          </a:fillRef>
+          <a:effectRef idx="2">
+            <a:schemeClr val="accent1"/>
+          </a:effectRef>
+          <a:fontRef idx="minor">
+            <a:schemeClr val="lt1"/>
+          </a:fontRef>
+        </p:style>
+        <p:txBody>
+          <a:bodyPr rtlCol="0" anchor="ctr" wrap="square"/>
+          <a:lstStyle/>
+          <a:p>
+            <a:pPr algn="ctr"/>
+            <a:r>
+              <a:rPr sz="900">
+                <a:solidFill>
+                  <a:srgbClr val="000000"/>
+                </a:solidFill>
+              </a:rPr>
+              <a:t>0.00–700136.92</a:t>
+            </a:r>
+          </a:p>
+        </p:txBody>
+      </p:sp>
+      <p:sp>
+        <p:nvSpPr>
+          <p:cNvPr id="51" name="Rectangle 50"/>
+          <p:cNvSpPr/>
+          <p:nvPr/>
+        </p:nvSpPr>
+        <p:spPr>
+          <a:xfrm>
+            <a:off x="9509760" y="3794760"/>
+            <a:ext cx="914400" cy="411480"/>
+          </a:xfrm>
+          <a:prstGeom prst="rect">
+            <a:avLst/>
+          </a:prstGeom>
+          <a:solidFill>
+            <a:srgbClr val="F5F5F5"/>
+          </a:solidFill>
+          <a:ln w="6350">
+            <a:solidFill>
+              <a:srgbClr val="CCCCCC"/>
+            </a:solidFill>
+          </a:ln>
+        </p:spPr>
+        <p:style>
+          <a:lnRef idx="1">
+            <a:schemeClr val="accent1"/>
+          </a:lnRef>
+          <a:fillRef idx="3">
+            <a:schemeClr val="accent1"/>
+          </a:fillRef>
+          <a:effectRef idx="2">
+            <a:schemeClr val="accent1"/>
+          </a:effectRef>
+          <a:fontRef idx="minor">
+            <a:schemeClr val="lt1"/>
+          </a:fontRef>
+        </p:style>
+        <p:txBody>
+          <a:bodyPr rtlCol="0" anchor="ctr" wrap="square"/>
+          <a:lstStyle/>
+          <a:p>
+            <a:pPr algn="ctr"/>
+            <a:r>
+              <a:rPr sz="900">
+                <a:solidFill>
+                  <a:srgbClr val="000000"/>
+                </a:solidFill>
+              </a:rPr>
+              <a:t>99.8%</a:t>
+            </a:r>
+          </a:p>
+        </p:txBody>
+      </p:sp>
+      <p:sp>
+        <p:nvSpPr>
+          <p:cNvPr id="52" name="Rectangle 51"/>
+          <p:cNvSpPr/>
+          <p:nvPr/>
+        </p:nvSpPr>
+        <p:spPr>
+          <a:xfrm>
+            <a:off x="1371600" y="4206240"/>
+            <a:ext cx="1371600" cy="411480"/>
+          </a:xfrm>
+          <a:prstGeom prst="rect">
+            <a:avLst/>
+          </a:prstGeom>
+          <a:solidFill>
+            <a:srgbClr val="FFFFFF"/>
+          </a:solidFill>
+          <a:ln w="6350">
+            <a:solidFill>
+              <a:srgbClr val="CCCCCC"/>
+            </a:solidFill>
+          </a:ln>
+        </p:spPr>
+        <p:style>
+          <a:lnRef idx="1">
+            <a:schemeClr val="accent1"/>
+          </a:lnRef>
+          <a:fillRef idx="3">
+            <a:schemeClr val="accent1"/>
+          </a:fillRef>
+          <a:effectRef idx="2">
+            <a:schemeClr val="accent1"/>
+          </a:effectRef>
+          <a:fontRef idx="minor">
+            <a:schemeClr val="lt1"/>
+          </a:fontRef>
+        </p:style>
+        <p:txBody>
+          <a:bodyPr rtlCol="0" anchor="ctr" wrap="square"/>
+          <a:lstStyle/>
+          <a:p>
+            <a:pPr algn="ctr"/>
+          </a:p>
+        </p:txBody>
+      </p:sp>
+      <p:sp>
+        <p:nvSpPr>
+          <p:cNvPr id="53" name="Rectangle 52"/>
+          <p:cNvSpPr/>
+          <p:nvPr/>
+        </p:nvSpPr>
+        <p:spPr>
+          <a:xfrm>
+            <a:off x="2743200" y="4206240"/>
+            <a:ext cx="1828800" cy="411480"/>
+          </a:xfrm>
+          <a:prstGeom prst="rect">
+            <a:avLst/>
+          </a:prstGeom>
+          <a:solidFill>
+            <a:srgbClr val="FFFFFF"/>
+          </a:solidFill>
+          <a:ln w="6350">
+            <a:solidFill>
+              <a:srgbClr val="CCCCCC"/>
+            </a:solidFill>
+          </a:ln>
+        </p:spPr>
+        <p:style>
+          <a:lnRef idx="1">
+            <a:schemeClr val="accent1"/>
+          </a:lnRef>
+          <a:fillRef idx="3">
+            <a:schemeClr val="accent1"/>
+          </a:fillRef>
+          <a:effectRef idx="2">
+            <a:schemeClr val="accent1"/>
+          </a:effectRef>
+          <a:fontRef idx="minor">
+            <a:schemeClr val="lt1"/>
+          </a:fontRef>
+        </p:style>
+        <p:txBody>
+          <a:bodyPr rtlCol="0" anchor="ctr" wrap="square"/>
+          <a:lstStyle/>
+          <a:p>
+            <a:pPr algn="ctr"/>
+            <a:r>
+              <a:rPr sz="900">
+                <a:solidFill>
+                  <a:srgbClr val="000000"/>
+                </a:solidFill>
+              </a:rPr>
+              <a:t>Narrow, Secondary</a:t>
+            </a:r>
+          </a:p>
+        </p:txBody>
+      </p:sp>
+      <p:sp>
+        <p:nvSpPr>
+          <p:cNvPr id="54" name="Rectangle 53"/>
+          <p:cNvSpPr/>
+          <p:nvPr/>
+        </p:nvSpPr>
+        <p:spPr>
+          <a:xfrm>
+            <a:off x="4572000" y="4206240"/>
+            <a:ext cx="914400" cy="411480"/>
+          </a:xfrm>
+          <a:prstGeom prst="rect">
+            <a:avLst/>
+          </a:prstGeom>
+          <a:solidFill>
+            <a:srgbClr val="FFFFFF"/>
+          </a:solidFill>
+          <a:ln w="6350">
+            <a:solidFill>
+              <a:srgbClr val="CCCCCC"/>
+            </a:solidFill>
+          </a:ln>
+        </p:spPr>
+        <p:style>
+          <a:lnRef idx="1">
+            <a:schemeClr val="accent1"/>
+          </a:lnRef>
+          <a:fillRef idx="3">
+            <a:schemeClr val="accent1"/>
+          </a:fillRef>
+          <a:effectRef idx="2">
+            <a:schemeClr val="accent1"/>
+          </a:effectRef>
+          <a:fontRef idx="minor">
+            <a:schemeClr val="lt1"/>
+          </a:fontRef>
+        </p:style>
+        <p:txBody>
+          <a:bodyPr rtlCol="0" anchor="ctr" wrap="square"/>
+          <a:lstStyle/>
+          <a:p>
+            <a:pPr algn="ctr"/>
+            <a:r>
+              <a:rPr sz="900">
+                <a:solidFill>
+                  <a:srgbClr val="000000"/>
+                </a:solidFill>
+              </a:rPr>
+              <a:t>14.14</a:t>
+            </a:r>
+          </a:p>
+        </p:txBody>
+      </p:sp>
+      <p:sp>
+        <p:nvSpPr>
+          <p:cNvPr id="55" name="Rectangle 54"/>
+          <p:cNvSpPr/>
+          <p:nvPr/>
+        </p:nvSpPr>
+        <p:spPr>
+          <a:xfrm>
+            <a:off x="5486400" y="4206240"/>
+            <a:ext cx="2011680" cy="411480"/>
+          </a:xfrm>
+          <a:prstGeom prst="rect">
+            <a:avLst/>
+          </a:prstGeom>
+          <a:solidFill>
+            <a:srgbClr val="FFFFFF"/>
+          </a:solidFill>
+          <a:ln w="6350">
+            <a:solidFill>
+              <a:srgbClr val="CCCCCC"/>
+            </a:solidFill>
+          </a:ln>
+        </p:spPr>
+        <p:style>
+          <a:lnRef idx="1">
+            <a:schemeClr val="accent1"/>
+          </a:lnRef>
+          <a:fillRef idx="3">
+            <a:schemeClr val="accent1"/>
+          </a:fillRef>
+          <a:effectRef idx="2">
+            <a:schemeClr val="accent1"/>
+          </a:effectRef>
+          <a:fontRef idx="minor">
+            <a:schemeClr val="lt1"/>
+          </a:fontRef>
+        </p:style>
+        <p:txBody>
+          <a:bodyPr rtlCol="0" anchor="ctr" wrap="square"/>
+          <a:lstStyle/>
+          <a:p>
+            <a:pPr algn="ctr"/>
+            <a:r>
+              <a:rPr sz="900">
+                <a:solidFill>
+                  <a:srgbClr val="000000"/>
+                </a:solidFill>
+              </a:rPr>
+              <a:t>0.72–277.39</a:t>
+            </a:r>
+          </a:p>
+        </p:txBody>
+      </p:sp>
+      <p:sp>
+        <p:nvSpPr>
+          <p:cNvPr id="56" name="Rectangle 55"/>
+          <p:cNvSpPr/>
+          <p:nvPr/>
+        </p:nvSpPr>
+        <p:spPr>
+          <a:xfrm>
+            <a:off x="7498080" y="4206240"/>
+            <a:ext cx="2011680" cy="411480"/>
+          </a:xfrm>
+          <a:prstGeom prst="rect">
+            <a:avLst/>
+          </a:prstGeom>
+          <a:solidFill>
+            <a:srgbClr val="FFFFFF"/>
+          </a:solidFill>
+          <a:ln w="6350">
+            <a:solidFill>
+              <a:srgbClr val="CCCCCC"/>
+            </a:solidFill>
+          </a:ln>
+        </p:spPr>
+        <p:style>
+          <a:lnRef idx="1">
+            <a:schemeClr val="accent1"/>
+          </a:lnRef>
+          <a:fillRef idx="3">
+            <a:schemeClr val="accent1"/>
+          </a:fillRef>
+          <a:effectRef idx="2">
+            <a:schemeClr val="accent1"/>
+          </a:effectRef>
+          <a:fontRef idx="minor">
+            <a:schemeClr val="lt1"/>
+          </a:fontRef>
+        </p:style>
+        <p:txBody>
+          <a:bodyPr rtlCol="0" anchor="ctr" wrap="square"/>
+          <a:lstStyle/>
+          <a:p>
+            <a:pPr algn="ctr"/>
+            <a:r>
+              <a:rPr sz="900">
+                <a:solidFill>
+                  <a:srgbClr val="000000"/>
+                </a:solidFill>
+              </a:rPr>
+              <a:t>Unstable</a:t>
+            </a:r>
+          </a:p>
+        </p:txBody>
+      </p:sp>
+      <p:sp>
+        <p:nvSpPr>
+          <p:cNvPr id="57" name="Rectangle 56"/>
+          <p:cNvSpPr/>
+          <p:nvPr/>
+        </p:nvSpPr>
+        <p:spPr>
+          <a:xfrm>
+            <a:off x="9509760" y="4206240"/>
+            <a:ext cx="914400" cy="411480"/>
+          </a:xfrm>
+          <a:prstGeom prst="rect">
+            <a:avLst/>
+          </a:prstGeom>
+          <a:solidFill>
+            <a:srgbClr val="FFFFFF"/>
+          </a:solidFill>
+          <a:ln w="6350">
+            <a:solidFill>
+              <a:srgbClr val="CCCCCC"/>
+            </a:solidFill>
+          </a:ln>
+        </p:spPr>
+        <p:style>
+          <a:lnRef idx="1">
+            <a:schemeClr val="accent1"/>
+          </a:lnRef>
+          <a:fillRef idx="3">
+            <a:schemeClr val="accent1"/>
+          </a:fillRef>
+          <a:effectRef idx="2">
+            <a:schemeClr val="accent1"/>
+          </a:effectRef>
+          <a:fontRef idx="minor">
+            <a:schemeClr val="lt1"/>
+          </a:fontRef>
+        </p:style>
+        <p:txBody>
+          <a:bodyPr rtlCol="0" anchor="ctr" wrap="square"/>
+          <a:lstStyle/>
+          <a:p>
+            <a:pPr algn="ctr"/>
+            <a:r>
+              <a:rPr sz="900">
+                <a:solidFill>
+                  <a:srgbClr val="000000"/>
+                </a:solidFill>
+              </a:rPr>
+              <a:t>91.5%</a:t>
+            </a:r>
+          </a:p>
+        </p:txBody>
+      </p:sp>
+    </p:spTree>
+  </p:cSld>
+  <p:clrMapOvr>
+    <a:masterClrMapping/>
+  </p:clrMapOvr>
+</p:sld>
+</file>
+
 <file path=ppt/theme/theme1.xml><?xml version="1.0" encoding="utf-8"?>
 <a:theme xmlns:a="http://schemas.openxmlformats.org/drawingml/2006/main" name="Office Theme">
   <a:themeElements>

--- a/yago_ionv/figures_strobe.pptx
+++ b/yago_ionv/figures_strobe.pptx
@@ -168,19 +168,19 @@
                 <c:ptCount val="4"/>
                 <c:pt idx="0">
                   <c:v>Broad: Primary
-(any phase)</c:v>
+(before delivery)</c:v>
                 </c:pt>
                 <c:pt idx="1">
                   <c:v>Broad: Secondary
-(before delivery)</c:v>
+(any phase)</c:v>
                 </c:pt>
                 <c:pt idx="2">
                   <c:v>Narrow: Primary
-(5-HT3, any phase)</c:v>
+(5-HT3, before delivery)</c:v>
                 </c:pt>
                 <c:pt idx="3">
                   <c:v>Narrow: Secondary
-(5-HT3 + before delivery)</c:v>
+(5-HT3, any phase)</c:v>
                 </c:pt>
               </c:strCache>
             </c:strRef>
@@ -252,19 +252,19 @@
                 <c:ptCount val="4"/>
                 <c:pt idx="0">
                   <c:v>Broad: Primary
-(any phase)</c:v>
+(before delivery)</c:v>
                 </c:pt>
                 <c:pt idx="1">
                   <c:v>Broad: Secondary
-(before delivery)</c:v>
+(any phase)</c:v>
                 </c:pt>
                 <c:pt idx="2">
                   <c:v>Narrow: Primary
-(5-HT3, any phase)</c:v>
+(5-HT3, before delivery)</c:v>
                 </c:pt>
                 <c:pt idx="3">
                   <c:v>Narrow: Secondary
-(5-HT3 + before delivery)</c:v>
+(5-HT3, any phase)</c:v>
                 </c:pt>
               </c:strCache>
             </c:strRef>
@@ -427,19 +427,19 @@
                 <c:ptCount val="4"/>
                 <c:pt idx="0">
                   <c:v>Broad: Primary
-(any phase)</c:v>
+(before delivery)</c:v>
                 </c:pt>
                 <c:pt idx="1">
                   <c:v>Broad: Secondary
-(before delivery)</c:v>
+(any phase)</c:v>
                 </c:pt>
                 <c:pt idx="2">
                   <c:v>Narrow: Primary
-(5-HT3, any phase)</c:v>
+(5-HT3, before delivery)</c:v>
                 </c:pt>
                 <c:pt idx="3">
                   <c:v>Narrow: Secondary
-(5-HT3 + before delivery)</c:v>
+(5-HT3, any phase)</c:v>
                 </c:pt>
               </c:strCache>
             </c:strRef>
@@ -451,16 +451,16 @@
                 <c:formatCode>General</c:formatCode>
                 <c:ptCount val="4"/>
                 <c:pt idx="0">
+                  <c:v>2.9227557411273484</c:v>
+                </c:pt>
+                <c:pt idx="1">
                   <c:v>21.920668058455114</c:v>
                 </c:pt>
-                <c:pt idx="1">
-                  <c:v>2.9227557411273484</c:v>
-                </c:pt>
                 <c:pt idx="2">
-                  <c:v>0.41753653444676403</c:v>
+                  <c:v>0.20876826722338201</c:v>
                 </c:pt>
                 <c:pt idx="3">
-                  <c:v>0.20876826722338201</c:v>
+                  <c:v>0.41753653444676403</c:v>
                 </c:pt>
               </c:numCache>
             </c:numRef>
@@ -511,19 +511,19 @@
                 <c:ptCount val="4"/>
                 <c:pt idx="0">
                   <c:v>Broad: Primary
-(any phase)</c:v>
+(before delivery)</c:v>
                 </c:pt>
                 <c:pt idx="1">
                   <c:v>Broad: Secondary
-(before delivery)</c:v>
+(any phase)</c:v>
                 </c:pt>
                 <c:pt idx="2">
                   <c:v>Narrow: Primary
-(5-HT3, any phase)</c:v>
+(5-HT3, before delivery)</c:v>
                 </c:pt>
                 <c:pt idx="3">
                   <c:v>Narrow: Secondary
-(5-HT3 + before delivery)</c:v>
+(5-HT3, any phase)</c:v>
                 </c:pt>
               </c:strCache>
             </c:strRef>
@@ -535,16 +535,16 @@
                 <c:formatCode>General</c:formatCode>
                 <c:ptCount val="4"/>
                 <c:pt idx="0">
+                  <c:v>2.1739130434782608</c:v>
+                </c:pt>
+                <c:pt idx="1">
                   <c:v>14.673913043478262</c:v>
                 </c:pt>
-                <c:pt idx="1">
-                  <c:v>2.1739130434782608</c:v>
-                </c:pt>
                 <c:pt idx="2">
-                  <c:v>3.260869565217391</c:v>
+                  <c:v>1.6304347826086956</c:v>
                 </c:pt>
                 <c:pt idx="3">
-                  <c:v>1.6304347826086956</c:v>
+                  <c:v>3.260869565217391</c:v>
                 </c:pt>
               </c:numCache>
             </c:numRef>
@@ -6117,7 +6117,7 @@
               <a:defRPr sz="1000" i="1"/>
             </a:pPr>
             <a:r>
-              <a:t>Multivariable logistic regression for 5-HT3 antagonist use (primary outcome). Reduced model with 6 covariates. N = 3,153.</a:t>
+              <a:t>Multivariable logistic regression for 5-HT3 antagonist use (primary outcome: before delivery). Reduced model with 6 covariates. N = 3,153.</a:t>
             </a:r>
           </a:p>
         </p:txBody>
@@ -6310,7 +6310,7 @@
               <a:defRPr sz="800"/>
             </a:pPr>
             <a:r>
-              <a:t>Narrow: 5-HT3 + before delivery phase</a:t>
+              <a:t>Def E: 5-HT3 + before delivery phase</a:t>
             </a:r>
           </a:p>
         </p:txBody>
@@ -6464,7 +6464,7 @@
               <a:defRPr sz="800"/>
             </a:pPr>
             <a:r>
-              <a:t>Narrow: 5-HT3 antagonist (any phase)</a:t>
+              <a:t>Def E: 5-HT3 antagonist (any phase)</a:t>
             </a:r>
           </a:p>
         </p:txBody>
@@ -10186,7 +10186,7 @@
               <a:defRPr sz="800"/>
             </a:pPr>
             <a:r>
-              <a:t>Narrow: 5-HT3 + before delivery phase</a:t>
+              <a:t>Narrow: 5-HT3 antagonist (any phase)</a:t>
             </a:r>
           </a:p>
         </p:txBody>
@@ -10199,14 +10199,14 @@
         </p:nvSpPr>
         <p:spPr>
           <a:xfrm>
-            <a:off x="3698811" y="1283970"/>
-            <a:ext cx="6816789" cy="38100"/>
-          </a:xfrm>
-          <a:prstGeom prst="rect">
-            <a:avLst/>
-          </a:prstGeom>
-          <a:solidFill>
-            <a:srgbClr val="4C72B0"/>
+            <a:off x="3757096" y="1283970"/>
+            <a:ext cx="5960742" cy="38100"/>
+          </a:xfrm>
+          <a:prstGeom prst="rect">
+            <a:avLst/>
+          </a:prstGeom>
+          <a:solidFill>
+            <a:srgbClr val="C44E52"/>
           </a:solidFill>
           <a:ln>
             <a:noFill/>
@@ -10242,7 +10242,161 @@
         </p:nvSpPr>
         <p:spPr>
           <a:xfrm>
-            <a:off x="4411014" y="1248156"/>
+            <a:off x="4379248" y="1248156"/>
+            <a:ext cx="109728" cy="109728"/>
+          </a:xfrm>
+          <a:prstGeom prst="diamond">
+            <a:avLst/>
+          </a:prstGeom>
+          <a:solidFill>
+            <a:srgbClr val="C44E52"/>
+          </a:solidFill>
+          <a:ln>
+            <a:solidFill>
+              <a:srgbClr val="C44E52"/>
+            </a:solidFill>
+          </a:ln>
+        </p:spPr>
+        <p:style>
+          <a:lnRef idx="1">
+            <a:schemeClr val="accent1"/>
+          </a:lnRef>
+          <a:fillRef idx="3">
+            <a:schemeClr val="accent1"/>
+          </a:fillRef>
+          <a:effectRef idx="2">
+            <a:schemeClr val="accent1"/>
+          </a:effectRef>
+          <a:fontRef idx="minor">
+            <a:schemeClr val="lt1"/>
+          </a:fontRef>
+        </p:style>
+        <p:txBody>
+          <a:bodyPr rtlCol="0" anchor="ctr"/>
+          <a:lstStyle/>
+          <a:p>
+            <a:pPr algn="ctr"/>
+          </a:p>
+        </p:txBody>
+      </p:sp>
+      <p:sp>
+        <p:nvSpPr>
+          <p:cNvPr id="9" name="TextBox 8"/>
+          <p:cNvSpPr txBox="1"/>
+          <p:nvPr/>
+        </p:nvSpPr>
+        <p:spPr>
+          <a:xfrm>
+            <a:off x="10607040" y="1193292"/>
+            <a:ext cx="1371600" cy="228600"/>
+          </a:xfrm>
+          <a:prstGeom prst="rect">
+            <a:avLst/>
+          </a:prstGeom>
+          <a:noFill/>
+        </p:spPr>
+        <p:txBody>
+          <a:bodyPr wrap="none">
+            <a:spAutoFit/>
+          </a:bodyPr>
+          <a:lstStyle/>
+          <a:p>
+            <a:pPr>
+              <a:defRPr sz="700">
+                <a:solidFill>
+                  <a:srgbClr val="C44E52"/>
+                </a:solidFill>
+              </a:defRPr>
+            </a:pPr>
+            <a:r>
+              <a:t>OR 13.59 [1.74–106.04] P=0.013*</a:t>
+            </a:r>
+          </a:p>
+        </p:txBody>
+      </p:sp>
+      <p:sp>
+        <p:nvSpPr>
+          <p:cNvPr id="10" name="TextBox 9"/>
+          <p:cNvSpPr txBox="1"/>
+          <p:nvPr/>
+        </p:nvSpPr>
+        <p:spPr>
+          <a:xfrm>
+            <a:off x="274320" y="1577340"/>
+            <a:ext cx="3200400" cy="274320"/>
+          </a:xfrm>
+          <a:prstGeom prst="rect">
+            <a:avLst/>
+          </a:prstGeom>
+          <a:noFill/>
+        </p:spPr>
+        <p:txBody>
+          <a:bodyPr wrap="square">
+            <a:spAutoFit/>
+          </a:bodyPr>
+          <a:lstStyle/>
+          <a:p>
+            <a:pPr algn="r">
+              <a:defRPr sz="800"/>
+            </a:pPr>
+            <a:r>
+              <a:t>Narrow: 5-HT3 + before delivery</a:t>
+            </a:r>
+          </a:p>
+        </p:txBody>
+      </p:sp>
+      <p:sp>
+        <p:nvSpPr>
+          <p:cNvPr id="11" name="Rectangle 10"/>
+          <p:cNvSpPr/>
+          <p:nvPr/>
+        </p:nvSpPr>
+        <p:spPr>
+          <a:xfrm>
+            <a:off x="3698811" y="1695450"/>
+            <a:ext cx="6816789" cy="38100"/>
+          </a:xfrm>
+          <a:prstGeom prst="rect">
+            <a:avLst/>
+          </a:prstGeom>
+          <a:solidFill>
+            <a:srgbClr val="4C72B0"/>
+          </a:solidFill>
+          <a:ln>
+            <a:noFill/>
+          </a:ln>
+        </p:spPr>
+        <p:style>
+          <a:lnRef idx="1">
+            <a:schemeClr val="accent1"/>
+          </a:lnRef>
+          <a:fillRef idx="3">
+            <a:schemeClr val="accent1"/>
+          </a:fillRef>
+          <a:effectRef idx="2">
+            <a:schemeClr val="accent1"/>
+          </a:effectRef>
+          <a:fontRef idx="minor">
+            <a:schemeClr val="lt1"/>
+          </a:fontRef>
+        </p:style>
+        <p:txBody>
+          <a:bodyPr rtlCol="0" anchor="ctr"/>
+          <a:lstStyle/>
+          <a:p>
+            <a:pPr algn="ctr"/>
+          </a:p>
+        </p:txBody>
+      </p:sp>
+      <p:sp>
+        <p:nvSpPr>
+          <p:cNvPr id="12" name="Diamond 11"/>
+          <p:cNvSpPr/>
+          <p:nvPr/>
+        </p:nvSpPr>
+        <p:spPr>
+          <a:xfrm>
+            <a:off x="4411014" y="1659636"/>
             <a:ext cx="109728" cy="109728"/>
           </a:xfrm>
           <a:prstGeom prst="diamond">
@@ -10281,13 +10435,13 @@
       </p:sp>
       <p:sp>
         <p:nvSpPr>
-          <p:cNvPr id="9" name="TextBox 8"/>
+          <p:cNvPr id="13" name="TextBox 12"/>
           <p:cNvSpPr txBox="1"/>
           <p:nvPr/>
         </p:nvSpPr>
         <p:spPr>
           <a:xfrm>
-            <a:off x="10607040" y="1193292"/>
+            <a:off x="10607040" y="1604772"/>
             <a:ext cx="1371600" cy="228600"/>
           </a:xfrm>
           <a:prstGeom prst="rect">
@@ -10316,13 +10470,13 @@
       </p:sp>
       <p:sp>
         <p:nvSpPr>
-          <p:cNvPr id="10" name="TextBox 9"/>
+          <p:cNvPr id="14" name="TextBox 13"/>
           <p:cNvSpPr txBox="1"/>
           <p:nvPr/>
         </p:nvSpPr>
         <p:spPr>
           <a:xfrm>
-            <a:off x="274320" y="1577340"/>
+            <a:off x="274320" y="1988820"/>
             <a:ext cx="3200400" cy="274320"/>
           </a:xfrm>
           <a:prstGeom prst="rect">
@@ -10340,27 +10494,27 @@
               <a:defRPr sz="800"/>
             </a:pPr>
             <a:r>
-              <a:t>Narrow: 5-HT3 antagonist (any phase)</a:t>
-            </a:r>
-          </a:p>
-        </p:txBody>
-      </p:sp>
-      <p:sp>
-        <p:nvSpPr>
-          <p:cNvPr id="11" name="Rectangle 10"/>
-          <p:cNvSpPr/>
-          <p:nvPr/>
-        </p:nvSpPr>
-        <p:spPr>
-          <a:xfrm>
-            <a:off x="3757096" y="1695450"/>
-            <a:ext cx="5960742" cy="38100"/>
-          </a:xfrm>
-          <a:prstGeom prst="rect">
-            <a:avLst/>
-          </a:prstGeom>
-          <a:solidFill>
-            <a:srgbClr val="C44E52"/>
+              <a:t>Broad: any antiemetic (any phase)</a:t>
+            </a:r>
+          </a:p>
+        </p:txBody>
+      </p:sp>
+      <p:sp>
+        <p:nvSpPr>
+          <p:cNvPr id="15" name="Rectangle 14"/>
+          <p:cNvSpPr/>
+          <p:nvPr/>
+        </p:nvSpPr>
+        <p:spPr>
+          <a:xfrm>
+            <a:off x="3680261" y="2106930"/>
+            <a:ext cx="38055" cy="38100"/>
+          </a:xfrm>
+          <a:prstGeom prst="rect">
+            <a:avLst/>
+          </a:prstGeom>
+          <a:solidFill>
+            <a:srgbClr val="4C72B0"/>
           </a:solidFill>
           <a:ln>
             <a:noFill/>
@@ -10390,167 +10544,13 @@
       </p:sp>
       <p:sp>
         <p:nvSpPr>
-          <p:cNvPr id="12" name="Diamond 11"/>
-          <p:cNvSpPr/>
-          <p:nvPr/>
-        </p:nvSpPr>
-        <p:spPr>
-          <a:xfrm>
-            <a:off x="4379248" y="1659636"/>
-            <a:ext cx="109728" cy="109728"/>
-          </a:xfrm>
-          <a:prstGeom prst="diamond">
-            <a:avLst/>
-          </a:prstGeom>
-          <a:solidFill>
-            <a:srgbClr val="C44E52"/>
-          </a:solidFill>
-          <a:ln>
-            <a:solidFill>
-              <a:srgbClr val="C44E52"/>
-            </a:solidFill>
-          </a:ln>
-        </p:spPr>
-        <p:style>
-          <a:lnRef idx="1">
-            <a:schemeClr val="accent1"/>
-          </a:lnRef>
-          <a:fillRef idx="3">
-            <a:schemeClr val="accent1"/>
-          </a:fillRef>
-          <a:effectRef idx="2">
-            <a:schemeClr val="accent1"/>
-          </a:effectRef>
-          <a:fontRef idx="minor">
-            <a:schemeClr val="lt1"/>
-          </a:fontRef>
-        </p:style>
-        <p:txBody>
-          <a:bodyPr rtlCol="0" anchor="ctr"/>
-          <a:lstStyle/>
-          <a:p>
-            <a:pPr algn="ctr"/>
-          </a:p>
-        </p:txBody>
-      </p:sp>
-      <p:sp>
-        <p:nvSpPr>
-          <p:cNvPr id="13" name="TextBox 12"/>
-          <p:cNvSpPr txBox="1"/>
-          <p:nvPr/>
-        </p:nvSpPr>
-        <p:spPr>
-          <a:xfrm>
-            <a:off x="10607040" y="1604772"/>
-            <a:ext cx="1371600" cy="228600"/>
-          </a:xfrm>
-          <a:prstGeom prst="rect">
-            <a:avLst/>
-          </a:prstGeom>
-          <a:noFill/>
-        </p:spPr>
-        <p:txBody>
-          <a:bodyPr wrap="none">
-            <a:spAutoFit/>
-          </a:bodyPr>
-          <a:lstStyle/>
-          <a:p>
-            <a:pPr>
-              <a:defRPr sz="700">
-                <a:solidFill>
-                  <a:srgbClr val="C44E52"/>
-                </a:solidFill>
-              </a:defRPr>
-            </a:pPr>
-            <a:r>
-              <a:t>OR 13.59 [1.74–106.04] P=0.013*</a:t>
-            </a:r>
-          </a:p>
-        </p:txBody>
-      </p:sp>
-      <p:sp>
-        <p:nvSpPr>
-          <p:cNvPr id="14" name="TextBox 13"/>
-          <p:cNvSpPr txBox="1"/>
-          <p:nvPr/>
-        </p:nvSpPr>
-        <p:spPr>
-          <a:xfrm>
-            <a:off x="274320" y="1988820"/>
-            <a:ext cx="3200400" cy="274320"/>
-          </a:xfrm>
-          <a:prstGeom prst="rect">
-            <a:avLst/>
-          </a:prstGeom>
-          <a:noFill/>
-        </p:spPr>
-        <p:txBody>
-          <a:bodyPr wrap="square">
-            <a:spAutoFit/>
-          </a:bodyPr>
-          <a:lstStyle/>
-          <a:p>
-            <a:pPr algn="r">
-              <a:defRPr sz="800"/>
-            </a:pPr>
-            <a:r>
-              <a:t>Broad: antiemetic before delivery</a:t>
-            </a:r>
-          </a:p>
-        </p:txBody>
-      </p:sp>
-      <p:sp>
-        <p:nvSpPr>
-          <p:cNvPr id="15" name="Rectangle 14"/>
-          <p:cNvSpPr/>
-          <p:nvPr/>
-        </p:nvSpPr>
-        <p:spPr>
-          <a:xfrm>
-            <a:off x="3669892" y="2106930"/>
-            <a:ext cx="117046" cy="38100"/>
-          </a:xfrm>
-          <a:prstGeom prst="rect">
-            <a:avLst/>
-          </a:prstGeom>
-          <a:solidFill>
-            <a:srgbClr val="4C72B0"/>
-          </a:solidFill>
-          <a:ln>
-            <a:noFill/>
-          </a:ln>
-        </p:spPr>
-        <p:style>
-          <a:lnRef idx="1">
-            <a:schemeClr val="accent1"/>
-          </a:lnRef>
-          <a:fillRef idx="3">
-            <a:schemeClr val="accent1"/>
-          </a:fillRef>
-          <a:effectRef idx="2">
-            <a:schemeClr val="accent1"/>
-          </a:effectRef>
-          <a:fontRef idx="minor">
-            <a:schemeClr val="lt1"/>
-          </a:fontRef>
-        </p:style>
-        <p:txBody>
-          <a:bodyPr rtlCol="0" anchor="ctr"/>
-          <a:lstStyle/>
-          <a:p>
-            <a:pPr algn="ctr"/>
-          </a:p>
-        </p:txBody>
-      </p:sp>
-      <p:sp>
-        <p:nvSpPr>
           <p:cNvPr id="16" name="Diamond 15"/>
           <p:cNvSpPr/>
           <p:nvPr/>
         </p:nvSpPr>
         <p:spPr>
           <a:xfrm>
-            <a:off x="3642610" y="2071116"/>
+            <a:off x="3639829" y="2071116"/>
             <a:ext cx="109728" cy="109728"/>
           </a:xfrm>
           <a:prstGeom prst="diamond">
@@ -10617,7 +10617,7 @@
               </a:defRPr>
             </a:pPr>
             <a:r>
-              <a:t>OR 0.70 [0.22–2.26] P=0.549</a:t>
+              <a:t>OR 0.65 [0.40–1.06] P=0.086</a:t>
             </a:r>
           </a:p>
         </p:txBody>
@@ -10648,7 +10648,7 @@
               <a:defRPr sz="800"/>
             </a:pPr>
             <a:r>
-              <a:t>Broad: any antiemetic (any phase)</a:t>
+              <a:t>Broad: antiemetic before delivery</a:t>
             </a:r>
           </a:p>
         </p:txBody>
@@ -10661,8 +10661,8 @@
         </p:nvSpPr>
         <p:spPr>
           <a:xfrm>
-            <a:off x="3680261" y="2518410"/>
-            <a:ext cx="38055" cy="38100"/>
+            <a:off x="3669892" y="2518410"/>
+            <a:ext cx="117046" cy="38100"/>
           </a:xfrm>
           <a:prstGeom prst="rect">
             <a:avLst/>
@@ -10704,7 +10704,7 @@
         </p:nvSpPr>
         <p:spPr>
           <a:xfrm>
-            <a:off x="3639829" y="2482596"/>
+            <a:off x="3642610" y="2482596"/>
             <a:ext cx="109728" cy="109728"/>
           </a:xfrm>
           <a:prstGeom prst="diamond">
@@ -10771,7 +10771,7 @@
               </a:defRPr>
             </a:pPr>
             <a:r>
-              <a:t>OR 0.65 [0.40–1.06] P=0.086</a:t>
+              <a:t>OR 0.70 [0.22–2.26] P=0.549</a:t>
             </a:r>
           </a:p>
         </p:txBody>

--- a/yago_ionv/figures_strobe.pptx
+++ b/yago_ionv/figures_strobe.pptx
@@ -192,16 +192,16 @@
                 <c:formatCode>General</c:formatCode>
                 <c:ptCount val="4"/>
                 <c:pt idx="0">
+                  <c:v>1.8973998594518624</c:v>
+                </c:pt>
+                <c:pt idx="1">
                   <c:v>17.70906535488405</c:v>
                 </c:pt>
-                <c:pt idx="1">
-                  <c:v>1.8973998594518624</c:v>
-                </c:pt>
                 <c:pt idx="2">
-                  <c:v>0.8784258608573436</c:v>
+                  <c:v>0.21082220660576245</c:v>
                 </c:pt>
                 <c:pt idx="3">
-                  <c:v>0.21082220660576245</c:v>
+                  <c:v>0.8784258608573436</c:v>
                 </c:pt>
               </c:numCache>
             </c:numRef>
@@ -276,16 +276,16 @@
                 <c:formatCode>General</c:formatCode>
                 <c:ptCount val="4"/>
                 <c:pt idx="0">
+                  <c:v>1.461988304093567</c:v>
+                </c:pt>
+                <c:pt idx="1">
                   <c:v>16.95906432748538</c:v>
                 </c:pt>
-                <c:pt idx="1">
-                  <c:v>1.461988304093567</c:v>
-                </c:pt>
                 <c:pt idx="2">
-                  <c:v>2.3391812865497075</c:v>
+                  <c:v>0.8771929824561403</c:v>
                 </c:pt>
                 <c:pt idx="3">
-                  <c:v>0.8771929824561403</c:v>
+                  <c:v>2.3391812865497075</c:v>
                 </c:pt>
               </c:numCache>
             </c:numRef>
@@ -5066,7 +5066,7 @@
         </p:nvSpPr>
         <p:spPr>
           <a:xfrm>
-            <a:off x="4374488" y="1097280"/>
+            <a:off x="4007918" y="1097280"/>
             <a:ext cx="19050" cy="2468880"/>
           </a:xfrm>
           <a:prstGeom prst="rect">
@@ -5109,7 +5109,7 @@
         </p:nvSpPr>
         <p:spPr>
           <a:xfrm>
-            <a:off x="4100168" y="3611880"/>
+            <a:off x="3733598" y="3611880"/>
             <a:ext cx="548640" cy="228600"/>
           </a:xfrm>
           <a:prstGeom prst="rect">
@@ -5193,7 +5193,7 @@
               <a:defRPr sz="800"/>
             </a:pPr>
             <a:r>
-              <a:t>Emergency CS</a:t>
+              <a:t>Hypotension (SBP&lt;90)</a:t>
             </a:r>
           </a:p>
         </p:txBody>
@@ -5206,8 +5206,8 @@
         </p:nvSpPr>
         <p:spPr>
           <a:xfrm>
-            <a:off x="4015343" y="1283970"/>
-            <a:ext cx="1196770" cy="38100"/>
+            <a:off x="3756990" y="1283970"/>
+            <a:ext cx="1330779" cy="38100"/>
           </a:xfrm>
           <a:prstGeom prst="rect">
             <a:avLst/>
@@ -5249,7 +5249,7 @@
         </p:nvSpPr>
         <p:spPr>
           <a:xfrm>
-            <a:off x="4348468" y="1248156"/>
+            <a:off x="3979757" y="1248156"/>
             <a:ext cx="109728" cy="109728"/>
           </a:xfrm>
           <a:prstGeom prst="diamond">
@@ -5316,7 +5316,7 @@
               </a:defRPr>
             </a:pPr>
             <a:r>
-              <a:t>OR 1.04 [0.50–2.17] P=0.916</a:t>
+              <a:t>OR 1.08 [0.28–4.08] P=0.914</a:t>
             </a:r>
           </a:p>
         </p:txBody>
@@ -5360,8 +5360,8 @@
         </p:nvSpPr>
         <p:spPr>
           <a:xfrm>
-            <a:off x="4295992" y="1695450"/>
-            <a:ext cx="191177" cy="38100"/>
+            <a:off x="3890101" y="1695450"/>
+            <a:ext cx="268068" cy="38100"/>
           </a:xfrm>
           <a:prstGeom prst="rect">
             <a:avLst/>
@@ -5403,7 +5403,7 @@
         </p:nvSpPr>
         <p:spPr>
           <a:xfrm>
-            <a:off x="4330466" y="1659636"/>
+            <a:off x="3943885" y="1659636"/>
             <a:ext cx="109728" cy="109728"/>
           </a:xfrm>
           <a:prstGeom prst="diamond">
@@ -5470,7 +5470,7 @@
               </a:defRPr>
             </a:pPr>
             <a:r>
-              <a:t>OR 1.02 [0.89–1.16] P=0.822</a:t>
+              <a:t>OR 0.97 [0.66–1.43] P=0.892</a:t>
             </a:r>
           </a:p>
         </p:txBody>
@@ -5501,7 +5501,7 @@
               <a:defRPr sz="800"/>
             </a:pPr>
             <a:r>
-              <a:t>Hypotension (SBP&lt;90)</a:t>
+              <a:t>Age (per year)</a:t>
             </a:r>
           </a:p>
         </p:txBody>
@@ -5514,8 +5514,8 @@
         </p:nvSpPr>
         <p:spPr>
           <a:xfrm>
-            <a:off x="4131923" y="2106930"/>
-            <a:ext cx="1481817" cy="38100"/>
+            <a:off x="3959407" y="2106930"/>
+            <a:ext cx="91752" cy="38100"/>
           </a:xfrm>
           <a:prstGeom prst="rect">
             <a:avLst/>
@@ -5557,7 +5557,7 @@
         </p:nvSpPr>
         <p:spPr>
           <a:xfrm>
-            <a:off x="4565982" y="2071116"/>
+            <a:off x="3947379" y="2071116"/>
             <a:ext cx="109728" cy="109728"/>
           </a:xfrm>
           <a:prstGeom prst="diamond">
@@ -5624,7 +5624,7 @@
               </a:defRPr>
             </a:pPr>
             <a:r>
-              <a:t>OR 1.34 [0.66–2.73] P=0.414</a:t>
+              <a:t>OR 0.98 [0.86–1.12] P=0.809</a:t>
             </a:r>
           </a:p>
         </p:txBody>
@@ -5668,8 +5668,8 @@
         </p:nvSpPr>
         <p:spPr>
           <a:xfrm>
-            <a:off x="4373627" y="2518410"/>
-            <a:ext cx="13304" cy="38100"/>
+            <a:off x="4000422" y="2518410"/>
+            <a:ext cx="19265" cy="38100"/>
           </a:xfrm>
           <a:prstGeom prst="rect">
             <a:avLst/>
@@ -5711,7 +5711,7 @@
         </p:nvSpPr>
         <p:spPr>
           <a:xfrm>
-            <a:off x="4325384" y="2482596"/>
+            <a:off x="3955059" y="2482596"/>
             <a:ext cx="109728" cy="109728"/>
           </a:xfrm>
           <a:prstGeom prst="diamond">
@@ -5778,7 +5778,7 @@
               </a:defRPr>
             </a:pPr>
             <a:r>
-              <a:t>OR 1.01 [1.00–1.02] P=0.088</a:t>
+              <a:t>OR 1.01 [0.98–1.03] P=0.682</a:t>
             </a:r>
           </a:p>
         </p:txBody>
@@ -5809,7 +5809,7 @@
               <a:defRPr sz="800"/>
             </a:pPr>
             <a:r>
-              <a:t>Age (per year)</a:t>
+              <a:t>Emergency CS</a:t>
             </a:r>
           </a:p>
         </p:txBody>
@@ -5822,8 +5822,8 @@
         </p:nvSpPr>
         <p:spPr>
           <a:xfrm>
-            <a:off x="4373330" y="2929890"/>
-            <a:ext cx="107300" cy="38100"/>
+            <a:off x="3663278" y="2929890"/>
+            <a:ext cx="514115" cy="38100"/>
           </a:xfrm>
           <a:prstGeom prst="rect">
             <a:avLst/>
@@ -5865,7 +5865,7 @@
         </p:nvSpPr>
         <p:spPr>
           <a:xfrm>
-            <a:off x="4370243" y="2894076"/>
+            <a:off x="3657065" y="2894076"/>
             <a:ext cx="109728" cy="109728"/>
           </a:xfrm>
           <a:prstGeom prst="diamond">
@@ -5932,7 +5932,7 @@
               </a:defRPr>
             </a:pPr>
             <a:r>
-              <a:t>OR 1.07 [1.00–1.15] P=0.056</a:t>
+              <a:t>OR 0.16 [0.02–1.48] P=0.106</a:t>
             </a:r>
           </a:p>
         </p:txBody>
@@ -5976,8 +5976,8 @@
         </p:nvSpPr>
         <p:spPr>
           <a:xfrm>
-            <a:off x="4644233" y="3341370"/>
-            <a:ext cx="4288751" cy="38100"/>
+            <a:off x="3939744" y="3341370"/>
+            <a:ext cx="4993240" cy="38100"/>
           </a:xfrm>
           <a:prstGeom prst="rect">
             <a:avLst/>
@@ -6019,7 +6019,7 @@
         </p:nvSpPr>
         <p:spPr>
           <a:xfrm>
-            <a:off x="5884154" y="3305556"/>
+            <a:off x="4822745" y="3305556"/>
             <a:ext cx="109728" cy="109728"/>
           </a:xfrm>
           <a:prstGeom prst="diamond">
@@ -6086,7 +6086,7 @@
               </a:defRPr>
             </a:pPr>
             <a:r>
-              <a:t>OR 3.18 [1.38–7.36] P=0.007**</a:t>
+              <a:t>OR 3.48 [0.81–15.06] P=0.095</a:t>
             </a:r>
           </a:p>
         </p:txBody>
@@ -6310,7 +6310,7 @@
               <a:defRPr sz="800"/>
             </a:pPr>
             <a:r>
-              <a:t>Def E: 5-HT3 + before delivery phase</a:t>
+              <a:t>Narrow: 5-HT3 any phase (anesthesia→exit)</a:t>
             </a:r>
           </a:p>
         </p:txBody>
@@ -6323,14 +6323,14 @@
         </p:nvSpPr>
         <p:spPr>
           <a:xfrm>
-            <a:off x="3939744" y="1283970"/>
-            <a:ext cx="4993240" cy="38100"/>
-          </a:xfrm>
-          <a:prstGeom prst="rect">
-            <a:avLst/>
-          </a:prstGeom>
-          <a:solidFill>
-            <a:srgbClr val="4C72B0"/>
+            <a:off x="4139733" y="1283970"/>
+            <a:ext cx="2095764" cy="38100"/>
+          </a:xfrm>
+          <a:prstGeom prst="rect">
+            <a:avLst/>
+          </a:prstGeom>
+          <a:solidFill>
+            <a:srgbClr val="C44E52"/>
           </a:solidFill>
           <a:ln>
             <a:noFill/>
@@ -6366,7 +6366,161 @@
         </p:nvSpPr>
         <p:spPr>
           <a:xfrm>
-            <a:off x="4822745" y="1248156"/>
+            <a:off x="4717586" y="1248156"/>
+            <a:ext cx="109728" cy="109728"/>
+          </a:xfrm>
+          <a:prstGeom prst="diamond">
+            <a:avLst/>
+          </a:prstGeom>
+          <a:solidFill>
+            <a:srgbClr val="C44E52"/>
+          </a:solidFill>
+          <a:ln>
+            <a:solidFill>
+              <a:srgbClr val="C44E52"/>
+            </a:solidFill>
+          </a:ln>
+        </p:spPr>
+        <p:style>
+          <a:lnRef idx="1">
+            <a:schemeClr val="accent1"/>
+          </a:lnRef>
+          <a:fillRef idx="3">
+            <a:schemeClr val="accent1"/>
+          </a:fillRef>
+          <a:effectRef idx="2">
+            <a:schemeClr val="accent1"/>
+          </a:effectRef>
+          <a:fontRef idx="minor">
+            <a:schemeClr val="lt1"/>
+          </a:fontRef>
+        </p:style>
+        <p:txBody>
+          <a:bodyPr rtlCol="0" anchor="ctr"/>
+          <a:lstStyle/>
+          <a:p>
+            <a:pPr algn="ctr"/>
+          </a:p>
+        </p:txBody>
+      </p:sp>
+      <p:sp>
+        <p:nvSpPr>
+          <p:cNvPr id="9" name="TextBox 8"/>
+          <p:cNvSpPr txBox="1"/>
+          <p:nvPr/>
+        </p:nvSpPr>
+        <p:spPr>
+          <a:xfrm>
+            <a:off x="10607040" y="1193292"/>
+            <a:ext cx="1371600" cy="228600"/>
+          </a:xfrm>
+          <a:prstGeom prst="rect">
+            <a:avLst/>
+          </a:prstGeom>
+          <a:noFill/>
+        </p:spPr>
+        <p:txBody>
+          <a:bodyPr wrap="none">
+            <a:spAutoFit/>
+          </a:bodyPr>
+          <a:lstStyle/>
+          <a:p>
+            <a:pPr>
+              <a:defRPr sz="700">
+                <a:solidFill>
+                  <a:srgbClr val="C44E52"/>
+                </a:solidFill>
+              </a:defRPr>
+            </a:pPr>
+            <a:r>
+              <a:t>OR 3.18 [1.38–7.36] P=0.007**</a:t>
+            </a:r>
+          </a:p>
+        </p:txBody>
+      </p:sp>
+      <p:sp>
+        <p:nvSpPr>
+          <p:cNvPr id="10" name="TextBox 9"/>
+          <p:cNvSpPr txBox="1"/>
+          <p:nvPr/>
+        </p:nvSpPr>
+        <p:spPr>
+          <a:xfrm>
+            <a:off x="274320" y="1577340"/>
+            <a:ext cx="3200400" cy="274320"/>
+          </a:xfrm>
+          <a:prstGeom prst="rect">
+            <a:avLst/>
+          </a:prstGeom>
+          <a:noFill/>
+        </p:spPr>
+        <p:txBody>
+          <a:bodyPr wrap="square">
+            <a:spAutoFit/>
+          </a:bodyPr>
+          <a:lstStyle/>
+          <a:p>
+            <a:pPr algn="r">
+              <a:defRPr sz="800"/>
+            </a:pPr>
+            <a:r>
+              <a:t>Narrow: 5-HT3 before delivery</a:t>
+            </a:r>
+          </a:p>
+        </p:txBody>
+      </p:sp>
+      <p:sp>
+        <p:nvSpPr>
+          <p:cNvPr id="11" name="Rectangle 10"/>
+          <p:cNvSpPr/>
+          <p:nvPr/>
+        </p:nvSpPr>
+        <p:spPr>
+          <a:xfrm>
+            <a:off x="3939744" y="1695450"/>
+            <a:ext cx="4993240" cy="38100"/>
+          </a:xfrm>
+          <a:prstGeom prst="rect">
+            <a:avLst/>
+          </a:prstGeom>
+          <a:solidFill>
+            <a:srgbClr val="4C72B0"/>
+          </a:solidFill>
+          <a:ln>
+            <a:noFill/>
+          </a:ln>
+        </p:spPr>
+        <p:style>
+          <a:lnRef idx="1">
+            <a:schemeClr val="accent1"/>
+          </a:lnRef>
+          <a:fillRef idx="3">
+            <a:schemeClr val="accent1"/>
+          </a:fillRef>
+          <a:effectRef idx="2">
+            <a:schemeClr val="accent1"/>
+          </a:effectRef>
+          <a:fontRef idx="minor">
+            <a:schemeClr val="lt1"/>
+          </a:fontRef>
+        </p:style>
+        <p:txBody>
+          <a:bodyPr rtlCol="0" anchor="ctr"/>
+          <a:lstStyle/>
+          <a:p>
+            <a:pPr algn="ctr"/>
+          </a:p>
+        </p:txBody>
+      </p:sp>
+      <p:sp>
+        <p:nvSpPr>
+          <p:cNvPr id="12" name="Diamond 11"/>
+          <p:cNvSpPr/>
+          <p:nvPr/>
+        </p:nvSpPr>
+        <p:spPr>
+          <a:xfrm>
+            <a:off x="4822745" y="1659636"/>
             <a:ext cx="109728" cy="109728"/>
           </a:xfrm>
           <a:prstGeom prst="diamond">
@@ -6405,13 +6559,13 @@
       </p:sp>
       <p:sp>
         <p:nvSpPr>
-          <p:cNvPr id="9" name="TextBox 8"/>
+          <p:cNvPr id="13" name="TextBox 12"/>
           <p:cNvSpPr txBox="1"/>
           <p:nvPr/>
         </p:nvSpPr>
         <p:spPr>
           <a:xfrm>
-            <a:off x="10607040" y="1193292"/>
+            <a:off x="10607040" y="1604772"/>
             <a:ext cx="1371600" cy="228600"/>
           </a:xfrm>
           <a:prstGeom prst="rect">
@@ -6440,13 +6594,13 @@
       </p:sp>
       <p:sp>
         <p:nvSpPr>
-          <p:cNvPr id="10" name="TextBox 9"/>
+          <p:cNvPr id="14" name="TextBox 13"/>
           <p:cNvSpPr txBox="1"/>
           <p:nvPr/>
         </p:nvSpPr>
         <p:spPr>
           <a:xfrm>
-            <a:off x="274320" y="1577340"/>
+            <a:off x="274320" y="1988820"/>
             <a:ext cx="3200400" cy="274320"/>
           </a:xfrm>
           <a:prstGeom prst="rect">
@@ -6464,27 +6618,27 @@
               <a:defRPr sz="800"/>
             </a:pPr>
             <a:r>
-              <a:t>Def E: 5-HT3 antagonist (any phase)</a:t>
-            </a:r>
-          </a:p>
-        </p:txBody>
-      </p:sp>
-      <p:sp>
-        <p:nvSpPr>
-          <p:cNvPr id="11" name="Rectangle 10"/>
-          <p:cNvSpPr/>
-          <p:nvPr/>
-        </p:nvSpPr>
-        <p:spPr>
-          <a:xfrm>
-            <a:off x="4139733" y="1695450"/>
-            <a:ext cx="2095764" cy="38100"/>
-          </a:xfrm>
-          <a:prstGeom prst="rect">
-            <a:avLst/>
-          </a:prstGeom>
-          <a:solidFill>
-            <a:srgbClr val="C44E52"/>
+              <a:t>Broad: any antiemetic (anesthesia→exit)</a:t>
+            </a:r>
+          </a:p>
+        </p:txBody>
+      </p:sp>
+      <p:sp>
+        <p:nvSpPr>
+          <p:cNvPr id="15" name="Rectangle 14"/>
+          <p:cNvSpPr/>
+          <p:nvPr/>
+        </p:nvSpPr>
+        <p:spPr>
+          <a:xfrm>
+            <a:off x="3893871" y="2106930"/>
+            <a:ext cx="207380" cy="38100"/>
+          </a:xfrm>
+          <a:prstGeom prst="rect">
+            <a:avLst/>
+          </a:prstGeom>
+          <a:solidFill>
+            <a:srgbClr val="4C72B0"/>
           </a:solidFill>
           <a:ln>
             <a:noFill/>
@@ -6514,167 +6668,13 @@
       </p:sp>
       <p:sp>
         <p:nvSpPr>
-          <p:cNvPr id="12" name="Diamond 11"/>
-          <p:cNvSpPr/>
-          <p:nvPr/>
-        </p:nvSpPr>
-        <p:spPr>
-          <a:xfrm>
-            <a:off x="4717586" y="1659636"/>
-            <a:ext cx="109728" cy="109728"/>
-          </a:xfrm>
-          <a:prstGeom prst="diamond">
-            <a:avLst/>
-          </a:prstGeom>
-          <a:solidFill>
-            <a:srgbClr val="C44E52"/>
-          </a:solidFill>
-          <a:ln>
-            <a:solidFill>
-              <a:srgbClr val="C44E52"/>
-            </a:solidFill>
-          </a:ln>
-        </p:spPr>
-        <p:style>
-          <a:lnRef idx="1">
-            <a:schemeClr val="accent1"/>
-          </a:lnRef>
-          <a:fillRef idx="3">
-            <a:schemeClr val="accent1"/>
-          </a:fillRef>
-          <a:effectRef idx="2">
-            <a:schemeClr val="accent1"/>
-          </a:effectRef>
-          <a:fontRef idx="minor">
-            <a:schemeClr val="lt1"/>
-          </a:fontRef>
-        </p:style>
-        <p:txBody>
-          <a:bodyPr rtlCol="0" anchor="ctr"/>
-          <a:lstStyle/>
-          <a:p>
-            <a:pPr algn="ctr"/>
-          </a:p>
-        </p:txBody>
-      </p:sp>
-      <p:sp>
-        <p:nvSpPr>
-          <p:cNvPr id="13" name="TextBox 12"/>
-          <p:cNvSpPr txBox="1"/>
-          <p:nvPr/>
-        </p:nvSpPr>
-        <p:spPr>
-          <a:xfrm>
-            <a:off x="10607040" y="1604772"/>
-            <a:ext cx="1371600" cy="228600"/>
-          </a:xfrm>
-          <a:prstGeom prst="rect">
-            <a:avLst/>
-          </a:prstGeom>
-          <a:noFill/>
-        </p:spPr>
-        <p:txBody>
-          <a:bodyPr wrap="none">
-            <a:spAutoFit/>
-          </a:bodyPr>
-          <a:lstStyle/>
-          <a:p>
-            <a:pPr>
-              <a:defRPr sz="700">
-                <a:solidFill>
-                  <a:srgbClr val="C44E52"/>
-                </a:solidFill>
-              </a:defRPr>
-            </a:pPr>
-            <a:r>
-              <a:t>OR 3.18 [1.38–7.36] P=0.007**</a:t>
-            </a:r>
-          </a:p>
-        </p:txBody>
-      </p:sp>
-      <p:sp>
-        <p:nvSpPr>
-          <p:cNvPr id="14" name="TextBox 13"/>
-          <p:cNvSpPr txBox="1"/>
-          <p:nvPr/>
-        </p:nvSpPr>
-        <p:spPr>
-          <a:xfrm>
-            <a:off x="274320" y="1988820"/>
-            <a:ext cx="3200400" cy="274320"/>
-          </a:xfrm>
-          <a:prstGeom prst="rect">
-            <a:avLst/>
-          </a:prstGeom>
-          <a:noFill/>
-        </p:spPr>
-        <p:txBody>
-          <a:bodyPr wrap="square">
-            <a:spAutoFit/>
-          </a:bodyPr>
-          <a:lstStyle/>
-          <a:p>
-            <a:pPr algn="r">
-              <a:defRPr sz="800"/>
-            </a:pPr>
-            <a:r>
-              <a:t>Protocol: antiemetic before delivery</a:t>
-            </a:r>
-          </a:p>
-        </p:txBody>
-      </p:sp>
-      <p:sp>
-        <p:nvSpPr>
-          <p:cNvPr id="15" name="Rectangle 14"/>
-          <p:cNvSpPr/>
-          <p:nvPr/>
-        </p:nvSpPr>
-        <p:spPr>
-          <a:xfrm>
-            <a:off x="3766155" y="2106930"/>
-            <a:ext cx="646378" cy="38100"/>
-          </a:xfrm>
-          <a:prstGeom prst="rect">
-            <a:avLst/>
-          </a:prstGeom>
-          <a:solidFill>
-            <a:srgbClr val="4C72B0"/>
-          </a:solidFill>
-          <a:ln>
-            <a:noFill/>
-          </a:ln>
-        </p:spPr>
-        <p:style>
-          <a:lnRef idx="1">
-            <a:schemeClr val="accent1"/>
-          </a:lnRef>
-          <a:fillRef idx="3">
-            <a:schemeClr val="accent1"/>
-          </a:fillRef>
-          <a:effectRef idx="2">
-            <a:schemeClr val="accent1"/>
-          </a:effectRef>
-          <a:fontRef idx="minor">
-            <a:schemeClr val="lt1"/>
-          </a:fontRef>
-        </p:style>
-        <p:txBody>
-          <a:bodyPr rtlCol="0" anchor="ctr"/>
-          <a:lstStyle/>
-          <a:p>
-            <a:pPr algn="ctr"/>
-          </a:p>
-        </p:txBody>
-      </p:sp>
-      <p:sp>
-        <p:nvSpPr>
           <p:cNvPr id="16" name="Diamond 15"/>
           <p:cNvSpPr/>
           <p:nvPr/>
         </p:nvSpPr>
         <p:spPr>
           <a:xfrm>
-            <a:off x="3889008" y="2071116"/>
+            <a:off x="3926498" y="2071116"/>
             <a:ext cx="109728" cy="109728"/>
           </a:xfrm>
           <a:prstGeom prst="diamond">
@@ -6741,7 +6741,7 @@
               </a:defRPr>
             </a:pPr>
             <a:r>
-              <a:t>OR 0.82 [0.31–2.15] P=0.683</a:t>
+              <a:t>OR 0.92 [0.67–1.27] P=0.624</a:t>
             </a:r>
           </a:p>
         </p:txBody>
@@ -6772,7 +6772,7 @@
               <a:defRPr sz="800"/>
             </a:pPr>
             <a:r>
-              <a:t>Protocol: any antiemetic (any phase)</a:t>
+              <a:t>Broad: antiemetic before delivery</a:t>
             </a:r>
           </a:p>
         </p:txBody>
@@ -6785,8 +6785,8 @@
         </p:nvSpPr>
         <p:spPr>
           <a:xfrm>
-            <a:off x="3893871" y="2518410"/>
-            <a:ext cx="207380" cy="38100"/>
+            <a:off x="3766155" y="2518410"/>
+            <a:ext cx="646378" cy="38100"/>
           </a:xfrm>
           <a:prstGeom prst="rect">
             <a:avLst/>
@@ -6828,7 +6828,7 @@
         </p:nvSpPr>
         <p:spPr>
           <a:xfrm>
-            <a:off x="3926498" y="2482596"/>
+            <a:off x="3889008" y="2482596"/>
             <a:ext cx="109728" cy="109728"/>
           </a:xfrm>
           <a:prstGeom prst="diamond">
@@ -6895,7 +6895,7 @@
               </a:defRPr>
             </a:pPr>
             <a:r>
-              <a:t>OR 0.92 [0.67–1.27] P=0.624</a:t>
+              <a:t>OR 0.82 [0.31–2.15] P=0.683</a:t>
             </a:r>
           </a:p>
         </p:txBody>
@@ -6992,7 +6992,7 @@
         </p:nvSpPr>
         <p:spPr>
           <a:xfrm>
-            <a:off x="4262051" y="1097280"/>
+            <a:off x="3835371" y="1097280"/>
             <a:ext cx="19050" cy="4572000"/>
           </a:xfrm>
           <a:prstGeom prst="rect">
@@ -7035,7 +7035,7 @@
         </p:nvSpPr>
         <p:spPr>
           <a:xfrm>
-            <a:off x="3987731" y="5715000"/>
+            <a:off x="3561051" y="5715000"/>
             <a:ext cx="548640" cy="228600"/>
           </a:xfrm>
           <a:prstGeom prst="rect">
@@ -7101,7 +7101,7 @@
         </p:nvSpPr>
         <p:spPr>
           <a:xfrm>
-            <a:off x="274320" y="1087120"/>
+            <a:off x="274320" y="1080435"/>
             <a:ext cx="3200400" cy="274320"/>
           </a:xfrm>
           <a:prstGeom prst="rect">
@@ -7132,14 +7132,14 @@
         </p:nvSpPr>
         <p:spPr>
           <a:xfrm>
-            <a:off x="4489489" y="1205230"/>
-            <a:ext cx="3616104" cy="38100"/>
-          </a:xfrm>
-          <a:prstGeom prst="rect">
-            <a:avLst/>
-          </a:prstGeom>
-          <a:solidFill>
-            <a:srgbClr val="C44E52"/>
+            <a:off x="3800776" y="1198545"/>
+            <a:ext cx="2533853" cy="38100"/>
+          </a:xfrm>
+          <a:prstGeom prst="rect">
+            <a:avLst/>
+          </a:prstGeom>
+          <a:solidFill>
+            <a:srgbClr val="4C72B0"/>
           </a:solidFill>
           <a:ln>
             <a:noFill/>
@@ -7175,7 +7175,777 @@
         </p:nvSpPr>
         <p:spPr>
           <a:xfrm>
-            <a:off x="5526336" y="1169416"/>
+            <a:off x="4221837" y="1162731"/>
+            <a:ext cx="109728" cy="109728"/>
+          </a:xfrm>
+          <a:prstGeom prst="diamond">
+            <a:avLst/>
+          </a:prstGeom>
+          <a:solidFill>
+            <a:srgbClr val="4C72B0"/>
+          </a:solidFill>
+          <a:ln>
+            <a:solidFill>
+              <a:srgbClr val="4C72B0"/>
+            </a:solidFill>
+          </a:ln>
+        </p:spPr>
+        <p:style>
+          <a:lnRef idx="1">
+            <a:schemeClr val="accent1"/>
+          </a:lnRef>
+          <a:fillRef idx="3">
+            <a:schemeClr val="accent1"/>
+          </a:fillRef>
+          <a:effectRef idx="2">
+            <a:schemeClr val="accent1"/>
+          </a:effectRef>
+          <a:fontRef idx="minor">
+            <a:schemeClr val="lt1"/>
+          </a:fontRef>
+        </p:style>
+        <p:txBody>
+          <a:bodyPr rtlCol="0" anchor="ctr"/>
+          <a:lstStyle/>
+          <a:p>
+            <a:pPr algn="ctr"/>
+          </a:p>
+        </p:txBody>
+      </p:sp>
+      <p:sp>
+        <p:nvSpPr>
+          <p:cNvPr id="9" name="TextBox 8"/>
+          <p:cNvSpPr txBox="1"/>
+          <p:nvPr/>
+        </p:nvSpPr>
+        <p:spPr>
+          <a:xfrm>
+            <a:off x="10607040" y="1107867"/>
+            <a:ext cx="1371600" cy="228600"/>
+          </a:xfrm>
+          <a:prstGeom prst="rect">
+            <a:avLst/>
+          </a:prstGeom>
+          <a:noFill/>
+        </p:spPr>
+        <p:txBody>
+          <a:bodyPr wrap="none">
+            <a:spAutoFit/>
+          </a:bodyPr>
+          <a:lstStyle/>
+          <a:p>
+            <a:pPr>
+              <a:defRPr sz="700">
+                <a:solidFill>
+                  <a:srgbClr val="4C72B0"/>
+                </a:solidFill>
+              </a:defRPr>
+            </a:pPr>
+            <a:r>
+              <a:t>OR 3.48 [0.81–15.06] P=0.095</a:t>
+            </a:r>
+          </a:p>
+        </p:txBody>
+      </p:sp>
+      <p:sp>
+        <p:nvSpPr>
+          <p:cNvPr id="10" name="TextBox 9"/>
+          <p:cNvSpPr txBox="1"/>
+          <p:nvPr/>
+        </p:nvSpPr>
+        <p:spPr>
+          <a:xfrm>
+            <a:off x="274320" y="1321067"/>
+            <a:ext cx="3200400" cy="274320"/>
+          </a:xfrm>
+          <a:prstGeom prst="rect">
+            <a:avLst/>
+          </a:prstGeom>
+          <a:noFill/>
+        </p:spPr>
+        <p:txBody>
+          <a:bodyPr wrap="square">
+            <a:spAutoFit/>
+          </a:bodyPr>
+          <a:lstStyle/>
+          <a:p>
+            <a:pPr algn="r">
+              <a:defRPr sz="800"/>
+            </a:pPr>
+            <a:r>
+              <a:t>Full minus Surgery time (per min)</a:t>
+            </a:r>
+          </a:p>
+        </p:txBody>
+      </p:sp>
+      <p:sp>
+        <p:nvSpPr>
+          <p:cNvPr id="11" name="Rectangle 10"/>
+          <p:cNvSpPr/>
+          <p:nvPr/>
+        </p:nvSpPr>
+        <p:spPr>
+          <a:xfrm>
+            <a:off x="3757472" y="1439177"/>
+            <a:ext cx="2989223" cy="38100"/>
+          </a:xfrm>
+          <a:prstGeom prst="rect">
+            <a:avLst/>
+          </a:prstGeom>
+          <a:solidFill>
+            <a:srgbClr val="4C72B0"/>
+          </a:solidFill>
+          <a:ln>
+            <a:noFill/>
+          </a:ln>
+        </p:spPr>
+        <p:style>
+          <a:lnRef idx="1">
+            <a:schemeClr val="accent1"/>
+          </a:lnRef>
+          <a:fillRef idx="3">
+            <a:schemeClr val="accent1"/>
+          </a:fillRef>
+          <a:effectRef idx="2">
+            <a:schemeClr val="accent1"/>
+          </a:effectRef>
+          <a:fontRef idx="minor">
+            <a:schemeClr val="lt1"/>
+          </a:fontRef>
+        </p:style>
+        <p:txBody>
+          <a:bodyPr rtlCol="0" anchor="ctr"/>
+          <a:lstStyle/>
+          <a:p>
+            <a:pPr algn="ctr"/>
+          </a:p>
+        </p:txBody>
+      </p:sp>
+      <p:sp>
+        <p:nvSpPr>
+          <p:cNvPr id="12" name="Diamond 11"/>
+          <p:cNvSpPr/>
+          <p:nvPr/>
+        </p:nvSpPr>
+        <p:spPr>
+          <a:xfrm>
+            <a:off x="4158177" y="1403363"/>
+            <a:ext cx="109728" cy="109728"/>
+          </a:xfrm>
+          <a:prstGeom prst="diamond">
+            <a:avLst/>
+          </a:prstGeom>
+          <a:solidFill>
+            <a:srgbClr val="4C72B0"/>
+          </a:solidFill>
+          <a:ln>
+            <a:solidFill>
+              <a:srgbClr val="4C72B0"/>
+            </a:solidFill>
+          </a:ln>
+        </p:spPr>
+        <p:style>
+          <a:lnRef idx="1">
+            <a:schemeClr val="accent1"/>
+          </a:lnRef>
+          <a:fillRef idx="3">
+            <a:schemeClr val="accent1"/>
+          </a:fillRef>
+          <a:effectRef idx="2">
+            <a:schemeClr val="accent1"/>
+          </a:effectRef>
+          <a:fontRef idx="minor">
+            <a:schemeClr val="lt1"/>
+          </a:fontRef>
+        </p:style>
+        <p:txBody>
+          <a:bodyPr rtlCol="0" anchor="ctr"/>
+          <a:lstStyle/>
+          <a:p>
+            <a:pPr algn="ctr"/>
+          </a:p>
+        </p:txBody>
+      </p:sp>
+      <p:sp>
+        <p:nvSpPr>
+          <p:cNvPr id="13" name="TextBox 12"/>
+          <p:cNvSpPr txBox="1"/>
+          <p:nvPr/>
+        </p:nvSpPr>
+        <p:spPr>
+          <a:xfrm>
+            <a:off x="10607040" y="1348499"/>
+            <a:ext cx="1371600" cy="228600"/>
+          </a:xfrm>
+          <a:prstGeom prst="rect">
+            <a:avLst/>
+          </a:prstGeom>
+          <a:noFill/>
+        </p:spPr>
+        <p:txBody>
+          <a:bodyPr wrap="none">
+            <a:spAutoFit/>
+          </a:bodyPr>
+          <a:lstStyle/>
+          <a:p>
+            <a:pPr>
+              <a:defRPr sz="700">
+                <a:solidFill>
+                  <a:srgbClr val="4C72B0"/>
+                </a:solidFill>
+              </a:defRPr>
+            </a:pPr>
+            <a:r>
+              <a:t>OR 3.12 [0.56–17.38] P=0.193</a:t>
+            </a:r>
+          </a:p>
+        </p:txBody>
+      </p:sp>
+      <p:sp>
+        <p:nvSpPr>
+          <p:cNvPr id="14" name="TextBox 13"/>
+          <p:cNvSpPr txBox="1"/>
+          <p:nvPr/>
+        </p:nvSpPr>
+        <p:spPr>
+          <a:xfrm>
+            <a:off x="274320" y="1561698"/>
+            <a:ext cx="3200400" cy="274320"/>
+          </a:xfrm>
+          <a:prstGeom prst="rect">
+            <a:avLst/>
+          </a:prstGeom>
+          <a:noFill/>
+        </p:spPr>
+        <p:txBody>
+          <a:bodyPr wrap="square">
+            <a:spAutoFit/>
+          </a:bodyPr>
+          <a:lstStyle/>
+          <a:p>
+            <a:pPr algn="r">
+              <a:defRPr sz="800"/>
+            </a:pPr>
+            <a:r>
+              <a:t>Full minus Epidural anesthesia</a:t>
+            </a:r>
+          </a:p>
+        </p:txBody>
+      </p:sp>
+      <p:sp>
+        <p:nvSpPr>
+          <p:cNvPr id="15" name="Rectangle 14"/>
+          <p:cNvSpPr/>
+          <p:nvPr/>
+        </p:nvSpPr>
+        <p:spPr>
+          <a:xfrm>
+            <a:off x="3787858" y="1679808"/>
+            <a:ext cx="3580687" cy="38100"/>
+          </a:xfrm>
+          <a:prstGeom prst="rect">
+            <a:avLst/>
+          </a:prstGeom>
+          <a:solidFill>
+            <a:srgbClr val="4C72B0"/>
+          </a:solidFill>
+          <a:ln>
+            <a:noFill/>
+          </a:ln>
+        </p:spPr>
+        <p:style>
+          <a:lnRef idx="1">
+            <a:schemeClr val="accent1"/>
+          </a:lnRef>
+          <a:fillRef idx="3">
+            <a:schemeClr val="accent1"/>
+          </a:fillRef>
+          <a:effectRef idx="2">
+            <a:schemeClr val="accent1"/>
+          </a:effectRef>
+          <a:fontRef idx="minor">
+            <a:schemeClr val="lt1"/>
+          </a:fontRef>
+        </p:style>
+        <p:txBody>
+          <a:bodyPr rtlCol="0" anchor="ctr"/>
+          <a:lstStyle/>
+          <a:p>
+            <a:pPr algn="ctr"/>
+          </a:p>
+        </p:txBody>
+      </p:sp>
+      <p:sp>
+        <p:nvSpPr>
+          <p:cNvPr id="16" name="Diamond 15"/>
+          <p:cNvSpPr/>
+          <p:nvPr/>
+        </p:nvSpPr>
+        <p:spPr>
+          <a:xfrm>
+            <a:off x="4297992" y="1643994"/>
+            <a:ext cx="109728" cy="109728"/>
+          </a:xfrm>
+          <a:prstGeom prst="diamond">
+            <a:avLst/>
+          </a:prstGeom>
+          <a:solidFill>
+            <a:srgbClr val="4C72B0"/>
+          </a:solidFill>
+          <a:ln>
+            <a:solidFill>
+              <a:srgbClr val="4C72B0"/>
+            </a:solidFill>
+          </a:ln>
+        </p:spPr>
+        <p:style>
+          <a:lnRef idx="1">
+            <a:schemeClr val="accent1"/>
+          </a:lnRef>
+          <a:fillRef idx="3">
+            <a:schemeClr val="accent1"/>
+          </a:fillRef>
+          <a:effectRef idx="2">
+            <a:schemeClr val="accent1"/>
+          </a:effectRef>
+          <a:fontRef idx="minor">
+            <a:schemeClr val="lt1"/>
+          </a:fontRef>
+        </p:style>
+        <p:txBody>
+          <a:bodyPr rtlCol="0" anchor="ctr"/>
+          <a:lstStyle/>
+          <a:p>
+            <a:pPr algn="ctr"/>
+          </a:p>
+        </p:txBody>
+      </p:sp>
+      <p:sp>
+        <p:nvSpPr>
+          <p:cNvPr id="17" name="TextBox 16"/>
+          <p:cNvSpPr txBox="1"/>
+          <p:nvPr/>
+        </p:nvSpPr>
+        <p:spPr>
+          <a:xfrm>
+            <a:off x="10607040" y="1589130"/>
+            <a:ext cx="1371600" cy="228600"/>
+          </a:xfrm>
+          <a:prstGeom prst="rect">
+            <a:avLst/>
+          </a:prstGeom>
+          <a:noFill/>
+        </p:spPr>
+        <p:txBody>
+          <a:bodyPr wrap="none">
+            <a:spAutoFit/>
+          </a:bodyPr>
+          <a:lstStyle/>
+          <a:p>
+            <a:pPr>
+              <a:defRPr sz="700">
+                <a:solidFill>
+                  <a:srgbClr val="4C72B0"/>
+                </a:solidFill>
+              </a:defRPr>
+            </a:pPr>
+            <a:r>
+              <a:t>OR 3.91 [0.73–20.87] P=0.110</a:t>
+            </a:r>
+          </a:p>
+        </p:txBody>
+      </p:sp>
+      <p:sp>
+        <p:nvSpPr>
+          <p:cNvPr id="18" name="TextBox 17"/>
+          <p:cNvSpPr txBox="1"/>
+          <p:nvPr/>
+        </p:nvSpPr>
+        <p:spPr>
+          <a:xfrm>
+            <a:off x="274320" y="1802330"/>
+            <a:ext cx="3200400" cy="274320"/>
+          </a:xfrm>
+          <a:prstGeom prst="rect">
+            <a:avLst/>
+          </a:prstGeom>
+          <a:noFill/>
+        </p:spPr>
+        <p:txBody>
+          <a:bodyPr wrap="square">
+            <a:spAutoFit/>
+          </a:bodyPr>
+          <a:lstStyle/>
+          <a:p>
+            <a:pPr algn="r">
+              <a:defRPr sz="800"/>
+            </a:pPr>
+            <a:r>
+              <a:t>Full minus HDP</a:t>
+            </a:r>
+          </a:p>
+        </p:txBody>
+      </p:sp>
+      <p:sp>
+        <p:nvSpPr>
+          <p:cNvPr id="19" name="Rectangle 18"/>
+          <p:cNvSpPr/>
+          <p:nvPr/>
+        </p:nvSpPr>
+        <p:spPr>
+          <a:xfrm>
+            <a:off x="3767164" y="1920440"/>
+            <a:ext cx="3138097" cy="38100"/>
+          </a:xfrm>
+          <a:prstGeom prst="rect">
+            <a:avLst/>
+          </a:prstGeom>
+          <a:solidFill>
+            <a:srgbClr val="4C72B0"/>
+          </a:solidFill>
+          <a:ln>
+            <a:noFill/>
+          </a:ln>
+        </p:spPr>
+        <p:style>
+          <a:lnRef idx="1">
+            <a:schemeClr val="accent1"/>
+          </a:lnRef>
+          <a:fillRef idx="3">
+            <a:schemeClr val="accent1"/>
+          </a:fillRef>
+          <a:effectRef idx="2">
+            <a:schemeClr val="accent1"/>
+          </a:effectRef>
+          <a:fontRef idx="minor">
+            <a:schemeClr val="lt1"/>
+          </a:fontRef>
+        </p:style>
+        <p:txBody>
+          <a:bodyPr rtlCol="0" anchor="ctr"/>
+          <a:lstStyle/>
+          <a:p>
+            <a:pPr algn="ctr"/>
+          </a:p>
+        </p:txBody>
+      </p:sp>
+      <p:sp>
+        <p:nvSpPr>
+          <p:cNvPr id="20" name="Diamond 19"/>
+          <p:cNvSpPr/>
+          <p:nvPr/>
+        </p:nvSpPr>
+        <p:spPr>
+          <a:xfrm>
+            <a:off x="4199249" y="1884626"/>
+            <a:ext cx="109728" cy="109728"/>
+          </a:xfrm>
+          <a:prstGeom prst="diamond">
+            <a:avLst/>
+          </a:prstGeom>
+          <a:solidFill>
+            <a:srgbClr val="4C72B0"/>
+          </a:solidFill>
+          <a:ln>
+            <a:solidFill>
+              <a:srgbClr val="4C72B0"/>
+            </a:solidFill>
+          </a:ln>
+        </p:spPr>
+        <p:style>
+          <a:lnRef idx="1">
+            <a:schemeClr val="accent1"/>
+          </a:lnRef>
+          <a:fillRef idx="3">
+            <a:schemeClr val="accent1"/>
+          </a:fillRef>
+          <a:effectRef idx="2">
+            <a:schemeClr val="accent1"/>
+          </a:effectRef>
+          <a:fontRef idx="minor">
+            <a:schemeClr val="lt1"/>
+          </a:fontRef>
+        </p:style>
+        <p:txBody>
+          <a:bodyPr rtlCol="0" anchor="ctr"/>
+          <a:lstStyle/>
+          <a:p>
+            <a:pPr algn="ctr"/>
+          </a:p>
+        </p:txBody>
+      </p:sp>
+      <p:sp>
+        <p:nvSpPr>
+          <p:cNvPr id="21" name="TextBox 20"/>
+          <p:cNvSpPr txBox="1"/>
+          <p:nvPr/>
+        </p:nvSpPr>
+        <p:spPr>
+          <a:xfrm>
+            <a:off x="10607040" y="1829762"/>
+            <a:ext cx="1371600" cy="228600"/>
+          </a:xfrm>
+          <a:prstGeom prst="rect">
+            <a:avLst/>
+          </a:prstGeom>
+          <a:noFill/>
+        </p:spPr>
+        <p:txBody>
+          <a:bodyPr wrap="none">
+            <a:spAutoFit/>
+          </a:bodyPr>
+          <a:lstStyle/>
+          <a:p>
+            <a:pPr>
+              <a:defRPr sz="700">
+                <a:solidFill>
+                  <a:srgbClr val="4C72B0"/>
+                </a:solidFill>
+              </a:defRPr>
+            </a:pPr>
+            <a:r>
+              <a:t>OR 3.36 [0.62–18.27] P=0.161</a:t>
+            </a:r>
+          </a:p>
+        </p:txBody>
+      </p:sp>
+      <p:sp>
+        <p:nvSpPr>
+          <p:cNvPr id="22" name="TextBox 21"/>
+          <p:cNvSpPr txBox="1"/>
+          <p:nvPr/>
+        </p:nvSpPr>
+        <p:spPr>
+          <a:xfrm>
+            <a:off x="274320" y="2042962"/>
+            <a:ext cx="3200400" cy="274320"/>
+          </a:xfrm>
+          <a:prstGeom prst="rect">
+            <a:avLst/>
+          </a:prstGeom>
+          <a:noFill/>
+        </p:spPr>
+        <p:txBody>
+          <a:bodyPr wrap="square">
+            <a:spAutoFit/>
+          </a:bodyPr>
+          <a:lstStyle/>
+          <a:p>
+            <a:pPr algn="r">
+              <a:defRPr sz="800"/>
+            </a:pPr>
+            <a:r>
+              <a:t>Full minus Prior CS</a:t>
+            </a:r>
+          </a:p>
+        </p:txBody>
+      </p:sp>
+      <p:sp>
+        <p:nvSpPr>
+          <p:cNvPr id="23" name="Rectangle 22"/>
+          <p:cNvSpPr/>
+          <p:nvPr/>
+        </p:nvSpPr>
+        <p:spPr>
+          <a:xfrm>
+            <a:off x="3801489" y="2161072"/>
+            <a:ext cx="2798862" cy="38100"/>
+          </a:xfrm>
+          <a:prstGeom prst="rect">
+            <a:avLst/>
+          </a:prstGeom>
+          <a:solidFill>
+            <a:srgbClr val="4C72B0"/>
+          </a:solidFill>
+          <a:ln>
+            <a:noFill/>
+          </a:ln>
+        </p:spPr>
+        <p:style>
+          <a:lnRef idx="1">
+            <a:schemeClr val="accent1"/>
+          </a:lnRef>
+          <a:fillRef idx="3">
+            <a:schemeClr val="accent1"/>
+          </a:fillRef>
+          <a:effectRef idx="2">
+            <a:schemeClr val="accent1"/>
+          </a:effectRef>
+          <a:fontRef idx="minor">
+            <a:schemeClr val="lt1"/>
+          </a:fontRef>
+        </p:style>
+        <p:txBody>
+          <a:bodyPr rtlCol="0" anchor="ctr"/>
+          <a:lstStyle/>
+          <a:p>
+            <a:pPr algn="ctr"/>
+          </a:p>
+        </p:txBody>
+      </p:sp>
+      <p:sp>
+        <p:nvSpPr>
+          <p:cNvPr id="24" name="Diamond 23"/>
+          <p:cNvSpPr/>
+          <p:nvPr/>
+        </p:nvSpPr>
+        <p:spPr>
+          <a:xfrm>
+            <a:off x="4253452" y="2125258"/>
+            <a:ext cx="109728" cy="109728"/>
+          </a:xfrm>
+          <a:prstGeom prst="diamond">
+            <a:avLst/>
+          </a:prstGeom>
+          <a:solidFill>
+            <a:srgbClr val="4C72B0"/>
+          </a:solidFill>
+          <a:ln>
+            <a:solidFill>
+              <a:srgbClr val="4C72B0"/>
+            </a:solidFill>
+          </a:ln>
+        </p:spPr>
+        <p:style>
+          <a:lnRef idx="1">
+            <a:schemeClr val="accent1"/>
+          </a:lnRef>
+          <a:fillRef idx="3">
+            <a:schemeClr val="accent1"/>
+          </a:fillRef>
+          <a:effectRef idx="2">
+            <a:schemeClr val="accent1"/>
+          </a:effectRef>
+          <a:fontRef idx="minor">
+            <a:schemeClr val="lt1"/>
+          </a:fontRef>
+        </p:style>
+        <p:txBody>
+          <a:bodyPr rtlCol="0" anchor="ctr"/>
+          <a:lstStyle/>
+          <a:p>
+            <a:pPr algn="ctr"/>
+          </a:p>
+        </p:txBody>
+      </p:sp>
+      <p:sp>
+        <p:nvSpPr>
+          <p:cNvPr id="25" name="TextBox 24"/>
+          <p:cNvSpPr txBox="1"/>
+          <p:nvPr/>
+        </p:nvSpPr>
+        <p:spPr>
+          <a:xfrm>
+            <a:off x="10607040" y="2070394"/>
+            <a:ext cx="1371600" cy="228600"/>
+          </a:xfrm>
+          <a:prstGeom prst="rect">
+            <a:avLst/>
+          </a:prstGeom>
+          <a:noFill/>
+        </p:spPr>
+        <p:txBody>
+          <a:bodyPr wrap="none">
+            <a:spAutoFit/>
+          </a:bodyPr>
+          <a:lstStyle/>
+          <a:p>
+            <a:pPr>
+              <a:defRPr sz="700">
+                <a:solidFill>
+                  <a:srgbClr val="4C72B0"/>
+                </a:solidFill>
+              </a:defRPr>
+            </a:pPr>
+            <a:r>
+              <a:t>OR 3.66 [0.81–16.55] P=0.092</a:t>
+            </a:r>
+          </a:p>
+        </p:txBody>
+      </p:sp>
+      <p:sp>
+        <p:nvSpPr>
+          <p:cNvPr id="26" name="TextBox 25"/>
+          <p:cNvSpPr txBox="1"/>
+          <p:nvPr/>
+        </p:nvSpPr>
+        <p:spPr>
+          <a:xfrm>
+            <a:off x="274320" y="2283593"/>
+            <a:ext cx="3200400" cy="274320"/>
+          </a:xfrm>
+          <a:prstGeom prst="rect">
+            <a:avLst/>
+          </a:prstGeom>
+          <a:noFill/>
+        </p:spPr>
+        <p:txBody>
+          <a:bodyPr wrap="square">
+            <a:spAutoFit/>
+          </a:bodyPr>
+          <a:lstStyle/>
+          <a:p>
+            <a:pPr algn="r">
+              <a:defRPr sz="800"/>
+            </a:pPr>
+            <a:r>
+              <a:t>Full minus Emergency CS</a:t>
+            </a:r>
+          </a:p>
+        </p:txBody>
+      </p:sp>
+      <p:sp>
+        <p:nvSpPr>
+          <p:cNvPr id="27" name="Rectangle 26"/>
+          <p:cNvSpPr/>
+          <p:nvPr/>
+        </p:nvSpPr>
+        <p:spPr>
+          <a:xfrm>
+            <a:off x="3870598" y="2401703"/>
+            <a:ext cx="5062386" cy="38100"/>
+          </a:xfrm>
+          <a:prstGeom prst="rect">
+            <a:avLst/>
+          </a:prstGeom>
+          <a:solidFill>
+            <a:srgbClr val="C44E52"/>
+          </a:solidFill>
+          <a:ln>
+            <a:noFill/>
+          </a:ln>
+        </p:spPr>
+        <p:style>
+          <a:lnRef idx="1">
+            <a:schemeClr val="accent1"/>
+          </a:lnRef>
+          <a:fillRef idx="3">
+            <a:schemeClr val="accent1"/>
+          </a:fillRef>
+          <a:effectRef idx="2">
+            <a:schemeClr val="accent1"/>
+          </a:effectRef>
+          <a:fontRef idx="minor">
+            <a:schemeClr val="lt1"/>
+          </a:fontRef>
+        </p:style>
+        <p:txBody>
+          <a:bodyPr rtlCol="0" anchor="ctr"/>
+          <a:lstStyle/>
+          <a:p>
+            <a:pPr algn="ctr"/>
+          </a:p>
+        </p:txBody>
+      </p:sp>
+      <p:sp>
+        <p:nvSpPr>
+          <p:cNvPr id="28" name="Diamond 27"/>
+          <p:cNvSpPr/>
+          <p:nvPr/>
+        </p:nvSpPr>
+        <p:spPr>
+          <a:xfrm>
+            <a:off x="4662759" y="2365889"/>
             <a:ext cx="109728" cy="109728"/>
           </a:xfrm>
           <a:prstGeom prst="diamond">
@@ -7214,13 +7984,13 @@
       </p:sp>
       <p:sp>
         <p:nvSpPr>
-          <p:cNvPr id="9" name="TextBox 8"/>
+          <p:cNvPr id="29" name="TextBox 28"/>
           <p:cNvSpPr txBox="1"/>
           <p:nvPr/>
         </p:nvSpPr>
         <p:spPr>
           <a:xfrm>
-            <a:off x="10607040" y="1114552"/>
+            <a:off x="10607040" y="2311025"/>
             <a:ext cx="1371600" cy="228600"/>
           </a:xfrm>
           <a:prstGeom prst="rect">
@@ -7242,20 +8012,20 @@
               </a:defRPr>
             </a:pPr>
             <a:r>
-              <a:t>OR 3.18 [1.38–7.36] P=0.007**</a:t>
-            </a:r>
-          </a:p>
-        </p:txBody>
-      </p:sp>
-      <p:sp>
-        <p:nvSpPr>
-          <p:cNvPr id="10" name="TextBox 9"/>
+              <a:t>OR 5.96 [1.20–29.68] P=0.029*</a:t>
+            </a:r>
+          </a:p>
+        </p:txBody>
+      </p:sp>
+      <p:sp>
+        <p:nvSpPr>
+          <p:cNvPr id="30" name="TextBox 29"/>
           <p:cNvSpPr txBox="1"/>
           <p:nvPr/>
         </p:nvSpPr>
         <p:spPr>
           <a:xfrm>
-            <a:off x="274320" y="1341120"/>
+            <a:off x="274320" y="2524225"/>
             <a:ext cx="3200400" cy="274320"/>
           </a:xfrm>
           <a:prstGeom prst="rect">
@@ -7273,27 +8043,27 @@
               <a:defRPr sz="800"/>
             </a:pPr>
             <a:r>
-              <a:t>Full minus Hypotension (SBP &lt; 90)</a:t>
-            </a:r>
-          </a:p>
-        </p:txBody>
-      </p:sp>
-      <p:sp>
-        <p:nvSpPr>
-          <p:cNvPr id="11" name="Rectangle 10"/>
-          <p:cNvSpPr/>
-          <p:nvPr/>
-        </p:nvSpPr>
-        <p:spPr>
-          <a:xfrm>
-            <a:off x="4371826" y="1459230"/>
-            <a:ext cx="3712687" cy="38100"/>
-          </a:xfrm>
-          <a:prstGeom prst="rect">
-            <a:avLst/>
-          </a:prstGeom>
-          <a:solidFill>
-            <a:srgbClr val="C44E52"/>
+              <a:t>Full minus GA (per week)</a:t>
+            </a:r>
+          </a:p>
+        </p:txBody>
+      </p:sp>
+      <p:sp>
+        <p:nvSpPr>
+          <p:cNvPr id="31" name="Rectangle 30"/>
+          <p:cNvSpPr/>
+          <p:nvPr/>
+        </p:nvSpPr>
+        <p:spPr>
+          <a:xfrm>
+            <a:off x="3775511" y="2642335"/>
+            <a:ext cx="3325562" cy="38100"/>
+          </a:xfrm>
+          <a:prstGeom prst="rect">
+            <a:avLst/>
+          </a:prstGeom>
+          <a:solidFill>
+            <a:srgbClr val="4C72B0"/>
           </a:solidFill>
           <a:ln>
             <a:noFill/>
@@ -7323,13 +8093,475 @@
       </p:sp>
       <p:sp>
         <p:nvSpPr>
-          <p:cNvPr id="12" name="Diamond 11"/>
-          <p:cNvSpPr/>
-          <p:nvPr/>
-        </p:nvSpPr>
-        <p:spPr>
-          <a:xfrm>
-            <a:off x="5380886" y="1423416"/>
+          <p:cNvPr id="32" name="Diamond 31"/>
+          <p:cNvSpPr/>
+          <p:nvPr/>
+        </p:nvSpPr>
+        <p:spPr>
+          <a:xfrm>
+            <a:off x="4239937" y="2606521"/>
+            <a:ext cx="109728" cy="109728"/>
+          </a:xfrm>
+          <a:prstGeom prst="diamond">
+            <a:avLst/>
+          </a:prstGeom>
+          <a:solidFill>
+            <a:srgbClr val="4C72B0"/>
+          </a:solidFill>
+          <a:ln>
+            <a:solidFill>
+              <a:srgbClr val="4C72B0"/>
+            </a:solidFill>
+          </a:ln>
+        </p:spPr>
+        <p:style>
+          <a:lnRef idx="1">
+            <a:schemeClr val="accent1"/>
+          </a:lnRef>
+          <a:fillRef idx="3">
+            <a:schemeClr val="accent1"/>
+          </a:fillRef>
+          <a:effectRef idx="2">
+            <a:schemeClr val="accent1"/>
+          </a:effectRef>
+          <a:fontRef idx="minor">
+            <a:schemeClr val="lt1"/>
+          </a:fontRef>
+        </p:style>
+        <p:txBody>
+          <a:bodyPr rtlCol="0" anchor="ctr"/>
+          <a:lstStyle/>
+          <a:p>
+            <a:pPr algn="ctr"/>
+          </a:p>
+        </p:txBody>
+      </p:sp>
+      <p:sp>
+        <p:nvSpPr>
+          <p:cNvPr id="33" name="TextBox 32"/>
+          <p:cNvSpPr txBox="1"/>
+          <p:nvPr/>
+        </p:nvSpPr>
+        <p:spPr>
+          <a:xfrm>
+            <a:off x="10607040" y="2551657"/>
+            <a:ext cx="1371600" cy="228600"/>
+          </a:xfrm>
+          <a:prstGeom prst="rect">
+            <a:avLst/>
+          </a:prstGeom>
+          <a:noFill/>
+        </p:spPr>
+        <p:txBody>
+          <a:bodyPr wrap="none">
+            <a:spAutoFit/>
+          </a:bodyPr>
+          <a:lstStyle/>
+          <a:p>
+            <a:pPr>
+              <a:defRPr sz="700">
+                <a:solidFill>
+                  <a:srgbClr val="4C72B0"/>
+                </a:solidFill>
+              </a:defRPr>
+            </a:pPr>
+            <a:r>
+              <a:t>OR 3.58 [0.66–19.37] P=0.138</a:t>
+            </a:r>
+          </a:p>
+        </p:txBody>
+      </p:sp>
+      <p:sp>
+        <p:nvSpPr>
+          <p:cNvPr id="34" name="TextBox 33"/>
+          <p:cNvSpPr txBox="1"/>
+          <p:nvPr/>
+        </p:nvSpPr>
+        <p:spPr>
+          <a:xfrm>
+            <a:off x="274320" y="2764856"/>
+            <a:ext cx="3200400" cy="274320"/>
+          </a:xfrm>
+          <a:prstGeom prst="rect">
+            <a:avLst/>
+          </a:prstGeom>
+          <a:noFill/>
+        </p:spPr>
+        <p:txBody>
+          <a:bodyPr wrap="square">
+            <a:spAutoFit/>
+          </a:bodyPr>
+          <a:lstStyle/>
+          <a:p>
+            <a:pPr algn="r">
+              <a:defRPr sz="800"/>
+            </a:pPr>
+            <a:r>
+              <a:t>Full minus BMI (per kg/m²)</a:t>
+            </a:r>
+          </a:p>
+        </p:txBody>
+      </p:sp>
+      <p:sp>
+        <p:nvSpPr>
+          <p:cNvPr id="35" name="Rectangle 34"/>
+          <p:cNvSpPr/>
+          <p:nvPr/>
+        </p:nvSpPr>
+        <p:spPr>
+          <a:xfrm>
+            <a:off x="3766054" y="2882966"/>
+            <a:ext cx="3164158" cy="38100"/>
+          </a:xfrm>
+          <a:prstGeom prst="rect">
+            <a:avLst/>
+          </a:prstGeom>
+          <a:solidFill>
+            <a:srgbClr val="4C72B0"/>
+          </a:solidFill>
+          <a:ln>
+            <a:noFill/>
+          </a:ln>
+        </p:spPr>
+        <p:style>
+          <a:lnRef idx="1">
+            <a:schemeClr val="accent1"/>
+          </a:lnRef>
+          <a:fillRef idx="3">
+            <a:schemeClr val="accent1"/>
+          </a:fillRef>
+          <a:effectRef idx="2">
+            <a:schemeClr val="accent1"/>
+          </a:effectRef>
+          <a:fontRef idx="minor">
+            <a:schemeClr val="lt1"/>
+          </a:fontRef>
+        </p:style>
+        <p:txBody>
+          <a:bodyPr rtlCol="0" anchor="ctr"/>
+          <a:lstStyle/>
+          <a:p>
+            <a:pPr algn="ctr"/>
+          </a:p>
+        </p:txBody>
+      </p:sp>
+      <p:sp>
+        <p:nvSpPr>
+          <p:cNvPr id="36" name="Diamond 35"/>
+          <p:cNvSpPr/>
+          <p:nvPr/>
+        </p:nvSpPr>
+        <p:spPr>
+          <a:xfrm>
+            <a:off x="4198496" y="2847152"/>
+            <a:ext cx="109728" cy="109728"/>
+          </a:xfrm>
+          <a:prstGeom prst="diamond">
+            <a:avLst/>
+          </a:prstGeom>
+          <a:solidFill>
+            <a:srgbClr val="4C72B0"/>
+          </a:solidFill>
+          <a:ln>
+            <a:solidFill>
+              <a:srgbClr val="4C72B0"/>
+            </a:solidFill>
+          </a:ln>
+        </p:spPr>
+        <p:style>
+          <a:lnRef idx="1">
+            <a:schemeClr val="accent1"/>
+          </a:lnRef>
+          <a:fillRef idx="3">
+            <a:schemeClr val="accent1"/>
+          </a:fillRef>
+          <a:effectRef idx="2">
+            <a:schemeClr val="accent1"/>
+          </a:effectRef>
+          <a:fontRef idx="minor">
+            <a:schemeClr val="lt1"/>
+          </a:fontRef>
+        </p:style>
+        <p:txBody>
+          <a:bodyPr rtlCol="0" anchor="ctr"/>
+          <a:lstStyle/>
+          <a:p>
+            <a:pPr algn="ctr"/>
+          </a:p>
+        </p:txBody>
+      </p:sp>
+      <p:sp>
+        <p:nvSpPr>
+          <p:cNvPr id="37" name="TextBox 36"/>
+          <p:cNvSpPr txBox="1"/>
+          <p:nvPr/>
+        </p:nvSpPr>
+        <p:spPr>
+          <a:xfrm>
+            <a:off x="10607040" y="2792288"/>
+            <a:ext cx="1371600" cy="228600"/>
+          </a:xfrm>
+          <a:prstGeom prst="rect">
+            <a:avLst/>
+          </a:prstGeom>
+          <a:noFill/>
+        </p:spPr>
+        <p:txBody>
+          <a:bodyPr wrap="none">
+            <a:spAutoFit/>
+          </a:bodyPr>
+          <a:lstStyle/>
+          <a:p>
+            <a:pPr>
+              <a:defRPr sz="700">
+                <a:solidFill>
+                  <a:srgbClr val="4C72B0"/>
+                </a:solidFill>
+              </a:defRPr>
+            </a:pPr>
+            <a:r>
+              <a:t>OR 3.35 [0.61–18.41] P=0.164</a:t>
+            </a:r>
+          </a:p>
+        </p:txBody>
+      </p:sp>
+      <p:sp>
+        <p:nvSpPr>
+          <p:cNvPr id="38" name="TextBox 37"/>
+          <p:cNvSpPr txBox="1"/>
+          <p:nvPr/>
+        </p:nvSpPr>
+        <p:spPr>
+          <a:xfrm>
+            <a:off x="274320" y="3005488"/>
+            <a:ext cx="3200400" cy="274320"/>
+          </a:xfrm>
+          <a:prstGeom prst="rect">
+            <a:avLst/>
+          </a:prstGeom>
+          <a:noFill/>
+        </p:spPr>
+        <p:txBody>
+          <a:bodyPr wrap="square">
+            <a:spAutoFit/>
+          </a:bodyPr>
+          <a:lstStyle/>
+          <a:p>
+            <a:pPr algn="r">
+              <a:defRPr sz="800"/>
+            </a:pPr>
+            <a:r>
+              <a:t>Full minus Age (per year)</a:t>
+            </a:r>
+          </a:p>
+        </p:txBody>
+      </p:sp>
+      <p:sp>
+        <p:nvSpPr>
+          <p:cNvPr id="39" name="Rectangle 38"/>
+          <p:cNvSpPr/>
+          <p:nvPr/>
+        </p:nvSpPr>
+        <p:spPr>
+          <a:xfrm>
+            <a:off x="3771972" y="3123598"/>
+            <a:ext cx="3283437" cy="38100"/>
+          </a:xfrm>
+          <a:prstGeom prst="rect">
+            <a:avLst/>
+          </a:prstGeom>
+          <a:solidFill>
+            <a:srgbClr val="4C72B0"/>
+          </a:solidFill>
+          <a:ln>
+            <a:noFill/>
+          </a:ln>
+        </p:spPr>
+        <p:style>
+          <a:lnRef idx="1">
+            <a:schemeClr val="accent1"/>
+          </a:lnRef>
+          <a:fillRef idx="3">
+            <a:schemeClr val="accent1"/>
+          </a:fillRef>
+          <a:effectRef idx="2">
+            <a:schemeClr val="accent1"/>
+          </a:effectRef>
+          <a:fontRef idx="minor">
+            <a:schemeClr val="lt1"/>
+          </a:fontRef>
+        </p:style>
+        <p:txBody>
+          <a:bodyPr rtlCol="0" anchor="ctr"/>
+          <a:lstStyle/>
+          <a:p>
+            <a:pPr algn="ctr"/>
+          </a:p>
+        </p:txBody>
+      </p:sp>
+      <p:sp>
+        <p:nvSpPr>
+          <p:cNvPr id="40" name="Diamond 39"/>
+          <p:cNvSpPr/>
+          <p:nvPr/>
+        </p:nvSpPr>
+        <p:spPr>
+          <a:xfrm>
+            <a:off x="4226126" y="3087784"/>
+            <a:ext cx="109728" cy="109728"/>
+          </a:xfrm>
+          <a:prstGeom prst="diamond">
+            <a:avLst/>
+          </a:prstGeom>
+          <a:solidFill>
+            <a:srgbClr val="4C72B0"/>
+          </a:solidFill>
+          <a:ln>
+            <a:solidFill>
+              <a:srgbClr val="4C72B0"/>
+            </a:solidFill>
+          </a:ln>
+        </p:spPr>
+        <p:style>
+          <a:lnRef idx="1">
+            <a:schemeClr val="accent1"/>
+          </a:lnRef>
+          <a:fillRef idx="3">
+            <a:schemeClr val="accent1"/>
+          </a:fillRef>
+          <a:effectRef idx="2">
+            <a:schemeClr val="accent1"/>
+          </a:effectRef>
+          <a:fontRef idx="minor">
+            <a:schemeClr val="lt1"/>
+          </a:fontRef>
+        </p:style>
+        <p:txBody>
+          <a:bodyPr rtlCol="0" anchor="ctr"/>
+          <a:lstStyle/>
+          <a:p>
+            <a:pPr algn="ctr"/>
+          </a:p>
+        </p:txBody>
+      </p:sp>
+      <p:sp>
+        <p:nvSpPr>
+          <p:cNvPr id="41" name="TextBox 40"/>
+          <p:cNvSpPr txBox="1"/>
+          <p:nvPr/>
+        </p:nvSpPr>
+        <p:spPr>
+          <a:xfrm>
+            <a:off x="10607040" y="3032920"/>
+            <a:ext cx="1371600" cy="228600"/>
+          </a:xfrm>
+          <a:prstGeom prst="rect">
+            <a:avLst/>
+          </a:prstGeom>
+          <a:noFill/>
+        </p:spPr>
+        <p:txBody>
+          <a:bodyPr wrap="none">
+            <a:spAutoFit/>
+          </a:bodyPr>
+          <a:lstStyle/>
+          <a:p>
+            <a:pPr>
+              <a:defRPr sz="700">
+                <a:solidFill>
+                  <a:srgbClr val="4C72B0"/>
+                </a:solidFill>
+              </a:defRPr>
+            </a:pPr>
+            <a:r>
+              <a:t>OR 3.51 [0.64–19.11] P=0.147</a:t>
+            </a:r>
+          </a:p>
+        </p:txBody>
+      </p:sp>
+      <p:sp>
+        <p:nvSpPr>
+          <p:cNvPr id="42" name="TextBox 41"/>
+          <p:cNvSpPr txBox="1"/>
+          <p:nvPr/>
+        </p:nvSpPr>
+        <p:spPr>
+          <a:xfrm>
+            <a:off x="274320" y="3246120"/>
+            <a:ext cx="3200400" cy="274320"/>
+          </a:xfrm>
+          <a:prstGeom prst="rect">
+            <a:avLst/>
+          </a:prstGeom>
+          <a:noFill/>
+        </p:spPr>
+        <p:txBody>
+          <a:bodyPr wrap="square">
+            <a:spAutoFit/>
+          </a:bodyPr>
+          <a:lstStyle/>
+          <a:p>
+            <a:pPr algn="r">
+              <a:defRPr sz="800"/>
+            </a:pPr>
+            <a:r>
+              <a:t>Twin + Hypotension (SBP &lt; 90)</a:t>
+            </a:r>
+          </a:p>
+        </p:txBody>
+      </p:sp>
+      <p:sp>
+        <p:nvSpPr>
+          <p:cNvPr id="43" name="Rectangle 42"/>
+          <p:cNvSpPr/>
+          <p:nvPr/>
+        </p:nvSpPr>
+        <p:spPr>
+          <a:xfrm>
+            <a:off x="3845739" y="3364230"/>
+            <a:ext cx="2876483" cy="38100"/>
+          </a:xfrm>
+          <a:prstGeom prst="rect">
+            <a:avLst/>
+          </a:prstGeom>
+          <a:solidFill>
+            <a:srgbClr val="C44E52"/>
+          </a:solidFill>
+          <a:ln>
+            <a:noFill/>
+          </a:ln>
+        </p:spPr>
+        <p:style>
+          <a:lnRef idx="1">
+            <a:schemeClr val="accent1"/>
+          </a:lnRef>
+          <a:fillRef idx="3">
+            <a:schemeClr val="accent1"/>
+          </a:fillRef>
+          <a:effectRef idx="2">
+            <a:schemeClr val="accent1"/>
+          </a:effectRef>
+          <a:fontRef idx="minor">
+            <a:schemeClr val="lt1"/>
+          </a:fontRef>
+        </p:style>
+        <p:txBody>
+          <a:bodyPr rtlCol="0" anchor="ctr"/>
+          <a:lstStyle/>
+          <a:p>
+            <a:pPr algn="ctr"/>
+          </a:p>
+        </p:txBody>
+      </p:sp>
+      <p:sp>
+        <p:nvSpPr>
+          <p:cNvPr id="44" name="Diamond 43"/>
+          <p:cNvSpPr/>
+          <p:nvPr/>
+        </p:nvSpPr>
+        <p:spPr>
+          <a:xfrm>
+            <a:off x="4362062" y="3328416"/>
             <a:ext cx="109728" cy="109728"/>
           </a:xfrm>
           <a:prstGeom prst="diamond">
@@ -7368,13 +8600,13 @@
       </p:sp>
       <p:sp>
         <p:nvSpPr>
-          <p:cNvPr id="13" name="TextBox 12"/>
+          <p:cNvPr id="45" name="TextBox 44"/>
           <p:cNvSpPr txBox="1"/>
           <p:nvPr/>
         </p:nvSpPr>
         <p:spPr>
           <a:xfrm>
-            <a:off x="10607040" y="1368552"/>
+            <a:off x="10607040" y="3273552"/>
             <a:ext cx="1371600" cy="228600"/>
           </a:xfrm>
           <a:prstGeom prst="rect">
@@ -7396,20 +8628,20 @@
               </a:defRPr>
             </a:pPr>
             <a:r>
-              <a:t>OR 2.94 [1.18–7.32] P=0.020*</a:t>
-            </a:r>
-          </a:p>
-        </p:txBody>
-      </p:sp>
-      <p:sp>
-        <p:nvSpPr>
-          <p:cNvPr id="14" name="TextBox 13"/>
+              <a:t>OR 4.27 [1.06–17.24] P=0.041*</a:t>
+            </a:r>
+          </a:p>
+        </p:txBody>
+      </p:sp>
+      <p:sp>
+        <p:nvSpPr>
+          <p:cNvPr id="46" name="TextBox 45"/>
           <p:cNvSpPr txBox="1"/>
           <p:nvPr/>
         </p:nvSpPr>
         <p:spPr>
           <a:xfrm>
-            <a:off x="274320" y="1595120"/>
+            <a:off x="274320" y="3486751"/>
             <a:ext cx="3200400" cy="274320"/>
           </a:xfrm>
           <a:prstGeom prst="rect">
@@ -7427,21 +8659,21 @@
               <a:defRPr sz="800"/>
             </a:pPr>
             <a:r>
-              <a:t>Full minus Surgery time (per min)</a:t>
-            </a:r>
-          </a:p>
-        </p:txBody>
-      </p:sp>
-      <p:sp>
-        <p:nvSpPr>
-          <p:cNvPr id="15" name="Rectangle 14"/>
-          <p:cNvSpPr/>
-          <p:nvPr/>
-        </p:nvSpPr>
-        <p:spPr>
-          <a:xfrm>
-            <a:off x="4314432" y="1713230"/>
-            <a:ext cx="3364718" cy="38100"/>
+              <a:t>Twin + Surgery time (per min)</a:t>
+            </a:r>
+          </a:p>
+        </p:txBody>
+      </p:sp>
+      <p:sp>
+        <p:nvSpPr>
+          <p:cNvPr id="47" name="Rectangle 46"/>
+          <p:cNvSpPr/>
+          <p:nvPr/>
+        </p:nvSpPr>
+        <p:spPr>
+          <a:xfrm>
+            <a:off x="3880313" y="3604861"/>
+            <a:ext cx="3685879" cy="38100"/>
           </a:xfrm>
           <a:prstGeom prst="rect">
             <a:avLst/>
@@ -7477,13 +8709,13 @@
       </p:sp>
       <p:sp>
         <p:nvSpPr>
-          <p:cNvPr id="16" name="Diamond 15"/>
-          <p:cNvSpPr/>
-          <p:nvPr/>
-        </p:nvSpPr>
-        <p:spPr>
-          <a:xfrm>
-            <a:off x="5228000" y="1677416"/>
+          <p:cNvPr id="48" name="Diamond 47"/>
+          <p:cNvSpPr/>
+          <p:nvPr/>
+        </p:nvSpPr>
+        <p:spPr>
+          <a:xfrm>
+            <a:off x="4535740" y="3569047"/>
             <a:ext cx="109728" cy="109728"/>
           </a:xfrm>
           <a:prstGeom prst="diamond">
@@ -7522,13 +8754,13 @@
       </p:sp>
       <p:sp>
         <p:nvSpPr>
-          <p:cNvPr id="17" name="TextBox 16"/>
+          <p:cNvPr id="49" name="TextBox 48"/>
           <p:cNvSpPr txBox="1"/>
           <p:nvPr/>
         </p:nvSpPr>
         <p:spPr>
           <a:xfrm>
-            <a:off x="10607040" y="1622552"/>
+            <a:off x="10607040" y="3514183"/>
             <a:ext cx="1371600" cy="228600"/>
           </a:xfrm>
           <a:prstGeom prst="rect">
@@ -7550,20 +8782,20 @@
               </a:defRPr>
             </a:pPr>
             <a:r>
-              <a:t>OR 2.69 [1.09–6.65] P=0.032*</a:t>
-            </a:r>
-          </a:p>
-        </p:txBody>
-      </p:sp>
-      <p:sp>
-        <p:nvSpPr>
-          <p:cNvPr id="18" name="TextBox 17"/>
+              <a:t>OR 5.25 [1.25–21.99] P=0.023*</a:t>
+            </a:r>
+          </a:p>
+        </p:txBody>
+      </p:sp>
+      <p:sp>
+        <p:nvSpPr>
+          <p:cNvPr id="50" name="TextBox 49"/>
           <p:cNvSpPr txBox="1"/>
           <p:nvPr/>
         </p:nvSpPr>
         <p:spPr>
           <a:xfrm>
-            <a:off x="274320" y="1849120"/>
+            <a:off x="274320" y="3727383"/>
             <a:ext cx="3200400" cy="274320"/>
           </a:xfrm>
           <a:prstGeom prst="rect">
@@ -7581,21 +8813,21 @@
               <a:defRPr sz="800"/>
             </a:pPr>
             <a:r>
-              <a:t>Full minus Epidural anesthesia</a:t>
-            </a:r>
-          </a:p>
-        </p:txBody>
-      </p:sp>
-      <p:sp>
-        <p:nvSpPr>
-          <p:cNvPr id="19" name="Rectangle 18"/>
-          <p:cNvSpPr/>
-          <p:nvPr/>
-        </p:nvSpPr>
-        <p:spPr>
-          <a:xfrm>
-            <a:off x="4483504" y="1967230"/>
-            <a:ext cx="4178928" cy="38100"/>
+              <a:t>Twin + Epidural anesthesia</a:t>
+            </a:r>
+          </a:p>
+        </p:txBody>
+      </p:sp>
+      <p:sp>
+        <p:nvSpPr>
+          <p:cNvPr id="51" name="Rectangle 50"/>
+          <p:cNvSpPr/>
+          <p:nvPr/>
+        </p:nvSpPr>
+        <p:spPr>
+          <a:xfrm>
+            <a:off x="3839551" y="3845493"/>
+            <a:ext cx="2765802" cy="38100"/>
           </a:xfrm>
           <a:prstGeom prst="rect">
             <a:avLst/>
@@ -7631,13 +8863,13 @@
       </p:sp>
       <p:sp>
         <p:nvSpPr>
-          <p:cNvPr id="20" name="Diamond 19"/>
-          <p:cNvSpPr/>
-          <p:nvPr/>
-        </p:nvSpPr>
-        <p:spPr>
-          <a:xfrm>
-            <a:off x="5635840" y="1931416"/>
+          <p:cNvPr id="52" name="Diamond 51"/>
+          <p:cNvSpPr/>
+          <p:nvPr/>
+        </p:nvSpPr>
+        <p:spPr>
+          <a:xfrm>
+            <a:off x="4335093" y="3809679"/>
             <a:ext cx="109728" cy="109728"/>
           </a:xfrm>
           <a:prstGeom prst="diamond">
@@ -7676,13 +8908,13 @@
       </p:sp>
       <p:sp>
         <p:nvSpPr>
-          <p:cNvPr id="21" name="TextBox 20"/>
+          <p:cNvPr id="53" name="TextBox 52"/>
           <p:cNvSpPr txBox="1"/>
           <p:nvPr/>
         </p:nvSpPr>
         <p:spPr>
           <a:xfrm>
-            <a:off x="10607040" y="1876552"/>
+            <a:off x="10607040" y="3754815"/>
             <a:ext cx="1371600" cy="228600"/>
           </a:xfrm>
           <a:prstGeom prst="rect">
@@ -7704,20 +8936,20 @@
               </a:defRPr>
             </a:pPr>
             <a:r>
-              <a:t>OR 3.36 [1.37–8.28] P=0.008**</a:t>
-            </a:r>
-          </a:p>
-        </p:txBody>
-      </p:sp>
-      <p:sp>
-        <p:nvSpPr>
-          <p:cNvPr id="22" name="TextBox 21"/>
+              <a:t>OR 4.12 [1.02–16.58] P=0.046*</a:t>
+            </a:r>
+          </a:p>
+        </p:txBody>
+      </p:sp>
+      <p:sp>
+        <p:nvSpPr>
+          <p:cNvPr id="54" name="TextBox 53"/>
           <p:cNvSpPr txBox="1"/>
           <p:nvPr/>
         </p:nvSpPr>
         <p:spPr>
           <a:xfrm>
-            <a:off x="274320" y="2103120"/>
+            <a:off x="274320" y="3968014"/>
             <a:ext cx="3200400" cy="274320"/>
           </a:xfrm>
           <a:prstGeom prst="rect">
@@ -7735,21 +8967,21 @@
               <a:defRPr sz="800"/>
             </a:pPr>
             <a:r>
-              <a:t>Full minus HDP</a:t>
-            </a:r>
-          </a:p>
-        </p:txBody>
-      </p:sp>
-      <p:sp>
-        <p:nvSpPr>
-          <p:cNvPr id="23" name="Rectangle 22"/>
-          <p:cNvSpPr/>
-          <p:nvPr/>
-        </p:nvSpPr>
-        <p:spPr>
-          <a:xfrm>
-            <a:off x="4387298" y="2221230"/>
-            <a:ext cx="3812648" cy="38100"/>
+              <a:t>Twin + HDP</a:t>
+            </a:r>
+          </a:p>
+        </p:txBody>
+      </p:sp>
+      <p:sp>
+        <p:nvSpPr>
+          <p:cNvPr id="55" name="Rectangle 54"/>
+          <p:cNvSpPr/>
+          <p:nvPr/>
+        </p:nvSpPr>
+        <p:spPr>
+          <a:xfrm>
+            <a:off x="3843067" y="4086124"/>
+            <a:ext cx="2807105" cy="38100"/>
           </a:xfrm>
           <a:prstGeom prst="rect">
             <a:avLst/>
@@ -7785,13 +9017,13 @@
       </p:sp>
       <p:sp>
         <p:nvSpPr>
-          <p:cNvPr id="24" name="Diamond 23"/>
-          <p:cNvSpPr/>
-          <p:nvPr/>
-        </p:nvSpPr>
-        <p:spPr>
-          <a:xfrm>
-            <a:off x="5423325" y="2185416"/>
+          <p:cNvPr id="56" name="Diamond 55"/>
+          <p:cNvSpPr/>
+          <p:nvPr/>
+        </p:nvSpPr>
+        <p:spPr>
+          <a:xfrm>
+            <a:off x="4347736" y="4050310"/>
             <a:ext cx="109728" cy="109728"/>
           </a:xfrm>
           <a:prstGeom prst="diamond">
@@ -7830,13 +9062,13 @@
       </p:sp>
       <p:sp>
         <p:nvSpPr>
-          <p:cNvPr id="25" name="TextBox 24"/>
+          <p:cNvPr id="57" name="TextBox 56"/>
           <p:cNvSpPr txBox="1"/>
           <p:nvPr/>
         </p:nvSpPr>
         <p:spPr>
           <a:xfrm>
-            <a:off x="10607040" y="2130552"/>
+            <a:off x="10607040" y="3995446"/>
             <a:ext cx="1371600" cy="228600"/>
           </a:xfrm>
           <a:prstGeom prst="rect">
@@ -7858,20 +9090,20 @@
               </a:defRPr>
             </a:pPr>
             <a:r>
-              <a:t>OR 3.01 [1.21–7.51] P=0.018*</a:t>
-            </a:r>
-          </a:p>
-        </p:txBody>
-      </p:sp>
-      <p:sp>
-        <p:nvSpPr>
-          <p:cNvPr id="26" name="TextBox 25"/>
+              <a:t>OR 4.19 [1.04–16.83] P=0.043*</a:t>
+            </a:r>
+          </a:p>
+        </p:txBody>
+      </p:sp>
+      <p:sp>
+        <p:nvSpPr>
+          <p:cNvPr id="58" name="TextBox 57"/>
           <p:cNvSpPr txBox="1"/>
           <p:nvPr/>
         </p:nvSpPr>
         <p:spPr>
           <a:xfrm>
-            <a:off x="274320" y="2357120"/>
+            <a:off x="274320" y="4208646"/>
             <a:ext cx="3200400" cy="274320"/>
           </a:xfrm>
           <a:prstGeom prst="rect">
@@ -7889,21 +9121,21 @@
               <a:defRPr sz="800"/>
             </a:pPr>
             <a:r>
-              <a:t>Full minus Prior CS</a:t>
-            </a:r>
-          </a:p>
-        </p:txBody>
-      </p:sp>
-      <p:sp>
-        <p:nvSpPr>
-          <p:cNvPr id="27" name="Rectangle 26"/>
-          <p:cNvSpPr/>
-          <p:nvPr/>
-        </p:nvSpPr>
-        <p:spPr>
-          <a:xfrm>
-            <a:off x="4591416" y="2475230"/>
-            <a:ext cx="4341568" cy="38100"/>
+              <a:t>Twin + Prior CS</a:t>
+            </a:r>
+          </a:p>
+        </p:txBody>
+      </p:sp>
+      <p:sp>
+        <p:nvSpPr>
+          <p:cNvPr id="59" name="Rectangle 58"/>
+          <p:cNvSpPr/>
+          <p:nvPr/>
+        </p:nvSpPr>
+        <p:spPr>
+          <a:xfrm>
+            <a:off x="3857869" y="4326756"/>
+            <a:ext cx="3829539" cy="38100"/>
           </a:xfrm>
           <a:prstGeom prst="rect">
             <a:avLst/>
@@ -7939,13 +9171,13 @@
       </p:sp>
       <p:sp>
         <p:nvSpPr>
-          <p:cNvPr id="28" name="Diamond 27"/>
-          <p:cNvSpPr/>
-          <p:nvPr/>
-        </p:nvSpPr>
-        <p:spPr>
-          <a:xfrm>
-            <a:off x="5822250" y="2439416"/>
+          <p:cNvPr id="60" name="Diamond 59"/>
+          <p:cNvSpPr/>
+          <p:nvPr/>
+        </p:nvSpPr>
+        <p:spPr>
+          <a:xfrm>
+            <a:off x="4501094" y="4290942"/>
             <a:ext cx="109728" cy="109728"/>
           </a:xfrm>
           <a:prstGeom prst="diamond">
@@ -7984,13 +9216,13 @@
       </p:sp>
       <p:sp>
         <p:nvSpPr>
-          <p:cNvPr id="29" name="TextBox 28"/>
+          <p:cNvPr id="61" name="TextBox 60"/>
           <p:cNvSpPr txBox="1"/>
           <p:nvPr/>
         </p:nvSpPr>
         <p:spPr>
           <a:xfrm>
-            <a:off x="10607040" y="2384552"/>
+            <a:off x="10607040" y="4236078"/>
             <a:ext cx="1371600" cy="228600"/>
           </a:xfrm>
           <a:prstGeom prst="rect">
@@ -8012,20 +9244,20 @@
               </a:defRPr>
             </a:pPr>
             <a:r>
-              <a:t>OR 3.67 [1.54–8.73] P=0.003**</a:t>
-            </a:r>
-          </a:p>
-        </p:txBody>
-      </p:sp>
-      <p:sp>
-        <p:nvSpPr>
-          <p:cNvPr id="30" name="TextBox 29"/>
+              <a:t>OR 5.05 [1.13–22.67] P=0.034*</a:t>
+            </a:r>
+          </a:p>
+        </p:txBody>
+      </p:sp>
+      <p:sp>
+        <p:nvSpPr>
+          <p:cNvPr id="62" name="TextBox 61"/>
           <p:cNvSpPr txBox="1"/>
           <p:nvPr/>
         </p:nvSpPr>
         <p:spPr>
           <a:xfrm>
-            <a:off x="274320" y="2611120"/>
+            <a:off x="274320" y="4449277"/>
             <a:ext cx="3200400" cy="274320"/>
           </a:xfrm>
           <a:prstGeom prst="rect">
@@ -8043,27 +9275,27 @@
               <a:defRPr sz="800"/>
             </a:pPr>
             <a:r>
-              <a:t>Full minus Emergency CS</a:t>
-            </a:r>
-          </a:p>
-        </p:txBody>
-      </p:sp>
-      <p:sp>
-        <p:nvSpPr>
-          <p:cNvPr id="31" name="Rectangle 30"/>
-          <p:cNvSpPr/>
-          <p:nvPr/>
-        </p:nvSpPr>
-        <p:spPr>
-          <a:xfrm>
-            <a:off x="4449491" y="2729230"/>
-            <a:ext cx="3745205" cy="38100"/>
-          </a:xfrm>
-          <a:prstGeom prst="rect">
-            <a:avLst/>
-          </a:prstGeom>
-          <a:solidFill>
-            <a:srgbClr val="C44E52"/>
+              <a:t>Twin + Emergency CS</a:t>
+            </a:r>
+          </a:p>
+        </p:txBody>
+      </p:sp>
+      <p:sp>
+        <p:nvSpPr>
+          <p:cNvPr id="63" name="Rectangle 62"/>
+          <p:cNvSpPr/>
+          <p:nvPr/>
+        </p:nvSpPr>
+        <p:spPr>
+          <a:xfrm>
+            <a:off x="3817471" y="4567387"/>
+            <a:ext cx="2442068" cy="38100"/>
+          </a:xfrm>
+          <a:prstGeom prst="rect">
+            <a:avLst/>
+          </a:prstGeom>
+          <a:solidFill>
+            <a:srgbClr val="4C72B0"/>
           </a:solidFill>
           <a:ln>
             <a:noFill/>
@@ -8093,13 +9325,167 @@
       </p:sp>
       <p:sp>
         <p:nvSpPr>
-          <p:cNvPr id="32" name="Diamond 31"/>
-          <p:cNvSpPr/>
-          <p:nvPr/>
-        </p:nvSpPr>
-        <p:spPr>
-          <a:xfrm>
-            <a:off x="5498228" y="2693416"/>
+          <p:cNvPr id="64" name="Diamond 63"/>
+          <p:cNvSpPr/>
+          <p:nvPr/>
+        </p:nvSpPr>
+        <p:spPr>
+          <a:xfrm>
+            <a:off x="4247698" y="4531573"/>
+            <a:ext cx="109728" cy="109728"/>
+          </a:xfrm>
+          <a:prstGeom prst="diamond">
+            <a:avLst/>
+          </a:prstGeom>
+          <a:solidFill>
+            <a:srgbClr val="4C72B0"/>
+          </a:solidFill>
+          <a:ln>
+            <a:solidFill>
+              <a:srgbClr val="4C72B0"/>
+            </a:solidFill>
+          </a:ln>
+        </p:spPr>
+        <p:style>
+          <a:lnRef idx="1">
+            <a:schemeClr val="accent1"/>
+          </a:lnRef>
+          <a:fillRef idx="3">
+            <a:schemeClr val="accent1"/>
+          </a:fillRef>
+          <a:effectRef idx="2">
+            <a:schemeClr val="accent1"/>
+          </a:effectRef>
+          <a:fontRef idx="minor">
+            <a:schemeClr val="lt1"/>
+          </a:fontRef>
+        </p:style>
+        <p:txBody>
+          <a:bodyPr rtlCol="0" anchor="ctr"/>
+          <a:lstStyle/>
+          <a:p>
+            <a:pPr algn="ctr"/>
+          </a:p>
+        </p:txBody>
+      </p:sp>
+      <p:sp>
+        <p:nvSpPr>
+          <p:cNvPr id="65" name="TextBox 64"/>
+          <p:cNvSpPr txBox="1"/>
+          <p:nvPr/>
+        </p:nvSpPr>
+        <p:spPr>
+          <a:xfrm>
+            <a:off x="10607040" y="4476709"/>
+            <a:ext cx="1371600" cy="228600"/>
+          </a:xfrm>
+          <a:prstGeom prst="rect">
+            <a:avLst/>
+          </a:prstGeom>
+          <a:noFill/>
+        </p:spPr>
+        <p:txBody>
+          <a:bodyPr wrap="none">
+            <a:spAutoFit/>
+          </a:bodyPr>
+          <a:lstStyle/>
+          <a:p>
+            <a:pPr>
+              <a:defRPr sz="700">
+                <a:solidFill>
+                  <a:srgbClr val="4C72B0"/>
+                </a:solidFill>
+              </a:defRPr>
+            </a:pPr>
+            <a:r>
+              <a:t>OR 3.63 [0.90–14.64] P=0.070</a:t>
+            </a:r>
+          </a:p>
+        </p:txBody>
+      </p:sp>
+      <p:sp>
+        <p:nvSpPr>
+          <p:cNvPr id="66" name="TextBox 65"/>
+          <p:cNvSpPr txBox="1"/>
+          <p:nvPr/>
+        </p:nvSpPr>
+        <p:spPr>
+          <a:xfrm>
+            <a:off x="274320" y="4689909"/>
+            <a:ext cx="3200400" cy="274320"/>
+          </a:xfrm>
+          <a:prstGeom prst="rect">
+            <a:avLst/>
+          </a:prstGeom>
+          <a:noFill/>
+        </p:spPr>
+        <p:txBody>
+          <a:bodyPr wrap="square">
+            <a:spAutoFit/>
+          </a:bodyPr>
+          <a:lstStyle/>
+          <a:p>
+            <a:pPr algn="r">
+              <a:defRPr sz="800"/>
+            </a:pPr>
+            <a:r>
+              <a:t>Twin + GA (per week)</a:t>
+            </a:r>
+          </a:p>
+        </p:txBody>
+      </p:sp>
+      <p:sp>
+        <p:nvSpPr>
+          <p:cNvPr id="67" name="Rectangle 66"/>
+          <p:cNvSpPr/>
+          <p:nvPr/>
+        </p:nvSpPr>
+        <p:spPr>
+          <a:xfrm>
+            <a:off x="3851005" y="4808019"/>
+            <a:ext cx="3266225" cy="38100"/>
+          </a:xfrm>
+          <a:prstGeom prst="rect">
+            <a:avLst/>
+          </a:prstGeom>
+          <a:solidFill>
+            <a:srgbClr val="C44E52"/>
+          </a:solidFill>
+          <a:ln>
+            <a:noFill/>
+          </a:ln>
+        </p:spPr>
+        <p:style>
+          <a:lnRef idx="1">
+            <a:schemeClr val="accent1"/>
+          </a:lnRef>
+          <a:fillRef idx="3">
+            <a:schemeClr val="accent1"/>
+          </a:fillRef>
+          <a:effectRef idx="2">
+            <a:schemeClr val="accent1"/>
+          </a:effectRef>
+          <a:fontRef idx="minor">
+            <a:schemeClr val="lt1"/>
+          </a:fontRef>
+        </p:style>
+        <p:txBody>
+          <a:bodyPr rtlCol="0" anchor="ctr"/>
+          <a:lstStyle/>
+          <a:p>
+            <a:pPr algn="ctr"/>
+          </a:p>
+        </p:txBody>
+      </p:sp>
+      <p:sp>
+        <p:nvSpPr>
+          <p:cNvPr id="68" name="Diamond 67"/>
+          <p:cNvSpPr/>
+          <p:nvPr/>
+        </p:nvSpPr>
+        <p:spPr>
+          <a:xfrm>
+            <a:off x="4420729" y="4772205"/>
             <a:ext cx="109728" cy="109728"/>
           </a:xfrm>
           <a:prstGeom prst="diamond">
@@ -8138,13 +9524,13 @@
       </p:sp>
       <p:sp>
         <p:nvSpPr>
-          <p:cNvPr id="33" name="TextBox 32"/>
+          <p:cNvPr id="69" name="TextBox 68"/>
           <p:cNvSpPr txBox="1"/>
           <p:nvPr/>
         </p:nvSpPr>
         <p:spPr>
           <a:xfrm>
-            <a:off x="10607040" y="2638552"/>
+            <a:off x="10607040" y="4717341"/>
             <a:ext cx="1371600" cy="228600"/>
           </a:xfrm>
           <a:prstGeom prst="rect">
@@ -8166,20 +9552,20 @@
               </a:defRPr>
             </a:pPr>
             <a:r>
-              <a:t>OR 3.14 [1.31–7.51] P=0.010*</a:t>
-            </a:r>
-          </a:p>
-        </p:txBody>
-      </p:sp>
-      <p:sp>
-        <p:nvSpPr>
-          <p:cNvPr id="34" name="TextBox 33"/>
+              <a:t>OR 4.60 [1.09–19.46] P=0.038*</a:t>
+            </a:r>
+          </a:p>
+        </p:txBody>
+      </p:sp>
+      <p:sp>
+        <p:nvSpPr>
+          <p:cNvPr id="70" name="TextBox 69"/>
           <p:cNvSpPr txBox="1"/>
           <p:nvPr/>
         </p:nvSpPr>
         <p:spPr>
           <a:xfrm>
-            <a:off x="274320" y="2865120"/>
+            <a:off x="274320" y="4930541"/>
             <a:ext cx="3200400" cy="274320"/>
           </a:xfrm>
           <a:prstGeom prst="rect">
@@ -8197,21 +9583,21 @@
               <a:defRPr sz="800"/>
             </a:pPr>
             <a:r>
-              <a:t>Full minus BMI (per kg/m²)</a:t>
-            </a:r>
-          </a:p>
-        </p:txBody>
-      </p:sp>
-      <p:sp>
-        <p:nvSpPr>
-          <p:cNvPr id="35" name="Rectangle 34"/>
-          <p:cNvSpPr/>
-          <p:nvPr/>
-        </p:nvSpPr>
-        <p:spPr>
-          <a:xfrm>
-            <a:off x="4387020" y="2983230"/>
-            <a:ext cx="3781755" cy="38100"/>
+              <a:t>Twin + BMI (per kg/m²)</a:t>
+            </a:r>
+          </a:p>
+        </p:txBody>
+      </p:sp>
+      <p:sp>
+        <p:nvSpPr>
+          <p:cNvPr id="71" name="Rectangle 70"/>
+          <p:cNvSpPr/>
+          <p:nvPr/>
+        </p:nvSpPr>
+        <p:spPr>
+          <a:xfrm>
+            <a:off x="3842237" y="5048651"/>
+            <a:ext cx="2803185" cy="38100"/>
           </a:xfrm>
           <a:prstGeom prst="rect">
             <a:avLst/>
@@ -8247,13 +9633,13 @@
       </p:sp>
       <p:sp>
         <p:nvSpPr>
-          <p:cNvPr id="36" name="Diamond 35"/>
-          <p:cNvSpPr/>
-          <p:nvPr/>
-        </p:nvSpPr>
-        <p:spPr>
-          <a:xfrm>
-            <a:off x="5416721" y="2947416"/>
+          <p:cNvPr id="72" name="Diamond 71"/>
+          <p:cNvSpPr/>
+          <p:nvPr/>
+        </p:nvSpPr>
+        <p:spPr>
+          <a:xfrm>
+            <a:off x="4345476" y="5012837"/>
             <a:ext cx="109728" cy="109728"/>
           </a:xfrm>
           <a:prstGeom prst="diamond">
@@ -8292,13 +9678,13 @@
       </p:sp>
       <p:sp>
         <p:nvSpPr>
-          <p:cNvPr id="37" name="TextBox 36"/>
+          <p:cNvPr id="73" name="TextBox 72"/>
           <p:cNvSpPr txBox="1"/>
           <p:nvPr/>
         </p:nvSpPr>
         <p:spPr>
           <a:xfrm>
-            <a:off x="10607040" y="2892552"/>
+            <a:off x="10607040" y="4957973"/>
             <a:ext cx="1371600" cy="228600"/>
           </a:xfrm>
           <a:prstGeom prst="rect">
@@ -8320,20 +9706,20 @@
               </a:defRPr>
             </a:pPr>
             <a:r>
-              <a:t>OR 3.00 [1.21–7.46] P=0.018*</a:t>
-            </a:r>
-          </a:p>
-        </p:txBody>
-      </p:sp>
-      <p:sp>
-        <p:nvSpPr>
-          <p:cNvPr id="38" name="TextBox 37"/>
+              <a:t>OR 4.18 [1.04–16.81] P=0.044*</a:t>
+            </a:r>
+          </a:p>
+        </p:txBody>
+      </p:sp>
+      <p:sp>
+        <p:nvSpPr>
+          <p:cNvPr id="74" name="TextBox 73"/>
           <p:cNvSpPr txBox="1"/>
           <p:nvPr/>
         </p:nvSpPr>
         <p:spPr>
           <a:xfrm>
-            <a:off x="274320" y="3119120"/>
+            <a:off x="274320" y="5171172"/>
             <a:ext cx="3200400" cy="274320"/>
           </a:xfrm>
           <a:prstGeom prst="rect">
@@ -8351,21 +9737,21 @@
               <a:defRPr sz="800"/>
             </a:pPr>
             <a:r>
-              <a:t>Twin + Hypotension (SBP &lt; 90)</a:t>
-            </a:r>
-          </a:p>
-        </p:txBody>
-      </p:sp>
-      <p:sp>
-        <p:nvSpPr>
-          <p:cNvPr id="39" name="Rectangle 38"/>
-          <p:cNvSpPr/>
-          <p:nvPr/>
-        </p:nvSpPr>
-        <p:spPr>
-          <a:xfrm>
-            <a:off x="4404734" y="3237230"/>
-            <a:ext cx="3002977" cy="38100"/>
+              <a:t>Twin + Age (per year)</a:t>
+            </a:r>
+          </a:p>
+        </p:txBody>
+      </p:sp>
+      <p:sp>
+        <p:nvSpPr>
+          <p:cNvPr id="75" name="Rectangle 74"/>
+          <p:cNvSpPr/>
+          <p:nvPr/>
+        </p:nvSpPr>
+        <p:spPr>
+          <a:xfrm>
+            <a:off x="3839087" y="5289282"/>
+            <a:ext cx="2818349" cy="38100"/>
           </a:xfrm>
           <a:prstGeom prst="rect">
             <a:avLst/>
@@ -8401,13 +9787,13 @@
       </p:sp>
       <p:sp>
         <p:nvSpPr>
-          <p:cNvPr id="40" name="Diamond 39"/>
-          <p:cNvSpPr/>
-          <p:nvPr/>
-        </p:nvSpPr>
-        <p:spPr>
-          <a:xfrm>
-            <a:off x="5276604" y="3201416"/>
+          <p:cNvPr id="76" name="Diamond 75"/>
+          <p:cNvSpPr/>
+          <p:nvPr/>
+        </p:nvSpPr>
+        <p:spPr>
+          <a:xfrm>
+            <a:off x="4340591" y="5253468"/>
             <a:ext cx="109728" cy="109728"/>
           </a:xfrm>
           <a:prstGeom prst="diamond">
@@ -8446,13 +9832,13 @@
       </p:sp>
       <p:sp>
         <p:nvSpPr>
-          <p:cNvPr id="41" name="TextBox 40"/>
+          <p:cNvPr id="77" name="TextBox 76"/>
           <p:cNvSpPr txBox="1"/>
           <p:nvPr/>
         </p:nvSpPr>
         <p:spPr>
           <a:xfrm>
-            <a:off x="10607040" y="3146552"/>
+            <a:off x="10607040" y="5198604"/>
             <a:ext cx="1371600" cy="228600"/>
           </a:xfrm>
           <a:prstGeom prst="rect">
@@ -8474,20 +9860,20 @@
               </a:defRPr>
             </a:pPr>
             <a:r>
-              <a:t>OR 2.77 [1.24–6.20] P=0.013*</a:t>
-            </a:r>
-          </a:p>
-        </p:txBody>
-      </p:sp>
-      <p:sp>
-        <p:nvSpPr>
-          <p:cNvPr id="42" name="TextBox 41"/>
+              <a:t>OR 4.15 [1.02–16.87] P=0.047*</a:t>
+            </a:r>
+          </a:p>
+        </p:txBody>
+      </p:sp>
+      <p:sp>
+        <p:nvSpPr>
+          <p:cNvPr id="78" name="TextBox 77"/>
           <p:cNvSpPr txBox="1"/>
           <p:nvPr/>
         </p:nvSpPr>
         <p:spPr>
           <a:xfrm>
-            <a:off x="274320" y="3373120"/>
+            <a:off x="274320" y="5411804"/>
             <a:ext cx="3200400" cy="274320"/>
           </a:xfrm>
           <a:prstGeom prst="rect">
@@ -8505,21 +9891,21 @@
               <a:defRPr sz="800"/>
             </a:pPr>
             <a:r>
-              <a:t>Twin + Surgery time (per min)</a:t>
-            </a:r>
-          </a:p>
-        </p:txBody>
-      </p:sp>
-      <p:sp>
-        <p:nvSpPr>
-          <p:cNvPr id="43" name="Rectangle 42"/>
-          <p:cNvSpPr/>
-          <p:nvPr/>
-        </p:nvSpPr>
-        <p:spPr>
-          <a:xfrm>
-            <a:off x="4549653" y="3491230"/>
-            <a:ext cx="3741573" cy="38100"/>
+              <a:t>Crude (twin only)</a:t>
+            </a:r>
+          </a:p>
+        </p:txBody>
+      </p:sp>
+      <p:sp>
+        <p:nvSpPr>
+          <p:cNvPr id="79" name="Rectangle 78"/>
+          <p:cNvSpPr/>
+          <p:nvPr/>
+        </p:nvSpPr>
+        <p:spPr>
+          <a:xfrm>
+            <a:off x="3842985" y="5529914"/>
+            <a:ext cx="2805676" cy="38100"/>
           </a:xfrm>
           <a:prstGeom prst="rect">
             <a:avLst/>
@@ -8555,13 +9941,13 @@
       </p:sp>
       <p:sp>
         <p:nvSpPr>
-          <p:cNvPr id="44" name="Diamond 43"/>
-          <p:cNvSpPr/>
-          <p:nvPr/>
-        </p:nvSpPr>
-        <p:spPr>
-          <a:xfrm>
-            <a:off x="5635823" y="3455416"/>
+          <p:cNvPr id="80" name="Diamond 79"/>
+          <p:cNvSpPr/>
+          <p:nvPr/>
+        </p:nvSpPr>
+        <p:spPr>
+          <a:xfrm>
+            <a:off x="4347383" y="5494100"/>
             <a:ext cx="109728" cy="109728"/>
           </a:xfrm>
           <a:prstGeom prst="diamond">
@@ -8600,13 +9986,13 @@
       </p:sp>
       <p:sp>
         <p:nvSpPr>
-          <p:cNvPr id="45" name="TextBox 44"/>
+          <p:cNvPr id="81" name="TextBox 80"/>
           <p:cNvSpPr txBox="1"/>
           <p:nvPr/>
         </p:nvSpPr>
         <p:spPr>
           <a:xfrm>
-            <a:off x="10607040" y="3400552"/>
+            <a:off x="10607040" y="5439236"/>
             <a:ext cx="1371600" cy="228600"/>
           </a:xfrm>
           <a:prstGeom prst="rect">
@@ -8628,1246 +10014,14 @@
               </a:defRPr>
             </a:pPr>
             <a:r>
-              <a:t>OR 3.36 [1.48–7.67] P=0.004**</a:t>
-            </a:r>
-          </a:p>
-        </p:txBody>
-      </p:sp>
-      <p:sp>
-        <p:nvSpPr>
-          <p:cNvPr id="46" name="TextBox 45"/>
-          <p:cNvSpPr txBox="1"/>
-          <p:nvPr/>
-        </p:nvSpPr>
-        <p:spPr>
-          <a:xfrm>
-            <a:off x="274320" y="3627120"/>
-            <a:ext cx="3200400" cy="274320"/>
-          </a:xfrm>
-          <a:prstGeom prst="rect">
-            <a:avLst/>
-          </a:prstGeom>
-          <a:noFill/>
-        </p:spPr>
-        <p:txBody>
-          <a:bodyPr wrap="square">
-            <a:spAutoFit/>
-          </a:bodyPr>
-          <a:lstStyle/>
-          <a:p>
-            <a:pPr algn="r">
-              <a:defRPr sz="800"/>
-            </a:pPr>
-            <a:r>
-              <a:t>Twin + Epidural anesthesia</a:t>
-            </a:r>
-          </a:p>
-        </p:txBody>
-      </p:sp>
-      <p:sp>
-        <p:nvSpPr>
-          <p:cNvPr id="47" name="Rectangle 46"/>
-          <p:cNvSpPr/>
-          <p:nvPr/>
-        </p:nvSpPr>
-        <p:spPr>
-          <a:xfrm>
-            <a:off x="4376445" y="3745230"/>
-            <a:ext cx="2897988" cy="38100"/>
-          </a:xfrm>
-          <a:prstGeom prst="rect">
-            <a:avLst/>
-          </a:prstGeom>
-          <a:solidFill>
-            <a:srgbClr val="C44E52"/>
-          </a:solidFill>
-          <a:ln>
-            <a:noFill/>
-          </a:ln>
-        </p:spPr>
-        <p:style>
-          <a:lnRef idx="1">
-            <a:schemeClr val="accent1"/>
-          </a:lnRef>
-          <a:fillRef idx="3">
-            <a:schemeClr val="accent1"/>
-          </a:fillRef>
-          <a:effectRef idx="2">
-            <a:schemeClr val="accent1"/>
-          </a:effectRef>
-          <a:fontRef idx="minor">
-            <a:schemeClr val="lt1"/>
-          </a:fontRef>
-        </p:style>
-        <p:txBody>
-          <a:bodyPr rtlCol="0" anchor="ctr"/>
-          <a:lstStyle/>
-          <a:p>
-            <a:pPr algn="ctr"/>
-          </a:p>
-        </p:txBody>
-      </p:sp>
-      <p:sp>
-        <p:nvSpPr>
-          <p:cNvPr id="48" name="Diamond 47"/>
-          <p:cNvSpPr/>
-          <p:nvPr/>
-        </p:nvSpPr>
-        <p:spPr>
-          <a:xfrm>
-            <a:off x="5215170" y="3709416"/>
-            <a:ext cx="109728" cy="109728"/>
-          </a:xfrm>
-          <a:prstGeom prst="diamond">
-            <a:avLst/>
-          </a:prstGeom>
-          <a:solidFill>
-            <a:srgbClr val="C44E52"/>
-          </a:solidFill>
-          <a:ln>
-            <a:solidFill>
-              <a:srgbClr val="C44E52"/>
-            </a:solidFill>
-          </a:ln>
-        </p:spPr>
-        <p:style>
-          <a:lnRef idx="1">
-            <a:schemeClr val="accent1"/>
-          </a:lnRef>
-          <a:fillRef idx="3">
-            <a:schemeClr val="accent1"/>
-          </a:fillRef>
-          <a:effectRef idx="2">
-            <a:schemeClr val="accent1"/>
-          </a:effectRef>
-          <a:fontRef idx="minor">
-            <a:schemeClr val="lt1"/>
-          </a:fontRef>
-        </p:style>
-        <p:txBody>
-          <a:bodyPr rtlCol="0" anchor="ctr"/>
-          <a:lstStyle/>
-          <a:p>
-            <a:pPr algn="ctr"/>
-          </a:p>
-        </p:txBody>
-      </p:sp>
-      <p:sp>
-        <p:nvSpPr>
-          <p:cNvPr id="49" name="TextBox 48"/>
-          <p:cNvSpPr txBox="1"/>
-          <p:nvPr/>
-        </p:nvSpPr>
-        <p:spPr>
-          <a:xfrm>
-            <a:off x="10607040" y="3654552"/>
-            <a:ext cx="1371600" cy="228600"/>
-          </a:xfrm>
-          <a:prstGeom prst="rect">
-            <a:avLst/>
-          </a:prstGeom>
-          <a:noFill/>
-        </p:spPr>
-        <p:txBody>
-          <a:bodyPr wrap="none">
-            <a:spAutoFit/>
-          </a:bodyPr>
-          <a:lstStyle/>
-          <a:p>
-            <a:pPr>
-              <a:defRPr sz="700">
-                <a:solidFill>
-                  <a:srgbClr val="C44E52"/>
-                </a:solidFill>
-              </a:defRPr>
-            </a:pPr>
-            <a:r>
-              <a:t>OR 2.67 [1.19–5.98] P=0.017*</a:t>
-            </a:r>
-          </a:p>
-        </p:txBody>
-      </p:sp>
-      <p:sp>
-        <p:nvSpPr>
-          <p:cNvPr id="50" name="TextBox 49"/>
-          <p:cNvSpPr txBox="1"/>
-          <p:nvPr/>
-        </p:nvSpPr>
-        <p:spPr>
-          <a:xfrm>
-            <a:off x="274320" y="3881120"/>
-            <a:ext cx="3200400" cy="274320"/>
-          </a:xfrm>
-          <a:prstGeom prst="rect">
-            <a:avLst/>
-          </a:prstGeom>
-          <a:noFill/>
-        </p:spPr>
-        <p:txBody>
-          <a:bodyPr wrap="square">
-            <a:spAutoFit/>
-          </a:bodyPr>
-          <a:lstStyle/>
-          <a:p>
-            <a:pPr algn="r">
-              <a:defRPr sz="800"/>
-            </a:pPr>
-            <a:r>
-              <a:t>Twin + HDP</a:t>
-            </a:r>
-          </a:p>
-        </p:txBody>
-      </p:sp>
-      <p:sp>
-        <p:nvSpPr>
-          <p:cNvPr id="51" name="Rectangle 50"/>
-          <p:cNvSpPr/>
-          <p:nvPr/>
-        </p:nvSpPr>
-        <p:spPr>
-          <a:xfrm>
-            <a:off x="4387632" y="3999230"/>
-            <a:ext cx="2917158" cy="38100"/>
-          </a:xfrm>
-          <a:prstGeom prst="rect">
-            <a:avLst/>
-          </a:prstGeom>
-          <a:solidFill>
-            <a:srgbClr val="C44E52"/>
-          </a:solidFill>
-          <a:ln>
-            <a:noFill/>
-          </a:ln>
-        </p:spPr>
-        <p:style>
-          <a:lnRef idx="1">
-            <a:schemeClr val="accent1"/>
-          </a:lnRef>
-          <a:fillRef idx="3">
-            <a:schemeClr val="accent1"/>
-          </a:fillRef>
-          <a:effectRef idx="2">
-            <a:schemeClr val="accent1"/>
-          </a:effectRef>
-          <a:fontRef idx="minor">
-            <a:schemeClr val="lt1"/>
-          </a:fontRef>
-        </p:style>
-        <p:txBody>
-          <a:bodyPr rtlCol="0" anchor="ctr"/>
-          <a:lstStyle/>
-          <a:p>
-            <a:pPr algn="ctr"/>
-          </a:p>
-        </p:txBody>
-      </p:sp>
-      <p:sp>
-        <p:nvSpPr>
-          <p:cNvPr id="52" name="Diamond 51"/>
-          <p:cNvSpPr/>
-          <p:nvPr/>
-        </p:nvSpPr>
-        <p:spPr>
-          <a:xfrm>
-            <a:off x="5234473" y="3963416"/>
-            <a:ext cx="109728" cy="109728"/>
-          </a:xfrm>
-          <a:prstGeom prst="diamond">
-            <a:avLst/>
-          </a:prstGeom>
-          <a:solidFill>
-            <a:srgbClr val="C44E52"/>
-          </a:solidFill>
-          <a:ln>
-            <a:solidFill>
-              <a:srgbClr val="C44E52"/>
-            </a:solidFill>
-          </a:ln>
-        </p:spPr>
-        <p:style>
-          <a:lnRef idx="1">
-            <a:schemeClr val="accent1"/>
-          </a:lnRef>
-          <a:fillRef idx="3">
-            <a:schemeClr val="accent1"/>
-          </a:fillRef>
-          <a:effectRef idx="2">
-            <a:schemeClr val="accent1"/>
-          </a:effectRef>
-          <a:fontRef idx="minor">
-            <a:schemeClr val="lt1"/>
-          </a:fontRef>
-        </p:style>
-        <p:txBody>
-          <a:bodyPr rtlCol="0" anchor="ctr"/>
-          <a:lstStyle/>
-          <a:p>
-            <a:pPr algn="ctr"/>
-          </a:p>
-        </p:txBody>
-      </p:sp>
-      <p:sp>
-        <p:nvSpPr>
-          <p:cNvPr id="53" name="TextBox 52"/>
-          <p:cNvSpPr txBox="1"/>
-          <p:nvPr/>
-        </p:nvSpPr>
-        <p:spPr>
-          <a:xfrm>
-            <a:off x="10607040" y="3908552"/>
-            <a:ext cx="1371600" cy="228600"/>
-          </a:xfrm>
-          <a:prstGeom prst="rect">
-            <a:avLst/>
-          </a:prstGeom>
-          <a:noFill/>
-        </p:spPr>
-        <p:txBody>
-          <a:bodyPr wrap="none">
-            <a:spAutoFit/>
-          </a:bodyPr>
-          <a:lstStyle/>
-          <a:p>
-            <a:pPr>
-              <a:defRPr sz="700">
-                <a:solidFill>
-                  <a:srgbClr val="C44E52"/>
-                </a:solidFill>
-              </a:defRPr>
-            </a:pPr>
-            <a:r>
-              <a:t>OR 2.70 [1.21–6.03] P=0.016*</a:t>
-            </a:r>
-          </a:p>
-        </p:txBody>
-      </p:sp>
-      <p:sp>
-        <p:nvSpPr>
-          <p:cNvPr id="54" name="TextBox 53"/>
-          <p:cNvSpPr txBox="1"/>
-          <p:nvPr/>
-        </p:nvSpPr>
-        <p:spPr>
-          <a:xfrm>
-            <a:off x="274320" y="4135120"/>
-            <a:ext cx="3200400" cy="274320"/>
-          </a:xfrm>
-          <a:prstGeom prst="rect">
-            <a:avLst/>
-          </a:prstGeom>
-          <a:noFill/>
-        </p:spPr>
-        <p:txBody>
-          <a:bodyPr wrap="square">
-            <a:spAutoFit/>
-          </a:bodyPr>
-          <a:lstStyle/>
-          <a:p>
-            <a:pPr algn="r">
-              <a:defRPr sz="800"/>
-            </a:pPr>
-            <a:r>
-              <a:t>Twin + Prior CS</a:t>
-            </a:r>
-          </a:p>
-        </p:txBody>
-      </p:sp>
-      <p:sp>
-        <p:nvSpPr>
-          <p:cNvPr id="55" name="Rectangle 54"/>
-          <p:cNvSpPr/>
-          <p:nvPr/>
-        </p:nvSpPr>
-        <p:spPr>
-          <a:xfrm>
-            <a:off x="4326783" y="4253230"/>
-            <a:ext cx="2901317" cy="38100"/>
-          </a:xfrm>
-          <a:prstGeom prst="rect">
-            <a:avLst/>
-          </a:prstGeom>
-          <a:solidFill>
-            <a:srgbClr val="C44E52"/>
-          </a:solidFill>
-          <a:ln>
-            <a:noFill/>
-          </a:ln>
-        </p:spPr>
-        <p:style>
-          <a:lnRef idx="1">
-            <a:schemeClr val="accent1"/>
-          </a:lnRef>
-          <a:fillRef idx="3">
-            <a:schemeClr val="accent1"/>
-          </a:fillRef>
-          <a:effectRef idx="2">
-            <a:schemeClr val="accent1"/>
-          </a:effectRef>
-          <a:fontRef idx="minor">
-            <a:schemeClr val="lt1"/>
-          </a:fontRef>
-        </p:style>
-        <p:txBody>
-          <a:bodyPr rtlCol="0" anchor="ctr"/>
-          <a:lstStyle/>
-          <a:p>
-            <a:pPr algn="ctr"/>
-          </a:p>
-        </p:txBody>
-      </p:sp>
-      <p:sp>
-        <p:nvSpPr>
-          <p:cNvPr id="56" name="Diamond 55"/>
-          <p:cNvSpPr/>
-          <p:nvPr/>
-        </p:nvSpPr>
-        <p:spPr>
-          <a:xfrm>
-            <a:off x="5148478" y="4217416"/>
-            <a:ext cx="109728" cy="109728"/>
-          </a:xfrm>
-          <a:prstGeom prst="diamond">
-            <a:avLst/>
-          </a:prstGeom>
-          <a:solidFill>
-            <a:srgbClr val="C44E52"/>
-          </a:solidFill>
-          <a:ln>
-            <a:solidFill>
-              <a:srgbClr val="C44E52"/>
-            </a:solidFill>
-          </a:ln>
-        </p:spPr>
-        <p:style>
-          <a:lnRef idx="1">
-            <a:schemeClr val="accent1"/>
-          </a:lnRef>
-          <a:fillRef idx="3">
-            <a:schemeClr val="accent1"/>
-          </a:fillRef>
-          <a:effectRef idx="2">
-            <a:schemeClr val="accent1"/>
-          </a:effectRef>
-          <a:fontRef idx="minor">
-            <a:schemeClr val="lt1"/>
-          </a:fontRef>
-        </p:style>
-        <p:txBody>
-          <a:bodyPr rtlCol="0" anchor="ctr"/>
-          <a:lstStyle/>
-          <a:p>
-            <a:pPr algn="ctr"/>
-          </a:p>
-        </p:txBody>
-      </p:sp>
-      <p:sp>
-        <p:nvSpPr>
-          <p:cNvPr id="57" name="TextBox 56"/>
-          <p:cNvSpPr txBox="1"/>
-          <p:nvPr/>
-        </p:nvSpPr>
-        <p:spPr>
-          <a:xfrm>
-            <a:off x="10607040" y="4162552"/>
-            <a:ext cx="1371600" cy="228600"/>
-          </a:xfrm>
-          <a:prstGeom prst="rect">
-            <a:avLst/>
-          </a:prstGeom>
-          <a:noFill/>
-        </p:spPr>
-        <p:txBody>
-          <a:bodyPr wrap="none">
-            <a:spAutoFit/>
-          </a:bodyPr>
-          <a:lstStyle/>
-          <a:p>
-            <a:pPr>
-              <a:defRPr sz="700">
-                <a:solidFill>
-                  <a:srgbClr val="C44E52"/>
-                </a:solidFill>
-              </a:defRPr>
-            </a:pPr>
-            <a:r>
-              <a:t>OR 2.56 [1.11–5.91] P=0.028*</a:t>
-            </a:r>
-          </a:p>
-        </p:txBody>
-      </p:sp>
-      <p:sp>
-        <p:nvSpPr>
-          <p:cNvPr id="58" name="TextBox 57"/>
-          <p:cNvSpPr txBox="1"/>
-          <p:nvPr/>
-        </p:nvSpPr>
-        <p:spPr>
-          <a:xfrm>
-            <a:off x="274320" y="4389120"/>
-            <a:ext cx="3200400" cy="274320"/>
-          </a:xfrm>
-          <a:prstGeom prst="rect">
-            <a:avLst/>
-          </a:prstGeom>
-          <a:noFill/>
-        </p:spPr>
-        <p:txBody>
-          <a:bodyPr wrap="square">
-            <a:spAutoFit/>
-          </a:bodyPr>
-          <a:lstStyle/>
-          <a:p>
-            <a:pPr algn="r">
-              <a:defRPr sz="800"/>
-            </a:pPr>
-            <a:r>
-              <a:t>Twin + Emergency CS</a:t>
-            </a:r>
-          </a:p>
-        </p:txBody>
-      </p:sp>
-      <p:sp>
-        <p:nvSpPr>
-          <p:cNvPr id="59" name="Rectangle 58"/>
-          <p:cNvSpPr/>
-          <p:nvPr/>
-        </p:nvSpPr>
-        <p:spPr>
-          <a:xfrm>
-            <a:off x="4380427" y="4507230"/>
-            <a:ext cx="2914937" cy="38100"/>
-          </a:xfrm>
-          <a:prstGeom prst="rect">
-            <a:avLst/>
-          </a:prstGeom>
-          <a:solidFill>
-            <a:srgbClr val="C44E52"/>
-          </a:solidFill>
-          <a:ln>
-            <a:noFill/>
-          </a:ln>
-        </p:spPr>
-        <p:style>
-          <a:lnRef idx="1">
-            <a:schemeClr val="accent1"/>
-          </a:lnRef>
-          <a:fillRef idx="3">
-            <a:schemeClr val="accent1"/>
-          </a:fillRef>
-          <a:effectRef idx="2">
-            <a:schemeClr val="accent1"/>
-          </a:effectRef>
-          <a:fontRef idx="minor">
-            <a:schemeClr val="lt1"/>
-          </a:fontRef>
-        </p:style>
-        <p:txBody>
-          <a:bodyPr rtlCol="0" anchor="ctr"/>
-          <a:lstStyle/>
-          <a:p>
-            <a:pPr algn="ctr"/>
-          </a:p>
-        </p:txBody>
-      </p:sp>
-      <p:sp>
-        <p:nvSpPr>
-          <p:cNvPr id="60" name="Diamond 59"/>
-          <p:cNvSpPr/>
-          <p:nvPr/>
-        </p:nvSpPr>
-        <p:spPr>
-          <a:xfrm>
-            <a:off x="5224301" y="4471416"/>
-            <a:ext cx="109728" cy="109728"/>
-          </a:xfrm>
-          <a:prstGeom prst="diamond">
-            <a:avLst/>
-          </a:prstGeom>
-          <a:solidFill>
-            <a:srgbClr val="C44E52"/>
-          </a:solidFill>
-          <a:ln>
-            <a:solidFill>
-              <a:srgbClr val="C44E52"/>
-            </a:solidFill>
-          </a:ln>
-        </p:spPr>
-        <p:style>
-          <a:lnRef idx="1">
-            <a:schemeClr val="accent1"/>
-          </a:lnRef>
-          <a:fillRef idx="3">
-            <a:schemeClr val="accent1"/>
-          </a:fillRef>
-          <a:effectRef idx="2">
-            <a:schemeClr val="accent1"/>
-          </a:effectRef>
-          <a:fontRef idx="minor">
-            <a:schemeClr val="lt1"/>
-          </a:fontRef>
-        </p:style>
-        <p:txBody>
-          <a:bodyPr rtlCol="0" anchor="ctr"/>
-          <a:lstStyle/>
-          <a:p>
-            <a:pPr algn="ctr"/>
-          </a:p>
-        </p:txBody>
-      </p:sp>
-      <p:sp>
-        <p:nvSpPr>
-          <p:cNvPr id="61" name="TextBox 60"/>
-          <p:cNvSpPr txBox="1"/>
-          <p:nvPr/>
-        </p:nvSpPr>
-        <p:spPr>
-          <a:xfrm>
-            <a:off x="10607040" y="4416552"/>
-            <a:ext cx="1371600" cy="228600"/>
-          </a:xfrm>
-          <a:prstGeom prst="rect">
-            <a:avLst/>
-          </a:prstGeom>
-          <a:noFill/>
-        </p:spPr>
-        <p:txBody>
-          <a:bodyPr wrap="none">
-            <a:spAutoFit/>
-          </a:bodyPr>
-          <a:lstStyle/>
-          <a:p>
-            <a:pPr>
-              <a:defRPr sz="700">
-                <a:solidFill>
-                  <a:srgbClr val="C44E52"/>
-                </a:solidFill>
-              </a:defRPr>
-            </a:pPr>
-            <a:r>
-              <a:t>OR 2.68 [1.20–6.02] P=0.017*</a:t>
-            </a:r>
-          </a:p>
-        </p:txBody>
-      </p:sp>
-      <p:sp>
-        <p:nvSpPr>
-          <p:cNvPr id="62" name="TextBox 61"/>
-          <p:cNvSpPr txBox="1"/>
-          <p:nvPr/>
-        </p:nvSpPr>
-        <p:spPr>
-          <a:xfrm>
-            <a:off x="274320" y="4643120"/>
-            <a:ext cx="3200400" cy="274320"/>
-          </a:xfrm>
-          <a:prstGeom prst="rect">
-            <a:avLst/>
-          </a:prstGeom>
-          <a:noFill/>
-        </p:spPr>
-        <p:txBody>
-          <a:bodyPr wrap="square">
-            <a:spAutoFit/>
-          </a:bodyPr>
-          <a:lstStyle/>
-          <a:p>
-            <a:pPr algn="r">
-              <a:defRPr sz="800"/>
-            </a:pPr>
-            <a:r>
-              <a:t>Twin + GA (per week)</a:t>
-            </a:r>
-          </a:p>
-        </p:txBody>
-      </p:sp>
-      <p:sp>
-        <p:nvSpPr>
-          <p:cNvPr id="63" name="Rectangle 62"/>
-          <p:cNvSpPr/>
-          <p:nvPr/>
-        </p:nvSpPr>
-        <p:spPr>
-          <a:xfrm>
-            <a:off x="4394082" y="4761230"/>
-            <a:ext cx="3023628" cy="38100"/>
-          </a:xfrm>
-          <a:prstGeom prst="rect">
-            <a:avLst/>
-          </a:prstGeom>
-          <a:solidFill>
-            <a:srgbClr val="C44E52"/>
-          </a:solidFill>
-          <a:ln>
-            <a:noFill/>
-          </a:ln>
-        </p:spPr>
-        <p:style>
-          <a:lnRef idx="1">
-            <a:schemeClr val="accent1"/>
-          </a:lnRef>
-          <a:fillRef idx="3">
-            <a:schemeClr val="accent1"/>
-          </a:fillRef>
-          <a:effectRef idx="2">
-            <a:schemeClr val="accent1"/>
-          </a:effectRef>
-          <a:fontRef idx="minor">
-            <a:schemeClr val="lt1"/>
-          </a:fontRef>
-        </p:style>
-        <p:txBody>
-          <a:bodyPr rtlCol="0" anchor="ctr"/>
-          <a:lstStyle/>
-          <a:p>
-            <a:pPr algn="ctr"/>
-          </a:p>
-        </p:txBody>
-      </p:sp>
-      <p:sp>
-        <p:nvSpPr>
-          <p:cNvPr id="64" name="Diamond 63"/>
-          <p:cNvSpPr/>
-          <p:nvPr/>
-        </p:nvSpPr>
-        <p:spPr>
-          <a:xfrm>
-            <a:off x="5266843" y="4725416"/>
-            <a:ext cx="109728" cy="109728"/>
-          </a:xfrm>
-          <a:prstGeom prst="diamond">
-            <a:avLst/>
-          </a:prstGeom>
-          <a:solidFill>
-            <a:srgbClr val="C44E52"/>
-          </a:solidFill>
-          <a:ln>
-            <a:solidFill>
-              <a:srgbClr val="C44E52"/>
-            </a:solidFill>
-          </a:ln>
-        </p:spPr>
-        <p:style>
-          <a:lnRef idx="1">
-            <a:schemeClr val="accent1"/>
-          </a:lnRef>
-          <a:fillRef idx="3">
-            <a:schemeClr val="accent1"/>
-          </a:fillRef>
-          <a:effectRef idx="2">
-            <a:schemeClr val="accent1"/>
-          </a:effectRef>
-          <a:fontRef idx="minor">
-            <a:schemeClr val="lt1"/>
-          </a:fontRef>
-        </p:style>
-        <p:txBody>
-          <a:bodyPr rtlCol="0" anchor="ctr"/>
-          <a:lstStyle/>
-          <a:p>
-            <a:pPr algn="ctr"/>
-          </a:p>
-        </p:txBody>
-      </p:sp>
-      <p:sp>
-        <p:nvSpPr>
-          <p:cNvPr id="65" name="TextBox 64"/>
-          <p:cNvSpPr txBox="1"/>
-          <p:nvPr/>
-        </p:nvSpPr>
-        <p:spPr>
-          <a:xfrm>
-            <a:off x="10607040" y="4670552"/>
-            <a:ext cx="1371600" cy="228600"/>
-          </a:xfrm>
-          <a:prstGeom prst="rect">
-            <a:avLst/>
-          </a:prstGeom>
-          <a:noFill/>
-        </p:spPr>
-        <p:txBody>
-          <a:bodyPr wrap="none">
-            <a:spAutoFit/>
-          </a:bodyPr>
-          <a:lstStyle/>
-          <a:p>
-            <a:pPr>
-              <a:defRPr sz="700">
-                <a:solidFill>
-                  <a:srgbClr val="C44E52"/>
-                </a:solidFill>
-              </a:defRPr>
-            </a:pPr>
-            <a:r>
-              <a:t>OR 2.75 [1.22–6.22] P=0.015*</a:t>
-            </a:r>
-          </a:p>
-        </p:txBody>
-      </p:sp>
-      <p:sp>
-        <p:nvSpPr>
-          <p:cNvPr id="66" name="TextBox 65"/>
-          <p:cNvSpPr txBox="1"/>
-          <p:nvPr/>
-        </p:nvSpPr>
-        <p:spPr>
-          <a:xfrm>
-            <a:off x="274320" y="4897120"/>
-            <a:ext cx="3200400" cy="274320"/>
-          </a:xfrm>
-          <a:prstGeom prst="rect">
-            <a:avLst/>
-          </a:prstGeom>
-          <a:noFill/>
-        </p:spPr>
-        <p:txBody>
-          <a:bodyPr wrap="square">
-            <a:spAutoFit/>
-          </a:bodyPr>
-          <a:lstStyle/>
-          <a:p>
-            <a:pPr algn="r">
-              <a:defRPr sz="800"/>
-            </a:pPr>
-            <a:r>
-              <a:t>Twin + BMI (per kg/m²)</a:t>
-            </a:r>
-          </a:p>
-        </p:txBody>
-      </p:sp>
-      <p:sp>
-        <p:nvSpPr>
-          <p:cNvPr id="67" name="Rectangle 66"/>
-          <p:cNvSpPr/>
-          <p:nvPr/>
-        </p:nvSpPr>
-        <p:spPr>
-          <a:xfrm>
-            <a:off x="4392706" y="5015230"/>
-            <a:ext cx="2947730" cy="38100"/>
-          </a:xfrm>
-          <a:prstGeom prst="rect">
-            <a:avLst/>
-          </a:prstGeom>
-          <a:solidFill>
-            <a:srgbClr val="C44E52"/>
-          </a:solidFill>
-          <a:ln>
-            <a:noFill/>
-          </a:ln>
-        </p:spPr>
-        <p:style>
-          <a:lnRef idx="1">
-            <a:schemeClr val="accent1"/>
-          </a:lnRef>
-          <a:fillRef idx="3">
-            <a:schemeClr val="accent1"/>
-          </a:fillRef>
-          <a:effectRef idx="2">
-            <a:schemeClr val="accent1"/>
-          </a:effectRef>
-          <a:fontRef idx="minor">
-            <a:schemeClr val="lt1"/>
-          </a:fontRef>
-        </p:style>
-        <p:txBody>
-          <a:bodyPr rtlCol="0" anchor="ctr"/>
-          <a:lstStyle/>
-          <a:p>
-            <a:pPr algn="ctr"/>
-          </a:p>
-        </p:txBody>
-      </p:sp>
-      <p:sp>
-        <p:nvSpPr>
-          <p:cNvPr id="68" name="Diamond 67"/>
-          <p:cNvSpPr/>
-          <p:nvPr/>
-        </p:nvSpPr>
-        <p:spPr>
-          <a:xfrm>
-            <a:off x="5248116" y="4979416"/>
-            <a:ext cx="109728" cy="109728"/>
-          </a:xfrm>
-          <a:prstGeom prst="diamond">
-            <a:avLst/>
-          </a:prstGeom>
-          <a:solidFill>
-            <a:srgbClr val="C44E52"/>
-          </a:solidFill>
-          <a:ln>
-            <a:solidFill>
-              <a:srgbClr val="C44E52"/>
-            </a:solidFill>
-          </a:ln>
-        </p:spPr>
-        <p:style>
-          <a:lnRef idx="1">
-            <a:schemeClr val="accent1"/>
-          </a:lnRef>
-          <a:fillRef idx="3">
-            <a:schemeClr val="accent1"/>
-          </a:fillRef>
-          <a:effectRef idx="2">
-            <a:schemeClr val="accent1"/>
-          </a:effectRef>
-          <a:fontRef idx="minor">
-            <a:schemeClr val="lt1"/>
-          </a:fontRef>
-        </p:style>
-        <p:txBody>
-          <a:bodyPr rtlCol="0" anchor="ctr"/>
-          <a:lstStyle/>
-          <a:p>
-            <a:pPr algn="ctr"/>
-          </a:p>
-        </p:txBody>
-      </p:sp>
-      <p:sp>
-        <p:nvSpPr>
-          <p:cNvPr id="69" name="TextBox 68"/>
-          <p:cNvSpPr txBox="1"/>
-          <p:nvPr/>
-        </p:nvSpPr>
-        <p:spPr>
-          <a:xfrm>
-            <a:off x="10607040" y="4924552"/>
-            <a:ext cx="1371600" cy="228600"/>
-          </a:xfrm>
-          <a:prstGeom prst="rect">
-            <a:avLst/>
-          </a:prstGeom>
-          <a:noFill/>
-        </p:spPr>
-        <p:txBody>
-          <a:bodyPr wrap="none">
-            <a:spAutoFit/>
-          </a:bodyPr>
-          <a:lstStyle/>
-          <a:p>
-            <a:pPr>
-              <a:defRPr sz="700">
-                <a:solidFill>
-                  <a:srgbClr val="C44E52"/>
-                </a:solidFill>
-              </a:defRPr>
-            </a:pPr>
-            <a:r>
-              <a:t>OR 2.72 [1.22–6.09] P=0.015*</a:t>
-            </a:r>
-          </a:p>
-        </p:txBody>
-      </p:sp>
-      <p:sp>
-        <p:nvSpPr>
-          <p:cNvPr id="70" name="TextBox 69"/>
-          <p:cNvSpPr txBox="1"/>
-          <p:nvPr/>
-        </p:nvSpPr>
-        <p:spPr>
-          <a:xfrm>
-            <a:off x="274320" y="5151120"/>
-            <a:ext cx="3200400" cy="274320"/>
-          </a:xfrm>
-          <a:prstGeom prst="rect">
-            <a:avLst/>
-          </a:prstGeom>
-          <a:noFill/>
-        </p:spPr>
-        <p:txBody>
-          <a:bodyPr wrap="square">
-            <a:spAutoFit/>
-          </a:bodyPr>
-          <a:lstStyle/>
-          <a:p>
-            <a:pPr algn="r">
-              <a:defRPr sz="800"/>
-            </a:pPr>
-            <a:r>
-              <a:t>Twin + Age (per year)</a:t>
-            </a:r>
-          </a:p>
-        </p:txBody>
-      </p:sp>
-      <p:sp>
-        <p:nvSpPr>
-          <p:cNvPr id="71" name="Rectangle 70"/>
-          <p:cNvSpPr/>
-          <p:nvPr/>
-        </p:nvSpPr>
-        <p:spPr>
-          <a:xfrm>
-            <a:off x="4467809" y="5269230"/>
-            <a:ext cx="3321347" cy="38100"/>
-          </a:xfrm>
-          <a:prstGeom prst="rect">
-            <a:avLst/>
-          </a:prstGeom>
-          <a:solidFill>
-            <a:srgbClr val="C44E52"/>
-          </a:solidFill>
-          <a:ln>
-            <a:noFill/>
-          </a:ln>
-        </p:spPr>
-        <p:style>
-          <a:lnRef idx="1">
-            <a:schemeClr val="accent1"/>
-          </a:lnRef>
-          <a:fillRef idx="3">
-            <a:schemeClr val="accent1"/>
-          </a:fillRef>
-          <a:effectRef idx="2">
-            <a:schemeClr val="accent1"/>
-          </a:effectRef>
-          <a:fontRef idx="minor">
-            <a:schemeClr val="lt1"/>
-          </a:fontRef>
-        </p:style>
-        <p:txBody>
-          <a:bodyPr rtlCol="0" anchor="ctr"/>
-          <a:lstStyle/>
-          <a:p>
-            <a:pPr algn="ctr"/>
-          </a:p>
-        </p:txBody>
-      </p:sp>
-      <p:sp>
-        <p:nvSpPr>
-          <p:cNvPr id="72" name="Diamond 71"/>
-          <p:cNvSpPr/>
-          <p:nvPr/>
-        </p:nvSpPr>
-        <p:spPr>
-          <a:xfrm>
-            <a:off x="5432332" y="5233416"/>
-            <a:ext cx="109728" cy="109728"/>
-          </a:xfrm>
-          <a:prstGeom prst="diamond">
-            <a:avLst/>
-          </a:prstGeom>
-          <a:solidFill>
-            <a:srgbClr val="C44E52"/>
-          </a:solidFill>
-          <a:ln>
-            <a:solidFill>
-              <a:srgbClr val="C44E52"/>
-            </a:solidFill>
-          </a:ln>
-        </p:spPr>
-        <p:style>
-          <a:lnRef idx="1">
-            <a:schemeClr val="accent1"/>
-          </a:lnRef>
-          <a:fillRef idx="3">
-            <a:schemeClr val="accent1"/>
-          </a:fillRef>
-          <a:effectRef idx="2">
-            <a:schemeClr val="accent1"/>
-          </a:effectRef>
-          <a:fontRef idx="minor">
-            <a:schemeClr val="lt1"/>
-          </a:fontRef>
-        </p:style>
-        <p:txBody>
-          <a:bodyPr rtlCol="0" anchor="ctr"/>
-          <a:lstStyle/>
-          <a:p>
-            <a:pPr algn="ctr"/>
-          </a:p>
-        </p:txBody>
-      </p:sp>
-      <p:sp>
-        <p:nvSpPr>
-          <p:cNvPr id="73" name="TextBox 72"/>
-          <p:cNvSpPr txBox="1"/>
-          <p:nvPr/>
-        </p:nvSpPr>
-        <p:spPr>
-          <a:xfrm>
-            <a:off x="10607040" y="5178552"/>
-            <a:ext cx="1371600" cy="228600"/>
-          </a:xfrm>
-          <a:prstGeom prst="rect">
-            <a:avLst/>
-          </a:prstGeom>
-          <a:noFill/>
-        </p:spPr>
-        <p:txBody>
-          <a:bodyPr wrap="none">
-            <a:spAutoFit/>
-          </a:bodyPr>
-          <a:lstStyle/>
-          <a:p>
-            <a:pPr>
-              <a:defRPr sz="700">
-                <a:solidFill>
-                  <a:srgbClr val="C44E52"/>
-                </a:solidFill>
-              </a:defRPr>
-            </a:pPr>
-            <a:r>
-              <a:t>OR 3.03 [1.34–6.84] P=0.008**</a:t>
-            </a:r>
-          </a:p>
-        </p:txBody>
-      </p:sp>
-      <p:sp>
-        <p:nvSpPr>
-          <p:cNvPr id="74" name="TextBox 73"/>
-          <p:cNvSpPr txBox="1"/>
-          <p:nvPr/>
-        </p:nvSpPr>
-        <p:spPr>
-          <a:xfrm>
-            <a:off x="274320" y="5405120"/>
-            <a:ext cx="3200400" cy="274320"/>
-          </a:xfrm>
-          <a:prstGeom prst="rect">
-            <a:avLst/>
-          </a:prstGeom>
-          <a:noFill/>
-        </p:spPr>
-        <p:txBody>
-          <a:bodyPr wrap="square">
-            <a:spAutoFit/>
-          </a:bodyPr>
-          <a:lstStyle/>
-          <a:p>
-            <a:pPr algn="r">
-              <a:defRPr sz="800"/>
-            </a:pPr>
-            <a:r>
-              <a:t>Crude (twin only)</a:t>
-            </a:r>
-          </a:p>
-        </p:txBody>
-      </p:sp>
-      <p:sp>
-        <p:nvSpPr>
-          <p:cNvPr id="75" name="Rectangle 74"/>
-          <p:cNvSpPr/>
-          <p:nvPr/>
-        </p:nvSpPr>
-        <p:spPr>
-          <a:xfrm>
-            <a:off x="4388600" y="5523230"/>
-            <a:ext cx="2920057" cy="38100"/>
-          </a:xfrm>
-          <a:prstGeom prst="rect">
-            <a:avLst/>
-          </a:prstGeom>
-          <a:solidFill>
-            <a:srgbClr val="C44E52"/>
-          </a:solidFill>
-          <a:ln>
-            <a:noFill/>
-          </a:ln>
-        </p:spPr>
-        <p:style>
-          <a:lnRef idx="1">
-            <a:schemeClr val="accent1"/>
-          </a:lnRef>
-          <a:fillRef idx="3">
-            <a:schemeClr val="accent1"/>
-          </a:fillRef>
-          <a:effectRef idx="2">
-            <a:schemeClr val="accent1"/>
-          </a:effectRef>
-          <a:fontRef idx="minor">
-            <a:schemeClr val="lt1"/>
-          </a:fontRef>
-        </p:style>
-        <p:txBody>
-          <a:bodyPr rtlCol="0" anchor="ctr"/>
-          <a:lstStyle/>
-          <a:p>
-            <a:pPr algn="ctr"/>
-          </a:p>
-        </p:txBody>
-      </p:sp>
-      <p:sp>
-        <p:nvSpPr>
-          <p:cNvPr id="76" name="Diamond 75"/>
-          <p:cNvSpPr/>
-          <p:nvPr/>
-        </p:nvSpPr>
-        <p:spPr>
-          <a:xfrm>
-            <a:off x="5236420" y="5487416"/>
-            <a:ext cx="109728" cy="109728"/>
-          </a:xfrm>
-          <a:prstGeom prst="diamond">
-            <a:avLst/>
-          </a:prstGeom>
-          <a:solidFill>
-            <a:srgbClr val="C44E52"/>
-          </a:solidFill>
-          <a:ln>
-            <a:solidFill>
-              <a:srgbClr val="C44E52"/>
-            </a:solidFill>
-          </a:ln>
-        </p:spPr>
-        <p:style>
-          <a:lnRef idx="1">
-            <a:schemeClr val="accent1"/>
-          </a:lnRef>
-          <a:fillRef idx="3">
-            <a:schemeClr val="accent1"/>
-          </a:fillRef>
-          <a:effectRef idx="2">
-            <a:schemeClr val="accent1"/>
-          </a:effectRef>
-          <a:fontRef idx="minor">
-            <a:schemeClr val="lt1"/>
-          </a:fontRef>
-        </p:style>
-        <p:txBody>
-          <a:bodyPr rtlCol="0" anchor="ctr"/>
-          <a:lstStyle/>
-          <a:p>
-            <a:pPr algn="ctr"/>
-          </a:p>
-        </p:txBody>
-      </p:sp>
-      <p:sp>
-        <p:nvSpPr>
-          <p:cNvPr id="77" name="TextBox 76"/>
-          <p:cNvSpPr txBox="1"/>
-          <p:nvPr/>
-        </p:nvSpPr>
-        <p:spPr>
-          <a:xfrm>
-            <a:off x="10607040" y="5432552"/>
-            <a:ext cx="1371600" cy="228600"/>
-          </a:xfrm>
-          <a:prstGeom prst="rect">
-            <a:avLst/>
-          </a:prstGeom>
-          <a:noFill/>
-        </p:spPr>
-        <p:txBody>
-          <a:bodyPr wrap="none">
-            <a:spAutoFit/>
-          </a:bodyPr>
-          <a:lstStyle/>
-          <a:p>
-            <a:pPr>
-              <a:defRPr sz="700">
-                <a:solidFill>
-                  <a:srgbClr val="C44E52"/>
-                </a:solidFill>
-              </a:defRPr>
-            </a:pPr>
-            <a:r>
-              <a:t>OR 2.70 [1.21–6.04] P=0.015*</a:t>
-            </a:r>
-          </a:p>
-        </p:txBody>
-      </p:sp>
-      <p:sp>
-        <p:nvSpPr>
-          <p:cNvPr id="78" name="TextBox 77"/>
+              <a:t>OR 4.19 [1.04–16.83] P=0.043*</a:t>
+            </a:r>
+          </a:p>
+        </p:txBody>
+      </p:sp>
+      <p:sp>
+        <p:nvSpPr>
+          <p:cNvPr id="82" name="TextBox 81"/>
           <p:cNvSpPr txBox="1"/>
           <p:nvPr/>
         </p:nvSpPr>
@@ -11363,7 +11517,7 @@
                   <a:srgbClr val="000000"/>
                 </a:solidFill>
               </a:rPr>
-              <a:t>0.92</a:t>
+              <a:t>0.82</a:t>
             </a:r>
           </a:p>
         </p:txBody>
@@ -11416,7 +11570,7 @@
                   <a:srgbClr val="000000"/>
                 </a:solidFill>
               </a:rPr>
-              <a:t>0.67–1.27</a:t>
+              <a:t>0.31–2.15</a:t>
             </a:r>
           </a:p>
         </p:txBody>
@@ -11469,7 +11623,7 @@
                   <a:srgbClr val="000000"/>
                 </a:solidFill>
               </a:rPr>
-              <a:t>0.68–1.26</a:t>
+              <a:t>0.30–2.29</a:t>
             </a:r>
           </a:p>
         </p:txBody>
@@ -11673,7 +11827,7 @@
                   <a:srgbClr val="000000"/>
                 </a:solidFill>
               </a:rPr>
-              <a:t>0.82</a:t>
+              <a:t>0.92</a:t>
             </a:r>
           </a:p>
         </p:txBody>
@@ -11726,7 +11880,7 @@
                   <a:srgbClr val="000000"/>
                 </a:solidFill>
               </a:rPr>
-              <a:t>0.31–2.15</a:t>
+              <a:t>0.67–1.27</a:t>
             </a:r>
           </a:p>
         </p:txBody>
@@ -11779,7 +11933,7 @@
                   <a:srgbClr val="000000"/>
                 </a:solidFill>
               </a:rPr>
-              <a:t>0.30–2.29</a:t>
+              <a:t>0.68–1.26</a:t>
             </a:r>
           </a:p>
         </p:txBody>
@@ -11983,7 +12137,7 @@
                   <a:srgbClr val="000000"/>
                 </a:solidFill>
               </a:rPr>
-              <a:t>3.18</a:t>
+              <a:t>3.48</a:t>
             </a:r>
           </a:p>
         </p:txBody>
@@ -12036,7 +12190,7 @@
                   <a:srgbClr val="000000"/>
                 </a:solidFill>
               </a:rPr>
-              <a:t>1.38–7.36</a:t>
+              <a:t>0.81–15.06</a:t>
             </a:r>
           </a:p>
         </p:txBody>
@@ -12089,7 +12243,7 @@
                   <a:srgbClr val="000000"/>
                 </a:solidFill>
               </a:rPr>
-              <a:t>1.23–7.01</a:t>
+              <a:t>0.00–21.33</a:t>
             </a:r>
           </a:p>
         </p:txBody>
@@ -12142,7 +12296,7 @@
                   <a:srgbClr val="000000"/>
                 </a:solidFill>
               </a:rPr>
-              <a:t>100.0%</a:t>
+              <a:t>99.8%</a:t>
             </a:r>
           </a:p>
         </p:txBody>
@@ -12293,7 +12447,7 @@
                   <a:srgbClr val="000000"/>
                 </a:solidFill>
               </a:rPr>
-              <a:t>3.48</a:t>
+              <a:t>3.18</a:t>
             </a:r>
           </a:p>
         </p:txBody>
@@ -12346,7 +12500,7 @@
                   <a:srgbClr val="000000"/>
                 </a:solidFill>
               </a:rPr>
-              <a:t>0.81–15.06</a:t>
+              <a:t>1.38–7.36</a:t>
             </a:r>
           </a:p>
         </p:txBody>
@@ -12399,7 +12553,7 @@
                   <a:srgbClr val="000000"/>
                 </a:solidFill>
               </a:rPr>
-              <a:t>0.00–21.33</a:t>
+              <a:t>1.23–7.01</a:t>
             </a:r>
           </a:p>
         </p:txBody>
@@ -12452,7 +12606,7 @@
                   <a:srgbClr val="000000"/>
                 </a:solidFill>
               </a:rPr>
-              <a:t>99.8%</a:t>
+              <a:t>100.0%</a:t>
             </a:r>
           </a:p>
         </p:txBody>
@@ -12611,7 +12765,7 @@
                   <a:srgbClr val="000000"/>
                 </a:solidFill>
               </a:rPr>
-              <a:t>0.65</a:t>
+              <a:t>0.70</a:t>
             </a:r>
           </a:p>
         </p:txBody>
@@ -12664,7 +12818,7 @@
                   <a:srgbClr val="000000"/>
                 </a:solidFill>
               </a:rPr>
-              <a:t>0.40–1.06</a:t>
+              <a:t>0.22–2.26</a:t>
             </a:r>
           </a:p>
         </p:txBody>
@@ -12717,7 +12871,7 @@
                   <a:srgbClr val="000000"/>
                 </a:solidFill>
               </a:rPr>
-              <a:t>0.39–1.06</a:t>
+              <a:t>0.15–2.72</a:t>
             </a:r>
           </a:p>
         </p:txBody>
@@ -12921,7 +13075,7 @@
                   <a:srgbClr val="000000"/>
                 </a:solidFill>
               </a:rPr>
-              <a:t>0.70</a:t>
+              <a:t>0.60</a:t>
             </a:r>
           </a:p>
         </p:txBody>
@@ -12974,7 +13128,7 @@
                   <a:srgbClr val="000000"/>
                 </a:solidFill>
               </a:rPr>
-              <a:t>0.22–2.26</a:t>
+              <a:t>0.40–1.06</a:t>
             </a:r>
           </a:p>
         </p:txBody>
@@ -13027,7 +13181,7 @@
                   <a:srgbClr val="000000"/>
                 </a:solidFill>
               </a:rPr>
-              <a:t>0.15–2.72</a:t>
+              <a:t>0.36–0.98</a:t>
             </a:r>
           </a:p>
         </p:txBody>
@@ -13231,7 +13385,7 @@
                   <a:srgbClr val="000000"/>
                 </a:solidFill>
               </a:rPr>
-              <a:t>13.59</a:t>
+              <a:t>14.14</a:t>
             </a:r>
           </a:p>
         </p:txBody>
@@ -13284,7 +13438,7 @@
                   <a:srgbClr val="000000"/>
                 </a:solidFill>
               </a:rPr>
-              <a:t>1.74–106.04</a:t>
+              <a:t>0.72–277.39</a:t>
             </a:r>
           </a:p>
         </p:txBody>
@@ -13337,7 +13491,7 @@
                   <a:srgbClr val="000000"/>
                 </a:solidFill>
               </a:rPr>
-              <a:t>0.00–700136.92</a:t>
+              <a:t>Unstable</a:t>
             </a:r>
           </a:p>
         </p:txBody>
@@ -13390,7 +13544,7 @@
                   <a:srgbClr val="000000"/>
                 </a:solidFill>
               </a:rPr>
-              <a:t>99.8%</a:t>
+              <a:t>91.5%</a:t>
             </a:r>
           </a:p>
         </p:txBody>
@@ -13541,7 +13695,7 @@
                   <a:srgbClr val="000000"/>
                 </a:solidFill>
               </a:rPr>
-              <a:t>14.14</a:t>
+              <a:t>13.59</a:t>
             </a:r>
           </a:p>
         </p:txBody>
@@ -13594,7 +13748,7 @@
                   <a:srgbClr val="000000"/>
                 </a:solidFill>
               </a:rPr>
-              <a:t>0.72–277.39</a:t>
+              <a:t>1.74–106.04</a:t>
             </a:r>
           </a:p>
         </p:txBody>
@@ -13647,7 +13801,7 @@
                   <a:srgbClr val="000000"/>
                 </a:solidFill>
               </a:rPr>
-              <a:t>Unstable</a:t>
+              <a:t>0.00–700136.92</a:t>
             </a:r>
           </a:p>
         </p:txBody>
@@ -13700,7 +13854,7 @@
                   <a:srgbClr val="000000"/>
                 </a:solidFill>
               </a:rPr>
-              <a:t>91.5%</a:t>
+              <a:t>99.8%</a:t>
             </a:r>
           </a:p>
         </p:txBody>

--- a/yago_ionv/figures_strobe.pptx
+++ b/yago_ionv/figures_strobe.pptx
@@ -192,16 +192,16 @@
                 <c:formatCode>General</c:formatCode>
                 <c:ptCount val="4"/>
                 <c:pt idx="0">
-                  <c:v>1.8973998594518624</c:v>
+                  <c:v>1.9121813031161474</c:v>
                 </c:pt>
                 <c:pt idx="1">
-                  <c:v>17.70906535488405</c:v>
+                  <c:v>17.740793201133144</c:v>
                 </c:pt>
                 <c:pt idx="2">
-                  <c:v>0.21082220660576245</c:v>
+                  <c:v>0.2124645892351275</c:v>
                 </c:pt>
                 <c:pt idx="3">
-                  <c:v>0.8784258608573436</c:v>
+                  <c:v>0.8852691218130312</c:v>
                 </c:pt>
               </c:numCache>
             </c:numRef>
@@ -276,16 +276,16 @@
                 <c:formatCode>General</c:formatCode>
                 <c:ptCount val="4"/>
                 <c:pt idx="0">
-                  <c:v>1.461988304093567</c:v>
+                  <c:v>1.4705882352941175</c:v>
                 </c:pt>
                 <c:pt idx="1">
-                  <c:v>16.95906432748538</c:v>
+                  <c:v>17.058823529411764</c:v>
                 </c:pt>
                 <c:pt idx="2">
-                  <c:v>0.8771929824561403</c:v>
+                  <c:v>0.8823529411764706</c:v>
                 </c:pt>
                 <c:pt idx="3">
-                  <c:v>2.3391812865497075</c:v>
+                  <c:v>2.3529411764705883</c:v>
                 </c:pt>
               </c:numCache>
             </c:numRef>
@@ -451,16 +451,16 @@
                 <c:formatCode>General</c:formatCode>
                 <c:ptCount val="4"/>
                 <c:pt idx="0">
-                  <c:v>2.9227557411273484</c:v>
+                  <c:v>2.941176470588235</c:v>
                 </c:pt>
                 <c:pt idx="1">
-                  <c:v>21.920668058455114</c:v>
+                  <c:v>22.058823529411764</c:v>
                 </c:pt>
                 <c:pt idx="2">
-                  <c:v>0.20876826722338201</c:v>
+                  <c:v>0.21008403361344538</c:v>
                 </c:pt>
                 <c:pt idx="3">
-                  <c:v>0.41753653444676403</c:v>
+                  <c:v>0.42016806722689076</c:v>
                 </c:pt>
               </c:numCache>
             </c:numRef>
@@ -535,16 +535,16 @@
                 <c:formatCode>General</c:formatCode>
                 <c:ptCount val="4"/>
                 <c:pt idx="0">
-                  <c:v>2.1739130434782608</c:v>
+                  <c:v>2.197802197802198</c:v>
                 </c:pt>
                 <c:pt idx="1">
-                  <c:v>14.673913043478262</c:v>
+                  <c:v>14.835164835164836</c:v>
                 </c:pt>
                 <c:pt idx="2">
-                  <c:v>1.6304347826086956</c:v>
+                  <c:v>1.6483516483516485</c:v>
                 </c:pt>
                 <c:pt idx="3">
-                  <c:v>3.260869565217391</c:v>
+                  <c:v>3.296703296703297</c:v>
                 </c:pt>
               </c:numCache>
             </c:numRef>
@@ -3718,7 +3718,7 @@
                   <a:srgbClr val="000000"/>
                 </a:solidFill>
               </a:rPr>
-              <a:t>N = 3,479  (Singleton 3,113  /  Twin 366)</a:t>
+              <a:t>N = 3,407  (Singleton 3,043  /  Twin 364)</a:t>
             </a:r>
           </a:p>
         </p:txBody>
@@ -3818,7 +3818,7 @@
         <p:spPr>
           <a:xfrm>
             <a:off x="7086600" y="960120"/>
-            <a:ext cx="3200400" cy="1682496"/>
+            <a:ext cx="3200400" cy="1883664"/>
           </a:xfrm>
           <a:prstGeom prst="roundRect">
             <a:avLst/>
@@ -3857,7 +3857,7 @@
                   <a:srgbClr val="000000"/>
                 </a:solidFill>
               </a:rPr>
-              <a:t>Excluded  (n = 236)</a:t>
+              <a:t>Excluded  (n = 188)</a:t>
             </a:r>
           </a:p>
           <a:p>
@@ -3868,7 +3868,7 @@
                   <a:srgbClr val="000000"/>
                 </a:solidFill>
               </a:rPr>
-              <a:t>General anesthesia: n=6 (S 4, T 2)</a:t>
+              <a:t>General anesthesia: n=142 (S 136, T 6)</a:t>
             </a:r>
           </a:p>
           <a:p>
@@ -3879,7 +3879,7 @@
                   <a:srgbClr val="000000"/>
                 </a:solidFill>
               </a:rPr>
-              <a:t>SBP &lt; 90 mmHg at admission: n=4 (S 3, T 1)</a:t>
+              <a:t>SBP &lt; 90 mmHg at admission: n=12 (S 11, T 1)</a:t>
             </a:r>
           </a:p>
           <a:p>
@@ -3923,7 +3923,7 @@
                   <a:srgbClr val="000000"/>
                 </a:solidFill>
               </a:rPr>
-              <a:t>Other exclusion criteria: n=147 (S 143, T 4)</a:t>
+              <a:t>Non-cesarean delivery: n=2 (S 2, T 0)</a:t>
             </a:r>
           </a:p>
           <a:p>
@@ -3934,7 +3934,18 @@
                   <a:srgbClr val="000000"/>
                 </a:solidFill>
               </a:rPr>
-              <a:t>Missing anesthesia data: n=58 (S 57, T 1)</a:t>
+              <a:t>Cardiac arrest: n=1 (S 1, T 0)</a:t>
+            </a:r>
+          </a:p>
+          <a:p>
+            <a:pPr algn="ctr"/>
+            <a:r>
+              <a:rPr sz="700">
+                <a:solidFill>
+                  <a:srgbClr val="000000"/>
+                </a:solidFill>
+              </a:rPr>
+              <a:t>Missing anesthesia data: n=10 (S 9, T 1)</a:t>
             </a:r>
           </a:p>
         </p:txBody>
@@ -3998,7 +4009,7 @@
                   <a:srgbClr val="000000"/>
                 </a:solidFill>
               </a:rPr>
-              <a:t>N = 3,243  (Singleton 2,897  /  Twin 346)</a:t>
+              <a:t>N = 3,219  (Singleton 2,875  /  Twin 344)</a:t>
             </a:r>
           </a:p>
         </p:txBody>
@@ -4212,7 +4223,7 @@
                   <a:srgbClr val="000000"/>
                 </a:solidFill>
               </a:rPr>
-              <a:t>N = 3,188  (Singleton 2,846  /  Twin 342)</a:t>
+              <a:t>N = 3,164  (Singleton 2,824  /  Twin 340)</a:t>
             </a:r>
           </a:p>
         </p:txBody>
@@ -4319,7 +4330,7 @@
                   <a:srgbClr val="000000"/>
                 </a:solidFill>
               </a:rPr>
-              <a:t>n = 2,846</a:t>
+              <a:t>n = 2,824</a:t>
             </a:r>
           </a:p>
         </p:txBody>
@@ -4426,7 +4437,7 @@
                   <a:srgbClr val="000000"/>
                 </a:solidFill>
               </a:rPr>
-              <a:t>n = 342</a:t>
+              <a:t>n = 340</a:t>
             </a:r>
           </a:p>
         </p:txBody>
@@ -4533,7 +4544,7 @@
                   <a:srgbClr val="000000"/>
                 </a:solidFill>
               </a:rPr>
-              <a:t>n = 2,525 (with overlap)</a:t>
+              <a:t>n = 2,506 (with overlap)</a:t>
             </a:r>
           </a:p>
           <a:p>
@@ -4544,7 +4555,7 @@
                   <a:srgbClr val="000000"/>
                 </a:solidFill>
               </a:rPr>
-              <a:t>Emergency CS: n=1452</a:t>
+              <a:t>Emergency CS: n=1441</a:t>
             </a:r>
           </a:p>
           <a:p>
@@ -4555,7 +4566,7 @@
                   <a:srgbClr val="000000"/>
                 </a:solidFill>
               </a:rPr>
-              <a:t>Prior CS: n=1320</a:t>
+              <a:t>Prior CS: n=1312</a:t>
             </a:r>
           </a:p>
           <a:p>
@@ -4566,7 +4577,7 @@
                   <a:srgbClr val="000000"/>
                 </a:solidFill>
               </a:rPr>
-              <a:t>HDP: n=317</a:t>
+              <a:t>HDP: n=312</a:t>
             </a:r>
           </a:p>
           <a:p>
@@ -4577,7 +4588,7 @@
                   <a:srgbClr val="000000"/>
                 </a:solidFill>
               </a:rPr>
-              <a:t>Preoperative steroid: n=232</a:t>
+              <a:t>Preoperative steroid: n=229</a:t>
             </a:r>
           </a:p>
         </p:txBody>
@@ -4684,7 +4695,7 @@
                   <a:srgbClr val="000000"/>
                 </a:solidFill>
               </a:rPr>
-              <a:t>N = 663  (Singleton 479  /  Twin 184)</a:t>
+              <a:t>N = 658  (Singleton 476  /  Twin 182)</a:t>
             </a:r>
           </a:p>
         </p:txBody>
@@ -4791,7 +4802,7 @@
                   <a:srgbClr val="000000"/>
                 </a:solidFill>
               </a:rPr>
-              <a:t>n = 479</a:t>
+              <a:t>n = 476</a:t>
             </a:r>
           </a:p>
         </p:txBody>
@@ -4898,7 +4909,7 @@
                   <a:srgbClr val="000000"/>
                 </a:solidFill>
               </a:rPr>
-              <a:t>n = 184</a:t>
+              <a:t>n = 182</a:t>
             </a:r>
           </a:p>
         </p:txBody>
@@ -5066,7 +5077,7 @@
         </p:nvSpPr>
         <p:spPr>
           <a:xfrm>
-            <a:off x="4007918" y="1097280"/>
+            <a:off x="4009875" y="1097280"/>
             <a:ext cx="19050" cy="2468880"/>
           </a:xfrm>
           <a:prstGeom prst="rect">
@@ -5109,7 +5120,7 @@
         </p:nvSpPr>
         <p:spPr>
           <a:xfrm>
-            <a:off x="3733598" y="3611880"/>
+            <a:off x="3735555" y="3611880"/>
             <a:ext cx="548640" cy="228600"/>
           </a:xfrm>
           <a:prstGeom prst="rect">
@@ -5206,8 +5217,8 @@
         </p:nvSpPr>
         <p:spPr>
           <a:xfrm>
-            <a:off x="3756990" y="1283970"/>
-            <a:ext cx="1330779" cy="38100"/>
+            <a:off x="3756452" y="1283970"/>
+            <a:ext cx="1323073" cy="38100"/>
           </a:xfrm>
           <a:prstGeom prst="rect">
             <a:avLst/>
@@ -5249,7 +5260,7 @@
         </p:nvSpPr>
         <p:spPr>
           <a:xfrm>
-            <a:off x="3979757" y="1248156"/>
+            <a:off x="3977651" y="1248156"/>
             <a:ext cx="109728" cy="109728"/>
           </a:xfrm>
           <a:prstGeom prst="diamond">
@@ -5316,7 +5327,7 @@
               </a:defRPr>
             </a:pPr>
             <a:r>
-              <a:t>OR 1.08 [0.28–4.08] P=0.914</a:t>
+              <a:t>OR 1.06 [0.28–4.04] P=0.927</a:t>
             </a:r>
           </a:p>
         </p:txBody>
@@ -5360,8 +5371,8 @@
         </p:nvSpPr>
         <p:spPr>
           <a:xfrm>
-            <a:off x="3890101" y="1695450"/>
-            <a:ext cx="268068" cy="38100"/>
+            <a:off x="3890956" y="1695450"/>
+            <a:ext cx="267748" cy="38100"/>
           </a:xfrm>
           <a:prstGeom prst="rect">
             <a:avLst/>
@@ -5403,7 +5414,7 @@
         </p:nvSpPr>
         <p:spPr>
           <a:xfrm>
-            <a:off x="3943885" y="1659636"/>
+            <a:off x="3944694" y="1659636"/>
             <a:ext cx="109728" cy="109728"/>
           </a:xfrm>
           <a:prstGeom prst="diamond">
@@ -5470,7 +5481,7 @@
               </a:defRPr>
             </a:pPr>
             <a:r>
-              <a:t>OR 0.97 [0.66–1.43] P=0.892</a:t>
+              <a:t>OR 0.97 [0.66–1.42] P=0.879</a:t>
             </a:r>
           </a:p>
         </p:txBody>
@@ -5514,8 +5525,8 @@
         </p:nvSpPr>
         <p:spPr>
           <a:xfrm>
-            <a:off x="3959407" y="2106930"/>
-            <a:ext cx="91752" cy="38100"/>
+            <a:off x="3960731" y="2106930"/>
+            <a:ext cx="92403" cy="38100"/>
           </a:xfrm>
           <a:prstGeom prst="rect">
             <a:avLst/>
@@ -5557,7 +5568,7 @@
         </p:nvSpPr>
         <p:spPr>
           <a:xfrm>
-            <a:off x="3947379" y="2071116"/>
+            <a:off x="3949000" y="2071116"/>
             <a:ext cx="109728" cy="109728"/>
           </a:xfrm>
           <a:prstGeom prst="diamond">
@@ -5624,7 +5635,7 @@
               </a:defRPr>
             </a:pPr>
             <a:r>
-              <a:t>OR 0.98 [0.86–1.12] P=0.809</a:t>
+              <a:t>OR 0.98 [0.86–1.12] P=0.800</a:t>
             </a:r>
           </a:p>
         </p:txBody>
@@ -5668,8 +5679,8 @@
         </p:nvSpPr>
         <p:spPr>
           <a:xfrm>
-            <a:off x="4000422" y="2518410"/>
-            <a:ext cx="19265" cy="38100"/>
+            <a:off x="4002310" y="2518410"/>
+            <a:ext cx="19405" cy="38100"/>
           </a:xfrm>
           <a:prstGeom prst="rect">
             <a:avLst/>
@@ -5711,7 +5722,7 @@
         </p:nvSpPr>
         <p:spPr>
           <a:xfrm>
-            <a:off x="3955059" y="2482596"/>
+            <a:off x="3957016" y="2482596"/>
             <a:ext cx="109728" cy="109728"/>
           </a:xfrm>
           <a:prstGeom prst="diamond">
@@ -5778,7 +5789,7 @@
               </a:defRPr>
             </a:pPr>
             <a:r>
-              <a:t>OR 1.01 [0.98–1.03] P=0.682</a:t>
+              <a:t>OR 1.01 [0.98–1.03] P=0.685</a:t>
             </a:r>
           </a:p>
         </p:txBody>
@@ -5822,8 +5833,8 @@
         </p:nvSpPr>
         <p:spPr>
           <a:xfrm>
-            <a:off x="3663278" y="2929890"/>
-            <a:ext cx="514115" cy="38100"/>
+            <a:off x="3663223" y="2929890"/>
+            <a:ext cx="514264" cy="38100"/>
           </a:xfrm>
           <a:prstGeom prst="rect">
             <a:avLst/>
@@ -5865,7 +5876,7 @@
         </p:nvSpPr>
         <p:spPr>
           <a:xfrm>
-            <a:off x="3657065" y="2894076"/>
+            <a:off x="3656806" y="2894076"/>
             <a:ext cx="109728" cy="109728"/>
           </a:xfrm>
           <a:prstGeom prst="diamond">
@@ -5932,7 +5943,7 @@
               </a:defRPr>
             </a:pPr>
             <a:r>
-              <a:t>OR 0.16 [0.02–1.48] P=0.106</a:t>
+              <a:t>OR 0.15 [0.02–1.48] P=0.105</a:t>
             </a:r>
           </a:p>
         </p:txBody>
@@ -5976,8 +5987,8 @@
         </p:nvSpPr>
         <p:spPr>
           <a:xfrm>
-            <a:off x="3939744" y="3341370"/>
-            <a:ext cx="4993240" cy="38100"/>
+            <a:off x="3940244" y="3341370"/>
+            <a:ext cx="4992740" cy="38100"/>
           </a:xfrm>
           <a:prstGeom prst="rect">
             <a:avLst/>
@@ -6019,7 +6030,7 @@
         </p:nvSpPr>
         <p:spPr>
           <a:xfrm>
-            <a:off x="4822745" y="3305556"/>
+            <a:off x="4823823" y="3305556"/>
             <a:ext cx="109728" cy="109728"/>
           </a:xfrm>
           <a:prstGeom prst="diamond">
@@ -6086,7 +6097,7 @@
               </a:defRPr>
             </a:pPr>
             <a:r>
-              <a:t>OR 3.48 [0.81–15.06] P=0.095</a:t>
+              <a:t>OR 3.47 [0.80–14.98] P=0.096</a:t>
             </a:r>
           </a:p>
         </p:txBody>
@@ -6183,7 +6194,7 @@
         </p:nvSpPr>
         <p:spPr>
           <a:xfrm>
-            <a:off x="4007918" y="1097280"/>
+            <a:off x="4009875" y="1097280"/>
             <a:ext cx="19050" cy="1645920"/>
           </a:xfrm>
           <a:prstGeom prst="rect">
@@ -6226,7 +6237,7 @@
         </p:nvSpPr>
         <p:spPr>
           <a:xfrm>
-            <a:off x="3733598" y="2788920"/>
+            <a:off x="3735555" y="2788920"/>
             <a:ext cx="548640" cy="228600"/>
           </a:xfrm>
           <a:prstGeom prst="rect">
@@ -6323,8 +6334,8 @@
         </p:nvSpPr>
         <p:spPr>
           <a:xfrm>
-            <a:off x="4139733" y="1283970"/>
-            <a:ext cx="2095764" cy="38100"/>
+            <a:off x="4139720" y="1283970"/>
+            <a:ext cx="2094809" cy="38100"/>
           </a:xfrm>
           <a:prstGeom prst="rect">
             <a:avLst/>
@@ -6366,7 +6377,7 @@
         </p:nvSpPr>
         <p:spPr>
           <a:xfrm>
-            <a:off x="4717586" y="1248156"/>
+            <a:off x="4717362" y="1248156"/>
             <a:ext cx="109728" cy="109728"/>
           </a:xfrm>
           <a:prstGeom prst="diamond">
@@ -6433,7 +6444,7 @@
               </a:defRPr>
             </a:pPr>
             <a:r>
-              <a:t>OR 3.18 [1.38–7.36] P=0.007**</a:t>
+              <a:t>OR 3.16 [1.37–7.32] P=0.007**</a:t>
             </a:r>
           </a:p>
         </p:txBody>
@@ -6477,8 +6488,8 @@
         </p:nvSpPr>
         <p:spPr>
           <a:xfrm>
-            <a:off x="3939744" y="1695450"/>
-            <a:ext cx="4993240" cy="38100"/>
+            <a:off x="3940244" y="1695450"/>
+            <a:ext cx="4992740" cy="38100"/>
           </a:xfrm>
           <a:prstGeom prst="rect">
             <a:avLst/>
@@ -6520,7 +6531,7 @@
         </p:nvSpPr>
         <p:spPr>
           <a:xfrm>
-            <a:off x="4822745" y="1659636"/>
+            <a:off x="4823823" y="1659636"/>
             <a:ext cx="109728" cy="109728"/>
           </a:xfrm>
           <a:prstGeom prst="diamond">
@@ -6587,7 +6598,7 @@
               </a:defRPr>
             </a:pPr>
             <a:r>
-              <a:t>OR 3.48 [0.81–15.06] P=0.095</a:t>
+              <a:t>OR 3.47 [0.80–14.98] P=0.096</a:t>
             </a:r>
           </a:p>
         </p:txBody>
@@ -6631,8 +6642,8 @@
         </p:nvSpPr>
         <p:spPr>
           <a:xfrm>
-            <a:off x="3893871" y="2106930"/>
-            <a:ext cx="207380" cy="38100"/>
+            <a:off x="3894640" y="2106930"/>
+            <a:ext cx="208366" cy="38100"/>
           </a:xfrm>
           <a:prstGeom prst="rect">
             <a:avLst/>
@@ -6674,7 +6685,7 @@
         </p:nvSpPr>
         <p:spPr>
           <a:xfrm>
-            <a:off x="3926498" y="2071116"/>
+            <a:off x="3927665" y="2071116"/>
             <a:ext cx="109728" cy="109728"/>
           </a:xfrm>
           <a:prstGeom prst="diamond">
@@ -6741,7 +6752,7 @@
               </a:defRPr>
             </a:pPr>
             <a:r>
-              <a:t>OR 0.92 [0.67–1.27] P=0.624</a:t>
+              <a:t>OR 0.92 [0.67–1.26] P=0.616</a:t>
             </a:r>
           </a:p>
         </p:txBody>
@@ -6785,8 +6796,8 @@
         </p:nvSpPr>
         <p:spPr>
           <a:xfrm>
-            <a:off x="3766155" y="2518410"/>
-            <a:ext cx="646378" cy="38100"/>
+            <a:off x="3766289" y="2518410"/>
+            <a:ext cx="646552" cy="38100"/>
           </a:xfrm>
           <a:prstGeom prst="rect">
             <a:avLst/>
@@ -6828,7 +6839,7 @@
         </p:nvSpPr>
         <p:spPr>
           <a:xfrm>
-            <a:off x="3889008" y="2482596"/>
+            <a:off x="3889244" y="2482596"/>
             <a:ext cx="109728" cy="109728"/>
           </a:xfrm>
           <a:prstGeom prst="diamond">
@@ -6895,7 +6906,7 @@
               </a:defRPr>
             </a:pPr>
             <a:r>
-              <a:t>OR 0.82 [0.31–2.15] P=0.683</a:t>
+              <a:t>OR 0.81 [0.31–2.14] P=0.676</a:t>
             </a:r>
           </a:p>
         </p:txBody>
@@ -6992,7 +7003,7 @@
         </p:nvSpPr>
         <p:spPr>
           <a:xfrm>
-            <a:off x="3835371" y="1097280"/>
+            <a:off x="3835705" y="1097280"/>
             <a:ext cx="19050" cy="4572000"/>
           </a:xfrm>
           <a:prstGeom prst="rect">
@@ -7035,7 +7046,7 @@
         </p:nvSpPr>
         <p:spPr>
           <a:xfrm>
-            <a:off x="3561051" y="5715000"/>
+            <a:off x="3561385" y="5715000"/>
             <a:ext cx="548640" cy="228600"/>
           </a:xfrm>
           <a:prstGeom prst="rect">
@@ -7132,8 +7143,8 @@
         </p:nvSpPr>
         <p:spPr>
           <a:xfrm>
-            <a:off x="3800776" y="1198545"/>
-            <a:ext cx="2533853" cy="38100"/>
+            <a:off x="3800500" y="1198545"/>
+            <a:ext cx="2524259" cy="38100"/>
           </a:xfrm>
           <a:prstGeom prst="rect">
             <a:avLst/>
@@ -7175,7 +7186,7 @@
         </p:nvSpPr>
         <p:spPr>
           <a:xfrm>
-            <a:off x="4221837" y="1162731"/>
+            <a:off x="4220100" y="1162731"/>
             <a:ext cx="109728" cy="109728"/>
           </a:xfrm>
           <a:prstGeom prst="diamond">
@@ -7242,7 +7253,7 @@
               </a:defRPr>
             </a:pPr>
             <a:r>
-              <a:t>OR 3.48 [0.81–15.06] P=0.095</a:t>
+              <a:t>OR 3.47 [0.80–14.98] P=0.096</a:t>
             </a:r>
           </a:p>
         </p:txBody>
@@ -7273,7 +7284,7 @@
               <a:defRPr sz="800"/>
             </a:pPr>
             <a:r>
-              <a:t>Full minus Surgery time (per min)</a:t>
+              <a:t>Full minus Hypotension (SBP &lt; 90)</a:t>
             </a:r>
           </a:p>
         </p:txBody>
@@ -7286,8 +7297,8 @@
         </p:nvSpPr>
         <p:spPr>
           <a:xfrm>
-            <a:off x="3757472" y="1439177"/>
-            <a:ext cx="2989223" cy="38100"/>
+            <a:off x="3763784" y="1439177"/>
+            <a:ext cx="3056833" cy="38100"/>
           </a:xfrm>
           <a:prstGeom prst="rect">
             <a:avLst/>
@@ -7329,7 +7340,7 @@
         </p:nvSpPr>
         <p:spPr>
           <a:xfrm>
-            <a:off x="4158177" y="1403363"/>
+            <a:off x="4182273" y="1403363"/>
             <a:ext cx="109728" cy="109728"/>
           </a:xfrm>
           <a:prstGeom prst="diamond">
@@ -7396,7 +7407,7 @@
               </a:defRPr>
             </a:pPr>
             <a:r>
-              <a:t>OR 3.12 [0.56–17.38] P=0.193</a:t>
+              <a:t>OR 3.25 [0.60–17.76] P=0.173</a:t>
             </a:r>
           </a:p>
         </p:txBody>
@@ -7427,7 +7438,7 @@
               <a:defRPr sz="800"/>
             </a:pPr>
             <a:r>
-              <a:t>Full minus Epidural anesthesia</a:t>
+              <a:t>Full minus Surgery time (per min)</a:t>
             </a:r>
           </a:p>
         </p:txBody>
@@ -7440,8 +7451,8 @@
         </p:nvSpPr>
         <p:spPr>
           <a:xfrm>
-            <a:off x="3787858" y="1679808"/>
-            <a:ext cx="3580687" cy="38100"/>
+            <a:off x="3757485" y="1679808"/>
+            <a:ext cx="2989351" cy="38100"/>
           </a:xfrm>
           <a:prstGeom prst="rect">
             <a:avLst/>
@@ -7483,7 +7494,7 @@
         </p:nvSpPr>
         <p:spPr>
           <a:xfrm>
-            <a:off x="4297992" y="1643994"/>
+            <a:off x="4158226" y="1643994"/>
             <a:ext cx="109728" cy="109728"/>
           </a:xfrm>
           <a:prstGeom prst="diamond">
@@ -7550,7 +7561,7 @@
               </a:defRPr>
             </a:pPr>
             <a:r>
-              <a:t>OR 3.91 [0.73–20.87] P=0.110</a:t>
+              <a:t>OR 3.12 [0.56–17.34] P=0.194</a:t>
             </a:r>
           </a:p>
         </p:txBody>
@@ -7581,7 +7592,7 @@
               <a:defRPr sz="800"/>
             </a:pPr>
             <a:r>
-              <a:t>Full minus HDP</a:t>
+              <a:t>Full minus Epidural anesthesia</a:t>
             </a:r>
           </a:p>
         </p:txBody>
@@ -7594,8 +7605,8 @@
         </p:nvSpPr>
         <p:spPr>
           <a:xfrm>
-            <a:off x="3767164" y="1920440"/>
-            <a:ext cx="3138097" cy="38100"/>
+            <a:off x="3787753" y="1920440"/>
+            <a:ext cx="3564286" cy="38100"/>
           </a:xfrm>
           <a:prstGeom prst="rect">
             <a:avLst/>
@@ -7637,7 +7648,7 @@
         </p:nvSpPr>
         <p:spPr>
           <a:xfrm>
-            <a:off x="4199249" y="1884626"/>
+            <a:off x="4296166" y="1884626"/>
             <a:ext cx="109728" cy="109728"/>
           </a:xfrm>
           <a:prstGeom prst="diamond">
@@ -7704,7 +7715,7 @@
               </a:defRPr>
             </a:pPr>
             <a:r>
-              <a:t>OR 3.36 [0.62–18.27] P=0.161</a:t>
+              <a:t>OR 3.89 [0.73–20.74] P=0.111</a:t>
             </a:r>
           </a:p>
         </p:txBody>
@@ -7735,7 +7746,7 @@
               <a:defRPr sz="800"/>
             </a:pPr>
             <a:r>
-              <a:t>Full minus Prior CS</a:t>
+              <a:t>Full minus HDP</a:t>
             </a:r>
           </a:p>
         </p:txBody>
@@ -7748,8 +7759,8 @@
         </p:nvSpPr>
         <p:spPr>
           <a:xfrm>
-            <a:off x="3801489" y="2161072"/>
-            <a:ext cx="2798862" cy="38100"/>
+            <a:off x="3767160" y="2161072"/>
+            <a:ext cx="3138543" cy="38100"/>
           </a:xfrm>
           <a:prstGeom prst="rect">
             <a:avLst/>
@@ -7791,7 +7802,7 @@
         </p:nvSpPr>
         <p:spPr>
           <a:xfrm>
-            <a:off x="4253452" y="2125258"/>
+            <a:off x="4199279" y="2125258"/>
             <a:ext cx="109728" cy="109728"/>
           </a:xfrm>
           <a:prstGeom prst="diamond">
@@ -7858,7 +7869,7 @@
               </a:defRPr>
             </a:pPr>
             <a:r>
-              <a:t>OR 3.66 [0.81–16.55] P=0.092</a:t>
+              <a:t>OR 3.35 [0.62–18.24] P=0.162</a:t>
             </a:r>
           </a:p>
         </p:txBody>
@@ -7889,7 +7900,7 @@
               <a:defRPr sz="800"/>
             </a:pPr>
             <a:r>
-              <a:t>Full minus Emergency CS</a:t>
+              <a:t>Full minus Prior CS</a:t>
             </a:r>
           </a:p>
         </p:txBody>
@@ -7902,14 +7913,14 @@
         </p:nvSpPr>
         <p:spPr>
           <a:xfrm>
-            <a:off x="3870598" y="2401703"/>
-            <a:ext cx="5062386" cy="38100"/>
-          </a:xfrm>
-          <a:prstGeom prst="rect">
-            <a:avLst/>
-          </a:prstGeom>
-          <a:solidFill>
-            <a:srgbClr val="C44E52"/>
+            <a:off x="3801505" y="2401703"/>
+            <a:ext cx="2800893" cy="38100"/>
+          </a:xfrm>
+          <a:prstGeom prst="rect">
+            <a:avLst/>
+          </a:prstGeom>
+          <a:solidFill>
+            <a:srgbClr val="4C72B0"/>
           </a:solidFill>
           <a:ln>
             <a:noFill/>
@@ -7945,7 +7956,161 @@
         </p:nvSpPr>
         <p:spPr>
           <a:xfrm>
-            <a:off x="4662759" y="2365889"/>
+            <a:off x="4253714" y="2365889"/>
+            <a:ext cx="109728" cy="109728"/>
+          </a:xfrm>
+          <a:prstGeom prst="diamond">
+            <a:avLst/>
+          </a:prstGeom>
+          <a:solidFill>
+            <a:srgbClr val="4C72B0"/>
+          </a:solidFill>
+          <a:ln>
+            <a:solidFill>
+              <a:srgbClr val="4C72B0"/>
+            </a:solidFill>
+          </a:ln>
+        </p:spPr>
+        <p:style>
+          <a:lnRef idx="1">
+            <a:schemeClr val="accent1"/>
+          </a:lnRef>
+          <a:fillRef idx="3">
+            <a:schemeClr val="accent1"/>
+          </a:fillRef>
+          <a:effectRef idx="2">
+            <a:schemeClr val="accent1"/>
+          </a:effectRef>
+          <a:fontRef idx="minor">
+            <a:schemeClr val="lt1"/>
+          </a:fontRef>
+        </p:style>
+        <p:txBody>
+          <a:bodyPr rtlCol="0" anchor="ctr"/>
+          <a:lstStyle/>
+          <a:p>
+            <a:pPr algn="ctr"/>
+          </a:p>
+        </p:txBody>
+      </p:sp>
+      <p:sp>
+        <p:nvSpPr>
+          <p:cNvPr id="29" name="TextBox 28"/>
+          <p:cNvSpPr txBox="1"/>
+          <p:nvPr/>
+        </p:nvSpPr>
+        <p:spPr>
+          <a:xfrm>
+            <a:off x="10607040" y="2311025"/>
+            <a:ext cx="1371600" cy="228600"/>
+          </a:xfrm>
+          <a:prstGeom prst="rect">
+            <a:avLst/>
+          </a:prstGeom>
+          <a:noFill/>
+        </p:spPr>
+        <p:txBody>
+          <a:bodyPr wrap="none">
+            <a:spAutoFit/>
+          </a:bodyPr>
+          <a:lstStyle/>
+          <a:p>
+            <a:pPr>
+              <a:defRPr sz="700">
+                <a:solidFill>
+                  <a:srgbClr val="4C72B0"/>
+                </a:solidFill>
+              </a:defRPr>
+            </a:pPr>
+            <a:r>
+              <a:t>OR 3.66 [0.81–16.53] P=0.092</a:t>
+            </a:r>
+          </a:p>
+        </p:txBody>
+      </p:sp>
+      <p:sp>
+        <p:nvSpPr>
+          <p:cNvPr id="30" name="TextBox 29"/>
+          <p:cNvSpPr txBox="1"/>
+          <p:nvPr/>
+        </p:nvSpPr>
+        <p:spPr>
+          <a:xfrm>
+            <a:off x="274320" y="2524225"/>
+            <a:ext cx="3200400" cy="274320"/>
+          </a:xfrm>
+          <a:prstGeom prst="rect">
+            <a:avLst/>
+          </a:prstGeom>
+          <a:noFill/>
+        </p:spPr>
+        <p:txBody>
+          <a:bodyPr wrap="square">
+            <a:spAutoFit/>
+          </a:bodyPr>
+          <a:lstStyle/>
+          <a:p>
+            <a:pPr algn="r">
+              <a:defRPr sz="800"/>
+            </a:pPr>
+            <a:r>
+              <a:t>Full minus Emergency CS</a:t>
+            </a:r>
+          </a:p>
+        </p:txBody>
+      </p:sp>
+      <p:sp>
+        <p:nvSpPr>
+          <p:cNvPr id="31" name="Rectangle 30"/>
+          <p:cNvSpPr/>
+          <p:nvPr/>
+        </p:nvSpPr>
+        <p:spPr>
+          <a:xfrm>
+            <a:off x="3870178" y="2642335"/>
+            <a:ext cx="5062806" cy="38100"/>
+          </a:xfrm>
+          <a:prstGeom prst="rect">
+            <a:avLst/>
+          </a:prstGeom>
+          <a:solidFill>
+            <a:srgbClr val="C44E52"/>
+          </a:solidFill>
+          <a:ln>
+            <a:noFill/>
+          </a:ln>
+        </p:spPr>
+        <p:style>
+          <a:lnRef idx="1">
+            <a:schemeClr val="accent1"/>
+          </a:lnRef>
+          <a:fillRef idx="3">
+            <a:schemeClr val="accent1"/>
+          </a:fillRef>
+          <a:effectRef idx="2">
+            <a:schemeClr val="accent1"/>
+          </a:effectRef>
+          <a:fontRef idx="minor">
+            <a:schemeClr val="lt1"/>
+          </a:fontRef>
+        </p:style>
+        <p:txBody>
+          <a:bodyPr rtlCol="0" anchor="ctr"/>
+          <a:lstStyle/>
+          <a:p>
+            <a:pPr algn="ctr"/>
+          </a:p>
+        </p:txBody>
+      </p:sp>
+      <p:sp>
+        <p:nvSpPr>
+          <p:cNvPr id="32" name="Diamond 31"/>
+          <p:cNvSpPr/>
+          <p:nvPr/>
+        </p:nvSpPr>
+        <p:spPr>
+          <a:xfrm>
+            <a:off x="4661714" y="2606521"/>
             <a:ext cx="109728" cy="109728"/>
           </a:xfrm>
           <a:prstGeom prst="diamond">
@@ -7984,13 +8149,13 @@
       </p:sp>
       <p:sp>
         <p:nvSpPr>
-          <p:cNvPr id="29" name="TextBox 28"/>
+          <p:cNvPr id="33" name="TextBox 32"/>
           <p:cNvSpPr txBox="1"/>
           <p:nvPr/>
         </p:nvSpPr>
         <p:spPr>
           <a:xfrm>
-            <a:off x="10607040" y="2311025"/>
+            <a:off x="10607040" y="2551657"/>
             <a:ext cx="1371600" cy="228600"/>
           </a:xfrm>
           <a:prstGeom prst="rect">
@@ -8012,20 +8177,20 @@
               </a:defRPr>
             </a:pPr>
             <a:r>
-              <a:t>OR 5.96 [1.20–29.68] P=0.029*</a:t>
-            </a:r>
-          </a:p>
-        </p:txBody>
-      </p:sp>
-      <p:sp>
-        <p:nvSpPr>
-          <p:cNvPr id="30" name="TextBox 29"/>
+              <a:t>OR 5.95 [1.19–29.62] P=0.030*</a:t>
+            </a:r>
+          </a:p>
+        </p:txBody>
+      </p:sp>
+      <p:sp>
+        <p:nvSpPr>
+          <p:cNvPr id="34" name="TextBox 33"/>
           <p:cNvSpPr txBox="1"/>
           <p:nvPr/>
         </p:nvSpPr>
         <p:spPr>
           <a:xfrm>
-            <a:off x="274320" y="2524225"/>
+            <a:off x="274320" y="2764856"/>
             <a:ext cx="3200400" cy="274320"/>
           </a:xfrm>
           <a:prstGeom prst="rect">
@@ -8050,14 +8215,14 @@
       </p:sp>
       <p:sp>
         <p:nvSpPr>
-          <p:cNvPr id="31" name="Rectangle 30"/>
-          <p:cNvSpPr/>
-          <p:nvPr/>
-        </p:nvSpPr>
-        <p:spPr>
-          <a:xfrm>
-            <a:off x="3775511" y="2642335"/>
-            <a:ext cx="3325562" cy="38100"/>
+          <p:cNvPr id="35" name="Rectangle 34"/>
+          <p:cNvSpPr/>
+          <p:nvPr/>
+        </p:nvSpPr>
+        <p:spPr>
+          <a:xfrm>
+            <a:off x="3775612" y="2882966"/>
+            <a:ext cx="3328159" cy="38100"/>
           </a:xfrm>
           <a:prstGeom prst="rect">
             <a:avLst/>
@@ -8093,13 +8258,13 @@
       </p:sp>
       <p:sp>
         <p:nvSpPr>
-          <p:cNvPr id="32" name="Diamond 31"/>
-          <p:cNvSpPr/>
-          <p:nvPr/>
-        </p:nvSpPr>
-        <p:spPr>
-          <a:xfrm>
-            <a:off x="4239937" y="2606521"/>
+          <p:cNvPr id="36" name="Diamond 35"/>
+          <p:cNvSpPr/>
+          <p:nvPr/>
+        </p:nvSpPr>
+        <p:spPr>
+          <a:xfrm>
+            <a:off x="4240459" y="2847152"/>
             <a:ext cx="109728" cy="109728"/>
           </a:xfrm>
           <a:prstGeom prst="diamond">
@@ -8138,13 +8303,13 @@
       </p:sp>
       <p:sp>
         <p:nvSpPr>
-          <p:cNvPr id="33" name="TextBox 32"/>
+          <p:cNvPr id="37" name="TextBox 36"/>
           <p:cNvSpPr txBox="1"/>
           <p:nvPr/>
         </p:nvSpPr>
         <p:spPr>
           <a:xfrm>
-            <a:off x="10607040" y="2551657"/>
+            <a:off x="10607040" y="2792288"/>
             <a:ext cx="1371600" cy="228600"/>
           </a:xfrm>
           <a:prstGeom prst="rect">
@@ -8166,20 +8331,20 @@
               </a:defRPr>
             </a:pPr>
             <a:r>
-              <a:t>OR 3.58 [0.66–19.37] P=0.138</a:t>
-            </a:r>
-          </a:p>
-        </p:txBody>
-      </p:sp>
-      <p:sp>
-        <p:nvSpPr>
-          <p:cNvPr id="34" name="TextBox 33"/>
+              <a:t>OR 3.58 [0.66–19.35] P=0.138</a:t>
+            </a:r>
+          </a:p>
+        </p:txBody>
+      </p:sp>
+      <p:sp>
+        <p:nvSpPr>
+          <p:cNvPr id="38" name="TextBox 37"/>
           <p:cNvSpPr txBox="1"/>
           <p:nvPr/>
         </p:nvSpPr>
         <p:spPr>
           <a:xfrm>
-            <a:off x="274320" y="2764856"/>
+            <a:off x="274320" y="3005488"/>
             <a:ext cx="3200400" cy="274320"/>
           </a:xfrm>
           <a:prstGeom prst="rect">
@@ -8197,21 +8362,21 @@
               <a:defRPr sz="800"/>
             </a:pPr>
             <a:r>
-              <a:t>Full minus BMI (per kg/m²)</a:t>
-            </a:r>
-          </a:p>
-        </p:txBody>
-      </p:sp>
-      <p:sp>
-        <p:nvSpPr>
-          <p:cNvPr id="35" name="Rectangle 34"/>
-          <p:cNvSpPr/>
-          <p:nvPr/>
-        </p:nvSpPr>
-        <p:spPr>
-          <a:xfrm>
-            <a:off x="3766054" y="2882966"/>
-            <a:ext cx="3164158" cy="38100"/>
+              <a:t>Full minus Age (per year)</a:t>
+            </a:r>
+          </a:p>
+        </p:txBody>
+      </p:sp>
+      <p:sp>
+        <p:nvSpPr>
+          <p:cNvPr id="39" name="Rectangle 38"/>
+          <p:cNvSpPr/>
+          <p:nvPr/>
+        </p:nvSpPr>
+        <p:spPr>
+          <a:xfrm>
+            <a:off x="3772056" y="3123598"/>
+            <a:ext cx="3285524" cy="38100"/>
           </a:xfrm>
           <a:prstGeom prst="rect">
             <a:avLst/>
@@ -8247,13 +8412,13 @@
       </p:sp>
       <p:sp>
         <p:nvSpPr>
-          <p:cNvPr id="36" name="Diamond 35"/>
-          <p:cNvSpPr/>
-          <p:nvPr/>
-        </p:nvSpPr>
-        <p:spPr>
-          <a:xfrm>
-            <a:off x="4198496" y="2847152"/>
+          <p:cNvPr id="40" name="Diamond 39"/>
+          <p:cNvSpPr/>
+          <p:nvPr/>
+        </p:nvSpPr>
+        <p:spPr>
+          <a:xfrm>
+            <a:off x="4226555" y="3087784"/>
             <a:ext cx="109728" cy="109728"/>
           </a:xfrm>
           <a:prstGeom prst="diamond">
@@ -8292,13 +8457,13 @@
       </p:sp>
       <p:sp>
         <p:nvSpPr>
-          <p:cNvPr id="37" name="TextBox 36"/>
+          <p:cNvPr id="41" name="TextBox 40"/>
           <p:cNvSpPr txBox="1"/>
           <p:nvPr/>
         </p:nvSpPr>
         <p:spPr>
           <a:xfrm>
-            <a:off x="10607040" y="2792288"/>
+            <a:off x="10607040" y="3032920"/>
             <a:ext cx="1371600" cy="228600"/>
           </a:xfrm>
           <a:prstGeom prst="rect">
@@ -8320,20 +8485,20 @@
               </a:defRPr>
             </a:pPr>
             <a:r>
-              <a:t>OR 3.35 [0.61–18.41] P=0.164</a:t>
-            </a:r>
-          </a:p>
-        </p:txBody>
-      </p:sp>
-      <p:sp>
-        <p:nvSpPr>
-          <p:cNvPr id="38" name="TextBox 37"/>
+              <a:t>OR 3.50 [0.64–19.09] P=0.147</a:t>
+            </a:r>
+          </a:p>
+        </p:txBody>
+      </p:sp>
+      <p:sp>
+        <p:nvSpPr>
+          <p:cNvPr id="42" name="TextBox 41"/>
           <p:cNvSpPr txBox="1"/>
           <p:nvPr/>
         </p:nvSpPr>
         <p:spPr>
           <a:xfrm>
-            <a:off x="274320" y="3005488"/>
+            <a:off x="274320" y="3246120"/>
             <a:ext cx="3200400" cy="274320"/>
           </a:xfrm>
           <a:prstGeom prst="rect">
@@ -8351,27 +8516,27 @@
               <a:defRPr sz="800"/>
             </a:pPr>
             <a:r>
-              <a:t>Full minus Age (per year)</a:t>
-            </a:r>
-          </a:p>
-        </p:txBody>
-      </p:sp>
-      <p:sp>
-        <p:nvSpPr>
-          <p:cNvPr id="39" name="Rectangle 38"/>
-          <p:cNvSpPr/>
-          <p:nvPr/>
-        </p:nvSpPr>
-        <p:spPr>
-          <a:xfrm>
-            <a:off x="3771972" y="3123598"/>
-            <a:ext cx="3283437" cy="38100"/>
-          </a:xfrm>
-          <a:prstGeom prst="rect">
-            <a:avLst/>
-          </a:prstGeom>
-          <a:solidFill>
-            <a:srgbClr val="4C72B0"/>
+              <a:t>Twin + Hypotension (SBP &lt; 90)</a:t>
+            </a:r>
+          </a:p>
+        </p:txBody>
+      </p:sp>
+      <p:sp>
+        <p:nvSpPr>
+          <p:cNvPr id="43" name="Rectangle 42"/>
+          <p:cNvSpPr/>
+          <p:nvPr/>
+        </p:nvSpPr>
+        <p:spPr>
+          <a:xfrm>
+            <a:off x="3845594" y="3364230"/>
+            <a:ext cx="2873521" cy="38100"/>
+          </a:xfrm>
+          <a:prstGeom prst="rect">
+            <a:avLst/>
+          </a:prstGeom>
+          <a:solidFill>
+            <a:srgbClr val="C44E52"/>
           </a:solidFill>
           <a:ln>
             <a:noFill/>
@@ -8401,13 +8566,783 @@
       </p:sp>
       <p:sp>
         <p:nvSpPr>
-          <p:cNvPr id="40" name="Diamond 39"/>
-          <p:cNvSpPr/>
-          <p:nvPr/>
-        </p:nvSpPr>
-        <p:spPr>
-          <a:xfrm>
-            <a:off x="4226126" y="3087784"/>
+          <p:cNvPr id="44" name="Diamond 43"/>
+          <p:cNvSpPr/>
+          <p:nvPr/>
+        </p:nvSpPr>
+        <p:spPr>
+          <a:xfrm>
+            <a:off x="4361385" y="3328416"/>
+            <a:ext cx="109728" cy="109728"/>
+          </a:xfrm>
+          <a:prstGeom prst="diamond">
+            <a:avLst/>
+          </a:prstGeom>
+          <a:solidFill>
+            <a:srgbClr val="C44E52"/>
+          </a:solidFill>
+          <a:ln>
+            <a:solidFill>
+              <a:srgbClr val="C44E52"/>
+            </a:solidFill>
+          </a:ln>
+        </p:spPr>
+        <p:style>
+          <a:lnRef idx="1">
+            <a:schemeClr val="accent1"/>
+          </a:lnRef>
+          <a:fillRef idx="3">
+            <a:schemeClr val="accent1"/>
+          </a:fillRef>
+          <a:effectRef idx="2">
+            <a:schemeClr val="accent1"/>
+          </a:effectRef>
+          <a:fontRef idx="minor">
+            <a:schemeClr val="lt1"/>
+          </a:fontRef>
+        </p:style>
+        <p:txBody>
+          <a:bodyPr rtlCol="0" anchor="ctr"/>
+          <a:lstStyle/>
+          <a:p>
+            <a:pPr algn="ctr"/>
+          </a:p>
+        </p:txBody>
+      </p:sp>
+      <p:sp>
+        <p:nvSpPr>
+          <p:cNvPr id="45" name="TextBox 44"/>
+          <p:cNvSpPr txBox="1"/>
+          <p:nvPr/>
+        </p:nvSpPr>
+        <p:spPr>
+          <a:xfrm>
+            <a:off x="10607040" y="3273552"/>
+            <a:ext cx="1371600" cy="228600"/>
+          </a:xfrm>
+          <a:prstGeom prst="rect">
+            <a:avLst/>
+          </a:prstGeom>
+          <a:noFill/>
+        </p:spPr>
+        <p:txBody>
+          <a:bodyPr wrap="none">
+            <a:spAutoFit/>
+          </a:bodyPr>
+          <a:lstStyle/>
+          <a:p>
+            <a:pPr>
+              <a:defRPr sz="700">
+                <a:solidFill>
+                  <a:srgbClr val="C44E52"/>
+                </a:solidFill>
+              </a:defRPr>
+            </a:pPr>
+            <a:r>
+              <a:t>OR 4.26 [1.06–17.19] P=0.042*</a:t>
+            </a:r>
+          </a:p>
+        </p:txBody>
+      </p:sp>
+      <p:sp>
+        <p:nvSpPr>
+          <p:cNvPr id="46" name="TextBox 45"/>
+          <p:cNvSpPr txBox="1"/>
+          <p:nvPr/>
+        </p:nvSpPr>
+        <p:spPr>
+          <a:xfrm>
+            <a:off x="274320" y="3486751"/>
+            <a:ext cx="3200400" cy="274320"/>
+          </a:xfrm>
+          <a:prstGeom prst="rect">
+            <a:avLst/>
+          </a:prstGeom>
+          <a:noFill/>
+        </p:spPr>
+        <p:txBody>
+          <a:bodyPr wrap="square">
+            <a:spAutoFit/>
+          </a:bodyPr>
+          <a:lstStyle/>
+          <a:p>
+            <a:pPr algn="r">
+              <a:defRPr sz="800"/>
+            </a:pPr>
+            <a:r>
+              <a:t>Twin + Surgery time (per min)</a:t>
+            </a:r>
+          </a:p>
+        </p:txBody>
+      </p:sp>
+      <p:sp>
+        <p:nvSpPr>
+          <p:cNvPr id="47" name="Rectangle 46"/>
+          <p:cNvSpPr/>
+          <p:nvPr/>
+        </p:nvSpPr>
+        <p:spPr>
+          <a:xfrm>
+            <a:off x="3880242" y="3604861"/>
+            <a:ext cx="3685461" cy="38100"/>
+          </a:xfrm>
+          <a:prstGeom prst="rect">
+            <a:avLst/>
+          </a:prstGeom>
+          <a:solidFill>
+            <a:srgbClr val="C44E52"/>
+          </a:solidFill>
+          <a:ln>
+            <a:noFill/>
+          </a:ln>
+        </p:spPr>
+        <p:style>
+          <a:lnRef idx="1">
+            <a:schemeClr val="accent1"/>
+          </a:lnRef>
+          <a:fillRef idx="3">
+            <a:schemeClr val="accent1"/>
+          </a:fillRef>
+          <a:effectRef idx="2">
+            <a:schemeClr val="accent1"/>
+          </a:effectRef>
+          <a:fontRef idx="minor">
+            <a:schemeClr val="lt1"/>
+          </a:fontRef>
+        </p:style>
+        <p:txBody>
+          <a:bodyPr rtlCol="0" anchor="ctr"/>
+          <a:lstStyle/>
+          <a:p>
+            <a:pPr algn="ctr"/>
+          </a:p>
+        </p:txBody>
+      </p:sp>
+      <p:sp>
+        <p:nvSpPr>
+          <p:cNvPr id="48" name="Diamond 47"/>
+          <p:cNvSpPr/>
+          <p:nvPr/>
+        </p:nvSpPr>
+        <p:spPr>
+          <a:xfrm>
+            <a:off x="4535533" y="3569047"/>
+            <a:ext cx="109728" cy="109728"/>
+          </a:xfrm>
+          <a:prstGeom prst="diamond">
+            <a:avLst/>
+          </a:prstGeom>
+          <a:solidFill>
+            <a:srgbClr val="C44E52"/>
+          </a:solidFill>
+          <a:ln>
+            <a:solidFill>
+              <a:srgbClr val="C44E52"/>
+            </a:solidFill>
+          </a:ln>
+        </p:spPr>
+        <p:style>
+          <a:lnRef idx="1">
+            <a:schemeClr val="accent1"/>
+          </a:lnRef>
+          <a:fillRef idx="3">
+            <a:schemeClr val="accent1"/>
+          </a:fillRef>
+          <a:effectRef idx="2">
+            <a:schemeClr val="accent1"/>
+          </a:effectRef>
+          <a:fontRef idx="minor">
+            <a:schemeClr val="lt1"/>
+          </a:fontRef>
+        </p:style>
+        <p:txBody>
+          <a:bodyPr rtlCol="0" anchor="ctr"/>
+          <a:lstStyle/>
+          <a:p>
+            <a:pPr algn="ctr"/>
+          </a:p>
+        </p:txBody>
+      </p:sp>
+      <p:sp>
+        <p:nvSpPr>
+          <p:cNvPr id="49" name="TextBox 48"/>
+          <p:cNvSpPr txBox="1"/>
+          <p:nvPr/>
+        </p:nvSpPr>
+        <p:spPr>
+          <a:xfrm>
+            <a:off x="10607040" y="3514183"/>
+            <a:ext cx="1371600" cy="228600"/>
+          </a:xfrm>
+          <a:prstGeom prst="rect">
+            <a:avLst/>
+          </a:prstGeom>
+          <a:noFill/>
+        </p:spPr>
+        <p:txBody>
+          <a:bodyPr wrap="none">
+            <a:spAutoFit/>
+          </a:bodyPr>
+          <a:lstStyle/>
+          <a:p>
+            <a:pPr>
+              <a:defRPr sz="700">
+                <a:solidFill>
+                  <a:srgbClr val="C44E52"/>
+                </a:solidFill>
+              </a:defRPr>
+            </a:pPr>
+            <a:r>
+              <a:t>OR 5.24 [1.25–21.94] P=0.023*</a:t>
+            </a:r>
+          </a:p>
+        </p:txBody>
+      </p:sp>
+      <p:sp>
+        <p:nvSpPr>
+          <p:cNvPr id="50" name="TextBox 49"/>
+          <p:cNvSpPr txBox="1"/>
+          <p:nvPr/>
+        </p:nvSpPr>
+        <p:spPr>
+          <a:xfrm>
+            <a:off x="274320" y="3727383"/>
+            <a:ext cx="3200400" cy="274320"/>
+          </a:xfrm>
+          <a:prstGeom prst="rect">
+            <a:avLst/>
+          </a:prstGeom>
+          <a:noFill/>
+        </p:spPr>
+        <p:txBody>
+          <a:bodyPr wrap="square">
+            <a:spAutoFit/>
+          </a:bodyPr>
+          <a:lstStyle/>
+          <a:p>
+            <a:pPr algn="r">
+              <a:defRPr sz="800"/>
+            </a:pPr>
+            <a:r>
+              <a:t>Twin + Epidural anesthesia</a:t>
+            </a:r>
+          </a:p>
+        </p:txBody>
+      </p:sp>
+      <p:sp>
+        <p:nvSpPr>
+          <p:cNvPr id="51" name="Rectangle 50"/>
+          <p:cNvSpPr/>
+          <p:nvPr/>
+        </p:nvSpPr>
+        <p:spPr>
+          <a:xfrm>
+            <a:off x="3839514" y="3845493"/>
+            <a:ext cx="2765252" cy="38100"/>
+          </a:xfrm>
+          <a:prstGeom prst="rect">
+            <a:avLst/>
+          </a:prstGeom>
+          <a:solidFill>
+            <a:srgbClr val="C44E52"/>
+          </a:solidFill>
+          <a:ln>
+            <a:noFill/>
+          </a:ln>
+        </p:spPr>
+        <p:style>
+          <a:lnRef idx="1">
+            <a:schemeClr val="accent1"/>
+          </a:lnRef>
+          <a:fillRef idx="3">
+            <a:schemeClr val="accent1"/>
+          </a:fillRef>
+          <a:effectRef idx="2">
+            <a:schemeClr val="accent1"/>
+          </a:effectRef>
+          <a:fontRef idx="minor">
+            <a:schemeClr val="lt1"/>
+          </a:fontRef>
+        </p:style>
+        <p:txBody>
+          <a:bodyPr rtlCol="0" anchor="ctr"/>
+          <a:lstStyle/>
+          <a:p>
+            <a:pPr algn="ctr"/>
+          </a:p>
+        </p:txBody>
+      </p:sp>
+      <p:sp>
+        <p:nvSpPr>
+          <p:cNvPr id="52" name="Diamond 51"/>
+          <p:cNvSpPr/>
+          <p:nvPr/>
+        </p:nvSpPr>
+        <p:spPr>
+          <a:xfrm>
+            <a:off x="4334946" y="3809679"/>
+            <a:ext cx="109728" cy="109728"/>
+          </a:xfrm>
+          <a:prstGeom prst="diamond">
+            <a:avLst/>
+          </a:prstGeom>
+          <a:solidFill>
+            <a:srgbClr val="C44E52"/>
+          </a:solidFill>
+          <a:ln>
+            <a:solidFill>
+              <a:srgbClr val="C44E52"/>
+            </a:solidFill>
+          </a:ln>
+        </p:spPr>
+        <p:style>
+          <a:lnRef idx="1">
+            <a:schemeClr val="accent1"/>
+          </a:lnRef>
+          <a:fillRef idx="3">
+            <a:schemeClr val="accent1"/>
+          </a:fillRef>
+          <a:effectRef idx="2">
+            <a:schemeClr val="accent1"/>
+          </a:effectRef>
+          <a:fontRef idx="minor">
+            <a:schemeClr val="lt1"/>
+          </a:fontRef>
+        </p:style>
+        <p:txBody>
+          <a:bodyPr rtlCol="0" anchor="ctr"/>
+          <a:lstStyle/>
+          <a:p>
+            <a:pPr algn="ctr"/>
+          </a:p>
+        </p:txBody>
+      </p:sp>
+      <p:sp>
+        <p:nvSpPr>
+          <p:cNvPr id="53" name="TextBox 52"/>
+          <p:cNvSpPr txBox="1"/>
+          <p:nvPr/>
+        </p:nvSpPr>
+        <p:spPr>
+          <a:xfrm>
+            <a:off x="10607040" y="3754815"/>
+            <a:ext cx="1371600" cy="228600"/>
+          </a:xfrm>
+          <a:prstGeom prst="rect">
+            <a:avLst/>
+          </a:prstGeom>
+          <a:noFill/>
+        </p:spPr>
+        <p:txBody>
+          <a:bodyPr wrap="none">
+            <a:spAutoFit/>
+          </a:bodyPr>
+          <a:lstStyle/>
+          <a:p>
+            <a:pPr>
+              <a:defRPr sz="700">
+                <a:solidFill>
+                  <a:srgbClr val="C44E52"/>
+                </a:solidFill>
+              </a:defRPr>
+            </a:pPr>
+            <a:r>
+              <a:t>OR 4.11 [1.02–16.55] P=0.047*</a:t>
+            </a:r>
+          </a:p>
+        </p:txBody>
+      </p:sp>
+      <p:sp>
+        <p:nvSpPr>
+          <p:cNvPr id="54" name="TextBox 53"/>
+          <p:cNvSpPr txBox="1"/>
+          <p:nvPr/>
+        </p:nvSpPr>
+        <p:spPr>
+          <a:xfrm>
+            <a:off x="274320" y="3968014"/>
+            <a:ext cx="3200400" cy="274320"/>
+          </a:xfrm>
+          <a:prstGeom prst="rect">
+            <a:avLst/>
+          </a:prstGeom>
+          <a:noFill/>
+        </p:spPr>
+        <p:txBody>
+          <a:bodyPr wrap="square">
+            <a:spAutoFit/>
+          </a:bodyPr>
+          <a:lstStyle/>
+          <a:p>
+            <a:pPr algn="r">
+              <a:defRPr sz="800"/>
+            </a:pPr>
+            <a:r>
+              <a:t>Twin + HDP</a:t>
+            </a:r>
+          </a:p>
+        </p:txBody>
+      </p:sp>
+      <p:sp>
+        <p:nvSpPr>
+          <p:cNvPr id="55" name="Rectangle 54"/>
+          <p:cNvSpPr/>
+          <p:nvPr/>
+        </p:nvSpPr>
+        <p:spPr>
+          <a:xfrm>
+            <a:off x="3843030" y="4086124"/>
+            <a:ext cx="2806609" cy="38100"/>
+          </a:xfrm>
+          <a:prstGeom prst="rect">
+            <a:avLst/>
+          </a:prstGeom>
+          <a:solidFill>
+            <a:srgbClr val="C44E52"/>
+          </a:solidFill>
+          <a:ln>
+            <a:noFill/>
+          </a:ln>
+        </p:spPr>
+        <p:style>
+          <a:lnRef idx="1">
+            <a:schemeClr val="accent1"/>
+          </a:lnRef>
+          <a:fillRef idx="3">
+            <a:schemeClr val="accent1"/>
+          </a:fillRef>
+          <a:effectRef idx="2">
+            <a:schemeClr val="accent1"/>
+          </a:effectRef>
+          <a:fontRef idx="minor">
+            <a:schemeClr val="lt1"/>
+          </a:fontRef>
+        </p:style>
+        <p:txBody>
+          <a:bodyPr rtlCol="0" anchor="ctr"/>
+          <a:lstStyle/>
+          <a:p>
+            <a:pPr algn="ctr"/>
+          </a:p>
+        </p:txBody>
+      </p:sp>
+      <p:sp>
+        <p:nvSpPr>
+          <p:cNvPr id="56" name="Diamond 55"/>
+          <p:cNvSpPr/>
+          <p:nvPr/>
+        </p:nvSpPr>
+        <p:spPr>
+          <a:xfrm>
+            <a:off x="4347594" y="4050310"/>
+            <a:ext cx="109728" cy="109728"/>
+          </a:xfrm>
+          <a:prstGeom prst="diamond">
+            <a:avLst/>
+          </a:prstGeom>
+          <a:solidFill>
+            <a:srgbClr val="C44E52"/>
+          </a:solidFill>
+          <a:ln>
+            <a:solidFill>
+              <a:srgbClr val="C44E52"/>
+            </a:solidFill>
+          </a:ln>
+        </p:spPr>
+        <p:style>
+          <a:lnRef idx="1">
+            <a:schemeClr val="accent1"/>
+          </a:lnRef>
+          <a:fillRef idx="3">
+            <a:schemeClr val="accent1"/>
+          </a:fillRef>
+          <a:effectRef idx="2">
+            <a:schemeClr val="accent1"/>
+          </a:effectRef>
+          <a:fontRef idx="minor">
+            <a:schemeClr val="lt1"/>
+          </a:fontRef>
+        </p:style>
+        <p:txBody>
+          <a:bodyPr rtlCol="0" anchor="ctr"/>
+          <a:lstStyle/>
+          <a:p>
+            <a:pPr algn="ctr"/>
+          </a:p>
+        </p:txBody>
+      </p:sp>
+      <p:sp>
+        <p:nvSpPr>
+          <p:cNvPr id="57" name="TextBox 56"/>
+          <p:cNvSpPr txBox="1"/>
+          <p:nvPr/>
+        </p:nvSpPr>
+        <p:spPr>
+          <a:xfrm>
+            <a:off x="10607040" y="3995446"/>
+            <a:ext cx="1371600" cy="228600"/>
+          </a:xfrm>
+          <a:prstGeom prst="rect">
+            <a:avLst/>
+          </a:prstGeom>
+          <a:noFill/>
+        </p:spPr>
+        <p:txBody>
+          <a:bodyPr wrap="none">
+            <a:spAutoFit/>
+          </a:bodyPr>
+          <a:lstStyle/>
+          <a:p>
+            <a:pPr>
+              <a:defRPr sz="700">
+                <a:solidFill>
+                  <a:srgbClr val="C44E52"/>
+                </a:solidFill>
+              </a:defRPr>
+            </a:pPr>
+            <a:r>
+              <a:t>OR 4.18 [1.04–16.80] P=0.044*</a:t>
+            </a:r>
+          </a:p>
+        </p:txBody>
+      </p:sp>
+      <p:sp>
+        <p:nvSpPr>
+          <p:cNvPr id="58" name="TextBox 57"/>
+          <p:cNvSpPr txBox="1"/>
+          <p:nvPr/>
+        </p:nvSpPr>
+        <p:spPr>
+          <a:xfrm>
+            <a:off x="274320" y="4208646"/>
+            <a:ext cx="3200400" cy="274320"/>
+          </a:xfrm>
+          <a:prstGeom prst="rect">
+            <a:avLst/>
+          </a:prstGeom>
+          <a:noFill/>
+        </p:spPr>
+        <p:txBody>
+          <a:bodyPr wrap="square">
+            <a:spAutoFit/>
+          </a:bodyPr>
+          <a:lstStyle/>
+          <a:p>
+            <a:pPr algn="r">
+              <a:defRPr sz="800"/>
+            </a:pPr>
+            <a:r>
+              <a:t>Twin + Prior CS</a:t>
+            </a:r>
+          </a:p>
+        </p:txBody>
+      </p:sp>
+      <p:sp>
+        <p:nvSpPr>
+          <p:cNvPr id="59" name="Rectangle 58"/>
+          <p:cNvSpPr/>
+          <p:nvPr/>
+        </p:nvSpPr>
+        <p:spPr>
+          <a:xfrm>
+            <a:off x="3857647" y="4326756"/>
+            <a:ext cx="3822141" cy="38100"/>
+          </a:xfrm>
+          <a:prstGeom prst="rect">
+            <a:avLst/>
+          </a:prstGeom>
+          <a:solidFill>
+            <a:srgbClr val="C44E52"/>
+          </a:solidFill>
+          <a:ln>
+            <a:noFill/>
+          </a:ln>
+        </p:spPr>
+        <p:style>
+          <a:lnRef idx="1">
+            <a:schemeClr val="accent1"/>
+          </a:lnRef>
+          <a:fillRef idx="3">
+            <a:schemeClr val="accent1"/>
+          </a:fillRef>
+          <a:effectRef idx="2">
+            <a:schemeClr val="accent1"/>
+          </a:effectRef>
+          <a:fontRef idx="minor">
+            <a:schemeClr val="lt1"/>
+          </a:fontRef>
+        </p:style>
+        <p:txBody>
+          <a:bodyPr rtlCol="0" anchor="ctr"/>
+          <a:lstStyle/>
+          <a:p>
+            <a:pPr algn="ctr"/>
+          </a:p>
+        </p:txBody>
+      </p:sp>
+      <p:sp>
+        <p:nvSpPr>
+          <p:cNvPr id="60" name="Diamond 59"/>
+          <p:cNvSpPr/>
+          <p:nvPr/>
+        </p:nvSpPr>
+        <p:spPr>
+          <a:xfrm>
+            <a:off x="4499747" y="4290942"/>
+            <a:ext cx="109728" cy="109728"/>
+          </a:xfrm>
+          <a:prstGeom prst="diamond">
+            <a:avLst/>
+          </a:prstGeom>
+          <a:solidFill>
+            <a:srgbClr val="C44E52"/>
+          </a:solidFill>
+          <a:ln>
+            <a:solidFill>
+              <a:srgbClr val="C44E52"/>
+            </a:solidFill>
+          </a:ln>
+        </p:spPr>
+        <p:style>
+          <a:lnRef idx="1">
+            <a:schemeClr val="accent1"/>
+          </a:lnRef>
+          <a:fillRef idx="3">
+            <a:schemeClr val="accent1"/>
+          </a:fillRef>
+          <a:effectRef idx="2">
+            <a:schemeClr val="accent1"/>
+          </a:effectRef>
+          <a:fontRef idx="minor">
+            <a:schemeClr val="lt1"/>
+          </a:fontRef>
+        </p:style>
+        <p:txBody>
+          <a:bodyPr rtlCol="0" anchor="ctr"/>
+          <a:lstStyle/>
+          <a:p>
+            <a:pPr algn="ctr"/>
+          </a:p>
+        </p:txBody>
+      </p:sp>
+      <p:sp>
+        <p:nvSpPr>
+          <p:cNvPr id="61" name="TextBox 60"/>
+          <p:cNvSpPr txBox="1"/>
+          <p:nvPr/>
+        </p:nvSpPr>
+        <p:spPr>
+          <a:xfrm>
+            <a:off x="10607040" y="4236078"/>
+            <a:ext cx="1371600" cy="228600"/>
+          </a:xfrm>
+          <a:prstGeom prst="rect">
+            <a:avLst/>
+          </a:prstGeom>
+          <a:noFill/>
+        </p:spPr>
+        <p:txBody>
+          <a:bodyPr wrap="none">
+            <a:spAutoFit/>
+          </a:bodyPr>
+          <a:lstStyle/>
+          <a:p>
+            <a:pPr>
+              <a:defRPr sz="700">
+                <a:solidFill>
+                  <a:srgbClr val="C44E52"/>
+                </a:solidFill>
+              </a:defRPr>
+            </a:pPr>
+            <a:r>
+              <a:t>OR 5.04 [1.12–22.58] P=0.035*</a:t>
+            </a:r>
+          </a:p>
+        </p:txBody>
+      </p:sp>
+      <p:sp>
+        <p:nvSpPr>
+          <p:cNvPr id="62" name="TextBox 61"/>
+          <p:cNvSpPr txBox="1"/>
+          <p:nvPr/>
+        </p:nvSpPr>
+        <p:spPr>
+          <a:xfrm>
+            <a:off x="274320" y="4449277"/>
+            <a:ext cx="3200400" cy="274320"/>
+          </a:xfrm>
+          <a:prstGeom prst="rect">
+            <a:avLst/>
+          </a:prstGeom>
+          <a:noFill/>
+        </p:spPr>
+        <p:txBody>
+          <a:bodyPr wrap="square">
+            <a:spAutoFit/>
+          </a:bodyPr>
+          <a:lstStyle/>
+          <a:p>
+            <a:pPr algn="r">
+              <a:defRPr sz="800"/>
+            </a:pPr>
+            <a:r>
+              <a:t>Twin + Emergency CS</a:t>
+            </a:r>
+          </a:p>
+        </p:txBody>
+      </p:sp>
+      <p:sp>
+        <p:nvSpPr>
+          <p:cNvPr id="63" name="Rectangle 62"/>
+          <p:cNvSpPr/>
+          <p:nvPr/>
+        </p:nvSpPr>
+        <p:spPr>
+          <a:xfrm>
+            <a:off x="3817931" y="4567387"/>
+            <a:ext cx="2448751" cy="38100"/>
+          </a:xfrm>
+          <a:prstGeom prst="rect">
+            <a:avLst/>
+          </a:prstGeom>
+          <a:solidFill>
+            <a:srgbClr val="4C72B0"/>
+          </a:solidFill>
+          <a:ln>
+            <a:noFill/>
+          </a:ln>
+        </p:spPr>
+        <p:style>
+          <a:lnRef idx="1">
+            <a:schemeClr val="accent1"/>
+          </a:lnRef>
+          <a:fillRef idx="3">
+            <a:schemeClr val="accent1"/>
+          </a:fillRef>
+          <a:effectRef idx="2">
+            <a:schemeClr val="accent1"/>
+          </a:effectRef>
+          <a:fontRef idx="minor">
+            <a:schemeClr val="lt1"/>
+          </a:fontRef>
+        </p:style>
+        <p:txBody>
+          <a:bodyPr rtlCol="0" anchor="ctr"/>
+          <a:lstStyle/>
+          <a:p>
+            <a:pPr algn="ctr"/>
+          </a:p>
+        </p:txBody>
+      </p:sp>
+      <p:sp>
+        <p:nvSpPr>
+          <p:cNvPr id="64" name="Diamond 63"/>
+          <p:cNvSpPr/>
+          <p:nvPr/>
+        </p:nvSpPr>
+        <p:spPr>
+          <a:xfrm>
+            <a:off x="4249511" y="4531573"/>
             <a:ext cx="109728" cy="109728"/>
           </a:xfrm>
           <a:prstGeom prst="diamond">
@@ -8446,13 +9381,13 @@
       </p:sp>
       <p:sp>
         <p:nvSpPr>
-          <p:cNvPr id="41" name="TextBox 40"/>
+          <p:cNvPr id="65" name="TextBox 64"/>
           <p:cNvSpPr txBox="1"/>
           <p:nvPr/>
         </p:nvSpPr>
         <p:spPr>
           <a:xfrm>
-            <a:off x="10607040" y="3032920"/>
+            <a:off x="10607040" y="4476709"/>
             <a:ext cx="1371600" cy="228600"/>
           </a:xfrm>
           <a:prstGeom prst="rect">
@@ -8474,20 +9409,20 @@
               </a:defRPr>
             </a:pPr>
             <a:r>
-              <a:t>OR 3.51 [0.64–19.11] P=0.147</a:t>
-            </a:r>
-          </a:p>
-        </p:txBody>
-      </p:sp>
-      <p:sp>
-        <p:nvSpPr>
-          <p:cNvPr id="42" name="TextBox 41"/>
+              <a:t>OR 3.63 [0.90–14.65] P=0.070</a:t>
+            </a:r>
+          </a:p>
+        </p:txBody>
+      </p:sp>
+      <p:sp>
+        <p:nvSpPr>
+          <p:cNvPr id="66" name="TextBox 65"/>
           <p:cNvSpPr txBox="1"/>
           <p:nvPr/>
         </p:nvSpPr>
         <p:spPr>
           <a:xfrm>
-            <a:off x="274320" y="3246120"/>
+            <a:off x="274320" y="4689909"/>
             <a:ext cx="3200400" cy="274320"/>
           </a:xfrm>
           <a:prstGeom prst="rect">
@@ -8505,21 +9440,21 @@
               <a:defRPr sz="800"/>
             </a:pPr>
             <a:r>
-              <a:t>Twin + Hypotension (SBP &lt; 90)</a:t>
-            </a:r>
-          </a:p>
-        </p:txBody>
-      </p:sp>
-      <p:sp>
-        <p:nvSpPr>
-          <p:cNvPr id="43" name="Rectangle 42"/>
-          <p:cNvSpPr/>
-          <p:nvPr/>
-        </p:nvSpPr>
-        <p:spPr>
-          <a:xfrm>
-            <a:off x="3845739" y="3364230"/>
-            <a:ext cx="2876483" cy="38100"/>
+              <a:t>Twin + GA (per week)</a:t>
+            </a:r>
+          </a:p>
+        </p:txBody>
+      </p:sp>
+      <p:sp>
+        <p:nvSpPr>
+          <p:cNvPr id="67" name="Rectangle 66"/>
+          <p:cNvSpPr/>
+          <p:nvPr/>
+        </p:nvSpPr>
+        <p:spPr>
+          <a:xfrm>
+            <a:off x="3850741" y="4808019"/>
+            <a:ext cx="3263433" cy="38100"/>
           </a:xfrm>
           <a:prstGeom prst="rect">
             <a:avLst/>
@@ -8555,13 +9490,13 @@
       </p:sp>
       <p:sp>
         <p:nvSpPr>
-          <p:cNvPr id="44" name="Diamond 43"/>
-          <p:cNvSpPr/>
-          <p:nvPr/>
-        </p:nvSpPr>
-        <p:spPr>
-          <a:xfrm>
-            <a:off x="4362062" y="3328416"/>
+          <p:cNvPr id="68" name="Diamond 67"/>
+          <p:cNvSpPr/>
+          <p:nvPr/>
+        </p:nvSpPr>
+        <p:spPr>
+          <a:xfrm>
+            <a:off x="4419809" y="4772205"/>
             <a:ext cx="109728" cy="109728"/>
           </a:xfrm>
           <a:prstGeom prst="diamond">
@@ -8600,13 +9535,13 @@
       </p:sp>
       <p:sp>
         <p:nvSpPr>
-          <p:cNvPr id="45" name="TextBox 44"/>
+          <p:cNvPr id="69" name="TextBox 68"/>
           <p:cNvSpPr txBox="1"/>
           <p:nvPr/>
         </p:nvSpPr>
         <p:spPr>
           <a:xfrm>
-            <a:off x="10607040" y="3273552"/>
+            <a:off x="10607040" y="4717341"/>
             <a:ext cx="1371600" cy="228600"/>
           </a:xfrm>
           <a:prstGeom prst="rect">
@@ -8628,20 +9563,20 @@
               </a:defRPr>
             </a:pPr>
             <a:r>
-              <a:t>OR 4.27 [1.06–17.24] P=0.041*</a:t>
-            </a:r>
-          </a:p>
-        </p:txBody>
-      </p:sp>
-      <p:sp>
-        <p:nvSpPr>
-          <p:cNvPr id="46" name="TextBox 45"/>
+              <a:t>OR 4.59 [1.08–19.41] P=0.038*</a:t>
+            </a:r>
+          </a:p>
+        </p:txBody>
+      </p:sp>
+      <p:sp>
+        <p:nvSpPr>
+          <p:cNvPr id="70" name="TextBox 69"/>
           <p:cNvSpPr txBox="1"/>
           <p:nvPr/>
         </p:nvSpPr>
         <p:spPr>
           <a:xfrm>
-            <a:off x="274320" y="3486751"/>
+            <a:off x="274320" y="4930541"/>
             <a:ext cx="3200400" cy="274320"/>
           </a:xfrm>
           <a:prstGeom prst="rect">
@@ -8659,21 +9594,21 @@
               <a:defRPr sz="800"/>
             </a:pPr>
             <a:r>
-              <a:t>Twin + Surgery time (per min)</a:t>
-            </a:r>
-          </a:p>
-        </p:txBody>
-      </p:sp>
-      <p:sp>
-        <p:nvSpPr>
-          <p:cNvPr id="47" name="Rectangle 46"/>
-          <p:cNvSpPr/>
-          <p:nvPr/>
-        </p:nvSpPr>
-        <p:spPr>
-          <a:xfrm>
-            <a:off x="3880313" y="3604861"/>
-            <a:ext cx="3685879" cy="38100"/>
+              <a:t>Twin + BMI (per kg/m²)</a:t>
+            </a:r>
+          </a:p>
+        </p:txBody>
+      </p:sp>
+      <p:sp>
+        <p:nvSpPr>
+          <p:cNvPr id="71" name="Rectangle 70"/>
+          <p:cNvSpPr/>
+          <p:nvPr/>
+        </p:nvSpPr>
+        <p:spPr>
+          <a:xfrm>
+            <a:off x="3842211" y="5048651"/>
+            <a:ext cx="2802869" cy="38100"/>
           </a:xfrm>
           <a:prstGeom prst="rect">
             <a:avLst/>
@@ -8709,13 +9644,13 @@
       </p:sp>
       <p:sp>
         <p:nvSpPr>
-          <p:cNvPr id="48" name="Diamond 47"/>
-          <p:cNvSpPr/>
-          <p:nvPr/>
-        </p:nvSpPr>
-        <p:spPr>
-          <a:xfrm>
-            <a:off x="4535740" y="3569047"/>
+          <p:cNvPr id="72" name="Diamond 71"/>
+          <p:cNvSpPr/>
+          <p:nvPr/>
+        </p:nvSpPr>
+        <p:spPr>
+          <a:xfrm>
+            <a:off x="4345382" y="5012837"/>
             <a:ext cx="109728" cy="109728"/>
           </a:xfrm>
           <a:prstGeom prst="diamond">
@@ -8754,13 +9689,13 @@
       </p:sp>
       <p:sp>
         <p:nvSpPr>
-          <p:cNvPr id="49" name="TextBox 48"/>
+          <p:cNvPr id="73" name="TextBox 72"/>
           <p:cNvSpPr txBox="1"/>
           <p:nvPr/>
         </p:nvSpPr>
         <p:spPr>
           <a:xfrm>
-            <a:off x="10607040" y="3514183"/>
+            <a:off x="10607040" y="4957973"/>
             <a:ext cx="1371600" cy="228600"/>
           </a:xfrm>
           <a:prstGeom prst="rect">
@@ -8782,20 +9717,20 @@
               </a:defRPr>
             </a:pPr>
             <a:r>
-              <a:t>OR 5.25 [1.25–21.99] P=0.023*</a:t>
-            </a:r>
-          </a:p>
-        </p:txBody>
-      </p:sp>
-      <p:sp>
-        <p:nvSpPr>
-          <p:cNvPr id="50" name="TextBox 49"/>
+              <a:t>OR 4.17 [1.04–16.77] P=0.044*</a:t>
+            </a:r>
+          </a:p>
+        </p:txBody>
+      </p:sp>
+      <p:sp>
+        <p:nvSpPr>
+          <p:cNvPr id="74" name="TextBox 73"/>
           <p:cNvSpPr txBox="1"/>
           <p:nvPr/>
         </p:nvSpPr>
         <p:spPr>
           <a:xfrm>
-            <a:off x="274320" y="3727383"/>
+            <a:off x="274320" y="5171172"/>
             <a:ext cx="3200400" cy="274320"/>
           </a:xfrm>
           <a:prstGeom prst="rect">
@@ -8813,21 +9748,21 @@
               <a:defRPr sz="800"/>
             </a:pPr>
             <a:r>
-              <a:t>Twin + Epidural anesthesia</a:t>
-            </a:r>
-          </a:p>
-        </p:txBody>
-      </p:sp>
-      <p:sp>
-        <p:nvSpPr>
-          <p:cNvPr id="51" name="Rectangle 50"/>
-          <p:cNvSpPr/>
-          <p:nvPr/>
-        </p:nvSpPr>
-        <p:spPr>
-          <a:xfrm>
-            <a:off x="3839551" y="3845493"/>
-            <a:ext cx="2765802" cy="38100"/>
+              <a:t>Twin + Age (per year)</a:t>
+            </a:r>
+          </a:p>
+        </p:txBody>
+      </p:sp>
+      <p:sp>
+        <p:nvSpPr>
+          <p:cNvPr id="75" name="Rectangle 74"/>
+          <p:cNvSpPr/>
+          <p:nvPr/>
+        </p:nvSpPr>
+        <p:spPr>
+          <a:xfrm>
+            <a:off x="3838951" y="5289282"/>
+            <a:ext cx="2815500" cy="38100"/>
           </a:xfrm>
           <a:prstGeom prst="rect">
             <a:avLst/>
@@ -8863,13 +9798,13 @@
       </p:sp>
       <p:sp>
         <p:nvSpPr>
-          <p:cNvPr id="52" name="Diamond 51"/>
-          <p:cNvSpPr/>
-          <p:nvPr/>
-        </p:nvSpPr>
-        <p:spPr>
-          <a:xfrm>
-            <a:off x="4335093" y="3809679"/>
+          <p:cNvPr id="76" name="Diamond 75"/>
+          <p:cNvSpPr/>
+          <p:nvPr/>
+        </p:nvSpPr>
+        <p:spPr>
+          <a:xfrm>
+            <a:off x="4339948" y="5253468"/>
             <a:ext cx="109728" cy="109728"/>
           </a:xfrm>
           <a:prstGeom prst="diamond">
@@ -8908,13 +9843,13 @@
       </p:sp>
       <p:sp>
         <p:nvSpPr>
-          <p:cNvPr id="53" name="TextBox 52"/>
+          <p:cNvPr id="77" name="TextBox 76"/>
           <p:cNvSpPr txBox="1"/>
           <p:nvPr/>
         </p:nvSpPr>
         <p:spPr>
           <a:xfrm>
-            <a:off x="10607040" y="3754815"/>
+            <a:off x="10607040" y="5198604"/>
             <a:ext cx="1371600" cy="228600"/>
           </a:xfrm>
           <a:prstGeom prst="rect">
@@ -8936,20 +9871,20 @@
               </a:defRPr>
             </a:pPr>
             <a:r>
-              <a:t>OR 4.12 [1.02–16.58] P=0.046*</a:t>
-            </a:r>
-          </a:p>
-        </p:txBody>
-      </p:sp>
-      <p:sp>
-        <p:nvSpPr>
-          <p:cNvPr id="54" name="TextBox 53"/>
+              <a:t>OR 4.14 [1.02–16.83] P=0.047*</a:t>
+            </a:r>
+          </a:p>
+        </p:txBody>
+      </p:sp>
+      <p:sp>
+        <p:nvSpPr>
+          <p:cNvPr id="78" name="TextBox 77"/>
           <p:cNvSpPr txBox="1"/>
           <p:nvPr/>
         </p:nvSpPr>
         <p:spPr>
           <a:xfrm>
-            <a:off x="274320" y="3968014"/>
+            <a:off x="274320" y="5411804"/>
             <a:ext cx="3200400" cy="274320"/>
           </a:xfrm>
           <a:prstGeom prst="rect">
@@ -8967,21 +9902,21 @@
               <a:defRPr sz="800"/>
             </a:pPr>
             <a:r>
-              <a:t>Twin + HDP</a:t>
-            </a:r>
-          </a:p>
-        </p:txBody>
-      </p:sp>
-      <p:sp>
-        <p:nvSpPr>
-          <p:cNvPr id="55" name="Rectangle 54"/>
-          <p:cNvSpPr/>
-          <p:nvPr/>
-        </p:nvSpPr>
-        <p:spPr>
-          <a:xfrm>
-            <a:off x="3843067" y="4086124"/>
-            <a:ext cx="2807105" cy="38100"/>
+              <a:t>Crude (twin only)</a:t>
+            </a:r>
+          </a:p>
+        </p:txBody>
+      </p:sp>
+      <p:sp>
+        <p:nvSpPr>
+          <p:cNvPr id="79" name="Rectangle 78"/>
+          <p:cNvSpPr/>
+          <p:nvPr/>
+        </p:nvSpPr>
+        <p:spPr>
+          <a:xfrm>
+            <a:off x="3842983" y="5529914"/>
+            <a:ext cx="2805812" cy="38100"/>
           </a:xfrm>
           <a:prstGeom prst="rect">
             <a:avLst/>
@@ -9017,13 +9952,13 @@
       </p:sp>
       <p:sp>
         <p:nvSpPr>
-          <p:cNvPr id="56" name="Diamond 55"/>
-          <p:cNvSpPr/>
-          <p:nvPr/>
-        </p:nvSpPr>
-        <p:spPr>
-          <a:xfrm>
-            <a:off x="4347736" y="4050310"/>
+          <p:cNvPr id="80" name="Diamond 79"/>
+          <p:cNvSpPr/>
+          <p:nvPr/>
+        </p:nvSpPr>
+        <p:spPr>
+          <a:xfrm>
+            <a:off x="4347396" y="5494100"/>
             <a:ext cx="109728" cy="109728"/>
           </a:xfrm>
           <a:prstGeom prst="diamond">
@@ -9062,13 +9997,13 @@
       </p:sp>
       <p:sp>
         <p:nvSpPr>
-          <p:cNvPr id="57" name="TextBox 56"/>
+          <p:cNvPr id="81" name="TextBox 80"/>
           <p:cNvSpPr txBox="1"/>
           <p:nvPr/>
         </p:nvSpPr>
         <p:spPr>
           <a:xfrm>
-            <a:off x="10607040" y="3995446"/>
+            <a:off x="10607040" y="5439236"/>
             <a:ext cx="1371600" cy="228600"/>
           </a:xfrm>
           <a:prstGeom prst="rect">
@@ -9090,931 +10025,7 @@
               </a:defRPr>
             </a:pPr>
             <a:r>
-              <a:t>OR 4.19 [1.04–16.83] P=0.043*</a:t>
-            </a:r>
-          </a:p>
-        </p:txBody>
-      </p:sp>
-      <p:sp>
-        <p:nvSpPr>
-          <p:cNvPr id="58" name="TextBox 57"/>
-          <p:cNvSpPr txBox="1"/>
-          <p:nvPr/>
-        </p:nvSpPr>
-        <p:spPr>
-          <a:xfrm>
-            <a:off x="274320" y="4208646"/>
-            <a:ext cx="3200400" cy="274320"/>
-          </a:xfrm>
-          <a:prstGeom prst="rect">
-            <a:avLst/>
-          </a:prstGeom>
-          <a:noFill/>
-        </p:spPr>
-        <p:txBody>
-          <a:bodyPr wrap="square">
-            <a:spAutoFit/>
-          </a:bodyPr>
-          <a:lstStyle/>
-          <a:p>
-            <a:pPr algn="r">
-              <a:defRPr sz="800"/>
-            </a:pPr>
-            <a:r>
-              <a:t>Twin + Prior CS</a:t>
-            </a:r>
-          </a:p>
-        </p:txBody>
-      </p:sp>
-      <p:sp>
-        <p:nvSpPr>
-          <p:cNvPr id="59" name="Rectangle 58"/>
-          <p:cNvSpPr/>
-          <p:nvPr/>
-        </p:nvSpPr>
-        <p:spPr>
-          <a:xfrm>
-            <a:off x="3857869" y="4326756"/>
-            <a:ext cx="3829539" cy="38100"/>
-          </a:xfrm>
-          <a:prstGeom prst="rect">
-            <a:avLst/>
-          </a:prstGeom>
-          <a:solidFill>
-            <a:srgbClr val="C44E52"/>
-          </a:solidFill>
-          <a:ln>
-            <a:noFill/>
-          </a:ln>
-        </p:spPr>
-        <p:style>
-          <a:lnRef idx="1">
-            <a:schemeClr val="accent1"/>
-          </a:lnRef>
-          <a:fillRef idx="3">
-            <a:schemeClr val="accent1"/>
-          </a:fillRef>
-          <a:effectRef idx="2">
-            <a:schemeClr val="accent1"/>
-          </a:effectRef>
-          <a:fontRef idx="minor">
-            <a:schemeClr val="lt1"/>
-          </a:fontRef>
-        </p:style>
-        <p:txBody>
-          <a:bodyPr rtlCol="0" anchor="ctr"/>
-          <a:lstStyle/>
-          <a:p>
-            <a:pPr algn="ctr"/>
-          </a:p>
-        </p:txBody>
-      </p:sp>
-      <p:sp>
-        <p:nvSpPr>
-          <p:cNvPr id="60" name="Diamond 59"/>
-          <p:cNvSpPr/>
-          <p:nvPr/>
-        </p:nvSpPr>
-        <p:spPr>
-          <a:xfrm>
-            <a:off x="4501094" y="4290942"/>
-            <a:ext cx="109728" cy="109728"/>
-          </a:xfrm>
-          <a:prstGeom prst="diamond">
-            <a:avLst/>
-          </a:prstGeom>
-          <a:solidFill>
-            <a:srgbClr val="C44E52"/>
-          </a:solidFill>
-          <a:ln>
-            <a:solidFill>
-              <a:srgbClr val="C44E52"/>
-            </a:solidFill>
-          </a:ln>
-        </p:spPr>
-        <p:style>
-          <a:lnRef idx="1">
-            <a:schemeClr val="accent1"/>
-          </a:lnRef>
-          <a:fillRef idx="3">
-            <a:schemeClr val="accent1"/>
-          </a:fillRef>
-          <a:effectRef idx="2">
-            <a:schemeClr val="accent1"/>
-          </a:effectRef>
-          <a:fontRef idx="minor">
-            <a:schemeClr val="lt1"/>
-          </a:fontRef>
-        </p:style>
-        <p:txBody>
-          <a:bodyPr rtlCol="0" anchor="ctr"/>
-          <a:lstStyle/>
-          <a:p>
-            <a:pPr algn="ctr"/>
-          </a:p>
-        </p:txBody>
-      </p:sp>
-      <p:sp>
-        <p:nvSpPr>
-          <p:cNvPr id="61" name="TextBox 60"/>
-          <p:cNvSpPr txBox="1"/>
-          <p:nvPr/>
-        </p:nvSpPr>
-        <p:spPr>
-          <a:xfrm>
-            <a:off x="10607040" y="4236078"/>
-            <a:ext cx="1371600" cy="228600"/>
-          </a:xfrm>
-          <a:prstGeom prst="rect">
-            <a:avLst/>
-          </a:prstGeom>
-          <a:noFill/>
-        </p:spPr>
-        <p:txBody>
-          <a:bodyPr wrap="none">
-            <a:spAutoFit/>
-          </a:bodyPr>
-          <a:lstStyle/>
-          <a:p>
-            <a:pPr>
-              <a:defRPr sz="700">
-                <a:solidFill>
-                  <a:srgbClr val="C44E52"/>
-                </a:solidFill>
-              </a:defRPr>
-            </a:pPr>
-            <a:r>
-              <a:t>OR 5.05 [1.13–22.67] P=0.034*</a:t>
-            </a:r>
-          </a:p>
-        </p:txBody>
-      </p:sp>
-      <p:sp>
-        <p:nvSpPr>
-          <p:cNvPr id="62" name="TextBox 61"/>
-          <p:cNvSpPr txBox="1"/>
-          <p:nvPr/>
-        </p:nvSpPr>
-        <p:spPr>
-          <a:xfrm>
-            <a:off x="274320" y="4449277"/>
-            <a:ext cx="3200400" cy="274320"/>
-          </a:xfrm>
-          <a:prstGeom prst="rect">
-            <a:avLst/>
-          </a:prstGeom>
-          <a:noFill/>
-        </p:spPr>
-        <p:txBody>
-          <a:bodyPr wrap="square">
-            <a:spAutoFit/>
-          </a:bodyPr>
-          <a:lstStyle/>
-          <a:p>
-            <a:pPr algn="r">
-              <a:defRPr sz="800"/>
-            </a:pPr>
-            <a:r>
-              <a:t>Twin + Emergency CS</a:t>
-            </a:r>
-          </a:p>
-        </p:txBody>
-      </p:sp>
-      <p:sp>
-        <p:nvSpPr>
-          <p:cNvPr id="63" name="Rectangle 62"/>
-          <p:cNvSpPr/>
-          <p:nvPr/>
-        </p:nvSpPr>
-        <p:spPr>
-          <a:xfrm>
-            <a:off x="3817471" y="4567387"/>
-            <a:ext cx="2442068" cy="38100"/>
-          </a:xfrm>
-          <a:prstGeom prst="rect">
-            <a:avLst/>
-          </a:prstGeom>
-          <a:solidFill>
-            <a:srgbClr val="4C72B0"/>
-          </a:solidFill>
-          <a:ln>
-            <a:noFill/>
-          </a:ln>
-        </p:spPr>
-        <p:style>
-          <a:lnRef idx="1">
-            <a:schemeClr val="accent1"/>
-          </a:lnRef>
-          <a:fillRef idx="3">
-            <a:schemeClr val="accent1"/>
-          </a:fillRef>
-          <a:effectRef idx="2">
-            <a:schemeClr val="accent1"/>
-          </a:effectRef>
-          <a:fontRef idx="minor">
-            <a:schemeClr val="lt1"/>
-          </a:fontRef>
-        </p:style>
-        <p:txBody>
-          <a:bodyPr rtlCol="0" anchor="ctr"/>
-          <a:lstStyle/>
-          <a:p>
-            <a:pPr algn="ctr"/>
-          </a:p>
-        </p:txBody>
-      </p:sp>
-      <p:sp>
-        <p:nvSpPr>
-          <p:cNvPr id="64" name="Diamond 63"/>
-          <p:cNvSpPr/>
-          <p:nvPr/>
-        </p:nvSpPr>
-        <p:spPr>
-          <a:xfrm>
-            <a:off x="4247698" y="4531573"/>
-            <a:ext cx="109728" cy="109728"/>
-          </a:xfrm>
-          <a:prstGeom prst="diamond">
-            <a:avLst/>
-          </a:prstGeom>
-          <a:solidFill>
-            <a:srgbClr val="4C72B0"/>
-          </a:solidFill>
-          <a:ln>
-            <a:solidFill>
-              <a:srgbClr val="4C72B0"/>
-            </a:solidFill>
-          </a:ln>
-        </p:spPr>
-        <p:style>
-          <a:lnRef idx="1">
-            <a:schemeClr val="accent1"/>
-          </a:lnRef>
-          <a:fillRef idx="3">
-            <a:schemeClr val="accent1"/>
-          </a:fillRef>
-          <a:effectRef idx="2">
-            <a:schemeClr val="accent1"/>
-          </a:effectRef>
-          <a:fontRef idx="minor">
-            <a:schemeClr val="lt1"/>
-          </a:fontRef>
-        </p:style>
-        <p:txBody>
-          <a:bodyPr rtlCol="0" anchor="ctr"/>
-          <a:lstStyle/>
-          <a:p>
-            <a:pPr algn="ctr"/>
-          </a:p>
-        </p:txBody>
-      </p:sp>
-      <p:sp>
-        <p:nvSpPr>
-          <p:cNvPr id="65" name="TextBox 64"/>
-          <p:cNvSpPr txBox="1"/>
-          <p:nvPr/>
-        </p:nvSpPr>
-        <p:spPr>
-          <a:xfrm>
-            <a:off x="10607040" y="4476709"/>
-            <a:ext cx="1371600" cy="228600"/>
-          </a:xfrm>
-          <a:prstGeom prst="rect">
-            <a:avLst/>
-          </a:prstGeom>
-          <a:noFill/>
-        </p:spPr>
-        <p:txBody>
-          <a:bodyPr wrap="none">
-            <a:spAutoFit/>
-          </a:bodyPr>
-          <a:lstStyle/>
-          <a:p>
-            <a:pPr>
-              <a:defRPr sz="700">
-                <a:solidFill>
-                  <a:srgbClr val="4C72B0"/>
-                </a:solidFill>
-              </a:defRPr>
-            </a:pPr>
-            <a:r>
-              <a:t>OR 3.63 [0.90–14.64] P=0.070</a:t>
-            </a:r>
-          </a:p>
-        </p:txBody>
-      </p:sp>
-      <p:sp>
-        <p:nvSpPr>
-          <p:cNvPr id="66" name="TextBox 65"/>
-          <p:cNvSpPr txBox="1"/>
-          <p:nvPr/>
-        </p:nvSpPr>
-        <p:spPr>
-          <a:xfrm>
-            <a:off x="274320" y="4689909"/>
-            <a:ext cx="3200400" cy="274320"/>
-          </a:xfrm>
-          <a:prstGeom prst="rect">
-            <a:avLst/>
-          </a:prstGeom>
-          <a:noFill/>
-        </p:spPr>
-        <p:txBody>
-          <a:bodyPr wrap="square">
-            <a:spAutoFit/>
-          </a:bodyPr>
-          <a:lstStyle/>
-          <a:p>
-            <a:pPr algn="r">
-              <a:defRPr sz="800"/>
-            </a:pPr>
-            <a:r>
-              <a:t>Twin + GA (per week)</a:t>
-            </a:r>
-          </a:p>
-        </p:txBody>
-      </p:sp>
-      <p:sp>
-        <p:nvSpPr>
-          <p:cNvPr id="67" name="Rectangle 66"/>
-          <p:cNvSpPr/>
-          <p:nvPr/>
-        </p:nvSpPr>
-        <p:spPr>
-          <a:xfrm>
-            <a:off x="3851005" y="4808019"/>
-            <a:ext cx="3266225" cy="38100"/>
-          </a:xfrm>
-          <a:prstGeom prst="rect">
-            <a:avLst/>
-          </a:prstGeom>
-          <a:solidFill>
-            <a:srgbClr val="C44E52"/>
-          </a:solidFill>
-          <a:ln>
-            <a:noFill/>
-          </a:ln>
-        </p:spPr>
-        <p:style>
-          <a:lnRef idx="1">
-            <a:schemeClr val="accent1"/>
-          </a:lnRef>
-          <a:fillRef idx="3">
-            <a:schemeClr val="accent1"/>
-          </a:fillRef>
-          <a:effectRef idx="2">
-            <a:schemeClr val="accent1"/>
-          </a:effectRef>
-          <a:fontRef idx="minor">
-            <a:schemeClr val="lt1"/>
-          </a:fontRef>
-        </p:style>
-        <p:txBody>
-          <a:bodyPr rtlCol="0" anchor="ctr"/>
-          <a:lstStyle/>
-          <a:p>
-            <a:pPr algn="ctr"/>
-          </a:p>
-        </p:txBody>
-      </p:sp>
-      <p:sp>
-        <p:nvSpPr>
-          <p:cNvPr id="68" name="Diamond 67"/>
-          <p:cNvSpPr/>
-          <p:nvPr/>
-        </p:nvSpPr>
-        <p:spPr>
-          <a:xfrm>
-            <a:off x="4420729" y="4772205"/>
-            <a:ext cx="109728" cy="109728"/>
-          </a:xfrm>
-          <a:prstGeom prst="diamond">
-            <a:avLst/>
-          </a:prstGeom>
-          <a:solidFill>
-            <a:srgbClr val="C44E52"/>
-          </a:solidFill>
-          <a:ln>
-            <a:solidFill>
-              <a:srgbClr val="C44E52"/>
-            </a:solidFill>
-          </a:ln>
-        </p:spPr>
-        <p:style>
-          <a:lnRef idx="1">
-            <a:schemeClr val="accent1"/>
-          </a:lnRef>
-          <a:fillRef idx="3">
-            <a:schemeClr val="accent1"/>
-          </a:fillRef>
-          <a:effectRef idx="2">
-            <a:schemeClr val="accent1"/>
-          </a:effectRef>
-          <a:fontRef idx="minor">
-            <a:schemeClr val="lt1"/>
-          </a:fontRef>
-        </p:style>
-        <p:txBody>
-          <a:bodyPr rtlCol="0" anchor="ctr"/>
-          <a:lstStyle/>
-          <a:p>
-            <a:pPr algn="ctr"/>
-          </a:p>
-        </p:txBody>
-      </p:sp>
-      <p:sp>
-        <p:nvSpPr>
-          <p:cNvPr id="69" name="TextBox 68"/>
-          <p:cNvSpPr txBox="1"/>
-          <p:nvPr/>
-        </p:nvSpPr>
-        <p:spPr>
-          <a:xfrm>
-            <a:off x="10607040" y="4717341"/>
-            <a:ext cx="1371600" cy="228600"/>
-          </a:xfrm>
-          <a:prstGeom prst="rect">
-            <a:avLst/>
-          </a:prstGeom>
-          <a:noFill/>
-        </p:spPr>
-        <p:txBody>
-          <a:bodyPr wrap="none">
-            <a:spAutoFit/>
-          </a:bodyPr>
-          <a:lstStyle/>
-          <a:p>
-            <a:pPr>
-              <a:defRPr sz="700">
-                <a:solidFill>
-                  <a:srgbClr val="C44E52"/>
-                </a:solidFill>
-              </a:defRPr>
-            </a:pPr>
-            <a:r>
-              <a:t>OR 4.60 [1.09–19.46] P=0.038*</a:t>
-            </a:r>
-          </a:p>
-        </p:txBody>
-      </p:sp>
-      <p:sp>
-        <p:nvSpPr>
-          <p:cNvPr id="70" name="TextBox 69"/>
-          <p:cNvSpPr txBox="1"/>
-          <p:nvPr/>
-        </p:nvSpPr>
-        <p:spPr>
-          <a:xfrm>
-            <a:off x="274320" y="4930541"/>
-            <a:ext cx="3200400" cy="274320"/>
-          </a:xfrm>
-          <a:prstGeom prst="rect">
-            <a:avLst/>
-          </a:prstGeom>
-          <a:noFill/>
-        </p:spPr>
-        <p:txBody>
-          <a:bodyPr wrap="square">
-            <a:spAutoFit/>
-          </a:bodyPr>
-          <a:lstStyle/>
-          <a:p>
-            <a:pPr algn="r">
-              <a:defRPr sz="800"/>
-            </a:pPr>
-            <a:r>
-              <a:t>Twin + BMI (per kg/m²)</a:t>
-            </a:r>
-          </a:p>
-        </p:txBody>
-      </p:sp>
-      <p:sp>
-        <p:nvSpPr>
-          <p:cNvPr id="71" name="Rectangle 70"/>
-          <p:cNvSpPr/>
-          <p:nvPr/>
-        </p:nvSpPr>
-        <p:spPr>
-          <a:xfrm>
-            <a:off x="3842237" y="5048651"/>
-            <a:ext cx="2803185" cy="38100"/>
-          </a:xfrm>
-          <a:prstGeom prst="rect">
-            <a:avLst/>
-          </a:prstGeom>
-          <a:solidFill>
-            <a:srgbClr val="C44E52"/>
-          </a:solidFill>
-          <a:ln>
-            <a:noFill/>
-          </a:ln>
-        </p:spPr>
-        <p:style>
-          <a:lnRef idx="1">
-            <a:schemeClr val="accent1"/>
-          </a:lnRef>
-          <a:fillRef idx="3">
-            <a:schemeClr val="accent1"/>
-          </a:fillRef>
-          <a:effectRef idx="2">
-            <a:schemeClr val="accent1"/>
-          </a:effectRef>
-          <a:fontRef idx="minor">
-            <a:schemeClr val="lt1"/>
-          </a:fontRef>
-        </p:style>
-        <p:txBody>
-          <a:bodyPr rtlCol="0" anchor="ctr"/>
-          <a:lstStyle/>
-          <a:p>
-            <a:pPr algn="ctr"/>
-          </a:p>
-        </p:txBody>
-      </p:sp>
-      <p:sp>
-        <p:nvSpPr>
-          <p:cNvPr id="72" name="Diamond 71"/>
-          <p:cNvSpPr/>
-          <p:nvPr/>
-        </p:nvSpPr>
-        <p:spPr>
-          <a:xfrm>
-            <a:off x="4345476" y="5012837"/>
-            <a:ext cx="109728" cy="109728"/>
-          </a:xfrm>
-          <a:prstGeom prst="diamond">
-            <a:avLst/>
-          </a:prstGeom>
-          <a:solidFill>
-            <a:srgbClr val="C44E52"/>
-          </a:solidFill>
-          <a:ln>
-            <a:solidFill>
-              <a:srgbClr val="C44E52"/>
-            </a:solidFill>
-          </a:ln>
-        </p:spPr>
-        <p:style>
-          <a:lnRef idx="1">
-            <a:schemeClr val="accent1"/>
-          </a:lnRef>
-          <a:fillRef idx="3">
-            <a:schemeClr val="accent1"/>
-          </a:fillRef>
-          <a:effectRef idx="2">
-            <a:schemeClr val="accent1"/>
-          </a:effectRef>
-          <a:fontRef idx="minor">
-            <a:schemeClr val="lt1"/>
-          </a:fontRef>
-        </p:style>
-        <p:txBody>
-          <a:bodyPr rtlCol="0" anchor="ctr"/>
-          <a:lstStyle/>
-          <a:p>
-            <a:pPr algn="ctr"/>
-          </a:p>
-        </p:txBody>
-      </p:sp>
-      <p:sp>
-        <p:nvSpPr>
-          <p:cNvPr id="73" name="TextBox 72"/>
-          <p:cNvSpPr txBox="1"/>
-          <p:nvPr/>
-        </p:nvSpPr>
-        <p:spPr>
-          <a:xfrm>
-            <a:off x="10607040" y="4957973"/>
-            <a:ext cx="1371600" cy="228600"/>
-          </a:xfrm>
-          <a:prstGeom prst="rect">
-            <a:avLst/>
-          </a:prstGeom>
-          <a:noFill/>
-        </p:spPr>
-        <p:txBody>
-          <a:bodyPr wrap="none">
-            <a:spAutoFit/>
-          </a:bodyPr>
-          <a:lstStyle/>
-          <a:p>
-            <a:pPr>
-              <a:defRPr sz="700">
-                <a:solidFill>
-                  <a:srgbClr val="C44E52"/>
-                </a:solidFill>
-              </a:defRPr>
-            </a:pPr>
-            <a:r>
-              <a:t>OR 4.18 [1.04–16.81] P=0.044*</a:t>
-            </a:r>
-          </a:p>
-        </p:txBody>
-      </p:sp>
-      <p:sp>
-        <p:nvSpPr>
-          <p:cNvPr id="74" name="TextBox 73"/>
-          <p:cNvSpPr txBox="1"/>
-          <p:nvPr/>
-        </p:nvSpPr>
-        <p:spPr>
-          <a:xfrm>
-            <a:off x="274320" y="5171172"/>
-            <a:ext cx="3200400" cy="274320"/>
-          </a:xfrm>
-          <a:prstGeom prst="rect">
-            <a:avLst/>
-          </a:prstGeom>
-          <a:noFill/>
-        </p:spPr>
-        <p:txBody>
-          <a:bodyPr wrap="square">
-            <a:spAutoFit/>
-          </a:bodyPr>
-          <a:lstStyle/>
-          <a:p>
-            <a:pPr algn="r">
-              <a:defRPr sz="800"/>
-            </a:pPr>
-            <a:r>
-              <a:t>Twin + Age (per year)</a:t>
-            </a:r>
-          </a:p>
-        </p:txBody>
-      </p:sp>
-      <p:sp>
-        <p:nvSpPr>
-          <p:cNvPr id="75" name="Rectangle 74"/>
-          <p:cNvSpPr/>
-          <p:nvPr/>
-        </p:nvSpPr>
-        <p:spPr>
-          <a:xfrm>
-            <a:off x="3839087" y="5289282"/>
-            <a:ext cx="2818349" cy="38100"/>
-          </a:xfrm>
-          <a:prstGeom prst="rect">
-            <a:avLst/>
-          </a:prstGeom>
-          <a:solidFill>
-            <a:srgbClr val="C44E52"/>
-          </a:solidFill>
-          <a:ln>
-            <a:noFill/>
-          </a:ln>
-        </p:spPr>
-        <p:style>
-          <a:lnRef idx="1">
-            <a:schemeClr val="accent1"/>
-          </a:lnRef>
-          <a:fillRef idx="3">
-            <a:schemeClr val="accent1"/>
-          </a:fillRef>
-          <a:effectRef idx="2">
-            <a:schemeClr val="accent1"/>
-          </a:effectRef>
-          <a:fontRef idx="minor">
-            <a:schemeClr val="lt1"/>
-          </a:fontRef>
-        </p:style>
-        <p:txBody>
-          <a:bodyPr rtlCol="0" anchor="ctr"/>
-          <a:lstStyle/>
-          <a:p>
-            <a:pPr algn="ctr"/>
-          </a:p>
-        </p:txBody>
-      </p:sp>
-      <p:sp>
-        <p:nvSpPr>
-          <p:cNvPr id="76" name="Diamond 75"/>
-          <p:cNvSpPr/>
-          <p:nvPr/>
-        </p:nvSpPr>
-        <p:spPr>
-          <a:xfrm>
-            <a:off x="4340591" y="5253468"/>
-            <a:ext cx="109728" cy="109728"/>
-          </a:xfrm>
-          <a:prstGeom prst="diamond">
-            <a:avLst/>
-          </a:prstGeom>
-          <a:solidFill>
-            <a:srgbClr val="C44E52"/>
-          </a:solidFill>
-          <a:ln>
-            <a:solidFill>
-              <a:srgbClr val="C44E52"/>
-            </a:solidFill>
-          </a:ln>
-        </p:spPr>
-        <p:style>
-          <a:lnRef idx="1">
-            <a:schemeClr val="accent1"/>
-          </a:lnRef>
-          <a:fillRef idx="3">
-            <a:schemeClr val="accent1"/>
-          </a:fillRef>
-          <a:effectRef idx="2">
-            <a:schemeClr val="accent1"/>
-          </a:effectRef>
-          <a:fontRef idx="minor">
-            <a:schemeClr val="lt1"/>
-          </a:fontRef>
-        </p:style>
-        <p:txBody>
-          <a:bodyPr rtlCol="0" anchor="ctr"/>
-          <a:lstStyle/>
-          <a:p>
-            <a:pPr algn="ctr"/>
-          </a:p>
-        </p:txBody>
-      </p:sp>
-      <p:sp>
-        <p:nvSpPr>
-          <p:cNvPr id="77" name="TextBox 76"/>
-          <p:cNvSpPr txBox="1"/>
-          <p:nvPr/>
-        </p:nvSpPr>
-        <p:spPr>
-          <a:xfrm>
-            <a:off x="10607040" y="5198604"/>
-            <a:ext cx="1371600" cy="228600"/>
-          </a:xfrm>
-          <a:prstGeom prst="rect">
-            <a:avLst/>
-          </a:prstGeom>
-          <a:noFill/>
-        </p:spPr>
-        <p:txBody>
-          <a:bodyPr wrap="none">
-            <a:spAutoFit/>
-          </a:bodyPr>
-          <a:lstStyle/>
-          <a:p>
-            <a:pPr>
-              <a:defRPr sz="700">
-                <a:solidFill>
-                  <a:srgbClr val="C44E52"/>
-                </a:solidFill>
-              </a:defRPr>
-            </a:pPr>
-            <a:r>
-              <a:t>OR 4.15 [1.02–16.87] P=0.047*</a:t>
-            </a:r>
-          </a:p>
-        </p:txBody>
-      </p:sp>
-      <p:sp>
-        <p:nvSpPr>
-          <p:cNvPr id="78" name="TextBox 77"/>
-          <p:cNvSpPr txBox="1"/>
-          <p:nvPr/>
-        </p:nvSpPr>
-        <p:spPr>
-          <a:xfrm>
-            <a:off x="274320" y="5411804"/>
-            <a:ext cx="3200400" cy="274320"/>
-          </a:xfrm>
-          <a:prstGeom prst="rect">
-            <a:avLst/>
-          </a:prstGeom>
-          <a:noFill/>
-        </p:spPr>
-        <p:txBody>
-          <a:bodyPr wrap="square">
-            <a:spAutoFit/>
-          </a:bodyPr>
-          <a:lstStyle/>
-          <a:p>
-            <a:pPr algn="r">
-              <a:defRPr sz="800"/>
-            </a:pPr>
-            <a:r>
-              <a:t>Crude (twin only)</a:t>
-            </a:r>
-          </a:p>
-        </p:txBody>
-      </p:sp>
-      <p:sp>
-        <p:nvSpPr>
-          <p:cNvPr id="79" name="Rectangle 78"/>
-          <p:cNvSpPr/>
-          <p:nvPr/>
-        </p:nvSpPr>
-        <p:spPr>
-          <a:xfrm>
-            <a:off x="3842985" y="5529914"/>
-            <a:ext cx="2805676" cy="38100"/>
-          </a:xfrm>
-          <a:prstGeom prst="rect">
-            <a:avLst/>
-          </a:prstGeom>
-          <a:solidFill>
-            <a:srgbClr val="C44E52"/>
-          </a:solidFill>
-          <a:ln>
-            <a:noFill/>
-          </a:ln>
-        </p:spPr>
-        <p:style>
-          <a:lnRef idx="1">
-            <a:schemeClr val="accent1"/>
-          </a:lnRef>
-          <a:fillRef idx="3">
-            <a:schemeClr val="accent1"/>
-          </a:fillRef>
-          <a:effectRef idx="2">
-            <a:schemeClr val="accent1"/>
-          </a:effectRef>
-          <a:fontRef idx="minor">
-            <a:schemeClr val="lt1"/>
-          </a:fontRef>
-        </p:style>
-        <p:txBody>
-          <a:bodyPr rtlCol="0" anchor="ctr"/>
-          <a:lstStyle/>
-          <a:p>
-            <a:pPr algn="ctr"/>
-          </a:p>
-        </p:txBody>
-      </p:sp>
-      <p:sp>
-        <p:nvSpPr>
-          <p:cNvPr id="80" name="Diamond 79"/>
-          <p:cNvSpPr/>
-          <p:nvPr/>
-        </p:nvSpPr>
-        <p:spPr>
-          <a:xfrm>
-            <a:off x="4347383" y="5494100"/>
-            <a:ext cx="109728" cy="109728"/>
-          </a:xfrm>
-          <a:prstGeom prst="diamond">
-            <a:avLst/>
-          </a:prstGeom>
-          <a:solidFill>
-            <a:srgbClr val="C44E52"/>
-          </a:solidFill>
-          <a:ln>
-            <a:solidFill>
-              <a:srgbClr val="C44E52"/>
-            </a:solidFill>
-          </a:ln>
-        </p:spPr>
-        <p:style>
-          <a:lnRef idx="1">
-            <a:schemeClr val="accent1"/>
-          </a:lnRef>
-          <a:fillRef idx="3">
-            <a:schemeClr val="accent1"/>
-          </a:fillRef>
-          <a:effectRef idx="2">
-            <a:schemeClr val="accent1"/>
-          </a:effectRef>
-          <a:fontRef idx="minor">
-            <a:schemeClr val="lt1"/>
-          </a:fontRef>
-        </p:style>
-        <p:txBody>
-          <a:bodyPr rtlCol="0" anchor="ctr"/>
-          <a:lstStyle/>
-          <a:p>
-            <a:pPr algn="ctr"/>
-          </a:p>
-        </p:txBody>
-      </p:sp>
-      <p:sp>
-        <p:nvSpPr>
-          <p:cNvPr id="81" name="TextBox 80"/>
-          <p:cNvSpPr txBox="1"/>
-          <p:nvPr/>
-        </p:nvSpPr>
-        <p:spPr>
-          <a:xfrm>
-            <a:off x="10607040" y="5439236"/>
-            <a:ext cx="1371600" cy="228600"/>
-          </a:xfrm>
-          <a:prstGeom prst="rect">
-            <a:avLst/>
-          </a:prstGeom>
-          <a:noFill/>
-        </p:spPr>
-        <p:txBody>
-          <a:bodyPr wrap="none">
-            <a:spAutoFit/>
-          </a:bodyPr>
-          <a:lstStyle/>
-          <a:p>
-            <a:pPr>
-              <a:defRPr sz="700">
-                <a:solidFill>
-                  <a:srgbClr val="C44E52"/>
-                </a:solidFill>
-              </a:defRPr>
-            </a:pPr>
-            <a:r>
-              <a:t>OR 4.19 [1.04–16.83] P=0.043*</a:t>
+              <a:t>OR 4.18 [1.04–16.79] P=0.044*</a:t>
             </a:r>
           </a:p>
         </p:txBody>
@@ -10353,8 +10364,8 @@
         </p:nvSpPr>
         <p:spPr>
           <a:xfrm>
-            <a:off x="3757096" y="1283970"/>
-            <a:ext cx="5960742" cy="38100"/>
+            <a:off x="3755587" y="1283970"/>
+            <a:ext cx="6015705" cy="38100"/>
           </a:xfrm>
           <a:prstGeom prst="rect">
             <a:avLst/>
@@ -10396,7 +10407,7 @@
         </p:nvSpPr>
         <p:spPr>
           <a:xfrm>
-            <a:off x="4379248" y="1248156"/>
+            <a:off x="4376727" y="1248156"/>
             <a:ext cx="109728" cy="109728"/>
           </a:xfrm>
           <a:prstGeom prst="diamond">
@@ -10463,7 +10474,7 @@
               </a:defRPr>
             </a:pPr>
             <a:r>
-              <a:t>OR 13.59 [1.74–106.04] P=0.013*</a:t>
+              <a:t>OR 13.54 [1.71–106.98] P=0.013*</a:t>
             </a:r>
           </a:p>
         </p:txBody>
@@ -10507,8 +10518,8 @@
         </p:nvSpPr>
         <p:spPr>
           <a:xfrm>
-            <a:off x="3698811" y="1695450"/>
-            <a:ext cx="6816789" cy="38100"/>
+            <a:off x="3698208" y="1695450"/>
+            <a:ext cx="6817392" cy="38100"/>
           </a:xfrm>
           <a:prstGeom prst="rect">
             <a:avLst/>
@@ -10550,7 +10561,7 @@
         </p:nvSpPr>
         <p:spPr>
           <a:xfrm>
-            <a:off x="4411014" y="1659636"/>
+            <a:off x="4416057" y="1659636"/>
             <a:ext cx="109728" cy="109728"/>
           </a:xfrm>
           <a:prstGeom prst="diamond">
@@ -10617,7 +10628,7 @@
               </a:defRPr>
             </a:pPr>
             <a:r>
-              <a:t>OR 14.14 [0.72–277.39] P=0.081</a:t>
+              <a:t>OR 14.23 [0.71–285.03] P=0.082</a:t>
             </a:r>
           </a:p>
         </p:txBody>
@@ -10661,8 +10672,8 @@
         </p:nvSpPr>
         <p:spPr>
           <a:xfrm>
-            <a:off x="3680261" y="2106930"/>
-            <a:ext cx="38055" cy="38100"/>
+            <a:off x="3680346" y="2106930"/>
+            <a:ext cx="38209" cy="38100"/>
           </a:xfrm>
           <a:prstGeom prst="rect">
             <a:avLst/>
@@ -10704,7 +10715,7 @@
         </p:nvSpPr>
         <p:spPr>
           <a:xfrm>
-            <a:off x="3639829" y="2071116"/>
+            <a:off x="3639972" y="2071116"/>
             <a:ext cx="109728" cy="109728"/>
           </a:xfrm>
           <a:prstGeom prst="diamond">
@@ -10771,7 +10782,7 @@
               </a:defRPr>
             </a:pPr>
             <a:r>
-              <a:t>OR 0.65 [0.40–1.06] P=0.086</a:t>
+              <a:t>OR 0.65 [0.40–1.07] P=0.088</a:t>
             </a:r>
           </a:p>
         </p:txBody>
@@ -10815,8 +10826,8 @@
         </p:nvSpPr>
         <p:spPr>
           <a:xfrm>
-            <a:off x="3669892" y="2518410"/>
-            <a:ext cx="117046" cy="38100"/>
+            <a:off x="3669942" y="2518410"/>
+            <a:ext cx="116957" cy="38100"/>
           </a:xfrm>
           <a:prstGeom prst="rect">
             <a:avLst/>
@@ -10858,7 +10869,7 @@
         </p:nvSpPr>
         <p:spPr>
           <a:xfrm>
-            <a:off x="3642610" y="2482596"/>
+            <a:off x="3642684" y="2482596"/>
             <a:ext cx="109728" cy="109728"/>
           </a:xfrm>
           <a:prstGeom prst="diamond">
@@ -10925,7 +10936,7 @@
               </a:defRPr>
             </a:pPr>
             <a:r>
-              <a:t>OR 0.70 [0.22–2.26] P=0.549</a:t>
+              <a:t>OR 0.70 [0.22–2.26] P=0.550</a:t>
             </a:r>
           </a:p>
         </p:txBody>
@@ -11517,7 +11528,7 @@
                   <a:srgbClr val="000000"/>
                 </a:solidFill>
               </a:rPr>
-              <a:t>0.82</a:t>
+              <a:t>0.81</a:t>
             </a:r>
           </a:p>
         </p:txBody>
@@ -11570,7 +11581,7 @@
                   <a:srgbClr val="000000"/>
                 </a:solidFill>
               </a:rPr>
-              <a:t>0.31–2.15</a:t>
+              <a:t>0.31–2.14</a:t>
             </a:r>
           </a:p>
         </p:txBody>
@@ -11623,7 +11634,7 @@
                   <a:srgbClr val="000000"/>
                 </a:solidFill>
               </a:rPr>
-              <a:t>0.30–2.29</a:t>
+              <a:t>0.17–1.81</a:t>
             </a:r>
           </a:p>
         </p:txBody>
@@ -11880,7 +11891,7 @@
                   <a:srgbClr val="000000"/>
                 </a:solidFill>
               </a:rPr>
-              <a:t>0.67–1.27</a:t>
+              <a:t>0.67–1.26</a:t>
             </a:r>
           </a:p>
         </p:txBody>
@@ -11933,7 +11944,7 @@
                   <a:srgbClr val="000000"/>
                 </a:solidFill>
               </a:rPr>
-              <a:t>0.68–1.26</a:t>
+              <a:t>0.67–1.27</a:t>
             </a:r>
           </a:p>
         </p:txBody>
@@ -12137,7 +12148,7 @@
                   <a:srgbClr val="000000"/>
                 </a:solidFill>
               </a:rPr>
-              <a:t>3.48</a:t>
+              <a:t>3.46</a:t>
             </a:r>
           </a:p>
         </p:txBody>
@@ -12190,7 +12201,7 @@
                   <a:srgbClr val="000000"/>
                 </a:solidFill>
               </a:rPr>
-              <a:t>0.81–15.06</a:t>
+              <a:t>0.80–14.98</a:t>
             </a:r>
           </a:p>
         </p:txBody>
@@ -12243,7 +12254,7 @@
                   <a:srgbClr val="000000"/>
                 </a:solidFill>
               </a:rPr>
-              <a:t>0.00–21.33</a:t>
+              <a:t>0.00–13.05</a:t>
             </a:r>
           </a:p>
         </p:txBody>
@@ -12296,7 +12307,7 @@
                   <a:srgbClr val="000000"/>
                 </a:solidFill>
               </a:rPr>
-              <a:t>99.8%</a:t>
+              <a:t>99.9%</a:t>
             </a:r>
           </a:p>
         </p:txBody>
@@ -12447,7 +12458,7 @@
                   <a:srgbClr val="000000"/>
                 </a:solidFill>
               </a:rPr>
-              <a:t>3.18</a:t>
+              <a:t>3.16</a:t>
             </a:r>
           </a:p>
         </p:txBody>
@@ -12500,7 +12511,7 @@
                   <a:srgbClr val="000000"/>
                 </a:solidFill>
               </a:rPr>
-              <a:t>1.38–7.36</a:t>
+              <a:t>1.37–7.32</a:t>
             </a:r>
           </a:p>
         </p:txBody>
@@ -12553,7 +12564,7 @@
                   <a:srgbClr val="000000"/>
                 </a:solidFill>
               </a:rPr>
-              <a:t>1.23–7.01</a:t>
+              <a:t>1.18–7.12</a:t>
             </a:r>
           </a:p>
         </p:txBody>
@@ -12871,7 +12882,7 @@
                   <a:srgbClr val="000000"/>
                 </a:solidFill>
               </a:rPr>
-              <a:t>0.15–2.72</a:t>
+              <a:t>0.14–2.61</a:t>
             </a:r>
           </a:p>
         </p:txBody>
@@ -13128,7 +13139,7 @@
                   <a:srgbClr val="000000"/>
                 </a:solidFill>
               </a:rPr>
-              <a:t>0.40–1.06</a:t>
+              <a:t>0.40–1.07</a:t>
             </a:r>
           </a:p>
         </p:txBody>
@@ -13181,7 +13192,7 @@
                   <a:srgbClr val="000000"/>
                 </a:solidFill>
               </a:rPr>
-              <a:t>0.36–0.98</a:t>
+              <a:t>0.35–0.97</a:t>
             </a:r>
           </a:p>
         </p:txBody>
@@ -13385,7 +13396,7 @@
                   <a:srgbClr val="000000"/>
                 </a:solidFill>
               </a:rPr>
-              <a:t>14.14</a:t>
+              <a:t>14.23</a:t>
             </a:r>
           </a:p>
         </p:txBody>
@@ -13438,7 +13449,7 @@
                   <a:srgbClr val="000000"/>
                 </a:solidFill>
               </a:rPr>
-              <a:t>0.72–277.39</a:t>
+              <a:t>0.71–285.03</a:t>
             </a:r>
           </a:p>
         </p:txBody>
@@ -13544,7 +13555,7 @@
                   <a:srgbClr val="000000"/>
                 </a:solidFill>
               </a:rPr>
-              <a:t>91.5%</a:t>
+              <a:t>91.0%</a:t>
             </a:r>
           </a:p>
         </p:txBody>
@@ -13695,7 +13706,7 @@
                   <a:srgbClr val="000000"/>
                 </a:solidFill>
               </a:rPr>
-              <a:t>13.59</a:t>
+              <a:t>13.54</a:t>
             </a:r>
           </a:p>
         </p:txBody>
@@ -13748,7 +13759,7 @@
                   <a:srgbClr val="000000"/>
                 </a:solidFill>
               </a:rPr>
-              <a:t>1.74–106.04</a:t>
+              <a:t>1.71–106.98</a:t>
             </a:r>
           </a:p>
         </p:txBody>
@@ -13801,7 +13812,7 @@
                   <a:srgbClr val="000000"/>
                 </a:solidFill>
               </a:rPr>
-              <a:t>0.00–700136.92</a:t>
+              <a:t>Unstable</a:t>
             </a:r>
           </a:p>
         </p:txBody>
@@ -13854,7 +13865,7 @@
                   <a:srgbClr val="000000"/>
                 </a:solidFill>
               </a:rPr>
-              <a:t>99.8%</a:t>
+              <a:t>99.7%</a:t>
             </a:r>
           </a:p>
         </p:txBody>
